--- a/decks/career-journey.pptx
+++ b/decks/career-journey.pptx
@@ -13,9 +13,15 @@
     <p:sldId id="261" r:id="rId7"/>
     <p:sldId id="262" r:id="rId8"/>
     <p:sldId id="263" r:id="rId9"/>
+    <p:sldId id="264" r:id="rId10"/>
+    <p:sldId id="265" r:id="rId11"/>
+    <p:sldId id="266" r:id="rId12"/>
+    <p:sldId id="267" r:id="rId13"/>
+    <p:sldId id="268" r:id="rId14"/>
+    <p:sldId id="269" r:id="rId15"/>
   </p:sldIdLst>
   <p:notesMasterIdLst>
-    <p:notesMasterId r:id="rId10"/>
+    <p:notesMasterId r:id="rId16"/>
   </p:notesMasterIdLst>
   <p:sldSz cx="12191695" cy="6858000"/>
   <p:notesSz cx="6858000" cy="12191695"/>
@@ -112,6 +118,1005 @@
     </a:lvl9pPr>
   </p:defaultTextStyle>
 </p:presentation>
+</file>
+
+<file path=ppt/charts/chart16.xml><?xml version="1.0" encoding="utf-8"?>
+<c:chartSpace xmlns:c="http://schemas.openxmlformats.org/drawingml/2006/chart" xmlns:a="http://schemas.openxmlformats.org/drawingml/2006/main" xmlns:r="http://schemas.openxmlformats.org/officeDocument/2006/relationships">
+  <c:date1904 val="0"/>
+  <c:roundedCorners val="1"/>
+  <c:chart>
+    <c:autoTitleDeleted val="1"/>
+    <c:plotArea>
+      <c:layout/>
+      <c:lineChart>
+        <c:varyColors val="0"/>
+        <c:ser>
+          <c:idx val="0"/>
+          <c:order val="0"/>
+          <c:tx>
+            <c:strRef>
+              <c:f>Sheet1!$B$1</c:f>
+              <c:strCache>
+                <c:ptCount val="1"/>
+                <c:pt idx="0">
+                  <c:v>Decision authority (illustrative index)</c:v>
+                </c:pt>
+              </c:strCache>
+            </c:strRef>
+          </c:tx>
+          <c:spPr>
+            <a:solidFill>
+              <a:srgbClr val="3B82F6"/>
+            </a:solidFill>
+            <a:ln w="31750" cap="flat">
+              <a:solidFill>
+                <a:srgbClr val="3B82F6"/>
+              </a:solidFill>
+              <a:prstDash val="solid"/>
+              <a:round/>
+            </a:ln>
+            <a:effectLst/>
+          </c:spPr>
+          <c:invertIfNegative val="0"/>
+          <c:dLbls>
+            <c:numFmt formatCode="#,##0" sourceLinked="0"/>
+            <c:txPr>
+              <a:bodyPr/>
+              <a:lstStyle/>
+              <a:p>
+                <a:pPr>
+                  <a:defRPr b="0" i="0" strike="noStrike" sz="1200" u="none">
+                    <a:solidFill>
+                      <a:srgbClr val="000000"/>
+                    </a:solidFill>
+                    <a:latin typeface="Arial"/>
+                  </a:defRPr>
+                </a:pPr>
+              </a:p>
+            </c:txPr>
+            <c:showLegendKey val="0"/>
+            <c:showVal val="0"/>
+            <c:showCatName val="0"/>
+            <c:showSerName val="0"/>
+            <c:showPercent val="0"/>
+            <c:showBubbleSize val="0"/>
+            <c:showLeaderLines val="0"/>
+          </c:dLbls>
+          <c:marker>
+            <c:symbol val="circle"/>
+            <c:size val="6"/>
+            <c:spPr>
+              <a:solidFill>
+                <a:srgbClr val="3B82F6"/>
+              </a:solidFill>
+              <a:ln w="9525" cap="flat">
+                <a:solidFill>
+                  <a:srgbClr val="3B82F6"/>
+                </a:solidFill>
+                <a:prstDash val="solid"/>
+                <a:round/>
+              </a:ln>
+              <a:effectLst/>
+            </c:spPr>
+          </c:marker>
+          <c:cat>
+            <c:multiLvlStrRef>
+              <c:f>Sheet1!$A$2:$A$5</c:f>
+              <c:multiLvlStrCache>
+                <c:ptCount val="4"/>
+                <c:lvl>
+                  <c:pt idx="0">
+                    <c:v>Tokopedia 2022</c:v>
+                  </c:pt>
+                  <c:pt idx="1">
+                    <c:v>BRI 2023</c:v>
+                  </c:pt>
+                  <c:pt idx="2">
+                    <c:v>IKEA 2023-24</c:v>
+                  </c:pt>
+                  <c:pt idx="3">
+                    <c:v>Zalin Labs 2024+</c:v>
+                  </c:pt>
+                </c:lvl>
+              </c:multiLvlStrCache>
+            </c:multiLvlStrRef>
+          </c:cat>
+          <c:val>
+            <c:numRef>
+              <c:f>Sheet1!$B$2:$B$5</c:f>
+              <c:numCache>
+                <c:formatCode>General</c:formatCode>
+                <c:ptCount val="4"/>
+                <c:pt idx="0">
+                  <c:v>2</c:v>
+                </c:pt>
+                <c:pt idx="1">
+                  <c:v>3</c:v>
+                </c:pt>
+                <c:pt idx="2">
+                  <c:v>5</c:v>
+                </c:pt>
+                <c:pt idx="3">
+                  <c:v>9</c:v>
+                </c:pt>
+              </c:numCache>
+            </c:numRef>
+          </c:val>
+          <c:smooth val="0"/>
+        </c:ser>
+        <c:ser>
+          <c:idx val="1"/>
+          <c:order val="1"/>
+          <c:tx>
+            <c:strRef>
+              <c:f>Sheet1!$C$1</c:f>
+              <c:strCache>
+                <c:ptCount val="1"/>
+                <c:pt idx="0">
+                  <c:v>Automation leverage (illustrative index)</c:v>
+                </c:pt>
+              </c:strCache>
+            </c:strRef>
+          </c:tx>
+          <c:spPr>
+            <a:solidFill>
+              <a:srgbClr val="06B6D4"/>
+            </a:solidFill>
+            <a:ln w="31750" cap="flat">
+              <a:solidFill>
+                <a:srgbClr val="06B6D4"/>
+              </a:solidFill>
+              <a:prstDash val="solid"/>
+              <a:round/>
+            </a:ln>
+            <a:effectLst/>
+          </c:spPr>
+          <c:invertIfNegative val="0"/>
+          <c:dLbls>
+            <c:numFmt formatCode="#,##0" sourceLinked="0"/>
+            <c:txPr>
+              <a:bodyPr/>
+              <a:lstStyle/>
+              <a:p>
+                <a:pPr>
+                  <a:defRPr b="0" i="0" strike="noStrike" sz="1200" u="none">
+                    <a:solidFill>
+                      <a:srgbClr val="000000"/>
+                    </a:solidFill>
+                    <a:latin typeface="Arial"/>
+                  </a:defRPr>
+                </a:pPr>
+              </a:p>
+            </c:txPr>
+            <c:showLegendKey val="0"/>
+            <c:showVal val="0"/>
+            <c:showCatName val="0"/>
+            <c:showSerName val="0"/>
+            <c:showPercent val="0"/>
+            <c:showBubbleSize val="0"/>
+            <c:showLeaderLines val="0"/>
+          </c:dLbls>
+          <c:marker>
+            <c:symbol val="circle"/>
+            <c:size val="6"/>
+            <c:spPr>
+              <a:solidFill>
+                <a:srgbClr val="06B6D4"/>
+              </a:solidFill>
+              <a:ln w="9525" cap="flat">
+                <a:solidFill>
+                  <a:srgbClr val="06B6D4"/>
+                </a:solidFill>
+                <a:prstDash val="solid"/>
+                <a:round/>
+              </a:ln>
+              <a:effectLst/>
+            </c:spPr>
+          </c:marker>
+          <c:cat>
+            <c:multiLvlStrRef>
+              <c:f>Sheet1!$A$2:$A$5</c:f>
+              <c:multiLvlStrCache>
+                <c:ptCount val="4"/>
+                <c:lvl>
+                  <c:pt idx="0">
+                    <c:v>Tokopedia 2022</c:v>
+                  </c:pt>
+                  <c:pt idx="1">
+                    <c:v>BRI 2023</c:v>
+                  </c:pt>
+                  <c:pt idx="2">
+                    <c:v>IKEA 2023-24</c:v>
+                  </c:pt>
+                  <c:pt idx="3">
+                    <c:v>Zalin Labs 2024+</c:v>
+                  </c:pt>
+                </c:lvl>
+              </c:multiLvlStrCache>
+            </c:multiLvlStrRef>
+          </c:cat>
+          <c:val>
+            <c:numRef>
+              <c:f>Sheet1!$C$2:$C$5</c:f>
+              <c:numCache>
+                <c:formatCode>General</c:formatCode>
+                <c:ptCount val="4"/>
+                <c:pt idx="0">
+                  <c:v>1</c:v>
+                </c:pt>
+                <c:pt idx="1">
+                  <c:v>2</c:v>
+                </c:pt>
+                <c:pt idx="2">
+                  <c:v>4</c:v>
+                </c:pt>
+                <c:pt idx="3">
+                  <c:v>10</c:v>
+                </c:pt>
+              </c:numCache>
+            </c:numRef>
+          </c:val>
+          <c:smooth val="0"/>
+        </c:ser>
+        <c:dLbls>
+          <c:numFmt formatCode="#,##0" sourceLinked="0"/>
+          <c:txPr>
+            <a:bodyPr/>
+            <a:lstStyle/>
+            <a:p>
+              <a:pPr>
+                <a:defRPr b="0" i="0" strike="noStrike" sz="1200" u="none">
+                  <a:solidFill>
+                    <a:srgbClr val="000000"/>
+                  </a:solidFill>
+                  <a:latin typeface="Arial"/>
+                </a:defRPr>
+              </a:pPr>
+            </a:p>
+          </c:txPr>
+          <c:showLegendKey val="0"/>
+          <c:showVal val="0"/>
+          <c:showCatName val="0"/>
+          <c:showSerName val="0"/>
+          <c:showPercent val="0"/>
+          <c:showBubbleSize val="0"/>
+          <c:showLeaderLines val="0"/>
+        </c:dLbls>
+        <c:marker val="1"/>
+        <c:axId val="2094734554"/>
+        <c:axId val="2094734552"/>
+        <c:axId val="2094734556"/>
+      </c:lineChart>
+      <c:catAx>
+        <c:axId val="2094734554"/>
+        <c:scaling>
+          <c:orientation val="minMax"/>
+        </c:scaling>
+        <c:delete val="0"/>
+        <c:axPos val="b"/>
+        <c:numFmt formatCode="General" sourceLinked="1"/>
+        <c:majorTickMark val="out"/>
+        <c:minorTickMark val="none"/>
+        <c:tickLblPos val="low"/>
+        <c:spPr>
+          <a:ln w="12700" cap="flat">
+            <a:solidFill>
+              <a:srgbClr val="24365A"/>
+            </a:solidFill>
+            <a:prstDash val="solid"/>
+            <a:round/>
+          </a:ln>
+        </c:spPr>
+        <c:txPr>
+          <a:bodyPr/>
+          <a:lstStyle/>
+          <a:p>
+            <a:pPr>
+              <a:defRPr sz="1100" b="0" i="0" u="none" strike="noStrike">
+                <a:solidFill>
+                  <a:srgbClr val="94A3B8"/>
+                </a:solidFill>
+                <a:latin typeface="Segoe UI"/>
+              </a:defRPr>
+            </a:pPr>
+            <a:endParaRPr lang="en-US"/>
+          </a:p>
+        </c:txPr>
+        <c:crossAx val="2094734552"/>
+        <c:crosses val="autoZero"/>
+        <c:auto val="1"/>
+        <c:lblAlgn val="ctr"/>
+        <c:noMultiLvlLbl val="1"/>
+      </c:catAx>
+      <c:valAx>
+        <c:axId val="2094734552"/>
+        <c:scaling>
+          <c:orientation val="minMax"/>
+        </c:scaling>
+        <c:delete val="0"/>
+        <c:axPos val="l"/>
+        <c:majorGridlines>
+          <c:spPr>
+            <a:ln w="12700" cap="flat">
+              <a:solidFill>
+                <a:srgbClr val="18243D"/>
+              </a:solidFill>
+              <a:prstDash val="solid"/>
+              <a:round/>
+            </a:ln>
+          </c:spPr>
+        </c:majorGridlines>
+        <c:numFmt formatCode="General" sourceLinked="0"/>
+        <c:majorTickMark val="out"/>
+        <c:minorTickMark val="none"/>
+        <c:tickLblPos val="nextTo"/>
+        <c:spPr>
+          <a:ln w="12700" cap="flat">
+            <a:solidFill>
+              <a:srgbClr val="24365A"/>
+            </a:solidFill>
+            <a:prstDash val="solid"/>
+            <a:round/>
+          </a:ln>
+        </c:spPr>
+        <c:txPr>
+          <a:bodyPr/>
+          <a:lstStyle/>
+          <a:p>
+            <a:pPr>
+              <a:defRPr sz="1000" b="0" i="0" u="none" strike="noStrike">
+                <a:solidFill>
+                  <a:srgbClr val="94A3B8"/>
+                </a:solidFill>
+                <a:latin typeface="Segoe UI"/>
+              </a:defRPr>
+            </a:pPr>
+            <a:endParaRPr lang="en-US"/>
+          </a:p>
+        </c:txPr>
+        <c:crossAx val="2094734554"/>
+        <c:crosses val="autoZero"/>
+        <c:crossBetween val="between"/>
+      </c:valAx>
+      <c:spPr>
+        <a:solidFill>
+          <a:srgbClr val="0D1420"/>
+        </a:solidFill>
+        <a:ln>
+          <a:noFill/>
+        </a:ln>
+        <a:effectLst/>
+      </c:spPr>
+    </c:plotArea>
+    <c:legend>
+      <c:legendPos val="b"/>
+      <c:overlay val="0"/>
+      <c:txPr>
+        <a:bodyPr/>
+        <a:lstStyle/>
+        <a:p>
+          <a:pPr>
+            <a:defRPr sz="1100">
+              <a:solidFill>
+                <a:srgbClr val="CBD5E1"/>
+              </a:solidFill>
+              <a:latin typeface="Segoe UI"/>
+              <a:cs typeface="Segoe UI"/>
+            </a:defRPr>
+          </a:pPr>
+          <a:endParaRPr lang="en-US"/>
+        </a:p>
+      </c:txPr>
+    </c:legend>
+    <c:plotVisOnly val="1"/>
+    <c:dispBlanksAs val="span"/>
+  </c:chart>
+  <c:spPr>
+    <a:solidFill>
+      <a:srgbClr val="0D1420"/>
+    </a:solidFill>
+    <a:ln w="12700" cap="flat">
+      <a:solidFill>
+        <a:srgbClr val="24365A"/>
+      </a:solidFill>
+    </a:ln>
+    <a:effectLst/>
+  </c:spPr>
+  <c:externalData r:id="rId1">
+    <c:autoUpdate val="0"/>
+  </c:externalData>
+</c:chartSpace>
+</file>
+
+<file path=ppt/charts/chart17.xml><?xml version="1.0" encoding="utf-8"?>
+<c:chartSpace xmlns:c="http://schemas.openxmlformats.org/drawingml/2006/chart" xmlns:a="http://schemas.openxmlformats.org/drawingml/2006/main" xmlns:r="http://schemas.openxmlformats.org/officeDocument/2006/relationships">
+  <c:date1904 val="0"/>
+  <c:roundedCorners val="1"/>
+  <c:chart>
+    <c:autoTitleDeleted val="1"/>
+    <c:plotArea>
+      <c:layout/>
+      <c:doughnutChart>
+        <c:varyColors val="1"/>
+        <c:ser>
+          <c:idx val="0"/>
+          <c:order val="0"/>
+          <c:tx>
+            <c:strRef>
+              <c:f>Sheet1!$B$1</c:f>
+              <c:strCache>
+                <c:ptCount val="1"/>
+                <c:pt idx="0">
+                  <c:v>Breakdown</c:v>
+                </c:pt>
+              </c:strCache>
+            </c:strRef>
+          </c:tx>
+          <c:spPr>
+            <a:solidFill>
+              <a:schemeClr val="accent1"/>
+            </a:solidFill>
+            <a:ln w="9525" cap="flat">
+              <a:solidFill>
+                <a:srgbClr val="F9F9F9"/>
+              </a:solidFill>
+              <a:prstDash val="solid"/>
+              <a:round/>
+            </a:ln>
+            <a:effectLst/>
+          </c:spPr>
+          <c:dPt>
+            <c:idx val="0"/>
+            <c:bubble3D val="0"/>
+            <c:spPr>
+              <a:solidFill>
+                <a:srgbClr val="3B82F6"/>
+              </a:solidFill>
+              <a:effectLst/>
+            </c:spPr>
+          </c:dPt>
+          <c:dPt>
+            <c:idx val="1"/>
+            <c:bubble3D val="0"/>
+            <c:spPr>
+              <a:solidFill>
+                <a:srgbClr val="06B6D4"/>
+              </a:solidFill>
+              <a:effectLst/>
+            </c:spPr>
+          </c:dPt>
+          <c:dPt>
+            <c:idx val="2"/>
+            <c:bubble3D val="0"/>
+            <c:spPr>
+              <a:solidFill>
+                <a:srgbClr val="22D3A0"/>
+              </a:solidFill>
+              <a:effectLst/>
+            </c:spPr>
+          </c:dPt>
+          <c:dPt>
+            <c:idx val="3"/>
+            <c:bubble3D val="0"/>
+            <c:spPr>
+              <a:solidFill>
+                <a:srgbClr val="F59E0B"/>
+              </a:solidFill>
+              <a:effectLst/>
+            </c:spPr>
+          </c:dPt>
+          <c:dLbls>
+            <c:dLbl>
+              <c:idx val="0"/>
+              <c:numFmt formatCode="0%" sourceLinked="0"/>
+              <c:spPr/>
+              <c:txPr>
+                <a:bodyPr/>
+                <a:lstStyle/>
+                <a:p>
+                  <a:pPr>
+                    <a:defRPr sz="1000" b="0" i="0" u="none" strike="noStrike">
+                      <a:solidFill>
+                        <a:srgbClr val="E2E8F0"/>
+                      </a:solidFill>
+                      <a:latin typeface="Segoe UI"/>
+                    </a:defRPr>
+                  </a:pPr>
+                </a:p>
+              </c:txPr>
+              <c:showLegendKey val="0"/>
+              <c:showVal val="0"/>
+              <c:showCatName val="0"/>
+              <c:showSerName val="0"/>
+              <c:showPercent val="1"/>
+              <c:showBubbleSize val="0"/>
+            </c:dLbl>
+            <c:dLbl>
+              <c:idx val="1"/>
+              <c:numFmt formatCode="0%" sourceLinked="0"/>
+              <c:spPr/>
+              <c:txPr>
+                <a:bodyPr/>
+                <a:lstStyle/>
+                <a:p>
+                  <a:pPr>
+                    <a:defRPr sz="1000" b="0" i="0" u="none" strike="noStrike">
+                      <a:solidFill>
+                        <a:srgbClr val="E2E8F0"/>
+                      </a:solidFill>
+                      <a:latin typeface="Segoe UI"/>
+                    </a:defRPr>
+                  </a:pPr>
+                </a:p>
+              </c:txPr>
+              <c:showLegendKey val="0"/>
+              <c:showVal val="0"/>
+              <c:showCatName val="0"/>
+              <c:showSerName val="0"/>
+              <c:showPercent val="1"/>
+              <c:showBubbleSize val="0"/>
+            </c:dLbl>
+            <c:dLbl>
+              <c:idx val="2"/>
+              <c:numFmt formatCode="0%" sourceLinked="0"/>
+              <c:spPr/>
+              <c:txPr>
+                <a:bodyPr/>
+                <a:lstStyle/>
+                <a:p>
+                  <a:pPr>
+                    <a:defRPr sz="1000" b="0" i="0" u="none" strike="noStrike">
+                      <a:solidFill>
+                        <a:srgbClr val="E2E8F0"/>
+                      </a:solidFill>
+                      <a:latin typeface="Segoe UI"/>
+                    </a:defRPr>
+                  </a:pPr>
+                </a:p>
+              </c:txPr>
+              <c:showLegendKey val="0"/>
+              <c:showVal val="0"/>
+              <c:showCatName val="0"/>
+              <c:showSerName val="0"/>
+              <c:showPercent val="1"/>
+              <c:showBubbleSize val="0"/>
+            </c:dLbl>
+            <c:dLbl>
+              <c:idx val="3"/>
+              <c:numFmt formatCode="0%" sourceLinked="0"/>
+              <c:spPr/>
+              <c:txPr>
+                <a:bodyPr/>
+                <a:lstStyle/>
+                <a:p>
+                  <a:pPr>
+                    <a:defRPr sz="1000" b="0" i="0" u="none" strike="noStrike">
+                      <a:solidFill>
+                        <a:srgbClr val="E2E8F0"/>
+                      </a:solidFill>
+                      <a:latin typeface="Segoe UI"/>
+                    </a:defRPr>
+                  </a:pPr>
+                </a:p>
+              </c:txPr>
+              <c:showLegendKey val="0"/>
+              <c:showVal val="0"/>
+              <c:showCatName val="0"/>
+              <c:showSerName val="0"/>
+              <c:showPercent val="1"/>
+              <c:showBubbleSize val="0"/>
+            </c:dLbl>
+            <c:numFmt formatCode="0%" sourceLinked="0"/>
+            <c:txPr>
+              <a:bodyPr/>
+              <a:lstStyle/>
+              <a:p>
+                <a:pPr>
+                  <a:defRPr sz="1800" b="0" i="0" u="none" strike="noStrike">
+                    <a:solidFill>
+                      <a:srgbClr val="000000"/>
+                    </a:solidFill>
+                    <a:latin typeface="Arial"/>
+                  </a:defRPr>
+                </a:pPr>
+              </a:p>
+            </c:txPr>
+            <c:showLegendKey val="0"/>
+            <c:showVal val="0"/>
+            <c:showCatName val="1"/>
+            <c:showSerName val="0"/>
+            <c:showPercent val="1"/>
+            <c:showBubbleSize val="0"/>
+            <c:showLeaderLines val="0"/>
+          </c:dLbls>
+          <c:cat>
+            <c:strRef>
+              <c:f>Sheet1!$A$2:$A$5</c:f>
+              <c:strCache>
+                <c:ptCount val="4"/>
+                <c:pt idx="0">
+                  <c:v>Building &amp; shipping</c:v>
+                </c:pt>
+                <c:pt idx="1">
+                  <c:v>Agent orchestration</c:v>
+                </c:pt>
+                <c:pt idx="2">
+                  <c:v>Quality gates &amp; QA</c:v>
+                </c:pt>
+                <c:pt idx="3">
+                  <c:v>Writing &amp; documentation</c:v>
+                </c:pt>
+              </c:strCache>
+            </c:strRef>
+          </c:cat>
+          <c:val>
+            <c:numRef>
+              <c:f>Sheet1!$B$2:$B$5</c:f>
+              <c:numCache>
+                <c:ptCount val="4"/>
+                <c:pt idx="0">
+                  <c:v>40</c:v>
+                </c:pt>
+                <c:pt idx="1">
+                  <c:v>25</c:v>
+                </c:pt>
+                <c:pt idx="2">
+                  <c:v>15</c:v>
+                </c:pt>
+                <c:pt idx="3">
+                  <c:v>20</c:v>
+                </c:pt>
+              </c:numCache>
+            </c:numRef>
+          </c:val>
+        </c:ser>
+        <c:firstSliceAng val="0"/>
+        <c:holeSize val="62"/>
+      </c:doughnutChart>
+      <c:spPr>
+        <a:solidFill>
+          <a:srgbClr val="0D1420"/>
+        </a:solidFill>
+        <a:ln>
+          <a:noFill/>
+        </a:ln>
+        <a:effectLst/>
+      </c:spPr>
+    </c:plotArea>
+    <c:legend>
+      <c:legendPos val="r"/>
+      <c:overlay val="0"/>
+      <c:txPr>
+        <a:bodyPr/>
+        <a:lstStyle/>
+        <a:p>
+          <a:pPr>
+            <a:defRPr sz="1100">
+              <a:solidFill>
+                <a:srgbClr val="CBD5E1"/>
+              </a:solidFill>
+              <a:latin typeface="Segoe UI"/>
+              <a:cs typeface="Segoe UI"/>
+            </a:defRPr>
+          </a:pPr>
+          <a:endParaRPr lang="en-US"/>
+        </a:p>
+      </c:txPr>
+    </c:legend>
+    <c:plotVisOnly val="1"/>
+    <c:dispBlanksAs val="span"/>
+  </c:chart>
+  <c:spPr>
+    <a:solidFill>
+      <a:srgbClr val="0D1420"/>
+    </a:solidFill>
+    <a:ln w="12700" cap="flat">
+      <a:solidFill>
+        <a:srgbClr val="24365A"/>
+      </a:solidFill>
+    </a:ln>
+    <a:effectLst/>
+  </c:spPr>
+  <c:externalData r:id="rId1">
+    <c:autoUpdate val="0"/>
+  </c:externalData>
+</c:chartSpace>
+</file>
+
+<file path=ppt/charts/chart18.xml><?xml version="1.0" encoding="utf-8"?>
+<c:chartSpace xmlns:c="http://schemas.openxmlformats.org/drawingml/2006/chart" xmlns:a="http://schemas.openxmlformats.org/drawingml/2006/main" xmlns:r="http://schemas.openxmlformats.org/officeDocument/2006/relationships">
+  <c:date1904 val="0"/>
+  <c:roundedCorners val="1"/>
+  <c:chart>
+    <c:autoTitleDeleted val="1"/>
+    <c:plotArea>
+      <c:layout/>
+      <c:barChart>
+        <c:barDir val="col"/>
+        <c:grouping val="clustered"/>
+        <c:varyColors val="0"/>
+        <c:ser>
+          <c:idx val="0"/>
+          <c:order val="0"/>
+          <c:tx>
+            <c:strRef>
+              <c:f>Sheet1!$B$1</c:f>
+              <c:strCache>
+                <c:ptCount val="1"/>
+                <c:pt idx="0">
+                  <c:v>Public, verifiable count</c:v>
+                </c:pt>
+              </c:strCache>
+            </c:strRef>
+          </c:tx>
+          <c:spPr>
+            <a:solidFill>
+              <a:srgbClr val="3B82F6"/>
+            </a:solidFill>
+            <a:effectLst/>
+          </c:spPr>
+          <c:invertIfNegative val="0"/>
+          <c:dLbls>
+            <c:numFmt formatCode="#,##0" sourceLinked="0"/>
+            <c:txPr>
+              <a:bodyPr/>
+              <a:lstStyle/>
+              <a:p>
+                <a:pPr>
+                  <a:defRPr b="0" i="0" strike="noStrike" sz="1000" u="none">
+                    <a:solidFill>
+                      <a:srgbClr val="E2E8F0"/>
+                    </a:solidFill>
+                    <a:latin typeface="Segoe UI"/>
+                  </a:defRPr>
+                </a:pPr>
+              </a:p>
+            </c:txPr>
+            <c:showLegendKey val="0"/>
+            <c:showVal val="1"/>
+            <c:showCatName val="0"/>
+            <c:showSerName val="0"/>
+            <c:showPercent val="0"/>
+            <c:showBubbleSize val="0"/>
+            <c:showLeaderLines val="0"/>
+          </c:dLbls>
+          <c:dPt>
+            <c:idx val="0"/>
+            <c:invertIfNegative val="0"/>
+            <c:bubble3D val="0"/>
+            <c:spPr>
+              <a:solidFill>
+                <a:srgbClr val="3B82F6"/>
+              </a:solidFill>
+              <a:effectLst/>
+            </c:spPr>
+          </c:dPt>
+          <c:dPt>
+            <c:idx val="1"/>
+            <c:invertIfNegative val="0"/>
+            <c:bubble3D val="0"/>
+            <c:spPr>
+              <a:solidFill>
+                <a:srgbClr val="06B6D4"/>
+              </a:solidFill>
+              <a:effectLst/>
+            </c:spPr>
+          </c:dPt>
+          <c:dPt>
+            <c:idx val="2"/>
+            <c:invertIfNegative val="0"/>
+            <c:bubble3D val="0"/>
+            <c:spPr>
+              <a:solidFill>
+                <a:srgbClr val="22D3A0"/>
+              </a:solidFill>
+              <a:effectLst/>
+            </c:spPr>
+          </c:dPt>
+          <c:dPt>
+            <c:idx val="3"/>
+            <c:invertIfNegative val="0"/>
+            <c:bubble3D val="0"/>
+            <c:spPr>
+              <a:solidFill>
+                <a:srgbClr val="F59E0B"/>
+              </a:solidFill>
+              <a:effectLst/>
+            </c:spPr>
+          </c:dPt>
+          <c:cat>
+            <c:multiLvlStrRef>
+              <c:f>Sheet1!$A$2:$A$5</c:f>
+              <c:multiLvlStrCache>
+                <c:ptCount val="4"/>
+                <c:lvl>
+                  <c:pt idx="0">
+                    <c:v>Production apps</c:v>
+                  </c:pt>
+                  <c:pt idx="1">
+                    <c:v>Specialist agents</c:v>
+                  </c:pt>
+                  <c:pt idx="2">
+                    <c:v>Production checks passed</c:v>
+                  </c:pt>
+                  <c:pt idx="3">
+                    <c:v>Validation queries</c:v>
+                  </c:pt>
+                </c:lvl>
+              </c:multiLvlStrCache>
+            </c:multiLvlStrRef>
+          </c:cat>
+          <c:val>
+            <c:numRef>
+              <c:f>Sheet1!$B$2:$B$5</c:f>
+              <c:numCache>
+                <c:formatCode>General</c:formatCode>
+                <c:ptCount val="4"/>
+                <c:pt idx="0">
+                  <c:v>30</c:v>
+                </c:pt>
+                <c:pt idx="1">
+                  <c:v>9</c:v>
+                </c:pt>
+                <c:pt idx="2">
+                  <c:v>51</c:v>
+                </c:pt>
+                <c:pt idx="3">
+                  <c:v>30</c:v>
+                </c:pt>
+              </c:numCache>
+            </c:numRef>
+          </c:val>
+        </c:ser>
+        <c:dLbls>
+          <c:numFmt formatCode="#,##0" sourceLinked="0"/>
+          <c:txPr>
+            <a:bodyPr/>
+            <a:lstStyle/>
+            <a:p>
+              <a:pPr>
+                <a:defRPr b="0" i="0" strike="noStrike" sz="1000" u="none">
+                  <a:solidFill>
+                    <a:srgbClr val="E2E8F0"/>
+                  </a:solidFill>
+                  <a:latin typeface="Segoe UI"/>
+                </a:defRPr>
+              </a:pPr>
+            </a:p>
+          </c:txPr>
+          <c:showLegendKey val="0"/>
+          <c:showVal val="1"/>
+          <c:showCatName val="0"/>
+          <c:showSerName val="0"/>
+          <c:showPercent val="0"/>
+          <c:showBubbleSize val="0"/>
+          <c:showLeaderLines val="0"/>
+        </c:dLbls>
+        <c:gapWidth val="55"/>
+        <c:overlap val="0"/>
+        <c:axId val="2094734554"/>
+        <c:axId val="2094734552"/>
+        <c:axId val="2094734556"/>
+      </c:barChart>
+      <c:catAx>
+        <c:axId val="2094734554"/>
+        <c:scaling>
+          <c:orientation val="minMax"/>
+        </c:scaling>
+        <c:delete val="0"/>
+        <c:axPos val="b"/>
+        <c:numFmt formatCode="General" sourceLinked="1"/>
+        <c:majorTickMark val="out"/>
+        <c:minorTickMark val="none"/>
+        <c:tickLblPos val="low"/>
+        <c:spPr>
+          <a:ln w="12700" cap="flat">
+            <a:solidFill>
+              <a:srgbClr val="24365A"/>
+            </a:solidFill>
+            <a:prstDash val="solid"/>
+            <a:round/>
+          </a:ln>
+        </c:spPr>
+        <c:txPr>
+          <a:bodyPr/>
+          <a:lstStyle/>
+          <a:p>
+            <a:pPr>
+              <a:defRPr sz="1100" b="0" i="0" u="none" strike="noStrike">
+                <a:solidFill>
+                  <a:srgbClr val="94A3B8"/>
+                </a:solidFill>
+                <a:latin typeface="Segoe UI"/>
+              </a:defRPr>
+            </a:pPr>
+            <a:endParaRPr lang="en-US"/>
+          </a:p>
+        </c:txPr>
+        <c:crossAx val="2094734552"/>
+        <c:crosses val="autoZero"/>
+        <c:auto val="1"/>
+        <c:lblAlgn val="ctr"/>
+        <c:noMultiLvlLbl val="1"/>
+      </c:catAx>
+      <c:valAx>
+        <c:axId val="2094734552"/>
+        <c:scaling>
+          <c:orientation val="minMax"/>
+        </c:scaling>
+        <c:delete val="0"/>
+        <c:axPos val="l"/>
+        <c:majorGridlines>
+          <c:spPr>
+            <a:ln w="12700" cap="flat">
+              <a:solidFill>
+                <a:srgbClr val="18243D"/>
+              </a:solidFill>
+              <a:prstDash val="solid"/>
+              <a:round/>
+            </a:ln>
+          </c:spPr>
+        </c:majorGridlines>
+        <c:numFmt formatCode="General" sourceLinked="0"/>
+        <c:majorTickMark val="out"/>
+        <c:minorTickMark val="none"/>
+        <c:tickLblPos val="nextTo"/>
+        <c:spPr>
+          <a:ln w="12700" cap="flat">
+            <a:solidFill>
+              <a:srgbClr val="24365A"/>
+            </a:solidFill>
+            <a:prstDash val="solid"/>
+            <a:round/>
+          </a:ln>
+        </c:spPr>
+        <c:txPr>
+          <a:bodyPr/>
+          <a:lstStyle/>
+          <a:p>
+            <a:pPr>
+              <a:defRPr sz="1000" b="0" i="0" u="none" strike="noStrike">
+                <a:solidFill>
+                  <a:srgbClr val="94A3B8"/>
+                </a:solidFill>
+                <a:latin typeface="Segoe UI"/>
+              </a:defRPr>
+            </a:pPr>
+            <a:endParaRPr lang="en-US"/>
+          </a:p>
+        </c:txPr>
+        <c:crossAx val="2094734554"/>
+        <c:crosses val="autoZero"/>
+        <c:crossBetween val="between"/>
+      </c:valAx>
+      <c:spPr>
+        <a:solidFill>
+          <a:srgbClr val="0D1420"/>
+        </a:solidFill>
+        <a:ln>
+          <a:noFill/>
+        </a:ln>
+        <a:effectLst/>
+      </c:spPr>
+    </c:plotArea>
+    <c:plotVisOnly val="1"/>
+    <c:dispBlanksAs val="span"/>
+  </c:chart>
+  <c:spPr>
+    <a:solidFill>
+      <a:srgbClr val="0D1420"/>
+    </a:solidFill>
+    <a:ln w="12700" cap="flat">
+      <a:solidFill>
+        <a:srgbClr val="24365A"/>
+      </a:solidFill>
+    </a:ln>
+    <a:effectLst/>
+  </c:spPr>
+  <c:externalData r:id="rId1">
+    <c:autoUpdate val="0"/>
+  </c:externalData>
+</c:chartSpace>
 </file>
 
 <file path=ppt/notesMasters/notesMaster1.xml><?xml version="1.0" encoding="utf-8"?>
@@ -551,6 +1556,446 @@
 </p:notes>
 </file>
 
+<file path=ppt/notesSlides/notesSlide10.xml><?xml version="1.0" encoding="utf-8"?>
+<p:notes xmlns:a="http://schemas.openxmlformats.org/drawingml/2006/main" xmlns:r="http://schemas.openxmlformats.org/officeDocument/2006/relationships" xmlns:p="http://schemas.openxmlformats.org/presentationml/2006/main">
+  <p:cSld>
+    <p:spTree>
+      <p:nvGrpSpPr>
+        <p:cNvPr id="1" name=""/>
+        <p:cNvGrpSpPr/>
+        <p:nvPr/>
+      </p:nvGrpSpPr>
+      <p:grpSpPr>
+        <a:xfrm>
+          <a:off x="0" y="0"/>
+          <a:ext cx="0" cy="0"/>
+          <a:chOff x="0" y="0"/>
+          <a:chExt cx="0" cy="0"/>
+        </a:xfrm>
+      </p:grpSpPr>
+      <p:sp>
+        <p:nvSpPr>
+          <p:cNvPr id="2" name="Slide Image Placeholder 1"/>
+          <p:cNvSpPr>
+            <a:spLocks noGrp="1" noRot="1" noChangeAspect="1"/>
+          </p:cNvSpPr>
+          <p:nvPr>
+            <p:ph type="sldImg"/>
+          </p:nvPr>
+        </p:nvSpPr>
+        <p:spPr/>
+      </p:sp>
+      <p:sp>
+        <p:nvSpPr>
+          <p:cNvPr id="3" name="Notes Placeholder 2"/>
+          <p:cNvSpPr>
+            <a:spLocks noGrp="1"/>
+          </p:cNvSpPr>
+          <p:nvPr>
+            <p:ph type="body" idx="1"/>
+          </p:nvPr>
+        </p:nvSpPr>
+        <p:spPr/>
+        <p:txBody>
+          <a:bodyPr/>
+          <a:lstStyle/>
+          <a:p>
+            <a:r>
+              <a:rPr lang="en-US" dirty="0"/>
+              <a:t/>
+            </a:r>
+            <a:endParaRPr lang="en-US" dirty="0"/>
+          </a:p>
+        </p:txBody>
+      </p:sp>
+      <p:sp>
+        <p:nvSpPr>
+          <p:cNvPr id="4" name="Slide Number Placeholder 3"/>
+          <p:cNvSpPr>
+            <a:spLocks noGrp="1"/>
+          </p:cNvSpPr>
+          <p:nvPr>
+            <p:ph type="sldNum" sz="quarter" idx="10"/>
+          </p:nvPr>
+        </p:nvSpPr>
+        <p:spPr/>
+        <p:txBody>
+          <a:bodyPr/>
+          <a:lstStyle/>
+          <a:p>
+            <a:fld id="{F7021451-1387-4CA6-816F-3879F97B5CBC}" type="slidenum">
+              <a:rPr lang="en-US"/>
+              <a:t>10</a:t>
+            </a:fld>
+            <a:endParaRPr lang="en-US"/>
+          </a:p>
+        </p:txBody>
+      </p:sp>
+    </p:spTree>
+    <p:extLst>
+      <p:ext uri="{BB962C8B-B14F-4D97-AF65-F5344CB8AC3E}">
+        <p14:creationId xmlns:p14="http://schemas.microsoft.com/office/powerpoint/2010/main" val="1024086991"/>
+      </p:ext>
+    </p:extLst>
+  </p:cSld>
+  <p:clrMapOvr>
+    <a:masterClrMapping/>
+  </p:clrMapOvr>
+</p:notes>
+</file>
+
+<file path=ppt/notesSlides/notesSlide11.xml><?xml version="1.0" encoding="utf-8"?>
+<p:notes xmlns:a="http://schemas.openxmlformats.org/drawingml/2006/main" xmlns:r="http://schemas.openxmlformats.org/officeDocument/2006/relationships" xmlns:p="http://schemas.openxmlformats.org/presentationml/2006/main">
+  <p:cSld>
+    <p:spTree>
+      <p:nvGrpSpPr>
+        <p:cNvPr id="1" name=""/>
+        <p:cNvGrpSpPr/>
+        <p:nvPr/>
+      </p:nvGrpSpPr>
+      <p:grpSpPr>
+        <a:xfrm>
+          <a:off x="0" y="0"/>
+          <a:ext cx="0" cy="0"/>
+          <a:chOff x="0" y="0"/>
+          <a:chExt cx="0" cy="0"/>
+        </a:xfrm>
+      </p:grpSpPr>
+      <p:sp>
+        <p:nvSpPr>
+          <p:cNvPr id="2" name="Slide Image Placeholder 1"/>
+          <p:cNvSpPr>
+            <a:spLocks noGrp="1" noRot="1" noChangeAspect="1"/>
+          </p:cNvSpPr>
+          <p:nvPr>
+            <p:ph type="sldImg"/>
+          </p:nvPr>
+        </p:nvSpPr>
+        <p:spPr/>
+      </p:sp>
+      <p:sp>
+        <p:nvSpPr>
+          <p:cNvPr id="3" name="Notes Placeholder 2"/>
+          <p:cNvSpPr>
+            <a:spLocks noGrp="1"/>
+          </p:cNvSpPr>
+          <p:nvPr>
+            <p:ph type="body" idx="1"/>
+          </p:nvPr>
+        </p:nvSpPr>
+        <p:spPr/>
+        <p:txBody>
+          <a:bodyPr/>
+          <a:lstStyle/>
+          <a:p>
+            <a:r>
+              <a:rPr lang="en-US" dirty="0"/>
+              <a:t/>
+            </a:r>
+            <a:endParaRPr lang="en-US" dirty="0"/>
+          </a:p>
+        </p:txBody>
+      </p:sp>
+      <p:sp>
+        <p:nvSpPr>
+          <p:cNvPr id="4" name="Slide Number Placeholder 3"/>
+          <p:cNvSpPr>
+            <a:spLocks noGrp="1"/>
+          </p:cNvSpPr>
+          <p:nvPr>
+            <p:ph type="sldNum" sz="quarter" idx="10"/>
+          </p:nvPr>
+        </p:nvSpPr>
+        <p:spPr/>
+        <p:txBody>
+          <a:bodyPr/>
+          <a:lstStyle/>
+          <a:p>
+            <a:fld id="{F7021451-1387-4CA6-816F-3879F97B5CBC}" type="slidenum">
+              <a:rPr lang="en-US"/>
+              <a:t>11</a:t>
+            </a:fld>
+            <a:endParaRPr lang="en-US"/>
+          </a:p>
+        </p:txBody>
+      </p:sp>
+    </p:spTree>
+    <p:extLst>
+      <p:ext uri="{BB962C8B-B14F-4D97-AF65-F5344CB8AC3E}">
+        <p14:creationId xmlns:p14="http://schemas.microsoft.com/office/powerpoint/2010/main" val="1024086991"/>
+      </p:ext>
+    </p:extLst>
+  </p:cSld>
+  <p:clrMapOvr>
+    <a:masterClrMapping/>
+  </p:clrMapOvr>
+</p:notes>
+</file>
+
+<file path=ppt/notesSlides/notesSlide12.xml><?xml version="1.0" encoding="utf-8"?>
+<p:notes xmlns:a="http://schemas.openxmlformats.org/drawingml/2006/main" xmlns:r="http://schemas.openxmlformats.org/officeDocument/2006/relationships" xmlns:p="http://schemas.openxmlformats.org/presentationml/2006/main">
+  <p:cSld>
+    <p:spTree>
+      <p:nvGrpSpPr>
+        <p:cNvPr id="1" name=""/>
+        <p:cNvGrpSpPr/>
+        <p:nvPr/>
+      </p:nvGrpSpPr>
+      <p:grpSpPr>
+        <a:xfrm>
+          <a:off x="0" y="0"/>
+          <a:ext cx="0" cy="0"/>
+          <a:chOff x="0" y="0"/>
+          <a:chExt cx="0" cy="0"/>
+        </a:xfrm>
+      </p:grpSpPr>
+      <p:sp>
+        <p:nvSpPr>
+          <p:cNvPr id="2" name="Slide Image Placeholder 1"/>
+          <p:cNvSpPr>
+            <a:spLocks noGrp="1" noRot="1" noChangeAspect="1"/>
+          </p:cNvSpPr>
+          <p:nvPr>
+            <p:ph type="sldImg"/>
+          </p:nvPr>
+        </p:nvSpPr>
+        <p:spPr/>
+      </p:sp>
+      <p:sp>
+        <p:nvSpPr>
+          <p:cNvPr id="3" name="Notes Placeholder 2"/>
+          <p:cNvSpPr>
+            <a:spLocks noGrp="1"/>
+          </p:cNvSpPr>
+          <p:nvPr>
+            <p:ph type="body" idx="1"/>
+          </p:nvPr>
+        </p:nvSpPr>
+        <p:spPr/>
+        <p:txBody>
+          <a:bodyPr/>
+          <a:lstStyle/>
+          <a:p>
+            <a:r>
+              <a:rPr lang="en-US" dirty="0"/>
+              <a:t/>
+            </a:r>
+            <a:endParaRPr lang="en-US" dirty="0"/>
+          </a:p>
+        </p:txBody>
+      </p:sp>
+      <p:sp>
+        <p:nvSpPr>
+          <p:cNvPr id="4" name="Slide Number Placeholder 3"/>
+          <p:cNvSpPr>
+            <a:spLocks noGrp="1"/>
+          </p:cNvSpPr>
+          <p:nvPr>
+            <p:ph type="sldNum" sz="quarter" idx="10"/>
+          </p:nvPr>
+        </p:nvSpPr>
+        <p:spPr/>
+        <p:txBody>
+          <a:bodyPr/>
+          <a:lstStyle/>
+          <a:p>
+            <a:fld id="{F7021451-1387-4CA6-816F-3879F97B5CBC}" type="slidenum">
+              <a:rPr lang="en-US"/>
+              <a:t>12</a:t>
+            </a:fld>
+            <a:endParaRPr lang="en-US"/>
+          </a:p>
+        </p:txBody>
+      </p:sp>
+    </p:spTree>
+    <p:extLst>
+      <p:ext uri="{BB962C8B-B14F-4D97-AF65-F5344CB8AC3E}">
+        <p14:creationId xmlns:p14="http://schemas.microsoft.com/office/powerpoint/2010/main" val="1024086991"/>
+      </p:ext>
+    </p:extLst>
+  </p:cSld>
+  <p:clrMapOvr>
+    <a:masterClrMapping/>
+  </p:clrMapOvr>
+</p:notes>
+</file>
+
+<file path=ppt/notesSlides/notesSlide13.xml><?xml version="1.0" encoding="utf-8"?>
+<p:notes xmlns:a="http://schemas.openxmlformats.org/drawingml/2006/main" xmlns:r="http://schemas.openxmlformats.org/officeDocument/2006/relationships" xmlns:p="http://schemas.openxmlformats.org/presentationml/2006/main">
+  <p:cSld>
+    <p:spTree>
+      <p:nvGrpSpPr>
+        <p:cNvPr id="1" name=""/>
+        <p:cNvGrpSpPr/>
+        <p:nvPr/>
+      </p:nvGrpSpPr>
+      <p:grpSpPr>
+        <a:xfrm>
+          <a:off x="0" y="0"/>
+          <a:ext cx="0" cy="0"/>
+          <a:chOff x="0" y="0"/>
+          <a:chExt cx="0" cy="0"/>
+        </a:xfrm>
+      </p:grpSpPr>
+      <p:sp>
+        <p:nvSpPr>
+          <p:cNvPr id="2" name="Slide Image Placeholder 1"/>
+          <p:cNvSpPr>
+            <a:spLocks noGrp="1" noRot="1" noChangeAspect="1"/>
+          </p:cNvSpPr>
+          <p:nvPr>
+            <p:ph type="sldImg"/>
+          </p:nvPr>
+        </p:nvSpPr>
+        <p:spPr/>
+      </p:sp>
+      <p:sp>
+        <p:nvSpPr>
+          <p:cNvPr id="3" name="Notes Placeholder 2"/>
+          <p:cNvSpPr>
+            <a:spLocks noGrp="1"/>
+          </p:cNvSpPr>
+          <p:nvPr>
+            <p:ph type="body" idx="1"/>
+          </p:nvPr>
+        </p:nvSpPr>
+        <p:spPr/>
+        <p:txBody>
+          <a:bodyPr/>
+          <a:lstStyle/>
+          <a:p>
+            <a:r>
+              <a:rPr lang="en-US" dirty="0"/>
+              <a:t/>
+            </a:r>
+            <a:endParaRPr lang="en-US" dirty="0"/>
+          </a:p>
+        </p:txBody>
+      </p:sp>
+      <p:sp>
+        <p:nvSpPr>
+          <p:cNvPr id="4" name="Slide Number Placeholder 3"/>
+          <p:cNvSpPr>
+            <a:spLocks noGrp="1"/>
+          </p:cNvSpPr>
+          <p:nvPr>
+            <p:ph type="sldNum" sz="quarter" idx="10"/>
+          </p:nvPr>
+        </p:nvSpPr>
+        <p:spPr/>
+        <p:txBody>
+          <a:bodyPr/>
+          <a:lstStyle/>
+          <a:p>
+            <a:fld id="{F7021451-1387-4CA6-816F-3879F97B5CBC}" type="slidenum">
+              <a:rPr lang="en-US"/>
+              <a:t>13</a:t>
+            </a:fld>
+            <a:endParaRPr lang="en-US"/>
+          </a:p>
+        </p:txBody>
+      </p:sp>
+    </p:spTree>
+    <p:extLst>
+      <p:ext uri="{BB962C8B-B14F-4D97-AF65-F5344CB8AC3E}">
+        <p14:creationId xmlns:p14="http://schemas.microsoft.com/office/powerpoint/2010/main" val="1024086991"/>
+      </p:ext>
+    </p:extLst>
+  </p:cSld>
+  <p:clrMapOvr>
+    <a:masterClrMapping/>
+  </p:clrMapOvr>
+</p:notes>
+</file>
+
+<file path=ppt/notesSlides/notesSlide14.xml><?xml version="1.0" encoding="utf-8"?>
+<p:notes xmlns:a="http://schemas.openxmlformats.org/drawingml/2006/main" xmlns:r="http://schemas.openxmlformats.org/officeDocument/2006/relationships" xmlns:p="http://schemas.openxmlformats.org/presentationml/2006/main">
+  <p:cSld>
+    <p:spTree>
+      <p:nvGrpSpPr>
+        <p:cNvPr id="1" name=""/>
+        <p:cNvGrpSpPr/>
+        <p:nvPr/>
+      </p:nvGrpSpPr>
+      <p:grpSpPr>
+        <a:xfrm>
+          <a:off x="0" y="0"/>
+          <a:ext cx="0" cy="0"/>
+          <a:chOff x="0" y="0"/>
+          <a:chExt cx="0" cy="0"/>
+        </a:xfrm>
+      </p:grpSpPr>
+      <p:sp>
+        <p:nvSpPr>
+          <p:cNvPr id="2" name="Slide Image Placeholder 1"/>
+          <p:cNvSpPr>
+            <a:spLocks noGrp="1" noRot="1" noChangeAspect="1"/>
+          </p:cNvSpPr>
+          <p:nvPr>
+            <p:ph type="sldImg"/>
+          </p:nvPr>
+        </p:nvSpPr>
+        <p:spPr/>
+      </p:sp>
+      <p:sp>
+        <p:nvSpPr>
+          <p:cNvPr id="3" name="Notes Placeholder 2"/>
+          <p:cNvSpPr>
+            <a:spLocks noGrp="1"/>
+          </p:cNvSpPr>
+          <p:nvPr>
+            <p:ph type="body" idx="1"/>
+          </p:nvPr>
+        </p:nvSpPr>
+        <p:spPr/>
+        <p:txBody>
+          <a:bodyPr/>
+          <a:lstStyle/>
+          <a:p>
+            <a:r>
+              <a:rPr lang="en-US" dirty="0"/>
+              <a:t/>
+            </a:r>
+            <a:endParaRPr lang="en-US" dirty="0"/>
+          </a:p>
+        </p:txBody>
+      </p:sp>
+      <p:sp>
+        <p:nvSpPr>
+          <p:cNvPr id="4" name="Slide Number Placeholder 3"/>
+          <p:cNvSpPr>
+            <a:spLocks noGrp="1"/>
+          </p:cNvSpPr>
+          <p:nvPr>
+            <p:ph type="sldNum" sz="quarter" idx="10"/>
+          </p:nvPr>
+        </p:nvSpPr>
+        <p:spPr/>
+        <p:txBody>
+          <a:bodyPr/>
+          <a:lstStyle/>
+          <a:p>
+            <a:fld id="{F7021451-1387-4CA6-816F-3879F97B5CBC}" type="slidenum">
+              <a:rPr lang="en-US"/>
+              <a:t>14</a:t>
+            </a:fld>
+            <a:endParaRPr lang="en-US"/>
+          </a:p>
+        </p:txBody>
+      </p:sp>
+    </p:spTree>
+    <p:extLst>
+      <p:ext uri="{BB962C8B-B14F-4D97-AF65-F5344CB8AC3E}">
+        <p14:creationId xmlns:p14="http://schemas.microsoft.com/office/powerpoint/2010/main" val="1024086991"/>
+      </p:ext>
+    </p:extLst>
+  </p:cSld>
+  <p:clrMapOvr>
+    <a:masterClrMapping/>
+  </p:clrMapOvr>
+</p:notes>
+</file>
+
 <file path=ppt/notesSlides/notesSlide2.xml><?xml version="1.0" encoding="utf-8"?>
 <p:notes xmlns:a="http://schemas.openxmlformats.org/drawingml/2006/main" xmlns:r="http://schemas.openxmlformats.org/officeDocument/2006/relationships" xmlns:p="http://schemas.openxmlformats.org/presentationml/2006/main">
   <p:cSld>
@@ -1149,6 +2594,94 @@
             <a:fld id="{F7021451-1387-4CA6-816F-3879F97B5CBC}" type="slidenum">
               <a:rPr lang="en-US"/>
               <a:t>8</a:t>
+            </a:fld>
+            <a:endParaRPr lang="en-US"/>
+          </a:p>
+        </p:txBody>
+      </p:sp>
+    </p:spTree>
+    <p:extLst>
+      <p:ext uri="{BB962C8B-B14F-4D97-AF65-F5344CB8AC3E}">
+        <p14:creationId xmlns:p14="http://schemas.microsoft.com/office/powerpoint/2010/main" val="1024086991"/>
+      </p:ext>
+    </p:extLst>
+  </p:cSld>
+  <p:clrMapOvr>
+    <a:masterClrMapping/>
+  </p:clrMapOvr>
+</p:notes>
+</file>
+
+<file path=ppt/notesSlides/notesSlide9.xml><?xml version="1.0" encoding="utf-8"?>
+<p:notes xmlns:a="http://schemas.openxmlformats.org/drawingml/2006/main" xmlns:r="http://schemas.openxmlformats.org/officeDocument/2006/relationships" xmlns:p="http://schemas.openxmlformats.org/presentationml/2006/main">
+  <p:cSld>
+    <p:spTree>
+      <p:nvGrpSpPr>
+        <p:cNvPr id="1" name=""/>
+        <p:cNvGrpSpPr/>
+        <p:nvPr/>
+      </p:nvGrpSpPr>
+      <p:grpSpPr>
+        <a:xfrm>
+          <a:off x="0" y="0"/>
+          <a:ext cx="0" cy="0"/>
+          <a:chOff x="0" y="0"/>
+          <a:chExt cx="0" cy="0"/>
+        </a:xfrm>
+      </p:grpSpPr>
+      <p:sp>
+        <p:nvSpPr>
+          <p:cNvPr id="2" name="Slide Image Placeholder 1"/>
+          <p:cNvSpPr>
+            <a:spLocks noGrp="1" noRot="1" noChangeAspect="1"/>
+          </p:cNvSpPr>
+          <p:nvPr>
+            <p:ph type="sldImg"/>
+          </p:nvPr>
+        </p:nvSpPr>
+        <p:spPr/>
+      </p:sp>
+      <p:sp>
+        <p:nvSpPr>
+          <p:cNvPr id="3" name="Notes Placeholder 2"/>
+          <p:cNvSpPr>
+            <a:spLocks noGrp="1"/>
+          </p:cNvSpPr>
+          <p:nvPr>
+            <p:ph type="body" idx="1"/>
+          </p:nvPr>
+        </p:nvSpPr>
+        <p:spPr/>
+        <p:txBody>
+          <a:bodyPr/>
+          <a:lstStyle/>
+          <a:p>
+            <a:r>
+              <a:rPr lang="en-US" dirty="0"/>
+              <a:t/>
+            </a:r>
+            <a:endParaRPr lang="en-US" dirty="0"/>
+          </a:p>
+        </p:txBody>
+      </p:sp>
+      <p:sp>
+        <p:nvSpPr>
+          <p:cNvPr id="4" name="Slide Number Placeholder 3"/>
+          <p:cNvSpPr>
+            <a:spLocks noGrp="1"/>
+          </p:cNvSpPr>
+          <p:nvPr>
+            <p:ph type="sldNum" sz="quarter" idx="10"/>
+          </p:nvPr>
+        </p:nvSpPr>
+        <p:spPr/>
+        <p:txBody>
+          <a:bodyPr/>
+          <a:lstStyle/>
+          <a:p>
+            <a:fld id="{F7021451-1387-4CA6-816F-3879F97B5CBC}" type="slidenum">
+              <a:rPr lang="en-US"/>
+              <a:t>9</a:t>
             </a:fld>
             <a:endParaRPr lang="en-US"/>
           </a:p>
@@ -1546,7 +3079,7 @@
         </p:nvSpPr>
         <p:spPr>
           <a:xfrm>
-            <a:off x="822960" y="1554480"/>
+            <a:off x="822960" y="1783080"/>
             <a:ext cx="10515600" cy="457200"/>
           </a:xfrm>
           <a:prstGeom prst="rect">
@@ -1571,7 +3104,7 @@
                 <a:ea typeface="Consolas" pitchFamily="34" charset="-122"/>
                 <a:cs typeface="Consolas" pitchFamily="34" charset="-120"/>
               </a:rPr>
-              <a:t>CAREER</a:t>
+              <a:t>ZALIN PLATFORM · CAREER STORY</a:t>
             </a:r>
             <a:endParaRPr lang="en-US" sz="1400" dirty="0"/>
           </a:p>
@@ -1586,7 +3119,7 @@
         <p:spPr>
           <a:xfrm>
             <a:off x="822960" y="2286000"/>
-            <a:ext cx="10515600" cy="1737360"/>
+            <a:ext cx="10607040" cy="1691640"/>
           </a:xfrm>
           <a:prstGeom prst="rect">
             <a:avLst/>
@@ -1602,7 +3135,7 @@
               <a:buNone/>
             </a:pPr>
             <a:r>
-              <a:rPr lang="en-US" sz="4400" b="1" dirty="0">
+              <a:rPr lang="en-US" sz="4100" b="1" dirty="0">
                 <a:solidFill>
                   <a:srgbClr val="FFFFFF"/>
                 </a:solidFill>
@@ -1610,9 +3143,9 @@
                 <a:ea typeface="Segoe UI" pitchFamily="34" charset="-122"/>
                 <a:cs typeface="Segoe UI" pitchFamily="34" charset="-120"/>
               </a:rPr>
-              <a:t>From BI analyst to AI company builder</a:t>
-            </a:r>
-            <a:endParaRPr lang="en-US" sz="4400" dirty="0"/>
+              <a:t>From BI Analyst to AI Company Builder</a:t>
+            </a:r>
+            <a:endParaRPr lang="en-US" sz="4100" dirty="0"/>
           </a:p>
         </p:txBody>
       </p:sp>
@@ -1624,8 +3157,8 @@
         </p:nvSpPr>
         <p:spPr>
           <a:xfrm>
-            <a:off x="822960" y="4206240"/>
-            <a:ext cx="10515600" cy="914400"/>
+            <a:off x="822960" y="4023360"/>
+            <a:ext cx="10058400" cy="777240"/>
           </a:xfrm>
           <a:prstGeom prst="rect">
             <a:avLst/>
@@ -1641,7 +3174,7 @@
               <a:buNone/>
             </a:pPr>
             <a:r>
-              <a:rPr lang="en-US" sz="1600" dirty="0">
+              <a:rPr lang="en-US" sz="1700" dirty="0">
                 <a:solidFill>
                   <a:srgbClr val="94A3B8"/>
                 </a:solidFill>
@@ -1649,21 +3182,83 @@
                 <a:ea typeface="Segoe UI" pitchFamily="34" charset="-122"/>
                 <a:cs typeface="Segoe UI" pitchFamily="34" charset="-120"/>
               </a:rPr>
-              <a:t>A transition map for analysts who cannot stop automating their own job · Rezalian Vatiady</a:t>
-            </a:r>
-            <a:endParaRPr lang="en-US" sz="1600" dirty="0"/>
-          </a:p>
-        </p:txBody>
-      </p:sp>
-      <p:sp>
-        <p:nvSpPr>
-          <p:cNvPr id="7" name="Text 5"/>
-          <p:cNvSpPr/>
-          <p:nvPr/>
-        </p:nvSpPr>
-        <p:spPr>
-          <a:xfrm>
-            <a:off x="10698480" y="6355080"/>
+              <a:t>Four chapters - Tokopedia, BRI, IKEA, Zalin Labs - and the skills that compounded into 30+ shipped products</a:t>
+            </a:r>
+            <a:endParaRPr lang="en-US" sz="1700" dirty="0"/>
+          </a:p>
+        </p:txBody>
+      </p:sp>
+      <p:sp>
+        <p:nvSpPr>
+          <p:cNvPr id="7" name="Shape 5"/>
+          <p:cNvSpPr/>
+          <p:nvPr/>
+        </p:nvSpPr>
+        <p:spPr>
+          <a:xfrm>
+            <a:off x="822960" y="5440680"/>
+            <a:ext cx="4114800" cy="0"/>
+          </a:xfrm>
+          <a:prstGeom prst="line">
+            <a:avLst/>
+          </a:prstGeom>
+          <a:noFill/>
+          <a:ln w="31750">
+            <a:solidFill>
+              <a:srgbClr val="3B82F6"/>
+            </a:solidFill>
+            <a:prstDash val="solid"/>
+          </a:ln>
+        </p:spPr>
+      </p:sp>
+      <p:sp>
+        <p:nvSpPr>
+          <p:cNvPr id="8" name="Text 6"/>
+          <p:cNvSpPr/>
+          <p:nvPr/>
+        </p:nvSpPr>
+        <p:spPr>
+          <a:xfrm>
+            <a:off x="822960" y="5596128"/>
+            <a:ext cx="10058400" cy="457200"/>
+          </a:xfrm>
+          <a:prstGeom prst="rect">
+            <a:avLst/>
+          </a:prstGeom>
+          <a:noFill/>
+          <a:ln/>
+        </p:spPr>
+        <p:txBody>
+          <a:bodyPr wrap="square" rtlCol="0" anchor="ctr"/>
+          <a:lstStyle/>
+          <a:p>
+            <a:pPr indent="0" marL="0">
+              <a:buNone/>
+            </a:pPr>
+            <a:r>
+              <a:rPr lang="en-US" sz="1250" dirty="0">
+                <a:solidFill>
+                  <a:srgbClr val="64748B"/>
+                </a:solidFill>
+                <a:latin typeface="Segoe UI" pitchFamily="34" charset="0"/>
+                <a:ea typeface="Segoe UI" pitchFamily="34" charset="-122"/>
+                <a:cs typeface="Segoe UI" pitchFamily="34" charset="-120"/>
+              </a:rPr>
+              <a:t>Rezalian Vatiady · Zalin Labs · 2026</a:t>
+            </a:r>
+            <a:endParaRPr lang="en-US" sz="1250" dirty="0"/>
+          </a:p>
+        </p:txBody>
+      </p:sp>
+      <p:sp>
+        <p:nvSpPr>
+          <p:cNvPr id="9" name="Text 7"/>
+          <p:cNvSpPr/>
+          <p:nvPr/>
+        </p:nvSpPr>
+        <p:spPr>
+          <a:xfrm>
+            <a:off x="10698480" y="6382512"/>
             <a:ext cx="1188720" cy="365760"/>
           </a:xfrm>
           <a:prstGeom prst="rect">
@@ -1688,7 +3283,2500 @@
                 <a:ea typeface="Consolas" pitchFamily="34" charset="-122"/>
                 <a:cs typeface="Consolas" pitchFamily="34" charset="-120"/>
               </a:rPr>
-              <a:t>1 / 8</a:t>
+              <a:t>1 / 14</a:t>
+            </a:r>
+            <a:endParaRPr lang="en-US" sz="1000" dirty="0"/>
+          </a:p>
+        </p:txBody>
+      </p:sp>
+    </p:spTree>
+  </p:cSld>
+  <p:clrMapOvr>
+    <a:masterClrMapping/>
+  </p:clrMapOvr>
+</p:sld>
+</file>
+
+<file path=ppt/slides/slide10.xml><?xml version="1.0" encoding="utf-8"?>
+<p:sld xmlns:a="http://schemas.openxmlformats.org/drawingml/2006/main" xmlns:r="http://schemas.openxmlformats.org/officeDocument/2006/relationships" xmlns:p="http://schemas.openxmlformats.org/presentationml/2006/main">
+  <p:cSld name="Slide 10">
+    <p:bg>
+      <p:bgPr>
+        <a:solidFill>
+          <a:srgbClr val="0A0C12"/>
+        </a:solidFill>
+      </p:bgPr>
+    </p:bg>
+    <p:spTree>
+      <p:nvGrpSpPr>
+        <p:cNvPr id="1" name=""/>
+        <p:cNvGrpSpPr/>
+        <p:nvPr/>
+      </p:nvGrpSpPr>
+      <p:grpSpPr>
+        <a:xfrm>
+          <a:off x="0" y="0"/>
+          <a:ext cx="0" cy="0"/>
+          <a:chOff x="0" y="0"/>
+          <a:chExt cx="0" cy="0"/>
+        </a:xfrm>
+      </p:grpSpPr>
+      <p:sp>
+        <p:nvSpPr>
+          <p:cNvPr id="2" name="Shape 0"/>
+          <p:cNvSpPr/>
+          <p:nvPr/>
+        </p:nvSpPr>
+        <p:spPr>
+          <a:xfrm>
+            <a:off x="0" y="0"/>
+            <a:ext cx="7680960" cy="64008"/>
+          </a:xfrm>
+          <a:prstGeom prst="rect">
+            <a:avLst/>
+          </a:prstGeom>
+          <a:solidFill>
+            <a:srgbClr val="3B82F6"/>
+          </a:solidFill>
+          <a:ln/>
+        </p:spPr>
+      </p:sp>
+      <p:sp>
+        <p:nvSpPr>
+          <p:cNvPr id="3" name="Shape 1"/>
+          <p:cNvSpPr/>
+          <p:nvPr/>
+        </p:nvSpPr>
+        <p:spPr>
+          <a:xfrm>
+            <a:off x="7680960" y="0"/>
+            <a:ext cx="4510735" cy="64008"/>
+          </a:xfrm>
+          <a:prstGeom prst="rect">
+            <a:avLst/>
+          </a:prstGeom>
+          <a:solidFill>
+            <a:srgbClr val="06B6D4"/>
+          </a:solidFill>
+          <a:ln/>
+        </p:spPr>
+      </p:sp>
+      <p:sp>
+        <p:nvSpPr>
+          <p:cNvPr id="4" name="Text 2"/>
+          <p:cNvSpPr/>
+          <p:nvPr/>
+        </p:nvSpPr>
+        <p:spPr>
+          <a:xfrm>
+            <a:off x="822960" y="502920"/>
+            <a:ext cx="10515600" cy="365760"/>
+          </a:xfrm>
+          <a:prstGeom prst="rect">
+            <a:avLst/>
+          </a:prstGeom>
+          <a:noFill/>
+          <a:ln/>
+        </p:spPr>
+        <p:txBody>
+          <a:bodyPr wrap="square" rtlCol="0" anchor="ctr"/>
+          <a:lstStyle/>
+          <a:p>
+            <a:pPr indent="0" marL="0">
+              <a:buNone/>
+            </a:pPr>
+            <a:r>
+              <a:rPr lang="en-US" sz="1200" spc="300" kern="0" dirty="0">
+                <a:solidFill>
+                  <a:srgbClr val="06B6D4"/>
+                </a:solidFill>
+                <a:latin typeface="Consolas" pitchFamily="34" charset="0"/>
+                <a:ea typeface="Consolas" pitchFamily="34" charset="-122"/>
+                <a:cs typeface="Consolas" pitchFamily="34" charset="-120"/>
+              </a:rPr>
+              <a:t>METHOD</a:t>
+            </a:r>
+            <a:endParaRPr lang="en-US" sz="1200" dirty="0"/>
+          </a:p>
+        </p:txBody>
+      </p:sp>
+      <p:sp>
+        <p:nvSpPr>
+          <p:cNvPr id="5" name="Text 3"/>
+          <p:cNvSpPr/>
+          <p:nvPr/>
+        </p:nvSpPr>
+        <p:spPr>
+          <a:xfrm>
+            <a:off x="822960" y="914400"/>
+            <a:ext cx="10561320" cy="868680"/>
+          </a:xfrm>
+          <a:prstGeom prst="rect">
+            <a:avLst/>
+          </a:prstGeom>
+          <a:noFill/>
+          <a:ln/>
+        </p:spPr>
+        <p:txBody>
+          <a:bodyPr wrap="square" rtlCol="0" anchor="ctr"/>
+          <a:lstStyle/>
+          <a:p>
+            <a:pPr indent="0" marL="0">
+              <a:buNone/>
+            </a:pPr>
+            <a:r>
+              <a:rPr lang="en-US" sz="2700" b="1" dirty="0">
+                <a:solidFill>
+                  <a:srgbClr val="FFFFFF"/>
+                </a:solidFill>
+                <a:latin typeface="Segoe UI" pitchFamily="34" charset="0"/>
+                <a:ea typeface="Segoe UI" pitchFamily="34" charset="-122"/>
+                <a:cs typeface="Segoe UI" pitchFamily="34" charset="-120"/>
+              </a:rPr>
+              <a:t>Build the proof before you need it</a:t>
+            </a:r>
+            <a:endParaRPr lang="en-US" sz="2700" dirty="0"/>
+          </a:p>
+        </p:txBody>
+      </p:sp>
+      <p:sp>
+        <p:nvSpPr>
+          <p:cNvPr id="6" name="Shape 4"/>
+          <p:cNvSpPr/>
+          <p:nvPr/>
+        </p:nvSpPr>
+        <p:spPr>
+          <a:xfrm>
+            <a:off x="1075792" y="2514600"/>
+            <a:ext cx="2331720" cy="2103120"/>
+          </a:xfrm>
+          <a:prstGeom prst="roundRect">
+            <a:avLst>
+              <a:gd name="adj" fmla="val 3043"/>
+            </a:avLst>
+          </a:prstGeom>
+          <a:solidFill>
+            <a:srgbClr val="111A2E"/>
+          </a:solidFill>
+          <a:ln w="19050">
+            <a:solidFill>
+              <a:srgbClr val="3B82F6"/>
+            </a:solidFill>
+            <a:prstDash val="solid"/>
+          </a:ln>
+        </p:spPr>
+      </p:sp>
+      <p:sp>
+        <p:nvSpPr>
+          <p:cNvPr id="7" name="Text 5"/>
+          <p:cNvSpPr/>
+          <p:nvPr/>
+        </p:nvSpPr>
+        <p:spPr>
+          <a:xfrm>
+            <a:off x="1203808" y="2633472"/>
+            <a:ext cx="2075688" cy="310896"/>
+          </a:xfrm>
+          <a:prstGeom prst="rect">
+            <a:avLst/>
+          </a:prstGeom>
+          <a:noFill/>
+          <a:ln/>
+        </p:spPr>
+        <p:txBody>
+          <a:bodyPr wrap="square" rtlCol="0" anchor="ctr"/>
+          <a:lstStyle/>
+          <a:p>
+            <a:pPr indent="0" marL="0">
+              <a:buNone/>
+            </a:pPr>
+            <a:r>
+              <a:rPr lang="en-US" sz="1100" b="1" dirty="0">
+                <a:solidFill>
+                  <a:srgbClr val="3B82F6"/>
+                </a:solidFill>
+                <a:latin typeface="Consolas" pitchFamily="34" charset="0"/>
+                <a:ea typeface="Consolas" pitchFamily="34" charset="-122"/>
+                <a:cs typeface="Consolas" pitchFamily="34" charset="-120"/>
+              </a:rPr>
+              <a:t>01</a:t>
+            </a:r>
+            <a:endParaRPr lang="en-US" sz="1100" dirty="0"/>
+          </a:p>
+        </p:txBody>
+      </p:sp>
+      <p:sp>
+        <p:nvSpPr>
+          <p:cNvPr id="8" name="Text 6"/>
+          <p:cNvSpPr/>
+          <p:nvPr/>
+        </p:nvSpPr>
+        <p:spPr>
+          <a:xfrm>
+            <a:off x="1203808" y="2962656"/>
+            <a:ext cx="2075688" cy="566928"/>
+          </a:xfrm>
+          <a:prstGeom prst="rect">
+            <a:avLst/>
+          </a:prstGeom>
+          <a:noFill/>
+          <a:ln/>
+        </p:spPr>
+        <p:txBody>
+          <a:bodyPr wrap="square" rtlCol="0" anchor="ctr"/>
+          <a:lstStyle/>
+          <a:p>
+            <a:pPr indent="0" marL="0">
+              <a:buNone/>
+            </a:pPr>
+            <a:r>
+              <a:rPr lang="en-US" sz="1350" b="1" dirty="0">
+                <a:solidFill>
+                  <a:srgbClr val="FFFFFF"/>
+                </a:solidFill>
+                <a:latin typeface="Segoe UI" pitchFamily="34" charset="0"/>
+                <a:ea typeface="Segoe UI" pitchFamily="34" charset="-122"/>
+                <a:cs typeface="Segoe UI" pitchFamily="34" charset="-120"/>
+              </a:rPr>
+              <a:t>Learn in production</a:t>
+            </a:r>
+            <a:endParaRPr lang="en-US" sz="1350" dirty="0"/>
+          </a:p>
+        </p:txBody>
+      </p:sp>
+      <p:sp>
+        <p:nvSpPr>
+          <p:cNvPr id="9" name="Text 7"/>
+          <p:cNvSpPr/>
+          <p:nvPr/>
+        </p:nvSpPr>
+        <p:spPr>
+          <a:xfrm>
+            <a:off x="1203808" y="3566160"/>
+            <a:ext cx="2075688" cy="960120"/>
+          </a:xfrm>
+          <a:prstGeom prst="rect">
+            <a:avLst/>
+          </a:prstGeom>
+          <a:noFill/>
+          <a:ln/>
+        </p:spPr>
+        <p:txBody>
+          <a:bodyPr wrap="square" rtlCol="0" anchor="ctr"/>
+          <a:lstStyle/>
+          <a:p>
+            <a:pPr indent="0" marL="0">
+              <a:buNone/>
+            </a:pPr>
+            <a:r>
+              <a:rPr lang="en-US" sz="980" dirty="0">
+                <a:solidFill>
+                  <a:srgbClr val="CBD5E1"/>
+                </a:solidFill>
+                <a:latin typeface="Segoe UI" pitchFamily="34" charset="0"/>
+                <a:ea typeface="Segoe UI" pitchFamily="34" charset="-122"/>
+                <a:cs typeface="Segoe UI" pitchFamily="34" charset="-120"/>
+              </a:rPr>
+              <a:t>Analytics fundamentals sharpened on real client data, not toy datasets.</a:t>
+            </a:r>
+            <a:endParaRPr lang="en-US" sz="980" dirty="0"/>
+          </a:p>
+        </p:txBody>
+      </p:sp>
+      <p:sp>
+        <p:nvSpPr>
+          <p:cNvPr id="10" name="Shape 8"/>
+          <p:cNvSpPr/>
+          <p:nvPr/>
+        </p:nvSpPr>
+        <p:spPr>
+          <a:xfrm>
+            <a:off x="3421228" y="3419856"/>
+            <a:ext cx="210312" cy="274320"/>
+          </a:xfrm>
+          <a:prstGeom prst="rightArrow">
+            <a:avLst/>
+          </a:prstGeom>
+          <a:solidFill>
+            <a:srgbClr val="06B6D4"/>
+          </a:solidFill>
+          <a:ln/>
+        </p:spPr>
+      </p:sp>
+      <p:sp>
+        <p:nvSpPr>
+          <p:cNvPr id="11" name="Shape 9"/>
+          <p:cNvSpPr/>
+          <p:nvPr/>
+        </p:nvSpPr>
+        <p:spPr>
+          <a:xfrm>
+            <a:off x="3645256" y="2514600"/>
+            <a:ext cx="2331720" cy="2103120"/>
+          </a:xfrm>
+          <a:prstGeom prst="roundRect">
+            <a:avLst>
+              <a:gd name="adj" fmla="val 3043"/>
+            </a:avLst>
+          </a:prstGeom>
+          <a:solidFill>
+            <a:srgbClr val="111A2E"/>
+          </a:solidFill>
+          <a:ln w="19050">
+            <a:solidFill>
+              <a:srgbClr val="06B6D4"/>
+            </a:solidFill>
+            <a:prstDash val="solid"/>
+          </a:ln>
+        </p:spPr>
+      </p:sp>
+      <p:sp>
+        <p:nvSpPr>
+          <p:cNvPr id="12" name="Text 10"/>
+          <p:cNvSpPr/>
+          <p:nvPr/>
+        </p:nvSpPr>
+        <p:spPr>
+          <a:xfrm>
+            <a:off x="3773272" y="2633472"/>
+            <a:ext cx="2075688" cy="310896"/>
+          </a:xfrm>
+          <a:prstGeom prst="rect">
+            <a:avLst/>
+          </a:prstGeom>
+          <a:noFill/>
+          <a:ln/>
+        </p:spPr>
+        <p:txBody>
+          <a:bodyPr wrap="square" rtlCol="0" anchor="ctr"/>
+          <a:lstStyle/>
+          <a:p>
+            <a:pPr indent="0" marL="0">
+              <a:buNone/>
+            </a:pPr>
+            <a:r>
+              <a:rPr lang="en-US" sz="1100" b="1" dirty="0">
+                <a:solidFill>
+                  <a:srgbClr val="06B6D4"/>
+                </a:solidFill>
+                <a:latin typeface="Consolas" pitchFamily="34" charset="0"/>
+                <a:ea typeface="Consolas" pitchFamily="34" charset="-122"/>
+                <a:cs typeface="Consolas" pitchFamily="34" charset="-120"/>
+              </a:rPr>
+              <a:t>02</a:t>
+            </a:r>
+            <a:endParaRPr lang="en-US" sz="1100" dirty="0"/>
+          </a:p>
+        </p:txBody>
+      </p:sp>
+      <p:sp>
+        <p:nvSpPr>
+          <p:cNvPr id="13" name="Text 11"/>
+          <p:cNvSpPr/>
+          <p:nvPr/>
+        </p:nvSpPr>
+        <p:spPr>
+          <a:xfrm>
+            <a:off x="3773272" y="2962656"/>
+            <a:ext cx="2075688" cy="566928"/>
+          </a:xfrm>
+          <a:prstGeom prst="rect">
+            <a:avLst/>
+          </a:prstGeom>
+          <a:noFill/>
+          <a:ln/>
+        </p:spPr>
+        <p:txBody>
+          <a:bodyPr wrap="square" rtlCol="0" anchor="ctr"/>
+          <a:lstStyle/>
+          <a:p>
+            <a:pPr indent="0" marL="0">
+              <a:buNone/>
+            </a:pPr>
+            <a:r>
+              <a:rPr lang="en-US" sz="1350" b="1" dirty="0">
+                <a:solidFill>
+                  <a:srgbClr val="FFFFFF"/>
+                </a:solidFill>
+                <a:latin typeface="Segoe UI" pitchFamily="34" charset="0"/>
+                <a:ea typeface="Segoe UI" pitchFamily="34" charset="-122"/>
+                <a:cs typeface="Segoe UI" pitchFamily="34" charset="-120"/>
+              </a:rPr>
+              <a:t>Automate your own job</a:t>
+            </a:r>
+            <a:endParaRPr lang="en-US" sz="1350" dirty="0"/>
+          </a:p>
+        </p:txBody>
+      </p:sp>
+      <p:sp>
+        <p:nvSpPr>
+          <p:cNvPr id="14" name="Text 12"/>
+          <p:cNvSpPr/>
+          <p:nvPr/>
+        </p:nvSpPr>
+        <p:spPr>
+          <a:xfrm>
+            <a:off x="3773272" y="3566160"/>
+            <a:ext cx="2075688" cy="960120"/>
+          </a:xfrm>
+          <a:prstGeom prst="rect">
+            <a:avLst/>
+          </a:prstGeom>
+          <a:noFill/>
+          <a:ln/>
+        </p:spPr>
+        <p:txBody>
+          <a:bodyPr wrap="square" rtlCol="0" anchor="ctr"/>
+          <a:lstStyle/>
+          <a:p>
+            <a:pPr indent="0" marL="0">
+              <a:buNone/>
+            </a:pPr>
+            <a:r>
+              <a:rPr lang="en-US" sz="980" dirty="0">
+                <a:solidFill>
+                  <a:srgbClr val="CBD5E1"/>
+                </a:solidFill>
+                <a:latin typeface="Segoe UI" pitchFamily="34" charset="0"/>
+                <a:ea typeface="Segoe UI" pitchFamily="34" charset="-122"/>
+                <a:cs typeface="Segoe UI" pitchFamily="34" charset="-120"/>
+              </a:rPr>
+              <a:t>Pipelines and ETL at IKEA made the automation itch impossible to ignore.</a:t>
+            </a:r>
+            <a:endParaRPr lang="en-US" sz="980" dirty="0"/>
+          </a:p>
+        </p:txBody>
+      </p:sp>
+      <p:sp>
+        <p:nvSpPr>
+          <p:cNvPr id="15" name="Shape 13"/>
+          <p:cNvSpPr/>
+          <p:nvPr/>
+        </p:nvSpPr>
+        <p:spPr>
+          <a:xfrm>
+            <a:off x="5990692" y="3419856"/>
+            <a:ext cx="210312" cy="274320"/>
+          </a:xfrm>
+          <a:prstGeom prst="rightArrow">
+            <a:avLst/>
+          </a:prstGeom>
+          <a:solidFill>
+            <a:srgbClr val="06B6D4"/>
+          </a:solidFill>
+          <a:ln/>
+        </p:spPr>
+      </p:sp>
+      <p:sp>
+        <p:nvSpPr>
+          <p:cNvPr id="16" name="Shape 14"/>
+          <p:cNvSpPr/>
+          <p:nvPr/>
+        </p:nvSpPr>
+        <p:spPr>
+          <a:xfrm>
+            <a:off x="6214720" y="2514600"/>
+            <a:ext cx="2331720" cy="2103120"/>
+          </a:xfrm>
+          <a:prstGeom prst="roundRect">
+            <a:avLst>
+              <a:gd name="adj" fmla="val 3043"/>
+            </a:avLst>
+          </a:prstGeom>
+          <a:solidFill>
+            <a:srgbClr val="111A2E"/>
+          </a:solidFill>
+          <a:ln w="19050">
+            <a:solidFill>
+              <a:srgbClr val="3B82F6"/>
+            </a:solidFill>
+            <a:prstDash val="solid"/>
+          </a:ln>
+        </p:spPr>
+      </p:sp>
+      <p:sp>
+        <p:nvSpPr>
+          <p:cNvPr id="17" name="Text 15"/>
+          <p:cNvSpPr/>
+          <p:nvPr/>
+        </p:nvSpPr>
+        <p:spPr>
+          <a:xfrm>
+            <a:off x="6342736" y="2633472"/>
+            <a:ext cx="2075688" cy="310896"/>
+          </a:xfrm>
+          <a:prstGeom prst="rect">
+            <a:avLst/>
+          </a:prstGeom>
+          <a:noFill/>
+          <a:ln/>
+        </p:spPr>
+        <p:txBody>
+          <a:bodyPr wrap="square" rtlCol="0" anchor="ctr"/>
+          <a:lstStyle/>
+          <a:p>
+            <a:pPr indent="0" marL="0">
+              <a:buNone/>
+            </a:pPr>
+            <a:r>
+              <a:rPr lang="en-US" sz="1100" b="1" dirty="0">
+                <a:solidFill>
+                  <a:srgbClr val="3B82F6"/>
+                </a:solidFill>
+                <a:latin typeface="Consolas" pitchFamily="34" charset="0"/>
+                <a:ea typeface="Consolas" pitchFamily="34" charset="-122"/>
+                <a:cs typeface="Consolas" pitchFamily="34" charset="-120"/>
+              </a:rPr>
+              <a:t>03</a:t>
+            </a:r>
+            <a:endParaRPr lang="en-US" sz="1100" dirty="0"/>
+          </a:p>
+        </p:txBody>
+      </p:sp>
+      <p:sp>
+        <p:nvSpPr>
+          <p:cNvPr id="18" name="Text 16"/>
+          <p:cNvSpPr/>
+          <p:nvPr/>
+        </p:nvSpPr>
+        <p:spPr>
+          <a:xfrm>
+            <a:off x="6342736" y="2962656"/>
+            <a:ext cx="2075688" cy="566928"/>
+          </a:xfrm>
+          <a:prstGeom prst="rect">
+            <a:avLst/>
+          </a:prstGeom>
+          <a:noFill/>
+          <a:ln/>
+        </p:spPr>
+        <p:txBody>
+          <a:bodyPr wrap="square" rtlCol="0" anchor="ctr"/>
+          <a:lstStyle/>
+          <a:p>
+            <a:pPr indent="0" marL="0">
+              <a:buNone/>
+            </a:pPr>
+            <a:r>
+              <a:rPr lang="en-US" sz="1350" b="1" dirty="0">
+                <a:solidFill>
+                  <a:srgbClr val="FFFFFF"/>
+                </a:solidFill>
+                <a:latin typeface="Segoe UI" pitchFamily="34" charset="0"/>
+                <a:ea typeface="Segoe UI" pitchFamily="34" charset="-122"/>
+                <a:cs typeface="Segoe UI" pitchFamily="34" charset="-120"/>
+              </a:rPr>
+              <a:t>Ship public artifacts</a:t>
+            </a:r>
+            <a:endParaRPr lang="en-US" sz="1350" dirty="0"/>
+          </a:p>
+        </p:txBody>
+      </p:sp>
+      <p:sp>
+        <p:nvSpPr>
+          <p:cNvPr id="19" name="Text 17"/>
+          <p:cNvSpPr/>
+          <p:nvPr/>
+        </p:nvSpPr>
+        <p:spPr>
+          <a:xfrm>
+            <a:off x="6342736" y="3566160"/>
+            <a:ext cx="2075688" cy="960120"/>
+          </a:xfrm>
+          <a:prstGeom prst="rect">
+            <a:avLst/>
+          </a:prstGeom>
+          <a:noFill/>
+          <a:ln/>
+        </p:spPr>
+        <p:txBody>
+          <a:bodyPr wrap="square" rtlCol="0" anchor="ctr"/>
+          <a:lstStyle/>
+          <a:p>
+            <a:pPr indent="0" marL="0">
+              <a:buNone/>
+            </a:pPr>
+            <a:r>
+              <a:rPr lang="en-US" sz="980" dirty="0">
+                <a:solidFill>
+                  <a:srgbClr val="CBD5E1"/>
+                </a:solidFill>
+                <a:latin typeface="Segoe UI" pitchFamily="34" charset="0"/>
+                <a:ea typeface="Segoe UI" pitchFamily="34" charset="-122"/>
+                <a:cs typeface="Segoe UI" pitchFamily="34" charset="-120"/>
+              </a:rPr>
+              <a:t>Open-source frameworks turned private skill into inspectable proof.</a:t>
+            </a:r>
+            <a:endParaRPr lang="en-US" sz="980" dirty="0"/>
+          </a:p>
+        </p:txBody>
+      </p:sp>
+      <p:sp>
+        <p:nvSpPr>
+          <p:cNvPr id="20" name="Shape 18"/>
+          <p:cNvSpPr/>
+          <p:nvPr/>
+        </p:nvSpPr>
+        <p:spPr>
+          <a:xfrm>
+            <a:off x="8560156" y="3419856"/>
+            <a:ext cx="210312" cy="274320"/>
+          </a:xfrm>
+          <a:prstGeom prst="rightArrow">
+            <a:avLst/>
+          </a:prstGeom>
+          <a:solidFill>
+            <a:srgbClr val="06B6D4"/>
+          </a:solidFill>
+          <a:ln/>
+        </p:spPr>
+      </p:sp>
+      <p:sp>
+        <p:nvSpPr>
+          <p:cNvPr id="21" name="Shape 19"/>
+          <p:cNvSpPr/>
+          <p:nvPr/>
+        </p:nvSpPr>
+        <p:spPr>
+          <a:xfrm>
+            <a:off x="8784184" y="2514600"/>
+            <a:ext cx="2331720" cy="2103120"/>
+          </a:xfrm>
+          <a:prstGeom prst="roundRect">
+            <a:avLst>
+              <a:gd name="adj" fmla="val 3043"/>
+            </a:avLst>
+          </a:prstGeom>
+          <a:solidFill>
+            <a:srgbClr val="111A2E"/>
+          </a:solidFill>
+          <a:ln w="19050">
+            <a:solidFill>
+              <a:srgbClr val="06B6D4"/>
+            </a:solidFill>
+            <a:prstDash val="solid"/>
+          </a:ln>
+        </p:spPr>
+      </p:sp>
+      <p:sp>
+        <p:nvSpPr>
+          <p:cNvPr id="22" name="Text 20"/>
+          <p:cNvSpPr/>
+          <p:nvPr/>
+        </p:nvSpPr>
+        <p:spPr>
+          <a:xfrm>
+            <a:off x="8912200" y="2633472"/>
+            <a:ext cx="2075688" cy="310896"/>
+          </a:xfrm>
+          <a:prstGeom prst="rect">
+            <a:avLst/>
+          </a:prstGeom>
+          <a:noFill/>
+          <a:ln/>
+        </p:spPr>
+        <p:txBody>
+          <a:bodyPr wrap="square" rtlCol="0" anchor="ctr"/>
+          <a:lstStyle/>
+          <a:p>
+            <a:pPr indent="0" marL="0">
+              <a:buNone/>
+            </a:pPr>
+            <a:r>
+              <a:rPr lang="en-US" sz="1100" b="1" dirty="0">
+                <a:solidFill>
+                  <a:srgbClr val="06B6D4"/>
+                </a:solidFill>
+                <a:latin typeface="Consolas" pitchFamily="34" charset="0"/>
+                <a:ea typeface="Consolas" pitchFamily="34" charset="-122"/>
+                <a:cs typeface="Consolas" pitchFamily="34" charset="-120"/>
+              </a:rPr>
+              <a:t>04</a:t>
+            </a:r>
+            <a:endParaRPr lang="en-US" sz="1100" dirty="0"/>
+          </a:p>
+        </p:txBody>
+      </p:sp>
+      <p:sp>
+        <p:nvSpPr>
+          <p:cNvPr id="23" name="Text 21"/>
+          <p:cNvSpPr/>
+          <p:nvPr/>
+        </p:nvSpPr>
+        <p:spPr>
+          <a:xfrm>
+            <a:off x="8912200" y="2962656"/>
+            <a:ext cx="2075688" cy="566928"/>
+          </a:xfrm>
+          <a:prstGeom prst="rect">
+            <a:avLst/>
+          </a:prstGeom>
+          <a:noFill/>
+          <a:ln/>
+        </p:spPr>
+        <p:txBody>
+          <a:bodyPr wrap="square" rtlCol="0" anchor="ctr"/>
+          <a:lstStyle/>
+          <a:p>
+            <a:pPr indent="0" marL="0">
+              <a:buNone/>
+            </a:pPr>
+            <a:r>
+              <a:rPr lang="en-US" sz="1350" b="1" dirty="0">
+                <a:solidFill>
+                  <a:srgbClr val="FFFFFF"/>
+                </a:solidFill>
+                <a:latin typeface="Segoe UI" pitchFamily="34" charset="0"/>
+                <a:ea typeface="Segoe UI" pitchFamily="34" charset="-122"/>
+                <a:cs typeface="Segoe UI" pitchFamily="34" charset="-120"/>
+              </a:rPr>
+              <a:t>Compound into a company</a:t>
+            </a:r>
+            <a:endParaRPr lang="en-US" sz="1350" dirty="0"/>
+          </a:p>
+        </p:txBody>
+      </p:sp>
+      <p:sp>
+        <p:nvSpPr>
+          <p:cNvPr id="24" name="Text 22"/>
+          <p:cNvSpPr/>
+          <p:nvPr/>
+        </p:nvSpPr>
+        <p:spPr>
+          <a:xfrm>
+            <a:off x="8912200" y="3566160"/>
+            <a:ext cx="2075688" cy="960120"/>
+          </a:xfrm>
+          <a:prstGeom prst="rect">
+            <a:avLst/>
+          </a:prstGeom>
+          <a:noFill/>
+          <a:ln/>
+        </p:spPr>
+        <p:txBody>
+          <a:bodyPr wrap="square" rtlCol="0" anchor="ctr"/>
+          <a:lstStyle/>
+          <a:p>
+            <a:pPr indent="0" marL="0">
+              <a:buNone/>
+            </a:pPr>
+            <a:r>
+              <a:rPr lang="en-US" sz="980" dirty="0">
+                <a:solidFill>
+                  <a:srgbClr val="CBD5E1"/>
+                </a:solidFill>
+                <a:latin typeface="Segoe UI" pitchFamily="34" charset="0"/>
+                <a:ea typeface="Segoe UI" pitchFamily="34" charset="-122"/>
+                <a:cs typeface="Segoe UI" pitchFamily="34" charset="-120"/>
+              </a:rPr>
+              <a:t>Zalin Labs: the automation of the automation, under quality gates.</a:t>
+            </a:r>
+            <a:endParaRPr lang="en-US" sz="980" dirty="0"/>
+          </a:p>
+        </p:txBody>
+      </p:sp>
+      <p:sp>
+        <p:nvSpPr>
+          <p:cNvPr id="25" name="Shape 23"/>
+          <p:cNvSpPr/>
+          <p:nvPr/>
+        </p:nvSpPr>
+        <p:spPr>
+          <a:xfrm>
+            <a:off x="822960" y="5961888"/>
+            <a:ext cx="10515600" cy="0"/>
+          </a:xfrm>
+          <a:prstGeom prst="line">
+            <a:avLst/>
+          </a:prstGeom>
+          <a:noFill/>
+          <a:ln w="12700">
+            <a:solidFill>
+              <a:srgbClr val="1E2D45"/>
+            </a:solidFill>
+            <a:prstDash val="solid"/>
+          </a:ln>
+        </p:spPr>
+      </p:sp>
+      <p:sp>
+        <p:nvSpPr>
+          <p:cNvPr id="26" name="Text 24"/>
+          <p:cNvSpPr/>
+          <p:nvPr/>
+        </p:nvSpPr>
+        <p:spPr>
+          <a:xfrm>
+            <a:off x="822960" y="6053328"/>
+            <a:ext cx="9692640" cy="457200"/>
+          </a:xfrm>
+          <a:prstGeom prst="rect">
+            <a:avLst/>
+          </a:prstGeom>
+          <a:noFill/>
+          <a:ln/>
+        </p:spPr>
+        <p:txBody>
+          <a:bodyPr wrap="square" rtlCol="0" anchor="ctr"/>
+          <a:lstStyle/>
+          <a:p>
+            <a:pPr indent="0" marL="0">
+              <a:buNone/>
+            </a:pPr>
+            <a:r>
+              <a:rPr lang="en-US" sz="1150" dirty="0">
+                <a:solidFill>
+                  <a:srgbClr val="64748B"/>
+                </a:solidFill>
+                <a:latin typeface="Segoe UI" pitchFamily="34" charset="0"/>
+                <a:ea typeface="Segoe UI" pitchFamily="34" charset="-122"/>
+                <a:cs typeface="Segoe UI" pitchFamily="34" charset="-120"/>
+              </a:rPr>
+              <a:t>Credibility was not a certificate - it was shipped work anyone could inspect.</a:t>
+            </a:r>
+            <a:endParaRPr lang="en-US" sz="1150" dirty="0"/>
+          </a:p>
+        </p:txBody>
+      </p:sp>
+      <p:sp>
+        <p:nvSpPr>
+          <p:cNvPr id="27" name="Text 25"/>
+          <p:cNvSpPr/>
+          <p:nvPr/>
+        </p:nvSpPr>
+        <p:spPr>
+          <a:xfrm>
+            <a:off x="10698480" y="6382512"/>
+            <a:ext cx="1188720" cy="365760"/>
+          </a:xfrm>
+          <a:prstGeom prst="rect">
+            <a:avLst/>
+          </a:prstGeom>
+          <a:noFill/>
+          <a:ln/>
+        </p:spPr>
+        <p:txBody>
+          <a:bodyPr wrap="square" rtlCol="0" anchor="ctr"/>
+          <a:lstStyle/>
+          <a:p>
+            <a:pPr algn="r" indent="0" marL="0">
+              <a:buNone/>
+            </a:pPr>
+            <a:r>
+              <a:rPr lang="en-US" sz="1000" dirty="0">
+                <a:solidFill>
+                  <a:srgbClr val="64748B"/>
+                </a:solidFill>
+                <a:latin typeface="Consolas" pitchFamily="34" charset="0"/>
+                <a:ea typeface="Consolas" pitchFamily="34" charset="-122"/>
+                <a:cs typeface="Consolas" pitchFamily="34" charset="-120"/>
+              </a:rPr>
+              <a:t>10 / 14</a:t>
+            </a:r>
+            <a:endParaRPr lang="en-US" sz="1000" dirty="0"/>
+          </a:p>
+        </p:txBody>
+      </p:sp>
+    </p:spTree>
+  </p:cSld>
+  <p:clrMapOvr>
+    <a:masterClrMapping/>
+  </p:clrMapOvr>
+</p:sld>
+</file>
+
+<file path=ppt/slides/slide11.xml><?xml version="1.0" encoding="utf-8"?>
+<p:sld xmlns:a="http://schemas.openxmlformats.org/drawingml/2006/main" xmlns:r="http://schemas.openxmlformats.org/officeDocument/2006/relationships" xmlns:p="http://schemas.openxmlformats.org/presentationml/2006/main">
+  <p:cSld name="Slide 11">
+    <p:bg>
+      <p:bgPr>
+        <a:solidFill>
+          <a:srgbClr val="0A0C12"/>
+        </a:solidFill>
+      </p:bgPr>
+    </p:bg>
+    <p:spTree>
+      <p:nvGrpSpPr>
+        <p:cNvPr id="1" name=""/>
+        <p:cNvGrpSpPr/>
+        <p:nvPr/>
+      </p:nvGrpSpPr>
+      <p:grpSpPr>
+        <a:xfrm>
+          <a:off x="0" y="0"/>
+          <a:ext cx="0" cy="0"/>
+          <a:chOff x="0" y="0"/>
+          <a:chExt cx="0" cy="0"/>
+        </a:xfrm>
+      </p:grpSpPr>
+      <p:sp>
+        <p:nvSpPr>
+          <p:cNvPr id="2" name="Shape 0"/>
+          <p:cNvSpPr/>
+          <p:nvPr/>
+        </p:nvSpPr>
+        <p:spPr>
+          <a:xfrm>
+            <a:off x="0" y="0"/>
+            <a:ext cx="7680960" cy="64008"/>
+          </a:xfrm>
+          <a:prstGeom prst="rect">
+            <a:avLst/>
+          </a:prstGeom>
+          <a:solidFill>
+            <a:srgbClr val="3B82F6"/>
+          </a:solidFill>
+          <a:ln/>
+        </p:spPr>
+      </p:sp>
+      <p:sp>
+        <p:nvSpPr>
+          <p:cNvPr id="3" name="Shape 1"/>
+          <p:cNvSpPr/>
+          <p:nvPr/>
+        </p:nvSpPr>
+        <p:spPr>
+          <a:xfrm>
+            <a:off x="7680960" y="0"/>
+            <a:ext cx="4510735" cy="64008"/>
+          </a:xfrm>
+          <a:prstGeom prst="rect">
+            <a:avLst/>
+          </a:prstGeom>
+          <a:solidFill>
+            <a:srgbClr val="06B6D4"/>
+          </a:solidFill>
+          <a:ln/>
+        </p:spPr>
+      </p:sp>
+      <p:sp>
+        <p:nvSpPr>
+          <p:cNvPr id="4" name="Text 2"/>
+          <p:cNvSpPr/>
+          <p:nvPr/>
+        </p:nvSpPr>
+        <p:spPr>
+          <a:xfrm>
+            <a:off x="822960" y="502920"/>
+            <a:ext cx="10515600" cy="365760"/>
+          </a:xfrm>
+          <a:prstGeom prst="rect">
+            <a:avLst/>
+          </a:prstGeom>
+          <a:noFill/>
+          <a:ln/>
+        </p:spPr>
+        <p:txBody>
+          <a:bodyPr wrap="square" rtlCol="0" anchor="ctr"/>
+          <a:lstStyle/>
+          <a:p>
+            <a:pPr indent="0" marL="0">
+              <a:buNone/>
+            </a:pPr>
+            <a:r>
+              <a:rPr lang="en-US" sz="1200" spc="300" kern="0" dirty="0">
+                <a:solidFill>
+                  <a:srgbClr val="06B6D4"/>
+                </a:solidFill>
+                <a:latin typeface="Consolas" pitchFamily="34" charset="0"/>
+                <a:ea typeface="Consolas" pitchFamily="34" charset="-122"/>
+                <a:cs typeface="Consolas" pitchFamily="34" charset="-120"/>
+              </a:rPr>
+              <a:t>MINDSET</a:t>
+            </a:r>
+            <a:endParaRPr lang="en-US" sz="1200" dirty="0"/>
+          </a:p>
+        </p:txBody>
+      </p:sp>
+      <p:sp>
+        <p:nvSpPr>
+          <p:cNvPr id="5" name="Text 3"/>
+          <p:cNvSpPr/>
+          <p:nvPr/>
+        </p:nvSpPr>
+        <p:spPr>
+          <a:xfrm>
+            <a:off x="822960" y="914400"/>
+            <a:ext cx="10561320" cy="868680"/>
+          </a:xfrm>
+          <a:prstGeom prst="rect">
+            <a:avLst/>
+          </a:prstGeom>
+          <a:noFill/>
+          <a:ln/>
+        </p:spPr>
+        <p:txBody>
+          <a:bodyPr wrap="square" rtlCol="0" anchor="ctr"/>
+          <a:lstStyle/>
+          <a:p>
+            <a:pPr indent="0" marL="0">
+              <a:buNone/>
+            </a:pPr>
+            <a:r>
+              <a:rPr lang="en-US" sz="2700" b="1" dirty="0">
+                <a:solidFill>
+                  <a:srgbClr val="FFFFFF"/>
+                </a:solidFill>
+                <a:latin typeface="Segoe UI" pitchFamily="34" charset="0"/>
+                <a:ea typeface="Segoe UI" pitchFamily="34" charset="-122"/>
+                <a:cs typeface="Segoe UI" pitchFamily="34" charset="-120"/>
+              </a:rPr>
+              <a:t>The enterprise taught me the system; building taught me the leverage</a:t>
+            </a:r>
+            <a:endParaRPr lang="en-US" sz="2700" dirty="0"/>
+          </a:p>
+        </p:txBody>
+      </p:sp>
+      <p:sp>
+        <p:nvSpPr>
+          <p:cNvPr id="6" name="Shape 4"/>
+          <p:cNvSpPr/>
+          <p:nvPr/>
+        </p:nvSpPr>
+        <p:spPr>
+          <a:xfrm>
+            <a:off x="822960" y="2011680"/>
+            <a:ext cx="5074920" cy="3611880"/>
+          </a:xfrm>
+          <a:prstGeom prst="roundRect">
+            <a:avLst>
+              <a:gd name="adj" fmla="val 2025"/>
+            </a:avLst>
+          </a:prstGeom>
+          <a:solidFill>
+            <a:srgbClr val="111A2E"/>
+          </a:solidFill>
+          <a:ln w="12700">
+            <a:solidFill>
+              <a:srgbClr val="1E2D45"/>
+            </a:solidFill>
+            <a:prstDash val="solid"/>
+          </a:ln>
+        </p:spPr>
+      </p:sp>
+      <p:sp>
+        <p:nvSpPr>
+          <p:cNvPr id="7" name="Text 5"/>
+          <p:cNvSpPr/>
+          <p:nvPr/>
+        </p:nvSpPr>
+        <p:spPr>
+          <a:xfrm>
+            <a:off x="1097280" y="2240280"/>
+            <a:ext cx="4526280" cy="502920"/>
+          </a:xfrm>
+          <a:prstGeom prst="rect">
+            <a:avLst/>
+          </a:prstGeom>
+          <a:noFill/>
+          <a:ln/>
+        </p:spPr>
+        <p:txBody>
+          <a:bodyPr wrap="square" rtlCol="0" anchor="ctr"/>
+          <a:lstStyle/>
+          <a:p>
+            <a:pPr indent="0" marL="0">
+              <a:buNone/>
+            </a:pPr>
+            <a:r>
+              <a:rPr lang="en-US" sz="1650" b="1" dirty="0">
+                <a:solidFill>
+                  <a:srgbClr val="06B6D4"/>
+                </a:solidFill>
+                <a:latin typeface="Segoe UI" pitchFamily="34" charset="0"/>
+                <a:ea typeface="Segoe UI" pitchFamily="34" charset="-122"/>
+                <a:cs typeface="Segoe UI" pitchFamily="34" charset="-120"/>
+              </a:rPr>
+              <a:t>What enterprise gave me</a:t>
+            </a:r>
+            <a:endParaRPr lang="en-US" sz="1650" dirty="0"/>
+          </a:p>
+        </p:txBody>
+      </p:sp>
+      <p:sp>
+        <p:nvSpPr>
+          <p:cNvPr id="8" name="Text 6"/>
+          <p:cNvSpPr/>
+          <p:nvPr/>
+        </p:nvSpPr>
+        <p:spPr>
+          <a:xfrm>
+            <a:off x="1097280" y="2834640"/>
+            <a:ext cx="4553712" cy="2651760"/>
+          </a:xfrm>
+          <a:prstGeom prst="rect">
+            <a:avLst/>
+          </a:prstGeom>
+          <a:noFill/>
+          <a:ln/>
+        </p:spPr>
+        <p:txBody>
+          <a:bodyPr wrap="square" rtlCol="0" anchor="t"/>
+          <a:lstStyle/>
+          <a:p>
+            <a:pPr marL="342900" indent="-342900">
+              <a:lnSpc>
+                <a:spcPct val="112000"/>
+              </a:lnSpc>
+              <a:spcAft>
+                <a:spcPts val="900"/>
+              </a:spcAft>
+              <a:buSzPct val="100000"/>
+              <a:buChar char="▸"/>
+            </a:pPr>
+            <a:r>
+              <a:rPr lang="en-US" sz="1280" dirty="0">
+                <a:solidFill>
+                  <a:srgbClr val="CBD5E1"/>
+                </a:solidFill>
+                <a:latin typeface="Segoe UI" pitchFamily="34" charset="0"/>
+                <a:ea typeface="Segoe UI" pitchFamily="34" charset="-122"/>
+                <a:cs typeface="Segoe UI" pitchFamily="34" charset="-120"/>
+              </a:rPr>
+              <a:t>Requirements discipline from compliance-grade AML analysis</a:t>
+            </a:r>
+            <a:endParaRPr lang="en-US" sz="1280" dirty="0"/>
+          </a:p>
+          <a:p>
+            <a:pPr marL="342900" indent="-342900">
+              <a:lnSpc>
+                <a:spcPct val="112000"/>
+              </a:lnSpc>
+              <a:spcAft>
+                <a:spcPts val="900"/>
+              </a:spcAft>
+              <a:buSzPct val="100000"/>
+              <a:buChar char="▸"/>
+            </a:pPr>
+            <a:r>
+              <a:rPr lang="en-US" sz="1280" dirty="0">
+                <a:solidFill>
+                  <a:srgbClr val="CBD5E1"/>
+                </a:solidFill>
+                <a:latin typeface="Segoe UI" pitchFamily="34" charset="0"/>
+                <a:ea typeface="Segoe UI" pitchFamily="34" charset="-122"/>
+                <a:cs typeface="Segoe UI" pitchFamily="34" charset="-120"/>
+              </a:rPr>
+              <a:t>Data quality paranoia from datalake reconciliation</a:t>
+            </a:r>
+            <a:endParaRPr lang="en-US" sz="1280" dirty="0"/>
+          </a:p>
+          <a:p>
+            <a:pPr marL="342900" indent="-342900">
+              <a:lnSpc>
+                <a:spcPct val="112000"/>
+              </a:lnSpc>
+              <a:spcAft>
+                <a:spcPts val="900"/>
+              </a:spcAft>
+              <a:buSzPct val="100000"/>
+              <a:buChar char="▸"/>
+            </a:pPr>
+            <a:r>
+              <a:rPr lang="en-US" sz="1280" dirty="0">
+                <a:solidFill>
+                  <a:srgbClr val="CBD5E1"/>
+                </a:solidFill>
+                <a:latin typeface="Segoe UI" pitchFamily="34" charset="0"/>
+                <a:ea typeface="Segoe UI" pitchFamily="34" charset="-122"/>
+                <a:cs typeface="Segoe UI" pitchFamily="34" charset="-120"/>
+              </a:rPr>
+              <a:t>Stakeholder trust earned row by row</a:t>
+            </a:r>
+            <a:endParaRPr lang="en-US" sz="1280" dirty="0"/>
+          </a:p>
+          <a:p>
+            <a:pPr marL="342900" indent="-342900">
+              <a:lnSpc>
+                <a:spcPct val="112000"/>
+              </a:lnSpc>
+              <a:spcAft>
+                <a:spcPts val="900"/>
+              </a:spcAft>
+              <a:buSzPct val="100000"/>
+              <a:buChar char="▸"/>
+            </a:pPr>
+            <a:r>
+              <a:rPr lang="en-US" sz="1280" dirty="0">
+                <a:solidFill>
+                  <a:srgbClr val="CBD5E1"/>
+                </a:solidFill>
+                <a:latin typeface="Segoe UI" pitchFamily="34" charset="0"/>
+                <a:ea typeface="Segoe UI" pitchFamily="34" charset="-122"/>
+                <a:cs typeface="Segoe UI" pitchFamily="34" charset="-120"/>
+              </a:rPr>
+              <a:t>Respect for process - and for its costs</a:t>
+            </a:r>
+            <a:endParaRPr lang="en-US" sz="1280" dirty="0"/>
+          </a:p>
+        </p:txBody>
+      </p:sp>
+      <p:sp>
+        <p:nvSpPr>
+          <p:cNvPr id="9" name="Shape 7"/>
+          <p:cNvSpPr/>
+          <p:nvPr/>
+        </p:nvSpPr>
+        <p:spPr>
+          <a:xfrm>
+            <a:off x="6291072" y="2011680"/>
+            <a:ext cx="5074920" cy="3611880"/>
+          </a:xfrm>
+          <a:prstGeom prst="roundRect">
+            <a:avLst>
+              <a:gd name="adj" fmla="val 2025"/>
+            </a:avLst>
+          </a:prstGeom>
+          <a:solidFill>
+            <a:srgbClr val="111A2E"/>
+          </a:solidFill>
+          <a:ln w="12700">
+            <a:solidFill>
+              <a:srgbClr val="1E2D45"/>
+            </a:solidFill>
+            <a:prstDash val="solid"/>
+          </a:ln>
+        </p:spPr>
+      </p:sp>
+      <p:sp>
+        <p:nvSpPr>
+          <p:cNvPr id="10" name="Text 8"/>
+          <p:cNvSpPr/>
+          <p:nvPr/>
+        </p:nvSpPr>
+        <p:spPr>
+          <a:xfrm>
+            <a:off x="6565392" y="2240280"/>
+            <a:ext cx="4526280" cy="502920"/>
+          </a:xfrm>
+          <a:prstGeom prst="rect">
+            <a:avLst/>
+          </a:prstGeom>
+          <a:noFill/>
+          <a:ln/>
+        </p:spPr>
+        <p:txBody>
+          <a:bodyPr wrap="square" rtlCol="0" anchor="ctr"/>
+          <a:lstStyle/>
+          <a:p>
+            <a:pPr indent="0" marL="0">
+              <a:buNone/>
+            </a:pPr>
+            <a:r>
+              <a:rPr lang="en-US" sz="1650" b="1" dirty="0">
+                <a:solidFill>
+                  <a:srgbClr val="93C5FD"/>
+                </a:solidFill>
+                <a:latin typeface="Segoe UI" pitchFamily="34" charset="0"/>
+                <a:ea typeface="Segoe UI" pitchFamily="34" charset="-122"/>
+                <a:cs typeface="Segoe UI" pitchFamily="34" charset="-120"/>
+              </a:rPr>
+              <a:t>What building added</a:t>
+            </a:r>
+            <a:endParaRPr lang="en-US" sz="1650" dirty="0"/>
+          </a:p>
+        </p:txBody>
+      </p:sp>
+      <p:sp>
+        <p:nvSpPr>
+          <p:cNvPr id="11" name="Text 9"/>
+          <p:cNvSpPr/>
+          <p:nvPr/>
+        </p:nvSpPr>
+        <p:spPr>
+          <a:xfrm>
+            <a:off x="6565392" y="2834640"/>
+            <a:ext cx="4553712" cy="2651760"/>
+          </a:xfrm>
+          <a:prstGeom prst="rect">
+            <a:avLst/>
+          </a:prstGeom>
+          <a:noFill/>
+          <a:ln/>
+        </p:spPr>
+        <p:txBody>
+          <a:bodyPr wrap="square" rtlCol="0" anchor="t"/>
+          <a:lstStyle/>
+          <a:p>
+            <a:pPr marL="342900" indent="-342900">
+              <a:lnSpc>
+                <a:spcPct val="112000"/>
+              </a:lnSpc>
+              <a:spcAft>
+                <a:spcPts val="900"/>
+              </a:spcAft>
+              <a:buSzPct val="100000"/>
+              <a:buChar char="▸"/>
+            </a:pPr>
+            <a:r>
+              <a:rPr lang="en-US" sz="1280" dirty="0">
+                <a:solidFill>
+                  <a:srgbClr val="CBD5E1"/>
+                </a:solidFill>
+                <a:latin typeface="Segoe UI" pitchFamily="34" charset="0"/>
+                <a:ea typeface="Segoe UI" pitchFamily="34" charset="-122"/>
+                <a:cs typeface="Segoe UI" pitchFamily="34" charset="-120"/>
+              </a:rPr>
+              <a:t>Shipping as the default, not the exception</a:t>
+            </a:r>
+            <a:endParaRPr lang="en-US" sz="1280" dirty="0"/>
+          </a:p>
+          <a:p>
+            <a:pPr marL="342900" indent="-342900">
+              <a:lnSpc>
+                <a:spcPct val="112000"/>
+              </a:lnSpc>
+              <a:spcAft>
+                <a:spcPts val="900"/>
+              </a:spcAft>
+              <a:buSzPct val="100000"/>
+              <a:buChar char="▸"/>
+            </a:pPr>
+            <a:r>
+              <a:rPr lang="en-US" sz="1280" dirty="0">
+                <a:solidFill>
+                  <a:srgbClr val="CBD5E1"/>
+                </a:solidFill>
+                <a:latin typeface="Segoe UI" pitchFamily="34" charset="0"/>
+                <a:ea typeface="Segoe UI" pitchFamily="34" charset="-122"/>
+                <a:cs typeface="Segoe UI" pitchFamily="34" charset="-120"/>
+              </a:rPr>
+              <a:t>Agents as programmable leverage</a:t>
+            </a:r>
+            <a:endParaRPr lang="en-US" sz="1280" dirty="0"/>
+          </a:p>
+          <a:p>
+            <a:pPr marL="342900" indent="-342900">
+              <a:lnSpc>
+                <a:spcPct val="112000"/>
+              </a:lnSpc>
+              <a:spcAft>
+                <a:spcPts val="900"/>
+              </a:spcAft>
+              <a:buSzPct val="100000"/>
+              <a:buChar char="▸"/>
+            </a:pPr>
+            <a:r>
+              <a:rPr lang="en-US" sz="1280" dirty="0">
+                <a:solidFill>
+                  <a:srgbClr val="CBD5E1"/>
+                </a:solidFill>
+                <a:latin typeface="Segoe UI" pitchFamily="34" charset="0"/>
+                <a:ea typeface="Segoe UI" pitchFamily="34" charset="-122"/>
+                <a:cs typeface="Segoe UI" pitchFamily="34" charset="-120"/>
+              </a:rPr>
+              <a:t>Evidence over status reports</a:t>
+            </a:r>
+            <a:endParaRPr lang="en-US" sz="1280" dirty="0"/>
+          </a:p>
+          <a:p>
+            <a:pPr marL="342900" indent="-342900">
+              <a:lnSpc>
+                <a:spcPct val="112000"/>
+              </a:lnSpc>
+              <a:spcAft>
+                <a:spcPts val="900"/>
+              </a:spcAft>
+              <a:buSzPct val="100000"/>
+              <a:buChar char="▸"/>
+            </a:pPr>
+            <a:r>
+              <a:rPr lang="en-US" sz="1280" dirty="0">
+                <a:solidFill>
+                  <a:srgbClr val="CBD5E1"/>
+                </a:solidFill>
+                <a:latin typeface="Segoe UI" pitchFamily="34" charset="0"/>
+                <a:ea typeface="Segoe UI" pitchFamily="34" charset="-122"/>
+                <a:cs typeface="Segoe UI" pitchFamily="34" charset="-120"/>
+              </a:rPr>
+              <a:t>Decisiveness: change is a Tuesday</a:t>
+            </a:r>
+            <a:endParaRPr lang="en-US" sz="1280" dirty="0"/>
+          </a:p>
+        </p:txBody>
+      </p:sp>
+      <p:sp>
+        <p:nvSpPr>
+          <p:cNvPr id="12" name="Shape 10"/>
+          <p:cNvSpPr/>
+          <p:nvPr/>
+        </p:nvSpPr>
+        <p:spPr>
+          <a:xfrm>
+            <a:off x="822960" y="5961888"/>
+            <a:ext cx="10515600" cy="0"/>
+          </a:xfrm>
+          <a:prstGeom prst="line">
+            <a:avLst/>
+          </a:prstGeom>
+          <a:noFill/>
+          <a:ln w="12700">
+            <a:solidFill>
+              <a:srgbClr val="1E2D45"/>
+            </a:solidFill>
+            <a:prstDash val="solid"/>
+          </a:ln>
+        </p:spPr>
+      </p:sp>
+      <p:sp>
+        <p:nvSpPr>
+          <p:cNvPr id="13" name="Text 11"/>
+          <p:cNvSpPr/>
+          <p:nvPr/>
+        </p:nvSpPr>
+        <p:spPr>
+          <a:xfrm>
+            <a:off x="822960" y="6053328"/>
+            <a:ext cx="9692640" cy="457200"/>
+          </a:xfrm>
+          <a:prstGeom prst="rect">
+            <a:avLst/>
+          </a:prstGeom>
+          <a:noFill/>
+          <a:ln/>
+        </p:spPr>
+        <p:txBody>
+          <a:bodyPr wrap="square" rtlCol="0" anchor="ctr"/>
+          <a:lstStyle/>
+          <a:p>
+            <a:pPr indent="0" marL="0">
+              <a:buNone/>
+            </a:pPr>
+            <a:r>
+              <a:rPr lang="en-US" sz="1150" dirty="0">
+                <a:solidFill>
+                  <a:srgbClr val="64748B"/>
+                </a:solidFill>
+                <a:latin typeface="Segoe UI" pitchFamily="34" charset="0"/>
+                <a:ea typeface="Segoe UI" pitchFamily="34" charset="-122"/>
+                <a:cs typeface="Segoe UI" pitchFamily="34" charset="-120"/>
+              </a:rPr>
+              <a:t>Rare profiles are combinations, not specialties: system thinking plus shipping speed.</a:t>
+            </a:r>
+            <a:endParaRPr lang="en-US" sz="1150" dirty="0"/>
+          </a:p>
+        </p:txBody>
+      </p:sp>
+      <p:sp>
+        <p:nvSpPr>
+          <p:cNvPr id="14" name="Text 12"/>
+          <p:cNvSpPr/>
+          <p:nvPr/>
+        </p:nvSpPr>
+        <p:spPr>
+          <a:xfrm>
+            <a:off x="10698480" y="6382512"/>
+            <a:ext cx="1188720" cy="365760"/>
+          </a:xfrm>
+          <a:prstGeom prst="rect">
+            <a:avLst/>
+          </a:prstGeom>
+          <a:noFill/>
+          <a:ln/>
+        </p:spPr>
+        <p:txBody>
+          <a:bodyPr wrap="square" rtlCol="0" anchor="ctr"/>
+          <a:lstStyle/>
+          <a:p>
+            <a:pPr algn="r" indent="0" marL="0">
+              <a:buNone/>
+            </a:pPr>
+            <a:r>
+              <a:rPr lang="en-US" sz="1000" dirty="0">
+                <a:solidFill>
+                  <a:srgbClr val="64748B"/>
+                </a:solidFill>
+                <a:latin typeface="Consolas" pitchFamily="34" charset="0"/>
+                <a:ea typeface="Consolas" pitchFamily="34" charset="-122"/>
+                <a:cs typeface="Consolas" pitchFamily="34" charset="-120"/>
+              </a:rPr>
+              <a:t>11 / 14</a:t>
+            </a:r>
+            <a:endParaRPr lang="en-US" sz="1000" dirty="0"/>
+          </a:p>
+        </p:txBody>
+      </p:sp>
+    </p:spTree>
+  </p:cSld>
+  <p:clrMapOvr>
+    <a:masterClrMapping/>
+  </p:clrMapOvr>
+</p:sld>
+</file>
+
+<file path=ppt/slides/slide12.xml><?xml version="1.0" encoding="utf-8"?>
+<p:sld xmlns:a="http://schemas.openxmlformats.org/drawingml/2006/main" xmlns:r="http://schemas.openxmlformats.org/officeDocument/2006/relationships" xmlns:p="http://schemas.openxmlformats.org/presentationml/2006/main">
+  <p:cSld name="Slide 12">
+    <p:bg>
+      <p:bgPr>
+        <a:solidFill>
+          <a:srgbClr val="0A0C12"/>
+        </a:solidFill>
+      </p:bgPr>
+    </p:bg>
+    <p:spTree>
+      <p:nvGrpSpPr>
+        <p:cNvPr id="1" name=""/>
+        <p:cNvGrpSpPr/>
+        <p:nvPr/>
+      </p:nvGrpSpPr>
+      <p:grpSpPr>
+        <a:xfrm>
+          <a:off x="0" y="0"/>
+          <a:ext cx="0" cy="0"/>
+          <a:chOff x="0" y="0"/>
+          <a:chExt cx="0" cy="0"/>
+        </a:xfrm>
+      </p:grpSpPr>
+      <p:sp>
+        <p:nvSpPr>
+          <p:cNvPr id="2" name="Shape 0"/>
+          <p:cNvSpPr/>
+          <p:nvPr/>
+        </p:nvSpPr>
+        <p:spPr>
+          <a:xfrm>
+            <a:off x="0" y="0"/>
+            <a:ext cx="7680960" cy="64008"/>
+          </a:xfrm>
+          <a:prstGeom prst="rect">
+            <a:avLst/>
+          </a:prstGeom>
+          <a:solidFill>
+            <a:srgbClr val="3B82F6"/>
+          </a:solidFill>
+          <a:ln/>
+        </p:spPr>
+      </p:sp>
+      <p:sp>
+        <p:nvSpPr>
+          <p:cNvPr id="3" name="Shape 1"/>
+          <p:cNvSpPr/>
+          <p:nvPr/>
+        </p:nvSpPr>
+        <p:spPr>
+          <a:xfrm>
+            <a:off x="7680960" y="0"/>
+            <a:ext cx="4510735" cy="64008"/>
+          </a:xfrm>
+          <a:prstGeom prst="rect">
+            <a:avLst/>
+          </a:prstGeom>
+          <a:solidFill>
+            <a:srgbClr val="06B6D4"/>
+          </a:solidFill>
+          <a:ln/>
+        </p:spPr>
+      </p:sp>
+      <p:sp>
+        <p:nvSpPr>
+          <p:cNvPr id="4" name="Text 2"/>
+          <p:cNvSpPr/>
+          <p:nvPr/>
+        </p:nvSpPr>
+        <p:spPr>
+          <a:xfrm>
+            <a:off x="822960" y="502920"/>
+            <a:ext cx="10515600" cy="365760"/>
+          </a:xfrm>
+          <a:prstGeom prst="rect">
+            <a:avLst/>
+          </a:prstGeom>
+          <a:noFill/>
+          <a:ln/>
+        </p:spPr>
+        <p:txBody>
+          <a:bodyPr wrap="square" rtlCol="0" anchor="ctr"/>
+          <a:lstStyle/>
+          <a:p>
+            <a:pPr indent="0" marL="0">
+              <a:buNone/>
+            </a:pPr>
+            <a:r>
+              <a:rPr lang="en-US" sz="1200" spc="300" kern="0" dirty="0">
+                <a:solidFill>
+                  <a:srgbClr val="06B6D4"/>
+                </a:solidFill>
+                <a:latin typeface="Consolas" pitchFamily="34" charset="0"/>
+                <a:ea typeface="Consolas" pitchFamily="34" charset="-122"/>
+                <a:cs typeface="Consolas" pitchFamily="34" charset="-120"/>
+              </a:rPr>
+              <a:t>RECRUITER CHECK</a:t>
+            </a:r>
+            <a:endParaRPr lang="en-US" sz="1200" dirty="0"/>
+          </a:p>
+        </p:txBody>
+      </p:sp>
+      <p:sp>
+        <p:nvSpPr>
+          <p:cNvPr id="5" name="Text 3"/>
+          <p:cNvSpPr/>
+          <p:nvPr/>
+        </p:nvSpPr>
+        <p:spPr>
+          <a:xfrm>
+            <a:off x="822960" y="914400"/>
+            <a:ext cx="10561320" cy="868680"/>
+          </a:xfrm>
+          <a:prstGeom prst="rect">
+            <a:avLst/>
+          </a:prstGeom>
+          <a:noFill/>
+          <a:ln/>
+        </p:spPr>
+        <p:txBody>
+          <a:bodyPr wrap="square" rtlCol="0" anchor="ctr"/>
+          <a:lstStyle/>
+          <a:p>
+            <a:pPr indent="0" marL="0">
+              <a:buNone/>
+            </a:pPr>
+            <a:r>
+              <a:rPr lang="en-US" sz="2700" b="1" dirty="0">
+                <a:solidFill>
+                  <a:srgbClr val="FFFFFF"/>
+                </a:solidFill>
+                <a:latin typeface="Segoe UI" pitchFamily="34" charset="0"/>
+                <a:ea typeface="Segoe UI" pitchFamily="34" charset="-122"/>
+                <a:cs typeface="Segoe UI" pitchFamily="34" charset="-120"/>
+              </a:rPr>
+              <a:t>Numbers you can verify in two clicks</a:t>
+            </a:r>
+            <a:endParaRPr lang="en-US" sz="2700" dirty="0"/>
+          </a:p>
+        </p:txBody>
+      </p:sp>
+      <p:graphicFrame>
+        <p:nvGraphicFramePr>
+          <p:cNvPr id="6" name="Chart 0" descr=""/>
+          <p:cNvGraphicFramePr/>
+          <p:nvPr/>
+        </p:nvGraphicFramePr>
+        <p:xfrm>
+          <a:off x="822960" y="1874520"/>
+          <a:ext cx="10515600" cy="3337560"/>
+        </p:xfrm>
+        <a:graphic xmlns:a="http://schemas.openxmlformats.org/drawingml/2006/main">
+          <a:graphicData uri="http://schemas.openxmlformats.org/drawingml/2006/chart">
+            <c:chart xmlns:c="http://schemas.openxmlformats.org/drawingml/2006/chart" r:id="rId1"/>
+          </a:graphicData>
+        </a:graphic>
+      </p:graphicFrame>
+      <p:sp>
+        <p:nvSpPr>
+          <p:cNvPr id="7" name="Shape 4"/>
+          <p:cNvSpPr/>
+          <p:nvPr/>
+        </p:nvSpPr>
+        <p:spPr>
+          <a:xfrm>
+            <a:off x="822960" y="5413248"/>
+            <a:ext cx="10515600" cy="0"/>
+          </a:xfrm>
+          <a:prstGeom prst="line">
+            <a:avLst/>
+          </a:prstGeom>
+          <a:noFill/>
+          <a:ln w="12700">
+            <a:solidFill>
+              <a:srgbClr val="1E2D45"/>
+            </a:solidFill>
+            <a:prstDash val="solid"/>
+          </a:ln>
+        </p:spPr>
+      </p:sp>
+      <p:sp>
+        <p:nvSpPr>
+          <p:cNvPr id="8" name="Text 5"/>
+          <p:cNvSpPr/>
+          <p:nvPr/>
+        </p:nvSpPr>
+        <p:spPr>
+          <a:xfrm>
+            <a:off x="822960" y="5504688"/>
+            <a:ext cx="10424160" cy="411480"/>
+          </a:xfrm>
+          <a:prstGeom prst="rect">
+            <a:avLst/>
+          </a:prstGeom>
+          <a:noFill/>
+          <a:ln/>
+        </p:spPr>
+        <p:txBody>
+          <a:bodyPr wrap="square" rtlCol="0" anchor="ctr"/>
+          <a:lstStyle/>
+          <a:p>
+            <a:pPr indent="0" marL="0">
+              <a:buNone/>
+            </a:pPr>
+            <a:r>
+              <a:rPr lang="en-US" sz="1300" i="1" dirty="0">
+                <a:solidFill>
+                  <a:srgbClr val="06B6D4"/>
+                </a:solidFill>
+                <a:latin typeface="Segoe UI" pitchFamily="34" charset="0"/>
+                <a:ea typeface="Segoe UI" pitchFamily="34" charset="-122"/>
+                <a:cs typeface="Segoe UI" pitchFamily="34" charset="-120"/>
+              </a:rPr>
+              <a:t>→  Every bar is public today - the live portfolio links to the apps, the platform, and the validation set.</a:t>
+            </a:r>
+            <a:endParaRPr lang="en-US" sz="1300" dirty="0"/>
+          </a:p>
+        </p:txBody>
+      </p:sp>
+      <p:sp>
+        <p:nvSpPr>
+          <p:cNvPr id="9" name="Shape 6"/>
+          <p:cNvSpPr/>
+          <p:nvPr/>
+        </p:nvSpPr>
+        <p:spPr>
+          <a:xfrm>
+            <a:off x="822960" y="5961888"/>
+            <a:ext cx="10515600" cy="0"/>
+          </a:xfrm>
+          <a:prstGeom prst="line">
+            <a:avLst/>
+          </a:prstGeom>
+          <a:noFill/>
+          <a:ln w="12700">
+            <a:solidFill>
+              <a:srgbClr val="1E2D45"/>
+            </a:solidFill>
+            <a:prstDash val="solid"/>
+          </a:ln>
+        </p:spPr>
+      </p:sp>
+      <p:sp>
+        <p:nvSpPr>
+          <p:cNvPr id="10" name="Text 7"/>
+          <p:cNvSpPr/>
+          <p:nvPr/>
+        </p:nvSpPr>
+        <p:spPr>
+          <a:xfrm>
+            <a:off x="822960" y="6053328"/>
+            <a:ext cx="9692640" cy="457200"/>
+          </a:xfrm>
+          <a:prstGeom prst="rect">
+            <a:avLst/>
+          </a:prstGeom>
+          <a:noFill/>
+          <a:ln/>
+        </p:spPr>
+        <p:txBody>
+          <a:bodyPr wrap="square" rtlCol="0" anchor="ctr"/>
+          <a:lstStyle/>
+          <a:p>
+            <a:pPr indent="0" marL="0">
+              <a:buNone/>
+            </a:pPr>
+            <a:r>
+              <a:rPr lang="en-US" sz="1150" dirty="0">
+                <a:solidFill>
+                  <a:srgbClr val="64748B"/>
+                </a:solidFill>
+                <a:latin typeface="Segoe UI" pitchFamily="34" charset="0"/>
+                <a:ea typeface="Segoe UI" pitchFamily="34" charset="-122"/>
+                <a:cs typeface="Segoe UI" pitchFamily="34" charset="-120"/>
+              </a:rPr>
+              <a:t>Sources: 30+ apps, 9+ agents, 51/52 production checks passing, and the 30-query intent-router validation set.</a:t>
+            </a:r>
+            <a:endParaRPr lang="en-US" sz="1150" dirty="0"/>
+          </a:p>
+        </p:txBody>
+      </p:sp>
+      <p:sp>
+        <p:nvSpPr>
+          <p:cNvPr id="11" name="Text 8"/>
+          <p:cNvSpPr/>
+          <p:nvPr/>
+        </p:nvSpPr>
+        <p:spPr>
+          <a:xfrm>
+            <a:off x="10698480" y="6382512"/>
+            <a:ext cx="1188720" cy="365760"/>
+          </a:xfrm>
+          <a:prstGeom prst="rect">
+            <a:avLst/>
+          </a:prstGeom>
+          <a:noFill/>
+          <a:ln/>
+        </p:spPr>
+        <p:txBody>
+          <a:bodyPr wrap="square" rtlCol="0" anchor="ctr"/>
+          <a:lstStyle/>
+          <a:p>
+            <a:pPr algn="r" indent="0" marL="0">
+              <a:buNone/>
+            </a:pPr>
+            <a:r>
+              <a:rPr lang="en-US" sz="1000" dirty="0">
+                <a:solidFill>
+                  <a:srgbClr val="64748B"/>
+                </a:solidFill>
+                <a:latin typeface="Consolas" pitchFamily="34" charset="0"/>
+                <a:ea typeface="Consolas" pitchFamily="34" charset="-122"/>
+                <a:cs typeface="Consolas" pitchFamily="34" charset="-120"/>
+              </a:rPr>
+              <a:t>12 / 14</a:t>
+            </a:r>
+            <a:endParaRPr lang="en-US" sz="1000" dirty="0"/>
+          </a:p>
+        </p:txBody>
+      </p:sp>
+    </p:spTree>
+  </p:cSld>
+  <p:clrMapOvr>
+    <a:masterClrMapping/>
+  </p:clrMapOvr>
+</p:sld>
+</file>
+
+<file path=ppt/slides/slide13.xml><?xml version="1.0" encoding="utf-8"?>
+<p:sld xmlns:a="http://schemas.openxmlformats.org/drawingml/2006/main" xmlns:r="http://schemas.openxmlformats.org/officeDocument/2006/relationships" xmlns:p="http://schemas.openxmlformats.org/presentationml/2006/main">
+  <p:cSld name="Slide 13">
+    <p:bg>
+      <p:bgPr>
+        <a:solidFill>
+          <a:srgbClr val="0A0C12"/>
+        </a:solidFill>
+      </p:bgPr>
+    </p:bg>
+    <p:spTree>
+      <p:nvGrpSpPr>
+        <p:cNvPr id="1" name=""/>
+        <p:cNvGrpSpPr/>
+        <p:nvPr/>
+      </p:nvGrpSpPr>
+      <p:grpSpPr>
+        <a:xfrm>
+          <a:off x="0" y="0"/>
+          <a:ext cx="0" cy="0"/>
+          <a:chOff x="0" y="0"/>
+          <a:chExt cx="0" cy="0"/>
+        </a:xfrm>
+      </p:grpSpPr>
+      <p:sp>
+        <p:nvSpPr>
+          <p:cNvPr id="2" name="Shape 0"/>
+          <p:cNvSpPr/>
+          <p:nvPr/>
+        </p:nvSpPr>
+        <p:spPr>
+          <a:xfrm>
+            <a:off x="0" y="0"/>
+            <a:ext cx="7680960" cy="64008"/>
+          </a:xfrm>
+          <a:prstGeom prst="rect">
+            <a:avLst/>
+          </a:prstGeom>
+          <a:solidFill>
+            <a:srgbClr val="3B82F6"/>
+          </a:solidFill>
+          <a:ln/>
+        </p:spPr>
+      </p:sp>
+      <p:sp>
+        <p:nvSpPr>
+          <p:cNvPr id="3" name="Shape 1"/>
+          <p:cNvSpPr/>
+          <p:nvPr/>
+        </p:nvSpPr>
+        <p:spPr>
+          <a:xfrm>
+            <a:off x="7680960" y="0"/>
+            <a:ext cx="4510735" cy="64008"/>
+          </a:xfrm>
+          <a:prstGeom prst="rect">
+            <a:avLst/>
+          </a:prstGeom>
+          <a:solidFill>
+            <a:srgbClr val="06B6D4"/>
+          </a:solidFill>
+          <a:ln/>
+        </p:spPr>
+      </p:sp>
+      <p:sp>
+        <p:nvSpPr>
+          <p:cNvPr id="4" name="Text 2"/>
+          <p:cNvSpPr/>
+          <p:nvPr/>
+        </p:nvSpPr>
+        <p:spPr>
+          <a:xfrm>
+            <a:off x="822960" y="502920"/>
+            <a:ext cx="10515600" cy="365760"/>
+          </a:xfrm>
+          <a:prstGeom prst="rect">
+            <a:avLst/>
+          </a:prstGeom>
+          <a:noFill/>
+          <a:ln/>
+        </p:spPr>
+        <p:txBody>
+          <a:bodyPr wrap="square" rtlCol="0" anchor="ctr"/>
+          <a:lstStyle/>
+          <a:p>
+            <a:pPr indent="0" marL="0">
+              <a:buNone/>
+            </a:pPr>
+            <a:r>
+              <a:rPr lang="en-US" sz="1200" spc="300" kern="0" dirty="0">
+                <a:solidFill>
+                  <a:srgbClr val="06B6D4"/>
+                </a:solidFill>
+                <a:latin typeface="Consolas" pitchFamily="34" charset="0"/>
+                <a:ea typeface="Consolas" pitchFamily="34" charset="-122"/>
+                <a:cs typeface="Consolas" pitchFamily="34" charset="-120"/>
+              </a:rPr>
+              <a:t>FOR RECRUITERS</a:t>
+            </a:r>
+            <a:endParaRPr lang="en-US" sz="1200" dirty="0"/>
+          </a:p>
+        </p:txBody>
+      </p:sp>
+      <p:sp>
+        <p:nvSpPr>
+          <p:cNvPr id="5" name="Text 3"/>
+          <p:cNvSpPr/>
+          <p:nvPr/>
+        </p:nvSpPr>
+        <p:spPr>
+          <a:xfrm>
+            <a:off x="822960" y="914400"/>
+            <a:ext cx="10561320" cy="868680"/>
+          </a:xfrm>
+          <a:prstGeom prst="rect">
+            <a:avLst/>
+          </a:prstGeom>
+          <a:noFill/>
+          <a:ln/>
+        </p:spPr>
+        <p:txBody>
+          <a:bodyPr wrap="square" rtlCol="0" anchor="ctr"/>
+          <a:lstStyle/>
+          <a:p>
+            <a:pPr indent="0" marL="0">
+              <a:buNone/>
+            </a:pPr>
+            <a:r>
+              <a:rPr lang="en-US" sz="2700" b="1" dirty="0">
+                <a:solidFill>
+                  <a:srgbClr val="FFFFFF"/>
+                </a:solidFill>
+                <a:latin typeface="Segoe UI" pitchFamily="34" charset="0"/>
+                <a:ea typeface="Segoe UI" pitchFamily="34" charset="-122"/>
+                <a:cs typeface="Segoe UI" pitchFamily="34" charset="-120"/>
+              </a:rPr>
+              <a:t>Why this combination is rare</a:t>
+            </a:r>
+            <a:endParaRPr lang="en-US" sz="2700" dirty="0"/>
+          </a:p>
+        </p:txBody>
+      </p:sp>
+      <p:sp>
+        <p:nvSpPr>
+          <p:cNvPr id="6" name="Text 4"/>
+          <p:cNvSpPr/>
+          <p:nvPr/>
+        </p:nvSpPr>
+        <p:spPr>
+          <a:xfrm>
+            <a:off x="868680" y="2011680"/>
+            <a:ext cx="10424160" cy="3566160"/>
+          </a:xfrm>
+          <a:prstGeom prst="rect">
+            <a:avLst/>
+          </a:prstGeom>
+          <a:noFill/>
+          <a:ln/>
+        </p:spPr>
+        <p:txBody>
+          <a:bodyPr wrap="square" rtlCol="0" anchor="t"/>
+          <a:lstStyle/>
+          <a:p>
+            <a:pPr marL="342900" indent="-342900">
+              <a:lnSpc>
+                <a:spcPct val="112000"/>
+              </a:lnSpc>
+              <a:spcAft>
+                <a:spcPts val="900"/>
+              </a:spcAft>
+              <a:buSzPct val="100000"/>
+              <a:buChar char="▸"/>
+            </a:pPr>
+            <a:r>
+              <a:rPr lang="en-US" sz="1600" dirty="0">
+                <a:solidFill>
+                  <a:srgbClr val="CBD5E1"/>
+                </a:solidFill>
+                <a:latin typeface="Segoe UI" pitchFamily="34" charset="0"/>
+                <a:ea typeface="Segoe UI" pitchFamily="34" charset="-122"/>
+                <a:cs typeface="Segoe UI" pitchFamily="34" charset="-120"/>
+              </a:rPr>
+              <a:t>BI foundations: requirements, data quality, and stakeholder trust from multinational retail and banking.</a:t>
+            </a:r>
+            <a:endParaRPr lang="en-US" sz="1600" dirty="0"/>
+          </a:p>
+          <a:p>
+            <a:pPr marL="342900" indent="-342900">
+              <a:lnSpc>
+                <a:spcPct val="112000"/>
+              </a:lnSpc>
+              <a:spcAft>
+                <a:spcPts val="900"/>
+              </a:spcAft>
+              <a:buSzPct val="100000"/>
+              <a:buChar char="▸"/>
+            </a:pPr>
+            <a:r>
+              <a:rPr lang="en-US" sz="1600" dirty="0">
+                <a:solidFill>
+                  <a:srgbClr val="CBD5E1"/>
+                </a:solidFill>
+                <a:latin typeface="Segoe UI" pitchFamily="34" charset="0"/>
+                <a:ea typeface="Segoe UI" pitchFamily="34" charset="-122"/>
+                <a:cs typeface="Segoe UI" pitchFamily="34" charset="-120"/>
+              </a:rPr>
+              <a:t>AI engineering: agents, intent routing, and local-first systems running in production, not in demos.</a:t>
+            </a:r>
+            <a:endParaRPr lang="en-US" sz="1600" dirty="0"/>
+          </a:p>
+          <a:p>
+            <a:pPr marL="342900" indent="-342900">
+              <a:lnSpc>
+                <a:spcPct val="112000"/>
+              </a:lnSpc>
+              <a:spcAft>
+                <a:spcPts val="900"/>
+              </a:spcAft>
+              <a:buSzPct val="100000"/>
+              <a:buChar char="▸"/>
+            </a:pPr>
+            <a:r>
+              <a:rPr lang="en-US" sz="1600" dirty="0">
+                <a:solidFill>
+                  <a:srgbClr val="CBD5E1"/>
+                </a:solidFill>
+                <a:latin typeface="Segoe UI" pitchFamily="34" charset="0"/>
+                <a:ea typeface="Segoe UI" pitchFamily="34" charset="-122"/>
+                <a:cs typeface="Segoe UI" pitchFamily="34" charset="-120"/>
+              </a:rPr>
+              <a:t>Proof of shipping: 30+ production apps, 8.7K+ lines of open source, and a live portfolio anyone can inspect.</a:t>
+            </a:r>
+            <a:endParaRPr lang="en-US" sz="1600" dirty="0"/>
+          </a:p>
+          <a:p>
+            <a:pPr marL="342900" indent="-342900">
+              <a:lnSpc>
+                <a:spcPct val="112000"/>
+              </a:lnSpc>
+              <a:spcAft>
+                <a:spcPts val="900"/>
+              </a:spcAft>
+              <a:buSzPct val="100000"/>
+              <a:buChar char="▸"/>
+            </a:pPr>
+            <a:r>
+              <a:rPr lang="en-US" sz="1600" dirty="0">
+                <a:solidFill>
+                  <a:srgbClr val="CBD5E1"/>
+                </a:solidFill>
+                <a:latin typeface="Segoe UI" pitchFamily="34" charset="0"/>
+                <a:ea typeface="Segoe UI" pitchFamily="34" charset="-122"/>
+                <a:cs typeface="Segoe UI" pitchFamily="34" charset="-120"/>
+              </a:rPr>
+              <a:t>Range: e-commerce analytics, banking compliance, four-country BI operations, and company building.</a:t>
+            </a:r>
+            <a:endParaRPr lang="en-US" sz="1600" dirty="0"/>
+          </a:p>
+          <a:p>
+            <a:pPr marL="342900" indent="-342900">
+              <a:lnSpc>
+                <a:spcPct val="112000"/>
+              </a:lnSpc>
+              <a:spcAft>
+                <a:spcPts val="900"/>
+              </a:spcAft>
+              <a:buSzPct val="100000"/>
+              <a:buChar char="▸"/>
+            </a:pPr>
+            <a:r>
+              <a:rPr lang="en-US" sz="1600" dirty="0">
+                <a:solidFill>
+                  <a:srgbClr val="CBD5E1"/>
+                </a:solidFill>
+                <a:latin typeface="Segoe UI" pitchFamily="34" charset="0"/>
+                <a:ea typeface="Segoe UI" pitchFamily="34" charset="-122"/>
+                <a:cs typeface="Segoe UI" pitchFamily="34" charset="-120"/>
+              </a:rPr>
+              <a:t>Available now for freelance data scraping, BI, and AI automation worldwide via Upwork.</a:t>
+            </a:r>
+            <a:endParaRPr lang="en-US" sz="1600" dirty="0"/>
+          </a:p>
+        </p:txBody>
+      </p:sp>
+      <p:sp>
+        <p:nvSpPr>
+          <p:cNvPr id="7" name="Text 5"/>
+          <p:cNvSpPr/>
+          <p:nvPr/>
+        </p:nvSpPr>
+        <p:spPr>
+          <a:xfrm>
+            <a:off x="10698480" y="6382512"/>
+            <a:ext cx="1188720" cy="365760"/>
+          </a:xfrm>
+          <a:prstGeom prst="rect">
+            <a:avLst/>
+          </a:prstGeom>
+          <a:noFill/>
+          <a:ln/>
+        </p:spPr>
+        <p:txBody>
+          <a:bodyPr wrap="square" rtlCol="0" anchor="ctr"/>
+          <a:lstStyle/>
+          <a:p>
+            <a:pPr algn="r" indent="0" marL="0">
+              <a:buNone/>
+            </a:pPr>
+            <a:r>
+              <a:rPr lang="en-US" sz="1000" dirty="0">
+                <a:solidFill>
+                  <a:srgbClr val="64748B"/>
+                </a:solidFill>
+                <a:latin typeface="Consolas" pitchFamily="34" charset="0"/>
+                <a:ea typeface="Consolas" pitchFamily="34" charset="-122"/>
+                <a:cs typeface="Consolas" pitchFamily="34" charset="-120"/>
+              </a:rPr>
+              <a:t>13 / 14</a:t>
+            </a:r>
+            <a:endParaRPr lang="en-US" sz="1000" dirty="0"/>
+          </a:p>
+        </p:txBody>
+      </p:sp>
+    </p:spTree>
+  </p:cSld>
+  <p:clrMapOvr>
+    <a:masterClrMapping/>
+  </p:clrMapOvr>
+</p:sld>
+</file>
+
+<file path=ppt/slides/slide14.xml><?xml version="1.0" encoding="utf-8"?>
+<p:sld xmlns:a="http://schemas.openxmlformats.org/drawingml/2006/main" xmlns:r="http://schemas.openxmlformats.org/officeDocument/2006/relationships" xmlns:p="http://schemas.openxmlformats.org/presentationml/2006/main">
+  <p:cSld name="Slide 14">
+    <p:bg>
+      <p:bgPr>
+        <a:solidFill>
+          <a:srgbClr val="0A0C12"/>
+        </a:solidFill>
+      </p:bgPr>
+    </p:bg>
+    <p:spTree>
+      <p:nvGrpSpPr>
+        <p:cNvPr id="1" name=""/>
+        <p:cNvGrpSpPr/>
+        <p:nvPr/>
+      </p:nvGrpSpPr>
+      <p:grpSpPr>
+        <a:xfrm>
+          <a:off x="0" y="0"/>
+          <a:ext cx="0" cy="0"/>
+          <a:chOff x="0" y="0"/>
+          <a:chExt cx="0" cy="0"/>
+        </a:xfrm>
+      </p:grpSpPr>
+      <p:sp>
+        <p:nvSpPr>
+          <p:cNvPr id="2" name="Shape 0"/>
+          <p:cNvSpPr/>
+          <p:nvPr/>
+        </p:nvSpPr>
+        <p:spPr>
+          <a:xfrm>
+            <a:off x="0" y="0"/>
+            <a:ext cx="7680960" cy="64008"/>
+          </a:xfrm>
+          <a:prstGeom prst="rect">
+            <a:avLst/>
+          </a:prstGeom>
+          <a:solidFill>
+            <a:srgbClr val="3B82F6"/>
+          </a:solidFill>
+          <a:ln/>
+        </p:spPr>
+      </p:sp>
+      <p:sp>
+        <p:nvSpPr>
+          <p:cNvPr id="3" name="Shape 1"/>
+          <p:cNvSpPr/>
+          <p:nvPr/>
+        </p:nvSpPr>
+        <p:spPr>
+          <a:xfrm>
+            <a:off x="7680960" y="0"/>
+            <a:ext cx="4510735" cy="64008"/>
+          </a:xfrm>
+          <a:prstGeom prst="rect">
+            <a:avLst/>
+          </a:prstGeom>
+          <a:solidFill>
+            <a:srgbClr val="06B6D4"/>
+          </a:solidFill>
+          <a:ln/>
+        </p:spPr>
+      </p:sp>
+      <p:sp>
+        <p:nvSpPr>
+          <p:cNvPr id="4" name="Text 2"/>
+          <p:cNvSpPr/>
+          <p:nvPr/>
+        </p:nvSpPr>
+        <p:spPr>
+          <a:xfrm>
+            <a:off x="822960" y="1417320"/>
+            <a:ext cx="10515600" cy="411480"/>
+          </a:xfrm>
+          <a:prstGeom prst="rect">
+            <a:avLst/>
+          </a:prstGeom>
+          <a:noFill/>
+          <a:ln/>
+        </p:spPr>
+        <p:txBody>
+          <a:bodyPr wrap="square" rtlCol="0" anchor="ctr"/>
+          <a:lstStyle/>
+          <a:p>
+            <a:pPr algn="ctr" indent="0" marL="0">
+              <a:buNone/>
+            </a:pPr>
+            <a:r>
+              <a:rPr lang="en-US" sz="1300" spc="400" kern="0" dirty="0">
+                <a:solidFill>
+                  <a:srgbClr val="06B6D4"/>
+                </a:solidFill>
+                <a:latin typeface="Consolas" pitchFamily="34" charset="0"/>
+                <a:ea typeface="Consolas" pitchFamily="34" charset="-122"/>
+                <a:cs typeface="Consolas" pitchFamily="34" charset="-120"/>
+              </a:rPr>
+              <a:t>WORK WITH ME</a:t>
+            </a:r>
+            <a:endParaRPr lang="en-US" sz="1300" dirty="0"/>
+          </a:p>
+        </p:txBody>
+      </p:sp>
+      <p:sp>
+        <p:nvSpPr>
+          <p:cNvPr id="5" name="Text 3"/>
+          <p:cNvSpPr/>
+          <p:nvPr/>
+        </p:nvSpPr>
+        <p:spPr>
+          <a:xfrm>
+            <a:off x="822960" y="1920240"/>
+            <a:ext cx="10515600" cy="1371600"/>
+          </a:xfrm>
+          <a:prstGeom prst="rect">
+            <a:avLst/>
+          </a:prstGeom>
+          <a:noFill/>
+          <a:ln/>
+        </p:spPr>
+        <p:txBody>
+          <a:bodyPr wrap="square" rtlCol="0" anchor="ctr"/>
+          <a:lstStyle/>
+          <a:p>
+            <a:pPr algn="ctr" indent="0" marL="0">
+              <a:buNone/>
+            </a:pPr>
+            <a:r>
+              <a:rPr lang="en-US" sz="3200" b="1" dirty="0">
+                <a:solidFill>
+                  <a:srgbClr val="FFFFFF"/>
+                </a:solidFill>
+                <a:latin typeface="Segoe UI" pitchFamily="34" charset="0"/>
+                <a:ea typeface="Segoe UI" pitchFamily="34" charset="-122"/>
+                <a:cs typeface="Segoe UI" pitchFamily="34" charset="-120"/>
+              </a:rPr>
+              <a:t>Hire the transition, not just the title</a:t>
+            </a:r>
+            <a:endParaRPr lang="en-US" sz="3200" dirty="0"/>
+          </a:p>
+        </p:txBody>
+      </p:sp>
+      <p:sp>
+        <p:nvSpPr>
+          <p:cNvPr id="6" name="Text 4"/>
+          <p:cNvSpPr/>
+          <p:nvPr/>
+        </p:nvSpPr>
+        <p:spPr>
+          <a:xfrm>
+            <a:off x="2011680" y="3429000"/>
+            <a:ext cx="8183880" cy="1554480"/>
+          </a:xfrm>
+          <a:prstGeom prst="rect">
+            <a:avLst/>
+          </a:prstGeom>
+          <a:noFill/>
+          <a:ln/>
+        </p:spPr>
+        <p:txBody>
+          <a:bodyPr wrap="square" rtlCol="0" anchor="t"/>
+          <a:lstStyle/>
+          <a:p>
+            <a:pPr algn="ctr" indent="0" marL="0">
+              <a:spcAft>
+                <a:spcPts val="800"/>
+              </a:spcAft>
+              <a:buNone/>
+            </a:pPr>
+            <a:r>
+              <a:rPr lang="en-US" sz="1500" dirty="0">
+                <a:solidFill>
+                  <a:srgbClr val="CBD5E1"/>
+                </a:solidFill>
+                <a:latin typeface="Segoe UI" pitchFamily="34" charset="0"/>
+                <a:ea typeface="Segoe UI" pitchFamily="34" charset="-122"/>
+                <a:cs typeface="Segoe UI" pitchFamily="34" charset="-120"/>
+              </a:rPr>
+              <a:t>Four chapters that compound into one delivery discipline you can audit today</a:t>
+            </a:r>
+            <a:pPr algn="ctr" indent="0" marL="0">
+              <a:spcAft>
+                <a:spcPts val="800"/>
+              </a:spcAft>
+              <a:buNone/>
+            </a:pPr>
+            <a:r>
+              <a:rPr lang="en-US" sz="1500" dirty="0">
+                <a:solidFill>
+                  <a:srgbClr val="CBD5E1"/>
+                </a:solidFill>
+                <a:latin typeface="Segoe UI" pitchFamily="34" charset="0"/>
+                <a:ea typeface="Segoe UI" pitchFamily="34" charset="-122"/>
+                <a:cs typeface="Segoe UI" pitchFamily="34" charset="-120"/>
+              </a:rPr>
+              <a:t>Data scraping, BI, and AI automation projects delivered worldwide</a:t>
+            </a:r>
+            <a:pPr algn="ctr" indent="0" marL="0">
+              <a:spcAft>
+                <a:spcPts val="800"/>
+              </a:spcAft>
+              <a:buNone/>
+            </a:pPr>
+            <a:r>
+              <a:rPr lang="en-US" sz="1500" dirty="0">
+                <a:solidFill>
+                  <a:srgbClr val="CBD5E1"/>
+                </a:solidFill>
+                <a:latin typeface="Segoe UI" pitchFamily="34" charset="0"/>
+                <a:ea typeface="Segoe UI" pitchFamily="34" charset="-122"/>
+                <a:cs typeface="Segoe UI" pitchFamily="34" charset="-120"/>
+              </a:rPr>
+              <a:t>Every number in this deck is verifiable on the live portfolio</a:t>
+            </a:r>
+            <a:endParaRPr lang="en-US" sz="1500" dirty="0"/>
+          </a:p>
+        </p:txBody>
+      </p:sp>
+      <p:sp>
+        <p:nvSpPr>
+          <p:cNvPr id="7" name="Shape 5"/>
+          <p:cNvSpPr/>
+          <p:nvPr/>
+        </p:nvSpPr>
+        <p:spPr>
+          <a:xfrm>
+            <a:off x="3566160" y="5212080"/>
+            <a:ext cx="5074920" cy="0"/>
+          </a:xfrm>
+          <a:prstGeom prst="line">
+            <a:avLst/>
+          </a:prstGeom>
+          <a:noFill/>
+          <a:ln w="25400">
+            <a:solidFill>
+              <a:srgbClr val="3B82F6"/>
+            </a:solidFill>
+            <a:prstDash val="solid"/>
+          </a:ln>
+        </p:spPr>
+      </p:sp>
+      <p:sp>
+        <p:nvSpPr>
+          <p:cNvPr id="8" name="Text 6"/>
+          <p:cNvSpPr/>
+          <p:nvPr/>
+        </p:nvSpPr>
+        <p:spPr>
+          <a:xfrm>
+            <a:off x="822960" y="5376672"/>
+            <a:ext cx="10515600" cy="457200"/>
+          </a:xfrm>
+          <a:prstGeom prst="rect">
+            <a:avLst/>
+          </a:prstGeom>
+          <a:noFill/>
+          <a:ln/>
+        </p:spPr>
+        <p:txBody>
+          <a:bodyPr wrap="square" rtlCol="0" anchor="ctr"/>
+          <a:lstStyle/>
+          <a:p>
+            <a:pPr algn="ctr" indent="0" marL="0">
+              <a:buNone/>
+            </a:pPr>
+            <a:r>
+              <a:rPr lang="en-US" sz="1350" b="1" dirty="0">
+                <a:solidFill>
+                  <a:srgbClr val="06B6D4"/>
+                </a:solidFill>
+                <a:latin typeface="Consolas" pitchFamily="34" charset="0"/>
+                <a:ea typeface="Consolas" pitchFamily="34" charset="-122"/>
+                <a:cs typeface="Consolas" pitchFamily="34" charset="-120"/>
+              </a:rPr>
+              <a:t>rezalianvatiady.github.io · github.com/rezalianvatiady</a:t>
+            </a:r>
+            <a:endParaRPr lang="en-US" sz="1350" dirty="0"/>
+          </a:p>
+        </p:txBody>
+      </p:sp>
+      <p:sp>
+        <p:nvSpPr>
+          <p:cNvPr id="9" name="Text 7"/>
+          <p:cNvSpPr/>
+          <p:nvPr/>
+        </p:nvSpPr>
+        <p:spPr>
+          <a:xfrm>
+            <a:off x="10698480" y="6382512"/>
+            <a:ext cx="1188720" cy="365760"/>
+          </a:xfrm>
+          <a:prstGeom prst="rect">
+            <a:avLst/>
+          </a:prstGeom>
+          <a:noFill/>
+          <a:ln/>
+        </p:spPr>
+        <p:txBody>
+          <a:bodyPr wrap="square" rtlCol="0" anchor="ctr"/>
+          <a:lstStyle/>
+          <a:p>
+            <a:pPr algn="r" indent="0" marL="0">
+              <a:buNone/>
+            </a:pPr>
+            <a:r>
+              <a:rPr lang="en-US" sz="1000" dirty="0">
+                <a:solidFill>
+                  <a:srgbClr val="64748B"/>
+                </a:solidFill>
+                <a:latin typeface="Consolas" pitchFamily="34" charset="0"/>
+                <a:ea typeface="Consolas" pitchFamily="34" charset="-122"/>
+                <a:cs typeface="Consolas" pitchFamily="34" charset="-120"/>
+              </a:rPr>
+              <a:t>14 / 14</a:t>
             </a:r>
             <a:endParaRPr lang="en-US" sz="1000" dirty="0"/>
           </a:p>
@@ -1799,7 +5887,7 @@
                 <a:ea typeface="Consolas" pitchFamily="34" charset="-122"/>
                 <a:cs typeface="Consolas" pitchFamily="34" charset="-120"/>
               </a:rPr>
-              <a:t>TIMELINE</a:t>
+              <a:t>AGENDA</a:t>
             </a:r>
             <a:endParaRPr lang="en-US" sz="1200" dirty="0"/>
           </a:p>
@@ -1813,8 +5901,8 @@
         </p:nvSpPr>
         <p:spPr>
           <a:xfrm>
-            <a:off x="822960" y="960120"/>
-            <a:ext cx="10515600" cy="868680"/>
+            <a:off x="822960" y="914400"/>
+            <a:ext cx="10561320" cy="868680"/>
           </a:xfrm>
           <a:prstGeom prst="rect">
             <a:avLst/>
@@ -1830,7 +5918,7 @@
               <a:buNone/>
             </a:pPr>
             <a:r>
-              <a:rPr lang="en-US" sz="3000" b="1" dirty="0">
+              <a:rPr lang="en-US" sz="2700" b="1" dirty="0">
                 <a:solidFill>
                   <a:srgbClr val="FFFFFF"/>
                 </a:solidFill>
@@ -1838,45 +5926,102 @@
                 <a:ea typeface="Segoe UI" pitchFamily="34" charset="-122"/>
                 <a:cs typeface="Segoe UI" pitchFamily="34" charset="-120"/>
               </a:rPr>
-              <a:t>Four chapters, one direction</a:t>
-            </a:r>
-            <a:endParaRPr lang="en-US" sz="3000" dirty="0"/>
-          </a:p>
-        </p:txBody>
-      </p:sp>
-      <p:sp>
-        <p:nvSpPr>
-          <p:cNvPr id="6" name="Text 4"/>
-          <p:cNvSpPr/>
-          <p:nvPr/>
-        </p:nvSpPr>
-        <p:spPr>
-          <a:xfrm>
-            <a:off x="868680" y="2057400"/>
-            <a:ext cx="10424160" cy="3566160"/>
-          </a:xfrm>
-          <a:prstGeom prst="rect">
-            <a:avLst/>
-          </a:prstGeom>
-          <a:noFill/>
-          <a:ln/>
-        </p:spPr>
-        <p:txBody>
-          <a:bodyPr wrap="square" rtlCol="0" anchor="t"/>
-          <a:lstStyle/>
-          <a:p>
-            <a:pPr marL="342900" indent="-342900">
-              <a:lnSpc>
-                <a:spcPct val="115000"/>
-              </a:lnSpc>
-              <a:spcAft>
-                <a:spcPts val="1000"/>
-              </a:spcAft>
-              <a:buSzPct val="100000"/>
-              <a:buChar char="▸"/>
-            </a:pPr>
-            <a:r>
-              <a:rPr lang="en-US" sz="1600" dirty="0">
+              <a:t>What this deck covers</a:t>
+            </a:r>
+            <a:endParaRPr lang="en-US" sz="2700" dirty="0"/>
+          </a:p>
+        </p:txBody>
+      </p:sp>
+      <p:sp>
+        <p:nvSpPr>
+          <p:cNvPr id="6" name="Shape 4"/>
+          <p:cNvSpPr/>
+          <p:nvPr/>
+        </p:nvSpPr>
+        <p:spPr>
+          <a:xfrm>
+            <a:off x="868680" y="2112264"/>
+            <a:ext cx="420624" cy="420624"/>
+          </a:xfrm>
+          <a:prstGeom prst="ellipse">
+            <a:avLst/>
+          </a:prstGeom>
+          <a:solidFill>
+            <a:srgbClr val="111A2E"/>
+          </a:solidFill>
+          <a:ln w="19050">
+            <a:solidFill>
+              <a:srgbClr val="3B82F6"/>
+            </a:solidFill>
+            <a:prstDash val="solid"/>
+          </a:ln>
+        </p:spPr>
+      </p:sp>
+      <p:sp>
+        <p:nvSpPr>
+          <p:cNvPr id="7" name="Text 5"/>
+          <p:cNvSpPr/>
+          <p:nvPr/>
+        </p:nvSpPr>
+        <p:spPr>
+          <a:xfrm>
+            <a:off x="868680" y="2112264"/>
+            <a:ext cx="420624" cy="420624"/>
+          </a:xfrm>
+          <a:prstGeom prst="rect">
+            <a:avLst/>
+          </a:prstGeom>
+          <a:noFill/>
+          <a:ln/>
+        </p:spPr>
+        <p:txBody>
+          <a:bodyPr wrap="square" rtlCol="0" anchor="ctr"/>
+          <a:lstStyle/>
+          <a:p>
+            <a:pPr algn="ctr" indent="0" marL="0">
+              <a:buNone/>
+            </a:pPr>
+            <a:r>
+              <a:rPr lang="en-US" sz="1300" b="1" dirty="0">
+                <a:solidFill>
+                  <a:srgbClr val="3B82F6"/>
+                </a:solidFill>
+                <a:latin typeface="Consolas" pitchFamily="34" charset="0"/>
+                <a:ea typeface="Consolas" pitchFamily="34" charset="-122"/>
+                <a:cs typeface="Consolas" pitchFamily="34" charset="-120"/>
+              </a:rPr>
+              <a:t>1</a:t>
+            </a:r>
+            <a:endParaRPr lang="en-US" sz="1300" dirty="0"/>
+          </a:p>
+        </p:txBody>
+      </p:sp>
+      <p:sp>
+        <p:nvSpPr>
+          <p:cNvPr id="8" name="Text 6"/>
+          <p:cNvSpPr/>
+          <p:nvPr/>
+        </p:nvSpPr>
+        <p:spPr>
+          <a:xfrm>
+            <a:off x="1435608" y="2057400"/>
+            <a:ext cx="4480560" cy="822960"/>
+          </a:xfrm>
+          <a:prstGeom prst="rect">
+            <a:avLst/>
+          </a:prstGeom>
+          <a:noFill/>
+          <a:ln/>
+        </p:spPr>
+        <p:txBody>
+          <a:bodyPr wrap="square" rtlCol="0" anchor="ctr"/>
+          <a:lstStyle/>
+          <a:p>
+            <a:pPr indent="0" marL="0">
+              <a:buNone/>
+            </a:pPr>
+            <a:r>
+              <a:rPr lang="en-US" sz="1450" dirty="0">
                 <a:solidFill>
                   <a:srgbClr val="CBD5E1"/>
                 </a:solidFill>
@@ -1884,23 +6029,102 @@
                 <a:ea typeface="Segoe UI" pitchFamily="34" charset="-122"/>
                 <a:cs typeface="Segoe UI" pitchFamily="34" charset="-120"/>
               </a:rPr>
-              <a:t>2022 - Customer analytics at RevoU × Tokopedia: segmentation, churn, KPI dashboards</a:t>
-            </a:r>
-            <a:endParaRPr lang="en-US" sz="1600" dirty="0"/>
-          </a:p>
-          <a:p>
-            <a:pPr marL="342900" indent="-342900">
-              <a:lnSpc>
-                <a:spcPct val="115000"/>
-              </a:lnSpc>
-              <a:spcAft>
-                <a:spcPts val="1000"/>
-              </a:spcAft>
-              <a:buSzPct val="100000"/>
-              <a:buChar char="▸"/>
-            </a:pPr>
-            <a:r>
-              <a:rPr lang="en-US" sz="1600" dirty="0">
+              <a:t>The four chapters - and what each one set up</a:t>
+            </a:r>
+            <a:endParaRPr lang="en-US" sz="1450" dirty="0"/>
+          </a:p>
+        </p:txBody>
+      </p:sp>
+      <p:sp>
+        <p:nvSpPr>
+          <p:cNvPr id="9" name="Shape 7"/>
+          <p:cNvSpPr/>
+          <p:nvPr/>
+        </p:nvSpPr>
+        <p:spPr>
+          <a:xfrm>
+            <a:off x="868680" y="3044952"/>
+            <a:ext cx="420624" cy="420624"/>
+          </a:xfrm>
+          <a:prstGeom prst="ellipse">
+            <a:avLst/>
+          </a:prstGeom>
+          <a:solidFill>
+            <a:srgbClr val="111A2E"/>
+          </a:solidFill>
+          <a:ln w="19050">
+            <a:solidFill>
+              <a:srgbClr val="06B6D4"/>
+            </a:solidFill>
+            <a:prstDash val="solid"/>
+          </a:ln>
+        </p:spPr>
+      </p:sp>
+      <p:sp>
+        <p:nvSpPr>
+          <p:cNvPr id="10" name="Text 8"/>
+          <p:cNvSpPr/>
+          <p:nvPr/>
+        </p:nvSpPr>
+        <p:spPr>
+          <a:xfrm>
+            <a:off x="868680" y="3044952"/>
+            <a:ext cx="420624" cy="420624"/>
+          </a:xfrm>
+          <a:prstGeom prst="rect">
+            <a:avLst/>
+          </a:prstGeom>
+          <a:noFill/>
+          <a:ln/>
+        </p:spPr>
+        <p:txBody>
+          <a:bodyPr wrap="square" rtlCol="0" anchor="ctr"/>
+          <a:lstStyle/>
+          <a:p>
+            <a:pPr algn="ctr" indent="0" marL="0">
+              <a:buNone/>
+            </a:pPr>
+            <a:r>
+              <a:rPr lang="en-US" sz="1300" b="1" dirty="0">
+                <a:solidFill>
+                  <a:srgbClr val="06B6D4"/>
+                </a:solidFill>
+                <a:latin typeface="Consolas" pitchFamily="34" charset="0"/>
+                <a:ea typeface="Consolas" pitchFamily="34" charset="-122"/>
+                <a:cs typeface="Consolas" pitchFamily="34" charset="-120"/>
+              </a:rPr>
+              <a:t>2</a:t>
+            </a:r>
+            <a:endParaRPr lang="en-US" sz="1300" dirty="0"/>
+          </a:p>
+        </p:txBody>
+      </p:sp>
+      <p:sp>
+        <p:nvSpPr>
+          <p:cNvPr id="11" name="Text 9"/>
+          <p:cNvSpPr/>
+          <p:nvPr/>
+        </p:nvSpPr>
+        <p:spPr>
+          <a:xfrm>
+            <a:off x="1435608" y="2990088"/>
+            <a:ext cx="4480560" cy="822960"/>
+          </a:xfrm>
+          <a:prstGeom prst="rect">
+            <a:avLst/>
+          </a:prstGeom>
+          <a:noFill/>
+          <a:ln/>
+        </p:spPr>
+        <p:txBody>
+          <a:bodyPr wrap="square" rtlCol="0" anchor="ctr"/>
+          <a:lstStyle/>
+          <a:p>
+            <a:pPr indent="0" marL="0">
+              <a:buNone/>
+            </a:pPr>
+            <a:r>
+              <a:rPr lang="en-US" sz="1450" dirty="0">
                 <a:solidFill>
                   <a:srgbClr val="CBD5E1"/>
                 </a:solidFill>
@@ -1908,23 +6132,102 @@
                 <a:ea typeface="Segoe UI" pitchFamily="34" charset="-122"/>
                 <a:cs typeface="Segoe UI" pitchFamily="34" charset="-120"/>
               </a:rPr>
-              <a:t>2023 - IT Business Analyst, BRI AML project: graph databases and compliance</a:t>
-            </a:r>
-            <a:endParaRPr lang="en-US" sz="1600" dirty="0"/>
-          </a:p>
-          <a:p>
-            <a:pPr marL="342900" indent="-342900">
-              <a:lnSpc>
-                <a:spcPct val="115000"/>
-              </a:lnSpc>
-              <a:spcAft>
-                <a:spcPts val="1000"/>
-              </a:spcAft>
-              <a:buSzPct val="100000"/>
-              <a:buChar char="▸"/>
-            </a:pPr>
-            <a:r>
-              <a:rPr lang="en-US" sz="1600" dirty="0">
+              <a:t>What transferred perfectly from BI to AI building</a:t>
+            </a:r>
+            <a:endParaRPr lang="en-US" sz="1450" dirty="0"/>
+          </a:p>
+        </p:txBody>
+      </p:sp>
+      <p:sp>
+        <p:nvSpPr>
+          <p:cNvPr id="12" name="Shape 10"/>
+          <p:cNvSpPr/>
+          <p:nvPr/>
+        </p:nvSpPr>
+        <p:spPr>
+          <a:xfrm>
+            <a:off x="868680" y="3977640"/>
+            <a:ext cx="420624" cy="420624"/>
+          </a:xfrm>
+          <a:prstGeom prst="ellipse">
+            <a:avLst/>
+          </a:prstGeom>
+          <a:solidFill>
+            <a:srgbClr val="111A2E"/>
+          </a:solidFill>
+          <a:ln w="19050">
+            <a:solidFill>
+              <a:srgbClr val="3B82F6"/>
+            </a:solidFill>
+            <a:prstDash val="solid"/>
+          </a:ln>
+        </p:spPr>
+      </p:sp>
+      <p:sp>
+        <p:nvSpPr>
+          <p:cNvPr id="13" name="Text 11"/>
+          <p:cNvSpPr/>
+          <p:nvPr/>
+        </p:nvSpPr>
+        <p:spPr>
+          <a:xfrm>
+            <a:off x="868680" y="3977640"/>
+            <a:ext cx="420624" cy="420624"/>
+          </a:xfrm>
+          <a:prstGeom prst="rect">
+            <a:avLst/>
+          </a:prstGeom>
+          <a:noFill/>
+          <a:ln/>
+        </p:spPr>
+        <p:txBody>
+          <a:bodyPr wrap="square" rtlCol="0" anchor="ctr"/>
+          <a:lstStyle/>
+          <a:p>
+            <a:pPr algn="ctr" indent="0" marL="0">
+              <a:buNone/>
+            </a:pPr>
+            <a:r>
+              <a:rPr lang="en-US" sz="1300" b="1" dirty="0">
+                <a:solidFill>
+                  <a:srgbClr val="3B82F6"/>
+                </a:solidFill>
+                <a:latin typeface="Consolas" pitchFamily="34" charset="0"/>
+                <a:ea typeface="Consolas" pitchFamily="34" charset="-122"/>
+                <a:cs typeface="Consolas" pitchFamily="34" charset="-120"/>
+              </a:rPr>
+              <a:t>3</a:t>
+            </a:r>
+            <a:endParaRPr lang="en-US" sz="1300" dirty="0"/>
+          </a:p>
+        </p:txBody>
+      </p:sp>
+      <p:sp>
+        <p:nvSpPr>
+          <p:cNvPr id="14" name="Text 12"/>
+          <p:cNvSpPr/>
+          <p:nvPr/>
+        </p:nvSpPr>
+        <p:spPr>
+          <a:xfrm>
+            <a:off x="1435608" y="3922776"/>
+            <a:ext cx="4480560" cy="822960"/>
+          </a:xfrm>
+          <a:prstGeom prst="rect">
+            <a:avLst/>
+          </a:prstGeom>
+          <a:noFill/>
+          <a:ln/>
+        </p:spPr>
+        <p:txBody>
+          <a:bodyPr wrap="square" rtlCol="0" anchor="ctr"/>
+          <a:lstStyle/>
+          <a:p>
+            <a:pPr indent="0" marL="0">
+              <a:buNone/>
+            </a:pPr>
+            <a:r>
+              <a:rPr lang="en-US" sz="1450" dirty="0">
                 <a:solidFill>
                   <a:srgbClr val="CBD5E1"/>
                 </a:solidFill>
@@ -1932,23 +6235,102 @@
                 <a:ea typeface="Segoe UI" pitchFamily="34" charset="-122"/>
                 <a:cs typeface="Segoe UI" pitchFamily="34" charset="-120"/>
               </a:rPr>
-              <a:t>2023-2024 - Regional BI Specialist, IKEA Indonesia: four countries, one datalake</a:t>
-            </a:r>
-            <a:endParaRPr lang="en-US" sz="1600" dirty="0"/>
-          </a:p>
-          <a:p>
-            <a:pPr marL="342900" indent="-342900">
-              <a:lnSpc>
-                <a:spcPct val="115000"/>
-              </a:lnSpc>
-              <a:spcAft>
-                <a:spcPts val="1000"/>
-              </a:spcAft>
-              <a:buSzPct val="100000"/>
-              <a:buChar char="▸"/>
-            </a:pPr>
-            <a:r>
-              <a:rPr lang="en-US" sz="1600" dirty="0">
+              <a:t>What I had to unlearn on the way to founder</a:t>
+            </a:r>
+            <a:endParaRPr lang="en-US" sz="1450" dirty="0"/>
+          </a:p>
+        </p:txBody>
+      </p:sp>
+      <p:sp>
+        <p:nvSpPr>
+          <p:cNvPr id="15" name="Shape 13"/>
+          <p:cNvSpPr/>
+          <p:nvPr/>
+        </p:nvSpPr>
+        <p:spPr>
+          <a:xfrm>
+            <a:off x="6355080" y="2112264"/>
+            <a:ext cx="420624" cy="420624"/>
+          </a:xfrm>
+          <a:prstGeom prst="ellipse">
+            <a:avLst/>
+          </a:prstGeom>
+          <a:solidFill>
+            <a:srgbClr val="111A2E"/>
+          </a:solidFill>
+          <a:ln w="19050">
+            <a:solidFill>
+              <a:srgbClr val="06B6D4"/>
+            </a:solidFill>
+            <a:prstDash val="solid"/>
+          </a:ln>
+        </p:spPr>
+      </p:sp>
+      <p:sp>
+        <p:nvSpPr>
+          <p:cNvPr id="16" name="Text 14"/>
+          <p:cNvSpPr/>
+          <p:nvPr/>
+        </p:nvSpPr>
+        <p:spPr>
+          <a:xfrm>
+            <a:off x="6355080" y="2112264"/>
+            <a:ext cx="420624" cy="420624"/>
+          </a:xfrm>
+          <a:prstGeom prst="rect">
+            <a:avLst/>
+          </a:prstGeom>
+          <a:noFill/>
+          <a:ln/>
+        </p:spPr>
+        <p:txBody>
+          <a:bodyPr wrap="square" rtlCol="0" anchor="ctr"/>
+          <a:lstStyle/>
+          <a:p>
+            <a:pPr algn="ctr" indent="0" marL="0">
+              <a:buNone/>
+            </a:pPr>
+            <a:r>
+              <a:rPr lang="en-US" sz="1300" b="1" dirty="0">
+                <a:solidFill>
+                  <a:srgbClr val="06B6D4"/>
+                </a:solidFill>
+                <a:latin typeface="Consolas" pitchFamily="34" charset="0"/>
+                <a:ea typeface="Consolas" pitchFamily="34" charset="-122"/>
+                <a:cs typeface="Consolas" pitchFamily="34" charset="-120"/>
+              </a:rPr>
+              <a:t>4</a:t>
+            </a:r>
+            <a:endParaRPr lang="en-US" sz="1300" dirty="0"/>
+          </a:p>
+        </p:txBody>
+      </p:sp>
+      <p:sp>
+        <p:nvSpPr>
+          <p:cNvPr id="17" name="Text 15"/>
+          <p:cNvSpPr/>
+          <p:nvPr/>
+        </p:nvSpPr>
+        <p:spPr>
+          <a:xfrm>
+            <a:off x="6922008" y="2057400"/>
+            <a:ext cx="4480560" cy="822960"/>
+          </a:xfrm>
+          <a:prstGeom prst="rect">
+            <a:avLst/>
+          </a:prstGeom>
+          <a:noFill/>
+          <a:ln/>
+        </p:spPr>
+        <p:txBody>
+          <a:bodyPr wrap="square" rtlCol="0" anchor="ctr"/>
+          <a:lstStyle/>
+          <a:p>
+            <a:pPr indent="0" marL="0">
+              <a:buNone/>
+            </a:pPr>
+            <a:r>
+              <a:rPr lang="en-US" sz="1450" dirty="0">
                 <a:solidFill>
                   <a:srgbClr val="CBD5E1"/>
                 </a:solidFill>
@@ -1956,22 +6338,47 @@
                 <a:ea typeface="Segoe UI" pitchFamily="34" charset="-122"/>
                 <a:cs typeface="Segoe UI" pitchFamily="34" charset="-120"/>
               </a:rPr>
-              <a:t>2024-now - Founder, Zalin Platform and Zalin Labs: agents, apps, frameworks</a:t>
-            </a:r>
-            <a:endParaRPr lang="en-US" sz="1600" dirty="0"/>
-          </a:p>
-        </p:txBody>
-      </p:sp>
-      <p:sp>
-        <p:nvSpPr>
-          <p:cNvPr id="7" name="Text 5"/>
-          <p:cNvSpPr/>
-          <p:nvPr/>
-        </p:nvSpPr>
-        <p:spPr>
-          <a:xfrm>
-            <a:off x="10698480" y="6355080"/>
-            <a:ext cx="1188720" cy="365760"/>
+              <a:t>The proof: apps, agents, frameworks, router checks</a:t>
+            </a:r>
+            <a:endParaRPr lang="en-US" sz="1450" dirty="0"/>
+          </a:p>
+        </p:txBody>
+      </p:sp>
+      <p:sp>
+        <p:nvSpPr>
+          <p:cNvPr id="18" name="Shape 16"/>
+          <p:cNvSpPr/>
+          <p:nvPr/>
+        </p:nvSpPr>
+        <p:spPr>
+          <a:xfrm>
+            <a:off x="6355080" y="3044952"/>
+            <a:ext cx="420624" cy="420624"/>
+          </a:xfrm>
+          <a:prstGeom prst="ellipse">
+            <a:avLst/>
+          </a:prstGeom>
+          <a:solidFill>
+            <a:srgbClr val="111A2E"/>
+          </a:solidFill>
+          <a:ln w="19050">
+            <a:solidFill>
+              <a:srgbClr val="3B82F6"/>
+            </a:solidFill>
+            <a:prstDash val="solid"/>
+          </a:ln>
+        </p:spPr>
+      </p:sp>
+      <p:sp>
+        <p:nvSpPr>
+          <p:cNvPr id="19" name="Text 17"/>
+          <p:cNvSpPr/>
+          <p:nvPr/>
+        </p:nvSpPr>
+        <p:spPr>
+          <a:xfrm>
+            <a:off x="6355080" y="3044952"/>
+            <a:ext cx="420624" cy="420624"/>
           </a:xfrm>
           <a:prstGeom prst="rect">
             <a:avLst/>
@@ -1983,19 +6390,97 @@
           <a:bodyPr wrap="square" rtlCol="0" anchor="ctr"/>
           <a:lstStyle/>
           <a:p>
-            <a:pPr algn="r" indent="0" marL="0">
+            <a:pPr algn="ctr" indent="0" marL="0">
               <a:buNone/>
             </a:pPr>
             <a:r>
-              <a:rPr lang="en-US" sz="1000" dirty="0">
-                <a:solidFill>
-                  <a:srgbClr val="64748B"/>
+              <a:rPr lang="en-US" sz="1300" b="1" dirty="0">
+                <a:solidFill>
+                  <a:srgbClr val="3B82F6"/>
                 </a:solidFill>
                 <a:latin typeface="Consolas" pitchFamily="34" charset="0"/>
                 <a:ea typeface="Consolas" pitchFamily="34" charset="-122"/>
                 <a:cs typeface="Consolas" pitchFamily="34" charset="-120"/>
               </a:rPr>
-              <a:t>2 / 8</a:t>
+              <a:t>5</a:t>
+            </a:r>
+            <a:endParaRPr lang="en-US" sz="1300" dirty="0"/>
+          </a:p>
+        </p:txBody>
+      </p:sp>
+      <p:sp>
+        <p:nvSpPr>
+          <p:cNvPr id="20" name="Text 18"/>
+          <p:cNvSpPr/>
+          <p:nvPr/>
+        </p:nvSpPr>
+        <p:spPr>
+          <a:xfrm>
+            <a:off x="6922008" y="2990088"/>
+            <a:ext cx="4480560" cy="822960"/>
+          </a:xfrm>
+          <a:prstGeom prst="rect">
+            <a:avLst/>
+          </a:prstGeom>
+          <a:noFill/>
+          <a:ln/>
+        </p:spPr>
+        <p:txBody>
+          <a:bodyPr wrap="square" rtlCol="0" anchor="ctr"/>
+          <a:lstStyle/>
+          <a:p>
+            <a:pPr indent="0" marL="0">
+              <a:buNone/>
+            </a:pPr>
+            <a:r>
+              <a:rPr lang="en-US" sz="1450" dirty="0">
+                <a:solidFill>
+                  <a:srgbClr val="CBD5E1"/>
+                </a:solidFill>
+                <a:latin typeface="Segoe UI" pitchFamily="34" charset="0"/>
+                <a:ea typeface="Segoe UI" pitchFamily="34" charset="-122"/>
+                <a:cs typeface="Segoe UI" pitchFamily="34" charset="-120"/>
+              </a:rPr>
+              <a:t>Why this combination is rare - and available</a:t>
+            </a:r>
+            <a:endParaRPr lang="en-US" sz="1450" dirty="0"/>
+          </a:p>
+        </p:txBody>
+      </p:sp>
+      <p:sp>
+        <p:nvSpPr>
+          <p:cNvPr id="21" name="Text 19"/>
+          <p:cNvSpPr/>
+          <p:nvPr/>
+        </p:nvSpPr>
+        <p:spPr>
+          <a:xfrm>
+            <a:off x="10698480" y="6382512"/>
+            <a:ext cx="1188720" cy="365760"/>
+          </a:xfrm>
+          <a:prstGeom prst="rect">
+            <a:avLst/>
+          </a:prstGeom>
+          <a:noFill/>
+          <a:ln/>
+        </p:spPr>
+        <p:txBody>
+          <a:bodyPr wrap="square" rtlCol="0" anchor="ctr"/>
+          <a:lstStyle/>
+          <a:p>
+            <a:pPr algn="r" indent="0" marL="0">
+              <a:buNone/>
+            </a:pPr>
+            <a:r>
+              <a:rPr lang="en-US" sz="1000" dirty="0">
+                <a:solidFill>
+                  <a:srgbClr val="64748B"/>
+                </a:solidFill>
+                <a:latin typeface="Consolas" pitchFamily="34" charset="0"/>
+                <a:ea typeface="Consolas" pitchFamily="34" charset="-122"/>
+                <a:cs typeface="Consolas" pitchFamily="34" charset="-120"/>
+              </a:rPr>
+              <a:t>2 / 14</a:t>
             </a:r>
             <a:endParaRPr lang="en-US" sz="1000" dirty="0"/>
           </a:p>
@@ -2106,7 +6591,7 @@
                 <a:ea typeface="Consolas" pitchFamily="34" charset="-122"/>
                 <a:cs typeface="Consolas" pitchFamily="34" charset="-120"/>
               </a:rPr>
-              <a:t>WHAT BI TAUGHT ME</a:t>
+              <a:t>TIMELINE</a:t>
             </a:r>
             <a:endParaRPr lang="en-US" sz="1200" dirty="0"/>
           </a:p>
@@ -2120,8 +6605,8 @@
         </p:nvSpPr>
         <p:spPr>
           <a:xfrm>
-            <a:off x="822960" y="960120"/>
-            <a:ext cx="10515600" cy="868680"/>
+            <a:off x="822960" y="914400"/>
+            <a:ext cx="10561320" cy="868680"/>
           </a:xfrm>
           <a:prstGeom prst="rect">
             <a:avLst/>
@@ -2137,7 +6622,7 @@
               <a:buNone/>
             </a:pPr>
             <a:r>
-              <a:rPr lang="en-US" sz="3000" b="1" dirty="0">
+              <a:rPr lang="en-US" sz="2700" b="1" dirty="0">
                 <a:solidFill>
                   <a:srgbClr val="FFFFFF"/>
                 </a:solidFill>
@@ -2145,69 +6630,164 @@
                 <a:ea typeface="Segoe UI" pitchFamily="34" charset="-122"/>
                 <a:cs typeface="Segoe UI" pitchFamily="34" charset="-120"/>
               </a:rPr>
-              <a:t>Skills that transferred perfectly</a:t>
-            </a:r>
-            <a:endParaRPr lang="en-US" sz="3000" dirty="0"/>
-          </a:p>
-        </p:txBody>
-      </p:sp>
-      <p:sp>
-        <p:nvSpPr>
-          <p:cNvPr id="6" name="Text 4"/>
-          <p:cNvSpPr/>
-          <p:nvPr/>
-        </p:nvSpPr>
-        <p:spPr>
-          <a:xfrm>
-            <a:off x="868680" y="2057400"/>
-            <a:ext cx="10424160" cy="3566160"/>
-          </a:xfrm>
-          <a:prstGeom prst="rect">
-            <a:avLst/>
-          </a:prstGeom>
-          <a:noFill/>
-          <a:ln/>
-        </p:spPr>
-        <p:txBody>
-          <a:bodyPr wrap="square" rtlCol="0" anchor="t"/>
-          <a:lstStyle/>
-          <a:p>
-            <a:pPr marL="342900" indent="-342900">
-              <a:lnSpc>
-                <a:spcPct val="115000"/>
-              </a:lnSpc>
-              <a:spcAft>
-                <a:spcPts val="1000"/>
-              </a:spcAft>
-              <a:buSzPct val="100000"/>
-              <a:buChar char="▸"/>
-            </a:pPr>
-            <a:r>
-              <a:rPr lang="en-US" sz="1600" dirty="0">
-                <a:solidFill>
-                  <a:srgbClr val="CBD5E1"/>
+              <a:t>Four chapters, one direction: every role set up the next</a:t>
+            </a:r>
+            <a:endParaRPr lang="en-US" sz="2700" dirty="0"/>
+          </a:p>
+        </p:txBody>
+      </p:sp>
+      <p:sp>
+        <p:nvSpPr>
+          <p:cNvPr id="6" name="Shape 4"/>
+          <p:cNvSpPr/>
+          <p:nvPr/>
+        </p:nvSpPr>
+        <p:spPr>
+          <a:xfrm>
+            <a:off x="1371600" y="3035808"/>
+            <a:ext cx="9464040" cy="0"/>
+          </a:xfrm>
+          <a:prstGeom prst="line">
+            <a:avLst/>
+          </a:prstGeom>
+          <a:noFill/>
+          <a:ln w="25400">
+            <a:solidFill>
+              <a:srgbClr val="24365A"/>
+            </a:solidFill>
+            <a:prstDash val="solid"/>
+          </a:ln>
+        </p:spPr>
+      </p:sp>
+      <p:sp>
+        <p:nvSpPr>
+          <p:cNvPr id="7" name="Shape 5"/>
+          <p:cNvSpPr/>
+          <p:nvPr/>
+        </p:nvSpPr>
+        <p:spPr>
+          <a:xfrm>
+            <a:off x="1289304" y="2953512"/>
+            <a:ext cx="164592" cy="164592"/>
+          </a:xfrm>
+          <a:prstGeom prst="ellipse">
+            <a:avLst/>
+          </a:prstGeom>
+          <a:solidFill>
+            <a:srgbClr val="3B82F6"/>
+          </a:solidFill>
+          <a:ln w="19050">
+            <a:solidFill>
+              <a:srgbClr val="0A0C12"/>
+            </a:solidFill>
+            <a:prstDash val="solid"/>
+          </a:ln>
+        </p:spPr>
+      </p:sp>
+      <p:sp>
+        <p:nvSpPr>
+          <p:cNvPr id="8" name="Text 6"/>
+          <p:cNvSpPr/>
+          <p:nvPr/>
+        </p:nvSpPr>
+        <p:spPr>
+          <a:xfrm>
+            <a:off x="342900" y="2395728"/>
+            <a:ext cx="2057400" cy="365760"/>
+          </a:xfrm>
+          <a:prstGeom prst="rect">
+            <a:avLst/>
+          </a:prstGeom>
+          <a:noFill/>
+          <a:ln/>
+        </p:spPr>
+        <p:txBody>
+          <a:bodyPr wrap="square" rtlCol="0" anchor="ctr"/>
+          <a:lstStyle/>
+          <a:p>
+            <a:pPr algn="ctr" indent="0" marL="0">
+              <a:buNone/>
+            </a:pPr>
+            <a:r>
+              <a:rPr lang="en-US" sz="1100" b="1" dirty="0">
+                <a:solidFill>
+                  <a:srgbClr val="3B82F6"/>
+                </a:solidFill>
+                <a:latin typeface="Consolas" pitchFamily="34" charset="0"/>
+                <a:ea typeface="Consolas" pitchFamily="34" charset="-122"/>
+                <a:cs typeface="Consolas" pitchFamily="34" charset="-120"/>
+              </a:rPr>
+              <a:t>Aug 2022</a:t>
+            </a:r>
+            <a:endParaRPr lang="en-US" sz="1100" dirty="0"/>
+          </a:p>
+        </p:txBody>
+      </p:sp>
+      <p:sp>
+        <p:nvSpPr>
+          <p:cNvPr id="9" name="Text 7"/>
+          <p:cNvSpPr/>
+          <p:nvPr/>
+        </p:nvSpPr>
+        <p:spPr>
+          <a:xfrm>
+            <a:off x="342900" y="3310128"/>
+            <a:ext cx="2057400" cy="566928"/>
+          </a:xfrm>
+          <a:prstGeom prst="rect">
+            <a:avLst/>
+          </a:prstGeom>
+          <a:noFill/>
+          <a:ln/>
+        </p:spPr>
+        <p:txBody>
+          <a:bodyPr wrap="square" rtlCol="0" anchor="ctr"/>
+          <a:lstStyle/>
+          <a:p>
+            <a:pPr algn="ctr" indent="0" marL="0">
+              <a:buNone/>
+            </a:pPr>
+            <a:r>
+              <a:rPr lang="en-US" sz="1250" b="1" dirty="0">
+                <a:solidFill>
+                  <a:srgbClr val="FFFFFF"/>
                 </a:solidFill>
                 <a:latin typeface="Segoe UI" pitchFamily="34" charset="0"/>
                 <a:ea typeface="Segoe UI" pitchFamily="34" charset="-122"/>
                 <a:cs typeface="Segoe UI" pitchFamily="34" charset="-120"/>
               </a:rPr>
-              <a:t>Requirements are 80% of success - unclear questions, useless answers</a:t>
-            </a:r>
-            <a:endParaRPr lang="en-US" sz="1600" dirty="0"/>
-          </a:p>
-          <a:p>
-            <a:pPr marL="342900" indent="-342900">
-              <a:lnSpc>
-                <a:spcPct val="115000"/>
-              </a:lnSpc>
-              <a:spcAft>
-                <a:spcPts val="1000"/>
-              </a:spcAft>
-              <a:buSzPct val="100000"/>
-              <a:buChar char="▸"/>
-            </a:pPr>
-            <a:r>
-              <a:rPr lang="en-US" sz="1600" dirty="0">
+              <a:t>Customer Analytics - RevoU × Tokopedia</a:t>
+            </a:r>
+            <a:endParaRPr lang="en-US" sz="1250" dirty="0"/>
+          </a:p>
+        </p:txBody>
+      </p:sp>
+      <p:sp>
+        <p:nvSpPr>
+          <p:cNvPr id="10" name="Text 8"/>
+          <p:cNvSpPr/>
+          <p:nvPr/>
+        </p:nvSpPr>
+        <p:spPr>
+          <a:xfrm>
+            <a:off x="342900" y="3895344"/>
+            <a:ext cx="2057400" cy="1234440"/>
+          </a:xfrm>
+          <a:prstGeom prst="rect">
+            <a:avLst/>
+          </a:prstGeom>
+          <a:noFill/>
+          <a:ln/>
+        </p:spPr>
+        <p:txBody>
+          <a:bodyPr wrap="square" rtlCol="0" anchor="ctr"/>
+          <a:lstStyle/>
+          <a:p>
+            <a:pPr algn="ctr" indent="0" marL="0">
+              <a:buNone/>
+            </a:pPr>
+            <a:r>
+              <a:rPr lang="en-US" sz="1000" dirty="0">
                 <a:solidFill>
                   <a:srgbClr val="CBD5E1"/>
                 </a:solidFill>
@@ -2215,47 +6795,141 @@
                 <a:ea typeface="Segoe UI" pitchFamily="34" charset="-122"/>
                 <a:cs typeface="Segoe UI" pitchFamily="34" charset="-120"/>
               </a:rPr>
-              <a:t>Data quality is a product, not a chore</a:t>
-            </a:r>
-            <a:endParaRPr lang="en-US" sz="1600" dirty="0"/>
-          </a:p>
-          <a:p>
-            <a:pPr marL="342900" indent="-342900">
-              <a:lnSpc>
-                <a:spcPct val="115000"/>
-              </a:lnSpc>
-              <a:spcAft>
-                <a:spcPts val="1000"/>
-              </a:spcAft>
-              <a:buSzPct val="100000"/>
-              <a:buChar char="▸"/>
-            </a:pPr>
-            <a:r>
-              <a:rPr lang="en-US" sz="1600" dirty="0">
-                <a:solidFill>
-                  <a:srgbClr val="CBD5E1"/>
+              <a:t>Segmentation, churn, and feature adoption on real e-commerce data, evaluated by the Tokopedia analytics team.</a:t>
+            </a:r>
+            <a:endParaRPr lang="en-US" sz="1000" dirty="0"/>
+          </a:p>
+        </p:txBody>
+      </p:sp>
+      <p:sp>
+        <p:nvSpPr>
+          <p:cNvPr id="11" name="Shape 9"/>
+          <p:cNvSpPr/>
+          <p:nvPr/>
+        </p:nvSpPr>
+        <p:spPr>
+          <a:xfrm>
+            <a:off x="4443984" y="2953512"/>
+            <a:ext cx="164592" cy="164592"/>
+          </a:xfrm>
+          <a:prstGeom prst="ellipse">
+            <a:avLst/>
+          </a:prstGeom>
+          <a:solidFill>
+            <a:srgbClr val="06B6D4"/>
+          </a:solidFill>
+          <a:ln w="19050">
+            <a:solidFill>
+              <a:srgbClr val="0A0C12"/>
+            </a:solidFill>
+            <a:prstDash val="solid"/>
+          </a:ln>
+        </p:spPr>
+      </p:sp>
+      <p:sp>
+        <p:nvSpPr>
+          <p:cNvPr id="12" name="Text 10"/>
+          <p:cNvSpPr/>
+          <p:nvPr/>
+        </p:nvSpPr>
+        <p:spPr>
+          <a:xfrm>
+            <a:off x="3497580" y="2395728"/>
+            <a:ext cx="2057400" cy="365760"/>
+          </a:xfrm>
+          <a:prstGeom prst="rect">
+            <a:avLst/>
+          </a:prstGeom>
+          <a:noFill/>
+          <a:ln/>
+        </p:spPr>
+        <p:txBody>
+          <a:bodyPr wrap="square" rtlCol="0" anchor="ctr"/>
+          <a:lstStyle/>
+          <a:p>
+            <a:pPr algn="ctr" indent="0" marL="0">
+              <a:buNone/>
+            </a:pPr>
+            <a:r>
+              <a:rPr lang="en-US" sz="1100" b="1" dirty="0">
+                <a:solidFill>
+                  <a:srgbClr val="06B6D4"/>
+                </a:solidFill>
+                <a:latin typeface="Consolas" pitchFamily="34" charset="0"/>
+                <a:ea typeface="Consolas" pitchFamily="34" charset="-122"/>
+                <a:cs typeface="Consolas" pitchFamily="34" charset="-120"/>
+              </a:rPr>
+              <a:t>Feb 2023</a:t>
+            </a:r>
+            <a:endParaRPr lang="en-US" sz="1100" dirty="0"/>
+          </a:p>
+        </p:txBody>
+      </p:sp>
+      <p:sp>
+        <p:nvSpPr>
+          <p:cNvPr id="13" name="Text 11"/>
+          <p:cNvSpPr/>
+          <p:nvPr/>
+        </p:nvSpPr>
+        <p:spPr>
+          <a:xfrm>
+            <a:off x="3497580" y="3310128"/>
+            <a:ext cx="2057400" cy="566928"/>
+          </a:xfrm>
+          <a:prstGeom prst="rect">
+            <a:avLst/>
+          </a:prstGeom>
+          <a:noFill/>
+          <a:ln/>
+        </p:spPr>
+        <p:txBody>
+          <a:bodyPr wrap="square" rtlCol="0" anchor="ctr"/>
+          <a:lstStyle/>
+          <a:p>
+            <a:pPr algn="ctr" indent="0" marL="0">
+              <a:buNone/>
+            </a:pPr>
+            <a:r>
+              <a:rPr lang="en-US" sz="1250" b="1" dirty="0">
+                <a:solidFill>
+                  <a:srgbClr val="FFFFFF"/>
                 </a:solidFill>
                 <a:latin typeface="Segoe UI" pitchFamily="34" charset="0"/>
                 <a:ea typeface="Segoe UI" pitchFamily="34" charset="-122"/>
                 <a:cs typeface="Segoe UI" pitchFamily="34" charset="-120"/>
               </a:rPr>
-              <a:t>Stakeholder trust is earned row by row</a:t>
-            </a:r>
-            <a:endParaRPr lang="en-US" sz="1600" dirty="0"/>
-          </a:p>
-          <a:p>
-            <a:pPr marL="342900" indent="-342900">
-              <a:lnSpc>
-                <a:spcPct val="115000"/>
-              </a:lnSpc>
-              <a:spcAft>
-                <a:spcPts val="1000"/>
-              </a:spcAft>
-              <a:buSzPct val="100000"/>
-              <a:buChar char="▸"/>
-            </a:pPr>
-            <a:r>
-              <a:rPr lang="en-US" sz="1600" dirty="0">
+              <a:t>IT Business Analyst - BRI AML Project</a:t>
+            </a:r>
+            <a:endParaRPr lang="en-US" sz="1250" dirty="0"/>
+          </a:p>
+        </p:txBody>
+      </p:sp>
+      <p:sp>
+        <p:nvSpPr>
+          <p:cNvPr id="14" name="Text 12"/>
+          <p:cNvSpPr/>
+          <p:nvPr/>
+        </p:nvSpPr>
+        <p:spPr>
+          <a:xfrm>
+            <a:off x="3497580" y="3895344"/>
+            <a:ext cx="2057400" cy="1234440"/>
+          </a:xfrm>
+          <a:prstGeom prst="rect">
+            <a:avLst/>
+          </a:prstGeom>
+          <a:noFill/>
+          <a:ln/>
+        </p:spPr>
+        <p:txBody>
+          <a:bodyPr wrap="square" rtlCol="0" anchor="ctr"/>
+          <a:lstStyle/>
+          <a:p>
+            <a:pPr algn="ctr" indent="0" marL="0">
+              <a:buNone/>
+            </a:pPr>
+            <a:r>
+              <a:rPr lang="en-US" sz="1000" dirty="0">
                 <a:solidFill>
                   <a:srgbClr val="CBD5E1"/>
                 </a:solidFill>
@@ -2263,22 +6937,47 @@
                 <a:ea typeface="Segoe UI" pitchFamily="34" charset="-122"/>
                 <a:cs typeface="Segoe UI" pitchFamily="34" charset="-120"/>
               </a:rPr>
-              <a:t>The best part of every job was building the machine that does the job</a:t>
-            </a:r>
-            <a:endParaRPr lang="en-US" sz="1600" dirty="0"/>
-          </a:p>
-        </p:txBody>
-      </p:sp>
-      <p:sp>
-        <p:nvSpPr>
-          <p:cNvPr id="7" name="Text 5"/>
-          <p:cNvSpPr/>
-          <p:nvPr/>
-        </p:nvSpPr>
-        <p:spPr>
-          <a:xfrm>
-            <a:off x="10698480" y="6355080"/>
-            <a:ext cx="1188720" cy="365760"/>
+              <a:t>Graph-database anti-money-laundering analysis: requirements, pattern definition, auditor-ready documentation.</a:t>
+            </a:r>
+            <a:endParaRPr lang="en-US" sz="1000" dirty="0"/>
+          </a:p>
+        </p:txBody>
+      </p:sp>
+      <p:sp>
+        <p:nvSpPr>
+          <p:cNvPr id="15" name="Shape 13"/>
+          <p:cNvSpPr/>
+          <p:nvPr/>
+        </p:nvSpPr>
+        <p:spPr>
+          <a:xfrm>
+            <a:off x="7598664" y="2953512"/>
+            <a:ext cx="164592" cy="164592"/>
+          </a:xfrm>
+          <a:prstGeom prst="ellipse">
+            <a:avLst/>
+          </a:prstGeom>
+          <a:solidFill>
+            <a:srgbClr val="3B82F6"/>
+          </a:solidFill>
+          <a:ln w="19050">
+            <a:solidFill>
+              <a:srgbClr val="0A0C12"/>
+            </a:solidFill>
+            <a:prstDash val="solid"/>
+          </a:ln>
+        </p:spPr>
+      </p:sp>
+      <p:sp>
+        <p:nvSpPr>
+          <p:cNvPr id="16" name="Text 14"/>
+          <p:cNvSpPr/>
+          <p:nvPr/>
+        </p:nvSpPr>
+        <p:spPr>
+          <a:xfrm>
+            <a:off x="6652260" y="2395728"/>
+            <a:ext cx="2057400" cy="365760"/>
           </a:xfrm>
           <a:prstGeom prst="rect">
             <a:avLst/>
@@ -2290,19 +6989,340 @@
           <a:bodyPr wrap="square" rtlCol="0" anchor="ctr"/>
           <a:lstStyle/>
           <a:p>
-            <a:pPr algn="r" indent="0" marL="0">
+            <a:pPr algn="ctr" indent="0" marL="0">
               <a:buNone/>
             </a:pPr>
             <a:r>
-              <a:rPr lang="en-US" sz="1000" dirty="0">
-                <a:solidFill>
-                  <a:srgbClr val="64748B"/>
+              <a:rPr lang="en-US" sz="1100" b="1" dirty="0">
+                <a:solidFill>
+                  <a:srgbClr val="3B82F6"/>
                 </a:solidFill>
                 <a:latin typeface="Consolas" pitchFamily="34" charset="0"/>
                 <a:ea typeface="Consolas" pitchFamily="34" charset="-122"/>
                 <a:cs typeface="Consolas" pitchFamily="34" charset="-120"/>
               </a:rPr>
-              <a:t>3 / 8</a:t>
+              <a:t>Oct 2023</a:t>
+            </a:r>
+            <a:endParaRPr lang="en-US" sz="1100" dirty="0"/>
+          </a:p>
+        </p:txBody>
+      </p:sp>
+      <p:sp>
+        <p:nvSpPr>
+          <p:cNvPr id="17" name="Text 15"/>
+          <p:cNvSpPr/>
+          <p:nvPr/>
+        </p:nvSpPr>
+        <p:spPr>
+          <a:xfrm>
+            <a:off x="6652260" y="3310128"/>
+            <a:ext cx="2057400" cy="566928"/>
+          </a:xfrm>
+          <a:prstGeom prst="rect">
+            <a:avLst/>
+          </a:prstGeom>
+          <a:noFill/>
+          <a:ln/>
+        </p:spPr>
+        <p:txBody>
+          <a:bodyPr wrap="square" rtlCol="0" anchor="ctr"/>
+          <a:lstStyle/>
+          <a:p>
+            <a:pPr algn="ctr" indent="0" marL="0">
+              <a:buNone/>
+            </a:pPr>
+            <a:r>
+              <a:rPr lang="en-US" sz="1250" b="1" dirty="0">
+                <a:solidFill>
+                  <a:srgbClr val="FFFFFF"/>
+                </a:solidFill>
+                <a:latin typeface="Segoe UI" pitchFamily="34" charset="0"/>
+                <a:ea typeface="Segoe UI" pitchFamily="34" charset="-122"/>
+                <a:cs typeface="Segoe UI" pitchFamily="34" charset="-120"/>
+              </a:rPr>
+              <a:t>Regional BI Specialist - IKEA Indonesia</a:t>
+            </a:r>
+            <a:endParaRPr lang="en-US" sz="1250" dirty="0"/>
+          </a:p>
+        </p:txBody>
+      </p:sp>
+      <p:sp>
+        <p:nvSpPr>
+          <p:cNvPr id="18" name="Text 16"/>
+          <p:cNvSpPr/>
+          <p:nvPr/>
+        </p:nvSpPr>
+        <p:spPr>
+          <a:xfrm>
+            <a:off x="6652260" y="3895344"/>
+            <a:ext cx="2057400" cy="1234440"/>
+          </a:xfrm>
+          <a:prstGeom prst="rect">
+            <a:avLst/>
+          </a:prstGeom>
+          <a:noFill/>
+          <a:ln/>
+        </p:spPr>
+        <p:txBody>
+          <a:bodyPr wrap="square" rtlCol="0" anchor="ctr"/>
+          <a:lstStyle/>
+          <a:p>
+            <a:pPr algn="ctr" indent="0" marL="0">
+              <a:buNone/>
+            </a:pPr>
+            <a:r>
+              <a:rPr lang="en-US" sz="1000" dirty="0">
+                <a:solidFill>
+                  <a:srgbClr val="CBD5E1"/>
+                </a:solidFill>
+                <a:latin typeface="Segoe UI" pitchFamily="34" charset="0"/>
+                <a:ea typeface="Segoe UI" pitchFamily="34" charset="-122"/>
+                <a:cs typeface="Segoe UI" pitchFamily="34" charset="-120"/>
+              </a:rPr>
+              <a:t>BI operations for Indonesia, Taiwan, Hong Kong, and Macau: one datalake, Qlik Sense, Alteryx pipelines.</a:t>
+            </a:r>
+            <a:endParaRPr lang="en-US" sz="1000" dirty="0"/>
+          </a:p>
+        </p:txBody>
+      </p:sp>
+      <p:sp>
+        <p:nvSpPr>
+          <p:cNvPr id="19" name="Shape 17"/>
+          <p:cNvSpPr/>
+          <p:nvPr/>
+        </p:nvSpPr>
+        <p:spPr>
+          <a:xfrm>
+            <a:off x="10753344" y="2953512"/>
+            <a:ext cx="164592" cy="164592"/>
+          </a:xfrm>
+          <a:prstGeom prst="ellipse">
+            <a:avLst/>
+          </a:prstGeom>
+          <a:solidFill>
+            <a:srgbClr val="06B6D4"/>
+          </a:solidFill>
+          <a:ln w="19050">
+            <a:solidFill>
+              <a:srgbClr val="0A0C12"/>
+            </a:solidFill>
+            <a:prstDash val="solid"/>
+          </a:ln>
+        </p:spPr>
+      </p:sp>
+      <p:sp>
+        <p:nvSpPr>
+          <p:cNvPr id="20" name="Text 18"/>
+          <p:cNvSpPr/>
+          <p:nvPr/>
+        </p:nvSpPr>
+        <p:spPr>
+          <a:xfrm>
+            <a:off x="9806940" y="2395728"/>
+            <a:ext cx="2057400" cy="365760"/>
+          </a:xfrm>
+          <a:prstGeom prst="rect">
+            <a:avLst/>
+          </a:prstGeom>
+          <a:noFill/>
+          <a:ln/>
+        </p:spPr>
+        <p:txBody>
+          <a:bodyPr wrap="square" rtlCol="0" anchor="ctr"/>
+          <a:lstStyle/>
+          <a:p>
+            <a:pPr algn="ctr" indent="0" marL="0">
+              <a:buNone/>
+            </a:pPr>
+            <a:r>
+              <a:rPr lang="en-US" sz="1100" b="1" dirty="0">
+                <a:solidFill>
+                  <a:srgbClr val="06B6D4"/>
+                </a:solidFill>
+                <a:latin typeface="Consolas" pitchFamily="34" charset="0"/>
+                <a:ea typeface="Consolas" pitchFamily="34" charset="-122"/>
+                <a:cs typeface="Consolas" pitchFamily="34" charset="-120"/>
+              </a:rPr>
+              <a:t>Apr 2024</a:t>
+            </a:r>
+            <a:endParaRPr lang="en-US" sz="1100" dirty="0"/>
+          </a:p>
+        </p:txBody>
+      </p:sp>
+      <p:sp>
+        <p:nvSpPr>
+          <p:cNvPr id="21" name="Text 19"/>
+          <p:cNvSpPr/>
+          <p:nvPr/>
+        </p:nvSpPr>
+        <p:spPr>
+          <a:xfrm>
+            <a:off x="9806940" y="3310128"/>
+            <a:ext cx="2057400" cy="566928"/>
+          </a:xfrm>
+          <a:prstGeom prst="rect">
+            <a:avLst/>
+          </a:prstGeom>
+          <a:noFill/>
+          <a:ln/>
+        </p:spPr>
+        <p:txBody>
+          <a:bodyPr wrap="square" rtlCol="0" anchor="ctr"/>
+          <a:lstStyle/>
+          <a:p>
+            <a:pPr algn="ctr" indent="0" marL="0">
+              <a:buNone/>
+            </a:pPr>
+            <a:r>
+              <a:rPr lang="en-US" sz="1250" b="1" dirty="0">
+                <a:solidFill>
+                  <a:srgbClr val="FFFFFF"/>
+                </a:solidFill>
+                <a:latin typeface="Segoe UI" pitchFamily="34" charset="0"/>
+                <a:ea typeface="Segoe UI" pitchFamily="34" charset="-122"/>
+                <a:cs typeface="Segoe UI" pitchFamily="34" charset="-120"/>
+              </a:rPr>
+              <a:t>Founder &amp; Lead AI Engineer - Zalin Labs</a:t>
+            </a:r>
+            <a:endParaRPr lang="en-US" sz="1250" dirty="0"/>
+          </a:p>
+        </p:txBody>
+      </p:sp>
+      <p:sp>
+        <p:nvSpPr>
+          <p:cNvPr id="22" name="Text 20"/>
+          <p:cNvSpPr/>
+          <p:nvPr/>
+        </p:nvSpPr>
+        <p:spPr>
+          <a:xfrm>
+            <a:off x="9806940" y="3895344"/>
+            <a:ext cx="2057400" cy="1234440"/>
+          </a:xfrm>
+          <a:prstGeom prst="rect">
+            <a:avLst/>
+          </a:prstGeom>
+          <a:noFill/>
+          <a:ln/>
+        </p:spPr>
+        <p:txBody>
+          <a:bodyPr wrap="square" rtlCol="0" anchor="ctr"/>
+          <a:lstStyle/>
+          <a:p>
+            <a:pPr algn="ctr" indent="0" marL="0">
+              <a:buNone/>
+            </a:pPr>
+            <a:r>
+              <a:rPr lang="en-US" sz="1000" dirty="0">
+                <a:solidFill>
+                  <a:srgbClr val="CBD5E1"/>
+                </a:solidFill>
+                <a:latin typeface="Segoe UI" pitchFamily="34" charset="0"/>
+                <a:ea typeface="Segoe UI" pitchFamily="34" charset="-122"/>
+                <a:cs typeface="Segoe UI" pitchFamily="34" charset="-120"/>
+              </a:rPr>
+              <a:t>ZalinOS, a nine-agent workforce, 30+ production apps, and two open-source frameworks - built and shipped solo.</a:t>
+            </a:r>
+            <a:endParaRPr lang="en-US" sz="1000" dirty="0"/>
+          </a:p>
+        </p:txBody>
+      </p:sp>
+      <p:sp>
+        <p:nvSpPr>
+          <p:cNvPr id="23" name="Shape 21"/>
+          <p:cNvSpPr/>
+          <p:nvPr/>
+        </p:nvSpPr>
+        <p:spPr>
+          <a:xfrm>
+            <a:off x="822960" y="5961888"/>
+            <a:ext cx="10515600" cy="0"/>
+          </a:xfrm>
+          <a:prstGeom prst="line">
+            <a:avLst/>
+          </a:prstGeom>
+          <a:noFill/>
+          <a:ln w="12700">
+            <a:solidFill>
+              <a:srgbClr val="1E2D45"/>
+            </a:solidFill>
+            <a:prstDash val="solid"/>
+          </a:ln>
+        </p:spPr>
+      </p:sp>
+      <p:sp>
+        <p:nvSpPr>
+          <p:cNvPr id="24" name="Text 22"/>
+          <p:cNvSpPr/>
+          <p:nvPr/>
+        </p:nvSpPr>
+        <p:spPr>
+          <a:xfrm>
+            <a:off x="822960" y="6053328"/>
+            <a:ext cx="9692640" cy="457200"/>
+          </a:xfrm>
+          <a:prstGeom prst="rect">
+            <a:avLst/>
+          </a:prstGeom>
+          <a:noFill/>
+          <a:ln/>
+        </p:spPr>
+        <p:txBody>
+          <a:bodyPr wrap="square" rtlCol="0" anchor="ctr"/>
+          <a:lstStyle/>
+          <a:p>
+            <a:pPr indent="0" marL="0">
+              <a:buNone/>
+            </a:pPr>
+            <a:r>
+              <a:rPr lang="en-US" sz="1150" dirty="0">
+                <a:solidFill>
+                  <a:srgbClr val="64748B"/>
+                </a:solidFill>
+                <a:latin typeface="Segoe UI" pitchFamily="34" charset="0"/>
+                <a:ea typeface="Segoe UI" pitchFamily="34" charset="-122"/>
+                <a:cs typeface="Segoe UI" pitchFamily="34" charset="-120"/>
+              </a:rPr>
+              <a:t>Analytics fundamentals led to technical analyst roles, then regional platform ownership, then the automation company.</a:t>
+            </a:r>
+            <a:endParaRPr lang="en-US" sz="1150" dirty="0"/>
+          </a:p>
+        </p:txBody>
+      </p:sp>
+      <p:sp>
+        <p:nvSpPr>
+          <p:cNvPr id="25" name="Text 23"/>
+          <p:cNvSpPr/>
+          <p:nvPr/>
+        </p:nvSpPr>
+        <p:spPr>
+          <a:xfrm>
+            <a:off x="10698480" y="6382512"/>
+            <a:ext cx="1188720" cy="365760"/>
+          </a:xfrm>
+          <a:prstGeom prst="rect">
+            <a:avLst/>
+          </a:prstGeom>
+          <a:noFill/>
+          <a:ln/>
+        </p:spPr>
+        <p:txBody>
+          <a:bodyPr wrap="square" rtlCol="0" anchor="ctr"/>
+          <a:lstStyle/>
+          <a:p>
+            <a:pPr algn="r" indent="0" marL="0">
+              <a:buNone/>
+            </a:pPr>
+            <a:r>
+              <a:rPr lang="en-US" sz="1000" dirty="0">
+                <a:solidFill>
+                  <a:srgbClr val="64748B"/>
+                </a:solidFill>
+                <a:latin typeface="Consolas" pitchFamily="34" charset="0"/>
+                <a:ea typeface="Consolas" pitchFamily="34" charset="-122"/>
+                <a:cs typeface="Consolas" pitchFamily="34" charset="-120"/>
+              </a:rPr>
+              <a:t>3 / 14</a:t>
             </a:r>
             <a:endParaRPr lang="en-US" sz="1000" dirty="0"/>
           </a:p>
@@ -2413,7 +7433,7 @@
                 <a:ea typeface="Consolas" pitchFamily="34" charset="-122"/>
                 <a:cs typeface="Consolas" pitchFamily="34" charset="-120"/>
               </a:rPr>
-              <a:t>WHY THE LEAP</a:t>
+              <a:t>WHAT TRANSFERRED</a:t>
             </a:r>
             <a:endParaRPr lang="en-US" sz="1200" dirty="0"/>
           </a:p>
@@ -2427,8 +7447,8 @@
         </p:nvSpPr>
         <p:spPr>
           <a:xfrm>
-            <a:off x="822960" y="960120"/>
-            <a:ext cx="10515600" cy="868680"/>
+            <a:off x="822960" y="914400"/>
+            <a:ext cx="10561320" cy="868680"/>
           </a:xfrm>
           <a:prstGeom prst="rect">
             <a:avLst/>
@@ -2444,7 +7464,7 @@
               <a:buNone/>
             </a:pPr>
             <a:r>
-              <a:rPr lang="en-US" sz="3000" b="1" dirty="0">
+              <a:rPr lang="en-US" sz="2700" b="1" dirty="0">
                 <a:solidFill>
                   <a:srgbClr val="FFFFFF"/>
                 </a:solidFill>
@@ -2452,9 +7472,9 @@
                 <a:ea typeface="Segoe UI" pitchFamily="34" charset="-122"/>
                 <a:cs typeface="Segoe UI" pitchFamily="34" charset="-120"/>
               </a:rPr>
-              <a:t>The automation itch became undeniable</a:t>
-            </a:r>
-            <a:endParaRPr lang="en-US" sz="3000" dirty="0"/>
+              <a:t>Skills that compounded instead of restarting</a:t>
+            </a:r>
+            <a:endParaRPr lang="en-US" sz="2700" dirty="0"/>
           </a:p>
         </p:txBody>
       </p:sp>
@@ -2466,7 +7486,7 @@
         </p:nvSpPr>
         <p:spPr>
           <a:xfrm>
-            <a:off x="868680" y="2057400"/>
+            <a:off x="868680" y="2011680"/>
             <a:ext cx="10424160" cy="3566160"/>
           </a:xfrm>
           <a:prstGeom prst="rect">
@@ -2481,10 +7501,10 @@
           <a:p>
             <a:pPr marL="342900" indent="-342900">
               <a:lnSpc>
-                <a:spcPct val="115000"/>
+                <a:spcPct val="112000"/>
               </a:lnSpc>
               <a:spcAft>
-                <a:spcPts val="1000"/>
+                <a:spcPts val="900"/>
               </a:spcAft>
               <a:buSzPct val="100000"/>
               <a:buChar char="▸"/>
@@ -2498,17 +7518,17 @@
                 <a:ea typeface="Segoe UI" pitchFamily="34" charset="-122"/>
                 <a:cs typeface="Segoe UI" pitchFamily="34" charset="-120"/>
               </a:rPr>
-              <a:t>AI agents turned leverage from a management skill into a technology</a:t>
+              <a:t>Requirements are 80% of success - unclear questions produce useless answers in analytics and in agent design alike.</a:t>
             </a:r>
             <a:endParaRPr lang="en-US" sz="1600" dirty="0"/>
           </a:p>
           <a:p>
             <a:pPr marL="342900" indent="-342900">
               <a:lnSpc>
-                <a:spcPct val="115000"/>
+                <a:spcPct val="112000"/>
               </a:lnSpc>
               <a:spcAft>
-                <a:spcPts val="1000"/>
+                <a:spcPts val="900"/>
               </a:spcAft>
               <a:buSzPct val="100000"/>
               <a:buChar char="▸"/>
@@ -2522,17 +7542,17 @@
                 <a:ea typeface="Segoe UI" pitchFamily="34" charset="-122"/>
                 <a:cs typeface="Segoe UI" pitchFamily="34" charset="-120"/>
               </a:rPr>
-              <a:t>One disciplined person with reliable agents ships like a team</a:t>
+              <a:t>Data quality discipline: an agent company runs on trustworthy internal data, and enterprise BI taught me that paranoia.</a:t>
             </a:r>
             <a:endParaRPr lang="en-US" sz="1600" dirty="0"/>
           </a:p>
           <a:p>
             <a:pPr marL="342900" indent="-342900">
               <a:lnSpc>
-                <a:spcPct val="115000"/>
+                <a:spcPct val="112000"/>
               </a:lnSpc>
               <a:spcAft>
-                <a:spcPts val="1000"/>
+                <a:spcPts val="900"/>
               </a:spcAft>
               <a:buSzPct val="100000"/>
               <a:buChar char="▸"/>
@@ -2546,17 +7566,17 @@
                 <a:ea typeface="Segoe UI" pitchFamily="34" charset="-122"/>
                 <a:cs typeface="Segoe UI" pitchFamily="34" charset="-120"/>
               </a:rPr>
-              <a:t>Founders decide; agents execute; quality gates keep both honest</a:t>
+              <a:t>Stakeholder communication: explaining AML patterns to auditors is the same muscle as explaining agent behavior to a recruiter.</a:t>
             </a:r>
             <a:endParaRPr lang="en-US" sz="1600" dirty="0"/>
           </a:p>
           <a:p>
             <a:pPr marL="342900" indent="-342900">
               <a:lnSpc>
-                <a:spcPct val="115000"/>
+                <a:spcPct val="112000"/>
               </a:lnSpc>
               <a:spcAft>
-                <a:spcPts val="1000"/>
+                <a:spcPts val="900"/>
               </a:spcAft>
               <a:buSzPct val="100000"/>
               <a:buChar char="▸"/>
@@ -2570,7 +7590,7 @@
                 <a:ea typeface="Segoe UI" pitchFamily="34" charset="-122"/>
                 <a:cs typeface="Segoe UI" pitchFamily="34" charset="-120"/>
               </a:rPr>
-              <a:t>The cost of building software collapsed - the cost of judgment did not</a:t>
+              <a:t>The automation instinct: the best part of every BI job was building the machine that does the job.</a:t>
             </a:r>
             <a:endParaRPr lang="en-US" sz="1600" dirty="0"/>
           </a:p>
@@ -2578,13 +7598,75 @@
       </p:sp>
       <p:sp>
         <p:nvSpPr>
-          <p:cNvPr id="7" name="Text 5"/>
-          <p:cNvSpPr/>
-          <p:nvPr/>
-        </p:nvSpPr>
-        <p:spPr>
-          <a:xfrm>
-            <a:off x="10698480" y="6355080"/>
+          <p:cNvPr id="7" name="Shape 5"/>
+          <p:cNvSpPr/>
+          <p:nvPr/>
+        </p:nvSpPr>
+        <p:spPr>
+          <a:xfrm>
+            <a:off x="822960" y="5961888"/>
+            <a:ext cx="10515600" cy="0"/>
+          </a:xfrm>
+          <a:prstGeom prst="line">
+            <a:avLst/>
+          </a:prstGeom>
+          <a:noFill/>
+          <a:ln w="12700">
+            <a:solidFill>
+              <a:srgbClr val="1E2D45"/>
+            </a:solidFill>
+            <a:prstDash val="solid"/>
+          </a:ln>
+        </p:spPr>
+      </p:sp>
+      <p:sp>
+        <p:nvSpPr>
+          <p:cNvPr id="8" name="Text 6"/>
+          <p:cNvSpPr/>
+          <p:nvPr/>
+        </p:nvSpPr>
+        <p:spPr>
+          <a:xfrm>
+            <a:off x="822960" y="6053328"/>
+            <a:ext cx="9692640" cy="457200"/>
+          </a:xfrm>
+          <a:prstGeom prst="rect">
+            <a:avLst/>
+          </a:prstGeom>
+          <a:noFill/>
+          <a:ln/>
+        </p:spPr>
+        <p:txBody>
+          <a:bodyPr wrap="square" rtlCol="0" anchor="ctr"/>
+          <a:lstStyle/>
+          <a:p>
+            <a:pPr indent="0" marL="0">
+              <a:buNone/>
+            </a:pPr>
+            <a:r>
+              <a:rPr lang="en-US" sz="1150" dirty="0">
+                <a:solidFill>
+                  <a:srgbClr val="64748B"/>
+                </a:solidFill>
+                <a:latin typeface="Segoe UI" pitchFamily="34" charset="0"/>
+                <a:ea typeface="Segoe UI" pitchFamily="34" charset="-122"/>
+                <a:cs typeface="Segoe UI" pitchFamily="34" charset="-120"/>
+              </a:rPr>
+              <a:t>Transferable skills are the compounding asset; tools are only the current interface.</a:t>
+            </a:r>
+            <a:endParaRPr lang="en-US" sz="1150" dirty="0"/>
+          </a:p>
+        </p:txBody>
+      </p:sp>
+      <p:sp>
+        <p:nvSpPr>
+          <p:cNvPr id="9" name="Text 7"/>
+          <p:cNvSpPr/>
+          <p:nvPr/>
+        </p:nvSpPr>
+        <p:spPr>
+          <a:xfrm>
+            <a:off x="10698480" y="6382512"/>
             <a:ext cx="1188720" cy="365760"/>
           </a:xfrm>
           <a:prstGeom prst="rect">
@@ -2609,7 +7691,7 @@
                 <a:ea typeface="Consolas" pitchFamily="34" charset="-122"/>
                 <a:cs typeface="Consolas" pitchFamily="34" charset="-120"/>
               </a:rPr>
-              <a:t>4 / 8</a:t>
+              <a:t>4 / 14</a:t>
             </a:r>
             <a:endParaRPr lang="en-US" sz="1000" dirty="0"/>
           </a:p>
@@ -2720,7 +7802,7 @@
                 <a:ea typeface="Consolas" pitchFamily="34" charset="-122"/>
                 <a:cs typeface="Consolas" pitchFamily="34" charset="-120"/>
               </a:rPr>
-              <a:t>THE BUILD</a:t>
+              <a:t>THE PROOF</a:t>
             </a:r>
             <a:endParaRPr lang="en-US" sz="1200" dirty="0"/>
           </a:p>
@@ -2734,8 +7816,8 @@
         </p:nvSpPr>
         <p:spPr>
           <a:xfrm>
-            <a:off x="822960" y="960120"/>
-            <a:ext cx="10515600" cy="868680"/>
+            <a:off x="822960" y="914400"/>
+            <a:ext cx="10561320" cy="868680"/>
           </a:xfrm>
           <a:prstGeom prst="rect">
             <a:avLst/>
@@ -2751,7 +7833,7 @@
               <a:buNone/>
             </a:pPr>
             <a:r>
-              <a:rPr lang="en-US" sz="3000" b="1" dirty="0">
+              <a:rPr lang="en-US" sz="2700" b="1" dirty="0">
                 <a:solidFill>
                   <a:srgbClr val="FFFFFF"/>
                 </a:solidFill>
@@ -2759,139 +7841,659 @@
                 <a:ea typeface="Segoe UI" pitchFamily="34" charset="-122"/>
                 <a:cs typeface="Segoe UI" pitchFamily="34" charset="-120"/>
               </a:rPr>
-              <a:t>What came out of the leap</a:t>
-            </a:r>
-            <a:endParaRPr lang="en-US" sz="3000" dirty="0"/>
-          </a:p>
-        </p:txBody>
-      </p:sp>
-      <p:sp>
-        <p:nvSpPr>
-          <p:cNvPr id="6" name="Text 4"/>
-          <p:cNvSpPr/>
-          <p:nvPr/>
-        </p:nvSpPr>
-        <p:spPr>
-          <a:xfrm>
-            <a:off x="868680" y="2057400"/>
-            <a:ext cx="10424160" cy="3566160"/>
-          </a:xfrm>
-          <a:prstGeom prst="rect">
-            <a:avLst/>
-          </a:prstGeom>
-          <a:noFill/>
-          <a:ln/>
-        </p:spPr>
-        <p:txBody>
-          <a:bodyPr wrap="square" rtlCol="0" anchor="t"/>
-          <a:lstStyle/>
-          <a:p>
-            <a:pPr marL="342900" indent="-342900">
-              <a:lnSpc>
-                <a:spcPct val="115000"/>
-              </a:lnSpc>
-              <a:spcAft>
-                <a:spcPts val="1000"/>
-              </a:spcAft>
-              <a:buSzPct val="100000"/>
-              <a:buChar char="▸"/>
-            </a:pPr>
-            <a:r>
-              <a:rPr lang="en-US" sz="1600" dirty="0">
-                <a:solidFill>
-                  <a:srgbClr val="CBD5E1"/>
+              <a:t>What the leap has produced so far</a:t>
+            </a:r>
+            <a:endParaRPr lang="en-US" sz="2700" dirty="0"/>
+          </a:p>
+        </p:txBody>
+      </p:sp>
+      <p:sp>
+        <p:nvSpPr>
+          <p:cNvPr id="6" name="Shape 4"/>
+          <p:cNvSpPr/>
+          <p:nvPr/>
+        </p:nvSpPr>
+        <p:spPr>
+          <a:xfrm>
+            <a:off x="822960" y="2194560"/>
+            <a:ext cx="2423160" cy="2697480"/>
+          </a:xfrm>
+          <a:prstGeom prst="roundRect">
+            <a:avLst>
+              <a:gd name="adj" fmla="val 3019"/>
+            </a:avLst>
+          </a:prstGeom>
+          <a:solidFill>
+            <a:srgbClr val="111A2E"/>
+          </a:solidFill>
+          <a:ln w="12700">
+            <a:solidFill>
+              <a:srgbClr val="1E2D45"/>
+            </a:solidFill>
+            <a:prstDash val="solid"/>
+          </a:ln>
+        </p:spPr>
+      </p:sp>
+      <p:sp>
+        <p:nvSpPr>
+          <p:cNvPr id="7" name="Text 5"/>
+          <p:cNvSpPr/>
+          <p:nvPr/>
+        </p:nvSpPr>
+        <p:spPr>
+          <a:xfrm>
+            <a:off x="960120" y="2514600"/>
+            <a:ext cx="2148840" cy="914400"/>
+          </a:xfrm>
+          <a:prstGeom prst="rect">
+            <a:avLst/>
+          </a:prstGeom>
+          <a:noFill/>
+          <a:ln/>
+        </p:spPr>
+        <p:txBody>
+          <a:bodyPr wrap="square" rtlCol="0" anchor="ctr"/>
+          <a:lstStyle/>
+          <a:p>
+            <a:pPr algn="ctr" indent="0" marL="0">
+              <a:buNone/>
+            </a:pPr>
+            <a:r>
+              <a:rPr lang="en-US" sz="3800" b="1" dirty="0">
+                <a:solidFill>
+                  <a:srgbClr val="3B82F6"/>
                 </a:solidFill>
                 <a:latin typeface="Segoe UI" pitchFamily="34" charset="0"/>
                 <a:ea typeface="Segoe UI" pitchFamily="34" charset="-122"/>
                 <a:cs typeface="Segoe UI" pitchFamily="34" charset="-120"/>
               </a:rPr>
-              <a:t>ZalinOS - a local-first AI agent operating system</a:t>
-            </a:r>
-            <a:endParaRPr lang="en-US" sz="1600" dirty="0"/>
-          </a:p>
-          <a:p>
-            <a:pPr marL="342900" indent="-342900">
-              <a:lnSpc>
-                <a:spcPct val="115000"/>
-              </a:lnSpc>
-              <a:spcAft>
-                <a:spcPts val="1000"/>
-              </a:spcAft>
-              <a:buSzPct val="100000"/>
-              <a:buChar char="▸"/>
-            </a:pPr>
-            <a:r>
-              <a:rPr lang="en-US" sz="1600" dirty="0">
-                <a:solidFill>
-                  <a:srgbClr val="CBD5E1"/>
+              <a:t>30+</a:t>
+            </a:r>
+            <a:endParaRPr lang="en-US" sz="3800" dirty="0"/>
+          </a:p>
+        </p:txBody>
+      </p:sp>
+      <p:sp>
+        <p:nvSpPr>
+          <p:cNvPr id="8" name="Text 6"/>
+          <p:cNvSpPr/>
+          <p:nvPr/>
+        </p:nvSpPr>
+        <p:spPr>
+          <a:xfrm>
+            <a:off x="960120" y="3520440"/>
+            <a:ext cx="2148840" cy="502920"/>
+          </a:xfrm>
+          <a:prstGeom prst="rect">
+            <a:avLst/>
+          </a:prstGeom>
+          <a:noFill/>
+          <a:ln/>
+        </p:spPr>
+        <p:txBody>
+          <a:bodyPr wrap="square" rtlCol="0" anchor="ctr"/>
+          <a:lstStyle/>
+          <a:p>
+            <a:pPr algn="ctr" indent="0" marL="0">
+              <a:buNone/>
+            </a:pPr>
+            <a:r>
+              <a:rPr lang="en-US" sz="1450" b="1" dirty="0">
+                <a:solidFill>
+                  <a:srgbClr val="FFFFFF"/>
                 </a:solidFill>
                 <a:latin typeface="Segoe UI" pitchFamily="34" charset="0"/>
                 <a:ea typeface="Segoe UI" pitchFamily="34" charset="-122"/>
                 <a:cs typeface="Segoe UI" pitchFamily="34" charset="-120"/>
               </a:rPr>
-              <a:t>Zalin Labs - 30+ production Android apps</a:t>
-            </a:r>
-            <a:endParaRPr lang="en-US" sz="1600" dirty="0"/>
-          </a:p>
-          <a:p>
-            <a:pPr marL="342900" indent="-342900">
-              <a:lnSpc>
-                <a:spcPct val="115000"/>
-              </a:lnSpc>
-              <a:spcAft>
-                <a:spcPts val="1000"/>
-              </a:spcAft>
-              <a:buSzPct val="100000"/>
-              <a:buChar char="▸"/>
-            </a:pPr>
-            <a:r>
-              <a:rPr lang="en-US" sz="1600" dirty="0">
-                <a:solidFill>
-                  <a:srgbClr val="CBD5E1"/>
+              <a:t>Production apps</a:t>
+            </a:r>
+            <a:endParaRPr lang="en-US" sz="1450" dirty="0"/>
+          </a:p>
+        </p:txBody>
+      </p:sp>
+      <p:sp>
+        <p:nvSpPr>
+          <p:cNvPr id="9" name="Text 7"/>
+          <p:cNvSpPr/>
+          <p:nvPr/>
+        </p:nvSpPr>
+        <p:spPr>
+          <a:xfrm>
+            <a:off x="1005840" y="4069080"/>
+            <a:ext cx="2057400" cy="685800"/>
+          </a:xfrm>
+          <a:prstGeom prst="rect">
+            <a:avLst/>
+          </a:prstGeom>
+          <a:noFill/>
+          <a:ln/>
+        </p:spPr>
+        <p:txBody>
+          <a:bodyPr wrap="square" rtlCol="0" anchor="ctr"/>
+          <a:lstStyle/>
+          <a:p>
+            <a:pPr algn="ctr" indent="0" marL="0">
+              <a:buNone/>
+            </a:pPr>
+            <a:r>
+              <a:rPr lang="en-US" sz="1050" dirty="0">
+                <a:solidFill>
+                  <a:srgbClr val="94A3B8"/>
                 </a:solidFill>
                 <a:latin typeface="Segoe UI" pitchFamily="34" charset="0"/>
                 <a:ea typeface="Segoe UI" pitchFamily="34" charset="-122"/>
                 <a:cs typeface="Segoe UI" pitchFamily="34" charset="-120"/>
               </a:rPr>
-              <a:t>ODIS and the Web Scraping Toolkit - 8.7K+ lines open source</a:t>
-            </a:r>
-            <a:endParaRPr lang="en-US" sz="1600" dirty="0"/>
-          </a:p>
-          <a:p>
-            <a:pPr marL="342900" indent="-342900">
-              <a:lnSpc>
-                <a:spcPct val="115000"/>
-              </a:lnSpc>
-              <a:spcAft>
-                <a:spcPts val="1000"/>
-              </a:spcAft>
-              <a:buSzPct val="100000"/>
-              <a:buChar char="▸"/>
-            </a:pPr>
-            <a:r>
-              <a:rPr lang="en-US" sz="1600" dirty="0">
-                <a:solidFill>
-                  <a:srgbClr val="CBD5E1"/>
+              <a:t>Shipped, updated, and supported through one gated pipeline</a:t>
+            </a:r>
+            <a:endParaRPr lang="en-US" sz="1050" dirty="0"/>
+          </a:p>
+        </p:txBody>
+      </p:sp>
+      <p:sp>
+        <p:nvSpPr>
+          <p:cNvPr id="10" name="Shape 8"/>
+          <p:cNvSpPr/>
+          <p:nvPr/>
+        </p:nvSpPr>
+        <p:spPr>
+          <a:xfrm>
+            <a:off x="3520440" y="2194560"/>
+            <a:ext cx="2423160" cy="2697480"/>
+          </a:xfrm>
+          <a:prstGeom prst="roundRect">
+            <a:avLst>
+              <a:gd name="adj" fmla="val 3019"/>
+            </a:avLst>
+          </a:prstGeom>
+          <a:solidFill>
+            <a:srgbClr val="111A2E"/>
+          </a:solidFill>
+          <a:ln w="12700">
+            <a:solidFill>
+              <a:srgbClr val="1E2D45"/>
+            </a:solidFill>
+            <a:prstDash val="solid"/>
+          </a:ln>
+        </p:spPr>
+      </p:sp>
+      <p:sp>
+        <p:nvSpPr>
+          <p:cNvPr id="11" name="Text 9"/>
+          <p:cNvSpPr/>
+          <p:nvPr/>
+        </p:nvSpPr>
+        <p:spPr>
+          <a:xfrm>
+            <a:off x="3657600" y="2514600"/>
+            <a:ext cx="2148840" cy="914400"/>
+          </a:xfrm>
+          <a:prstGeom prst="rect">
+            <a:avLst/>
+          </a:prstGeom>
+          <a:noFill/>
+          <a:ln/>
+        </p:spPr>
+        <p:txBody>
+          <a:bodyPr wrap="square" rtlCol="0" anchor="ctr"/>
+          <a:lstStyle/>
+          <a:p>
+            <a:pPr algn="ctr" indent="0" marL="0">
+              <a:buNone/>
+            </a:pPr>
+            <a:r>
+              <a:rPr lang="en-US" sz="3800" b="1" dirty="0">
+                <a:solidFill>
+                  <a:srgbClr val="06B6D4"/>
                 </a:solidFill>
                 <a:latin typeface="Segoe UI" pitchFamily="34" charset="0"/>
                 <a:ea typeface="Segoe UI" pitchFamily="34" charset="-122"/>
                 <a:cs typeface="Segoe UI" pitchFamily="34" charset="-120"/>
               </a:rPr>
-              <a:t>A nine-agent workforce under quality-gated releases</a:t>
-            </a:r>
-            <a:endParaRPr lang="en-US" sz="1600" dirty="0"/>
-          </a:p>
-        </p:txBody>
-      </p:sp>
-      <p:sp>
-        <p:nvSpPr>
-          <p:cNvPr id="7" name="Text 5"/>
-          <p:cNvSpPr/>
-          <p:nvPr/>
-        </p:nvSpPr>
-        <p:spPr>
-          <a:xfrm>
-            <a:off x="10698480" y="6355080"/>
+              <a:t>9+</a:t>
+            </a:r>
+            <a:endParaRPr lang="en-US" sz="3800" dirty="0"/>
+          </a:p>
+        </p:txBody>
+      </p:sp>
+      <p:sp>
+        <p:nvSpPr>
+          <p:cNvPr id="12" name="Text 10"/>
+          <p:cNvSpPr/>
+          <p:nvPr/>
+        </p:nvSpPr>
+        <p:spPr>
+          <a:xfrm>
+            <a:off x="3657600" y="3520440"/>
+            <a:ext cx="2148840" cy="502920"/>
+          </a:xfrm>
+          <a:prstGeom prst="rect">
+            <a:avLst/>
+          </a:prstGeom>
+          <a:noFill/>
+          <a:ln/>
+        </p:spPr>
+        <p:txBody>
+          <a:bodyPr wrap="square" rtlCol="0" anchor="ctr"/>
+          <a:lstStyle/>
+          <a:p>
+            <a:pPr algn="ctr" indent="0" marL="0">
+              <a:buNone/>
+            </a:pPr>
+            <a:r>
+              <a:rPr lang="en-US" sz="1450" b="1" dirty="0">
+                <a:solidFill>
+                  <a:srgbClr val="FFFFFF"/>
+                </a:solidFill>
+                <a:latin typeface="Segoe UI" pitchFamily="34" charset="0"/>
+                <a:ea typeface="Segoe UI" pitchFamily="34" charset="-122"/>
+                <a:cs typeface="Segoe UI" pitchFamily="34" charset="-120"/>
+              </a:rPr>
+              <a:t>Specialist agents</a:t>
+            </a:r>
+            <a:endParaRPr lang="en-US" sz="1450" dirty="0"/>
+          </a:p>
+        </p:txBody>
+      </p:sp>
+      <p:sp>
+        <p:nvSpPr>
+          <p:cNvPr id="13" name="Text 11"/>
+          <p:cNvSpPr/>
+          <p:nvPr/>
+        </p:nvSpPr>
+        <p:spPr>
+          <a:xfrm>
+            <a:off x="3703320" y="4069080"/>
+            <a:ext cx="2057400" cy="685800"/>
+          </a:xfrm>
+          <a:prstGeom prst="rect">
+            <a:avLst/>
+          </a:prstGeom>
+          <a:noFill/>
+          <a:ln/>
+        </p:spPr>
+        <p:txBody>
+          <a:bodyPr wrap="square" rtlCol="0" anchor="ctr"/>
+          <a:lstStyle/>
+          <a:p>
+            <a:pPr algn="ctr" indent="0" marL="0">
+              <a:buNone/>
+            </a:pPr>
+            <a:r>
+              <a:rPr lang="en-US" sz="1050" dirty="0">
+                <a:solidFill>
+                  <a:srgbClr val="94A3B8"/>
+                </a:solidFill>
+                <a:latin typeface="Segoe UI" pitchFamily="34" charset="0"/>
+                <a:ea typeface="Segoe UI" pitchFamily="34" charset="-122"/>
+                <a:cs typeface="Segoe UI" pitchFamily="34" charset="-120"/>
+              </a:rPr>
+              <a:t>A workforce that builds, tests, documents, and watches</a:t>
+            </a:r>
+            <a:endParaRPr lang="en-US" sz="1050" dirty="0"/>
+          </a:p>
+        </p:txBody>
+      </p:sp>
+      <p:sp>
+        <p:nvSpPr>
+          <p:cNvPr id="14" name="Shape 12"/>
+          <p:cNvSpPr/>
+          <p:nvPr/>
+        </p:nvSpPr>
+        <p:spPr>
+          <a:xfrm>
+            <a:off x="6217920" y="2194560"/>
+            <a:ext cx="2423160" cy="2697480"/>
+          </a:xfrm>
+          <a:prstGeom prst="roundRect">
+            <a:avLst>
+              <a:gd name="adj" fmla="val 3019"/>
+            </a:avLst>
+          </a:prstGeom>
+          <a:solidFill>
+            <a:srgbClr val="111A2E"/>
+          </a:solidFill>
+          <a:ln w="12700">
+            <a:solidFill>
+              <a:srgbClr val="1E2D45"/>
+            </a:solidFill>
+            <a:prstDash val="solid"/>
+          </a:ln>
+        </p:spPr>
+      </p:sp>
+      <p:sp>
+        <p:nvSpPr>
+          <p:cNvPr id="15" name="Text 13"/>
+          <p:cNvSpPr/>
+          <p:nvPr/>
+        </p:nvSpPr>
+        <p:spPr>
+          <a:xfrm>
+            <a:off x="6355080" y="2514600"/>
+            <a:ext cx="2148840" cy="914400"/>
+          </a:xfrm>
+          <a:prstGeom prst="rect">
+            <a:avLst/>
+          </a:prstGeom>
+          <a:noFill/>
+          <a:ln/>
+        </p:spPr>
+        <p:txBody>
+          <a:bodyPr wrap="square" rtlCol="0" anchor="ctr"/>
+          <a:lstStyle/>
+          <a:p>
+            <a:pPr algn="ctr" indent="0" marL="0">
+              <a:buNone/>
+            </a:pPr>
+            <a:r>
+              <a:rPr lang="en-US" sz="3800" b="1" dirty="0">
+                <a:solidFill>
+                  <a:srgbClr val="22D3A0"/>
+                </a:solidFill>
+                <a:latin typeface="Segoe UI" pitchFamily="34" charset="0"/>
+                <a:ea typeface="Segoe UI" pitchFamily="34" charset="-122"/>
+                <a:cs typeface="Segoe UI" pitchFamily="34" charset="-120"/>
+              </a:rPr>
+              <a:t>8.7K+</a:t>
+            </a:r>
+            <a:endParaRPr lang="en-US" sz="3800" dirty="0"/>
+          </a:p>
+        </p:txBody>
+      </p:sp>
+      <p:sp>
+        <p:nvSpPr>
+          <p:cNvPr id="16" name="Text 14"/>
+          <p:cNvSpPr/>
+          <p:nvPr/>
+        </p:nvSpPr>
+        <p:spPr>
+          <a:xfrm>
+            <a:off x="6355080" y="3520440"/>
+            <a:ext cx="2148840" cy="502920"/>
+          </a:xfrm>
+          <a:prstGeom prst="rect">
+            <a:avLst/>
+          </a:prstGeom>
+          <a:noFill/>
+          <a:ln/>
+        </p:spPr>
+        <p:txBody>
+          <a:bodyPr wrap="square" rtlCol="0" anchor="ctr"/>
+          <a:lstStyle/>
+          <a:p>
+            <a:pPr algn="ctr" indent="0" marL="0">
+              <a:buNone/>
+            </a:pPr>
+            <a:r>
+              <a:rPr lang="en-US" sz="1450" b="1" dirty="0">
+                <a:solidFill>
+                  <a:srgbClr val="FFFFFF"/>
+                </a:solidFill>
+                <a:latin typeface="Segoe UI" pitchFamily="34" charset="0"/>
+                <a:ea typeface="Segoe UI" pitchFamily="34" charset="-122"/>
+                <a:cs typeface="Segoe UI" pitchFamily="34" charset="-120"/>
+              </a:rPr>
+              <a:t>Lines of code</a:t>
+            </a:r>
+            <a:endParaRPr lang="en-US" sz="1450" dirty="0"/>
+          </a:p>
+        </p:txBody>
+      </p:sp>
+      <p:sp>
+        <p:nvSpPr>
+          <p:cNvPr id="17" name="Text 15"/>
+          <p:cNvSpPr/>
+          <p:nvPr/>
+        </p:nvSpPr>
+        <p:spPr>
+          <a:xfrm>
+            <a:off x="6400800" y="4069080"/>
+            <a:ext cx="2057400" cy="685800"/>
+          </a:xfrm>
+          <a:prstGeom prst="rect">
+            <a:avLst/>
+          </a:prstGeom>
+          <a:noFill/>
+          <a:ln/>
+        </p:spPr>
+        <p:txBody>
+          <a:bodyPr wrap="square" rtlCol="0" anchor="ctr"/>
+          <a:lstStyle/>
+          <a:p>
+            <a:pPr algn="ctr" indent="0" marL="0">
+              <a:buNone/>
+            </a:pPr>
+            <a:r>
+              <a:rPr lang="en-US" sz="1050" dirty="0">
+                <a:solidFill>
+                  <a:srgbClr val="94A3B8"/>
+                </a:solidFill>
+                <a:latin typeface="Segoe UI" pitchFamily="34" charset="0"/>
+                <a:ea typeface="Segoe UI" pitchFamily="34" charset="-122"/>
+                <a:cs typeface="Segoe UI" pitchFamily="34" charset="-120"/>
+              </a:rPr>
+              <a:t>Two open-source frameworks any client can audit</a:t>
+            </a:r>
+            <a:endParaRPr lang="en-US" sz="1050" dirty="0"/>
+          </a:p>
+        </p:txBody>
+      </p:sp>
+      <p:sp>
+        <p:nvSpPr>
+          <p:cNvPr id="18" name="Shape 16"/>
+          <p:cNvSpPr/>
+          <p:nvPr/>
+        </p:nvSpPr>
+        <p:spPr>
+          <a:xfrm>
+            <a:off x="8915400" y="2194560"/>
+            <a:ext cx="2423160" cy="2697480"/>
+          </a:xfrm>
+          <a:prstGeom prst="roundRect">
+            <a:avLst>
+              <a:gd name="adj" fmla="val 3019"/>
+            </a:avLst>
+          </a:prstGeom>
+          <a:solidFill>
+            <a:srgbClr val="111A2E"/>
+          </a:solidFill>
+          <a:ln w="12700">
+            <a:solidFill>
+              <a:srgbClr val="1E2D45"/>
+            </a:solidFill>
+            <a:prstDash val="solid"/>
+          </a:ln>
+        </p:spPr>
+      </p:sp>
+      <p:sp>
+        <p:nvSpPr>
+          <p:cNvPr id="19" name="Text 17"/>
+          <p:cNvSpPr/>
+          <p:nvPr/>
+        </p:nvSpPr>
+        <p:spPr>
+          <a:xfrm>
+            <a:off x="9052560" y="2514600"/>
+            <a:ext cx="2148840" cy="914400"/>
+          </a:xfrm>
+          <a:prstGeom prst="rect">
+            <a:avLst/>
+          </a:prstGeom>
+          <a:noFill/>
+          <a:ln/>
+        </p:spPr>
+        <p:txBody>
+          <a:bodyPr wrap="square" rtlCol="0" anchor="ctr"/>
+          <a:lstStyle/>
+          <a:p>
+            <a:pPr algn="ctr" indent="0" marL="0">
+              <a:buNone/>
+            </a:pPr>
+            <a:r>
+              <a:rPr lang="en-US" sz="3800" b="1" dirty="0">
+                <a:solidFill>
+                  <a:srgbClr val="F59E0B"/>
+                </a:solidFill>
+                <a:latin typeface="Segoe UI" pitchFamily="34" charset="0"/>
+                <a:ea typeface="Segoe UI" pitchFamily="34" charset="-122"/>
+                <a:cs typeface="Segoe UI" pitchFamily="34" charset="-120"/>
+              </a:rPr>
+              <a:t>51/52</a:t>
+            </a:r>
+            <a:endParaRPr lang="en-US" sz="3800" dirty="0"/>
+          </a:p>
+        </p:txBody>
+      </p:sp>
+      <p:sp>
+        <p:nvSpPr>
+          <p:cNvPr id="20" name="Text 18"/>
+          <p:cNvSpPr/>
+          <p:nvPr/>
+        </p:nvSpPr>
+        <p:spPr>
+          <a:xfrm>
+            <a:off x="9052560" y="3520440"/>
+            <a:ext cx="2148840" cy="502920"/>
+          </a:xfrm>
+          <a:prstGeom prst="rect">
+            <a:avLst/>
+          </a:prstGeom>
+          <a:noFill/>
+          <a:ln/>
+        </p:spPr>
+        <p:txBody>
+          <a:bodyPr wrap="square" rtlCol="0" anchor="ctr"/>
+          <a:lstStyle/>
+          <a:p>
+            <a:pPr algn="ctr" indent="0" marL="0">
+              <a:buNone/>
+            </a:pPr>
+            <a:r>
+              <a:rPr lang="en-US" sz="1450" b="1" dirty="0">
+                <a:solidFill>
+                  <a:srgbClr val="FFFFFF"/>
+                </a:solidFill>
+                <a:latin typeface="Segoe UI" pitchFamily="34" charset="0"/>
+                <a:ea typeface="Segoe UI" pitchFamily="34" charset="-122"/>
+                <a:cs typeface="Segoe UI" pitchFamily="34" charset="-120"/>
+              </a:rPr>
+              <a:t>Production checks</a:t>
+            </a:r>
+            <a:endParaRPr lang="en-US" sz="1450" dirty="0"/>
+          </a:p>
+        </p:txBody>
+      </p:sp>
+      <p:sp>
+        <p:nvSpPr>
+          <p:cNvPr id="21" name="Text 19"/>
+          <p:cNvSpPr/>
+          <p:nvPr/>
+        </p:nvSpPr>
+        <p:spPr>
+          <a:xfrm>
+            <a:off x="9098280" y="4069080"/>
+            <a:ext cx="2057400" cy="685800"/>
+          </a:xfrm>
+          <a:prstGeom prst="rect">
+            <a:avLst/>
+          </a:prstGeom>
+          <a:noFill/>
+          <a:ln/>
+        </p:spPr>
+        <p:txBody>
+          <a:bodyPr wrap="square" rtlCol="0" anchor="ctr"/>
+          <a:lstStyle/>
+          <a:p>
+            <a:pPr algn="ctr" indent="0" marL="0">
+              <a:buNone/>
+            </a:pPr>
+            <a:r>
+              <a:rPr lang="en-US" sz="1050" dirty="0">
+                <a:solidFill>
+                  <a:srgbClr val="94A3B8"/>
+                </a:solidFill>
+                <a:latin typeface="Segoe UI" pitchFamily="34" charset="0"/>
+                <a:ea typeface="Segoe UI" pitchFamily="34" charset="-122"/>
+                <a:cs typeface="Segoe UI" pitchFamily="34" charset="-120"/>
+              </a:rPr>
+              <a:t>Passing in the live platform, with a 30-query router validation set</a:t>
+            </a:r>
+            <a:endParaRPr lang="en-US" sz="1050" dirty="0"/>
+          </a:p>
+        </p:txBody>
+      </p:sp>
+      <p:sp>
+        <p:nvSpPr>
+          <p:cNvPr id="22" name="Shape 20"/>
+          <p:cNvSpPr/>
+          <p:nvPr/>
+        </p:nvSpPr>
+        <p:spPr>
+          <a:xfrm>
+            <a:off x="822960" y="5413248"/>
+            <a:ext cx="10515600" cy="0"/>
+          </a:xfrm>
+          <a:prstGeom prst="line">
+            <a:avLst/>
+          </a:prstGeom>
+          <a:noFill/>
+          <a:ln w="12700">
+            <a:solidFill>
+              <a:srgbClr val="1E2D45"/>
+            </a:solidFill>
+            <a:prstDash val="solid"/>
+          </a:ln>
+        </p:spPr>
+      </p:sp>
+      <p:sp>
+        <p:nvSpPr>
+          <p:cNvPr id="23" name="Text 21"/>
+          <p:cNvSpPr/>
+          <p:nvPr/>
+        </p:nvSpPr>
+        <p:spPr>
+          <a:xfrm>
+            <a:off x="822960" y="5504688"/>
+            <a:ext cx="10424160" cy="411480"/>
+          </a:xfrm>
+          <a:prstGeom prst="rect">
+            <a:avLst/>
+          </a:prstGeom>
+          <a:noFill/>
+          <a:ln/>
+        </p:spPr>
+        <p:txBody>
+          <a:bodyPr wrap="square" rtlCol="0" anchor="ctr"/>
+          <a:lstStyle/>
+          <a:p>
+            <a:pPr indent="0" marL="0">
+              <a:buNone/>
+            </a:pPr>
+            <a:r>
+              <a:rPr lang="en-US" sz="1300" i="1" dirty="0">
+                <a:solidFill>
+                  <a:srgbClr val="06B6D4"/>
+                </a:solidFill>
+                <a:latin typeface="Segoe UI" pitchFamily="34" charset="0"/>
+                <a:ea typeface="Segoe UI" pitchFamily="34" charset="-122"/>
+                <a:cs typeface="Segoe UI" pitchFamily="34" charset="-120"/>
+              </a:rPr>
+              <a:t>→  All four numbers come from the public portfolio and published build logs.</a:t>
+            </a:r>
+            <a:endParaRPr lang="en-US" sz="1300" dirty="0"/>
+          </a:p>
+        </p:txBody>
+      </p:sp>
+      <p:sp>
+        <p:nvSpPr>
+          <p:cNvPr id="24" name="Text 22"/>
+          <p:cNvSpPr/>
+          <p:nvPr/>
+        </p:nvSpPr>
+        <p:spPr>
+          <a:xfrm>
+            <a:off x="10698480" y="6382512"/>
             <a:ext cx="1188720" cy="365760"/>
           </a:xfrm>
           <a:prstGeom prst="rect">
@@ -2916,7 +8518,7 @@
                 <a:ea typeface="Consolas" pitchFamily="34" charset="-122"/>
                 <a:cs typeface="Consolas" pitchFamily="34" charset="-120"/>
               </a:rPr>
-              <a:t>5 / 8</a:t>
+              <a:t>5 / 14</a:t>
             </a:r>
             <a:endParaRPr lang="en-US" sz="1000" dirty="0"/>
           </a:p>
@@ -3027,7 +8629,7 @@
                 <a:ea typeface="Consolas" pitchFamily="34" charset="-122"/>
                 <a:cs typeface="Consolas" pitchFamily="34" charset="-120"/>
               </a:rPr>
-              <a:t>WHAT DID NOT TRANSFER</a:t>
+              <a:t>THE CURVE</a:t>
             </a:r>
             <a:endParaRPr lang="en-US" sz="1200" dirty="0"/>
           </a:p>
@@ -3041,8 +8643,8 @@
         </p:nvSpPr>
         <p:spPr>
           <a:xfrm>
-            <a:off x="822960" y="960120"/>
-            <a:ext cx="10515600" cy="868680"/>
+            <a:off x="822960" y="914400"/>
+            <a:ext cx="10561320" cy="868680"/>
           </a:xfrm>
           <a:prstGeom prst="rect">
             <a:avLst/>
@@ -3058,7 +8660,7 @@
               <a:buNone/>
             </a:pPr>
             <a:r>
-              <a:rPr lang="en-US" sz="3000" b="1" dirty="0">
+              <a:rPr lang="en-US" sz="2700" b="1" dirty="0">
                 <a:solidFill>
                   <a:srgbClr val="FFFFFF"/>
                 </a:solidFill>
@@ -3066,115 +8668,161 @@
                 <a:ea typeface="Segoe UI" pitchFamily="34" charset="-122"/>
                 <a:cs typeface="Segoe UI" pitchFamily="34" charset="-120"/>
               </a:rPr>
-              <a:t>The unlearning list</a:t>
-            </a:r>
-            <a:endParaRPr lang="en-US" sz="3000" dirty="0"/>
-          </a:p>
-        </p:txBody>
-      </p:sp>
-      <p:sp>
-        <p:nvSpPr>
-          <p:cNvPr id="6" name="Text 4"/>
-          <p:cNvSpPr/>
-          <p:nvPr/>
-        </p:nvSpPr>
-        <p:spPr>
-          <a:xfrm>
-            <a:off x="868680" y="2057400"/>
-            <a:ext cx="10424160" cy="3566160"/>
-          </a:xfrm>
-          <a:prstGeom prst="rect">
-            <a:avLst/>
-          </a:prstGeom>
-          <a:noFill/>
-          <a:ln/>
-        </p:spPr>
-        <p:txBody>
-          <a:bodyPr wrap="square" rtlCol="0" anchor="t"/>
-          <a:lstStyle/>
-          <a:p>
-            <a:pPr marL="342900" indent="-342900">
-              <a:lnSpc>
-                <a:spcPct val="115000"/>
-              </a:lnSpc>
-              <a:spcAft>
-                <a:spcPts val="1000"/>
-              </a:spcAft>
-              <a:buSzPct val="100000"/>
-              <a:buChar char="▸"/>
-            </a:pPr>
-            <a:r>
-              <a:rPr lang="en-US" sz="1600" dirty="0">
-                <a:solidFill>
-                  <a:srgbClr val="CBD5E1"/>
+              <a:t>The founder leap is the last step of a steady climb</a:t>
+            </a:r>
+            <a:endParaRPr lang="en-US" sz="2700" dirty="0"/>
+          </a:p>
+        </p:txBody>
+      </p:sp>
+      <p:graphicFrame>
+        <p:nvGraphicFramePr>
+          <p:cNvPr id="6" name="Chart 0" descr=""/>
+          <p:cNvGraphicFramePr/>
+          <p:nvPr/>
+        </p:nvGraphicFramePr>
+        <p:xfrm>
+          <a:off x="822960" y="1874520"/>
+          <a:ext cx="10515600" cy="3337560"/>
+        </p:xfrm>
+        <a:graphic xmlns:a="http://schemas.openxmlformats.org/drawingml/2006/main">
+          <a:graphicData uri="http://schemas.openxmlformats.org/drawingml/2006/chart">
+            <c:chart xmlns:c="http://schemas.openxmlformats.org/drawingml/2006/chart" r:id="rId1"/>
+          </a:graphicData>
+        </a:graphic>
+      </p:graphicFrame>
+      <p:sp>
+        <p:nvSpPr>
+          <p:cNvPr id="7" name="Shape 4"/>
+          <p:cNvSpPr/>
+          <p:nvPr/>
+        </p:nvSpPr>
+        <p:spPr>
+          <a:xfrm>
+            <a:off x="822960" y="5413248"/>
+            <a:ext cx="10515600" cy="0"/>
+          </a:xfrm>
+          <a:prstGeom prst="line">
+            <a:avLst/>
+          </a:prstGeom>
+          <a:noFill/>
+          <a:ln w="12700">
+            <a:solidFill>
+              <a:srgbClr val="1E2D45"/>
+            </a:solidFill>
+            <a:prstDash val="solid"/>
+          </a:ln>
+        </p:spPr>
+      </p:sp>
+      <p:sp>
+        <p:nvSpPr>
+          <p:cNvPr id="8" name="Text 5"/>
+          <p:cNvSpPr/>
+          <p:nvPr/>
+        </p:nvSpPr>
+        <p:spPr>
+          <a:xfrm>
+            <a:off x="822960" y="5504688"/>
+            <a:ext cx="10424160" cy="411480"/>
+          </a:xfrm>
+          <a:prstGeom prst="rect">
+            <a:avLst/>
+          </a:prstGeom>
+          <a:noFill/>
+          <a:ln/>
+        </p:spPr>
+        <p:txBody>
+          <a:bodyPr wrap="square" rtlCol="0" anchor="ctr"/>
+          <a:lstStyle/>
+          <a:p>
+            <a:pPr indent="0" marL="0">
+              <a:buNone/>
+            </a:pPr>
+            <a:r>
+              <a:rPr lang="en-US" sz="1300" i="1" dirty="0">
+                <a:solidFill>
+                  <a:srgbClr val="06B6D4"/>
                 </a:solidFill>
                 <a:latin typeface="Segoe UI" pitchFamily="34" charset="0"/>
                 <a:ea typeface="Segoe UI" pitchFamily="34" charset="-122"/>
                 <a:cs typeface="Segoe UI" pitchFamily="34" charset="-120"/>
               </a:rPr>
-              <a:t>Waiting for permission - change is a process there, a Tuesday here</a:t>
-            </a:r>
-            <a:endParaRPr lang="en-US" sz="1600" dirty="0"/>
-          </a:p>
-          <a:p>
-            <a:pPr marL="342900" indent="-342900">
-              <a:lnSpc>
-                <a:spcPct val="115000"/>
-              </a:lnSpc>
-              <a:spcAft>
-                <a:spcPts val="1000"/>
-              </a:spcAft>
-              <a:buSzPct val="100000"/>
-              <a:buChar char="▸"/>
-            </a:pPr>
-            <a:r>
-              <a:rPr lang="en-US" sz="1600" dirty="0">
-                <a:solidFill>
-                  <a:srgbClr val="CBD5E1"/>
+              <a:t>→  On a resume the founder leap looks sudden; on the skill curve it is the final step of a two-year climb.</a:t>
+            </a:r>
+            <a:endParaRPr lang="en-US" sz="1300" dirty="0"/>
+          </a:p>
+        </p:txBody>
+      </p:sp>
+      <p:sp>
+        <p:nvSpPr>
+          <p:cNvPr id="9" name="Shape 6"/>
+          <p:cNvSpPr/>
+          <p:nvPr/>
+        </p:nvSpPr>
+        <p:spPr>
+          <a:xfrm>
+            <a:off x="822960" y="5961888"/>
+            <a:ext cx="10515600" cy="0"/>
+          </a:xfrm>
+          <a:prstGeom prst="line">
+            <a:avLst/>
+          </a:prstGeom>
+          <a:noFill/>
+          <a:ln w="12700">
+            <a:solidFill>
+              <a:srgbClr val="1E2D45"/>
+            </a:solidFill>
+            <a:prstDash val="solid"/>
+          </a:ln>
+        </p:spPr>
+      </p:sp>
+      <p:sp>
+        <p:nvSpPr>
+          <p:cNvPr id="10" name="Text 7"/>
+          <p:cNvSpPr/>
+          <p:nvPr/>
+        </p:nvSpPr>
+        <p:spPr>
+          <a:xfrm>
+            <a:off x="822960" y="6053328"/>
+            <a:ext cx="9692640" cy="457200"/>
+          </a:xfrm>
+          <a:prstGeom prst="rect">
+            <a:avLst/>
+          </a:prstGeom>
+          <a:noFill/>
+          <a:ln/>
+        </p:spPr>
+        <p:txBody>
+          <a:bodyPr wrap="square" rtlCol="0" anchor="ctr"/>
+          <a:lstStyle/>
+          <a:p>
+            <a:pPr indent="0" marL="0">
+              <a:buNone/>
+            </a:pPr>
+            <a:r>
+              <a:rPr lang="en-US" sz="1150" dirty="0">
+                <a:solidFill>
+                  <a:srgbClr val="64748B"/>
                 </a:solidFill>
                 <a:latin typeface="Segoe UI" pitchFamily="34" charset="0"/>
                 <a:ea typeface="Segoe UI" pitchFamily="34" charset="-122"/>
                 <a:cs typeface="Segoe UI" pitchFamily="34" charset="-120"/>
               </a:rPr>
-              <a:t>Scope defense - founders win by crossing boundaries</a:t>
-            </a:r>
-            <a:endParaRPr lang="en-US" sz="1600" dirty="0"/>
-          </a:p>
-          <a:p>
-            <a:pPr marL="342900" indent="-342900">
-              <a:lnSpc>
-                <a:spcPct val="115000"/>
-              </a:lnSpc>
-              <a:spcAft>
-                <a:spcPts val="1000"/>
-              </a:spcAft>
-              <a:buSzPct val="100000"/>
-              <a:buChar char="▸"/>
-            </a:pPr>
-            <a:r>
-              <a:rPr lang="en-US" sz="1600" dirty="0">
-                <a:solidFill>
-                  <a:srgbClr val="CBD5E1"/>
-                </a:solidFill>
-                <a:latin typeface="Segoe UI" pitchFamily="34" charset="0"/>
-                <a:ea typeface="Segoe UI" pitchFamily="34" charset="-122"/>
-                <a:cs typeface="Segoe UI" pitchFamily="34" charset="-120"/>
-              </a:rPr>
-              <a:t>Perfectionism before shipping - gates replace gold-plating</a:t>
-            </a:r>
-            <a:endParaRPr lang="en-US" sz="1600" dirty="0"/>
-          </a:p>
-        </p:txBody>
-      </p:sp>
-      <p:sp>
-        <p:nvSpPr>
-          <p:cNvPr id="7" name="Text 5"/>
-          <p:cNvSpPr/>
-          <p:nvPr/>
-        </p:nvSpPr>
-        <p:spPr>
-          <a:xfrm>
-            <a:off x="10698480" y="6355080"/>
+              <a:t>Indices are illustrative; the chapters, roles, and dates are real.</a:t>
+            </a:r>
+            <a:endParaRPr lang="en-US" sz="1150" dirty="0"/>
+          </a:p>
+        </p:txBody>
+      </p:sp>
+      <p:sp>
+        <p:nvSpPr>
+          <p:cNvPr id="11" name="Text 8"/>
+          <p:cNvSpPr/>
+          <p:nvPr/>
+        </p:nvSpPr>
+        <p:spPr>
+          <a:xfrm>
+            <a:off x="10698480" y="6382512"/>
             <a:ext cx="1188720" cy="365760"/>
           </a:xfrm>
           <a:prstGeom prst="rect">
@@ -3199,7 +8847,7 @@
                 <a:ea typeface="Consolas" pitchFamily="34" charset="-122"/>
                 <a:cs typeface="Consolas" pitchFamily="34" charset="-120"/>
               </a:rPr>
-              <a:t>6 / 8</a:t>
+              <a:t>6 / 14</a:t>
             </a:r>
             <a:endParaRPr lang="en-US" sz="1000" dirty="0"/>
           </a:p>
@@ -3310,7 +8958,7 @@
                 <a:ea typeface="Consolas" pitchFamily="34" charset="-122"/>
                 <a:cs typeface="Consolas" pitchFamily="34" charset="-120"/>
               </a:rPr>
-              <a:t>FOR RECRUITERS</a:t>
+              <a:t>AT A GLANCE</a:t>
             </a:r>
             <a:endParaRPr lang="en-US" sz="1200" dirty="0"/>
           </a:p>
@@ -3324,8 +8972,8 @@
         </p:nvSpPr>
         <p:spPr>
           <a:xfrm>
-            <a:off x="822960" y="960120"/>
-            <a:ext cx="10515600" cy="868680"/>
+            <a:off x="822960" y="914400"/>
+            <a:ext cx="10561320" cy="868680"/>
           </a:xfrm>
           <a:prstGeom prst="rect">
             <a:avLst/>
@@ -3341,7 +8989,7 @@
               <a:buNone/>
             </a:pPr>
             <a:r>
-              <a:rPr lang="en-US" sz="3000" b="1" dirty="0">
+              <a:rPr lang="en-US" sz="2700" b="1" dirty="0">
                 <a:solidFill>
                   <a:srgbClr val="FFFFFF"/>
                 </a:solidFill>
@@ -3349,139 +8997,1485 @@
                 <a:ea typeface="Segoe UI" pitchFamily="34" charset="-122"/>
                 <a:cs typeface="Segoe UI" pitchFamily="34" charset="-120"/>
               </a:rPr>
-              <a:t>The combination that is rare</a:t>
-            </a:r>
-            <a:endParaRPr lang="en-US" sz="3000" dirty="0"/>
-          </a:p>
-        </p:txBody>
-      </p:sp>
-      <p:sp>
-        <p:nvSpPr>
-          <p:cNvPr id="6" name="Text 4"/>
-          <p:cNvSpPr/>
-          <p:nvPr/>
-        </p:nvSpPr>
-        <p:spPr>
-          <a:xfrm>
-            <a:off x="868680" y="2057400"/>
-            <a:ext cx="10424160" cy="3566160"/>
-          </a:xfrm>
-          <a:prstGeom prst="rect">
-            <a:avLst/>
-          </a:prstGeom>
-          <a:noFill/>
-          <a:ln/>
-        </p:spPr>
-        <p:txBody>
-          <a:bodyPr wrap="square" rtlCol="0" anchor="t"/>
-          <a:lstStyle/>
-          <a:p>
-            <a:pPr marL="342900" indent="-342900">
-              <a:lnSpc>
-                <a:spcPct val="115000"/>
-              </a:lnSpc>
-              <a:spcAft>
-                <a:spcPts val="1000"/>
-              </a:spcAft>
-              <a:buSzPct val="100000"/>
-              <a:buChar char="▸"/>
-            </a:pPr>
-            <a:r>
-              <a:rPr lang="en-US" sz="1600" dirty="0">
-                <a:solidFill>
-                  <a:srgbClr val="CBD5E1"/>
+              <a:t>Four chapters, four environments, one direction</a:t>
+            </a:r>
+            <a:endParaRPr lang="en-US" sz="2700" dirty="0"/>
+          </a:p>
+        </p:txBody>
+      </p:sp>
+      <p:graphicFrame>
+        <p:nvGraphicFramePr>
+          <p:cNvPr id="8" name="Table 0"/>
+          <p:cNvGraphicFramePr>
+            <a:graphicFrameLocks noGrp="1"/>
+          </p:cNvGraphicFramePr>
+          <p:nvPr>
+            <p:extLst>
+              <p:ext uri="{D42A27DB-BD31-4B8C-83A1-F6EECF244321}">
+                <p14:modId xmlns:p14="http://schemas.microsoft.com/office/powerpoint/2010/main" val="1579011935"/>
+              </p:ext>
+            </p:extLst>
+          </p:nvPr>
+        </p:nvGraphicFramePr>
+        <p:xfrm>
+          <a:off x="822960" y="2011680"/>
+          <a:ext cx="10515600" cy="914400"/>
+        </p:xfrm>
+        <a:graphic>
+          <a:graphicData uri="http://schemas.openxmlformats.org/drawingml/2006/table">
+            <a:tbl>
+              <a:tblPr/>
+              <a:tblGrid>
+                <a:gridCol w="2628900"/>
+                <a:gridCol w="2628900"/>
+                <a:gridCol w="2628900"/>
+                <a:gridCol w="2628900"/>
+              </a:tblGrid>
+              <a:tr h="402336">
+                <a:tc>
+                  <a:txBody>
+                    <a:bodyPr/>
+                    <a:lstStyle/>
+                    <a:p>
+                      <a:pPr indent="0" marL="0">
+                        <a:buNone/>
+                      </a:pPr>
+                      <a:r>
+                        <a:rPr lang="en-US" sz="1150" b="1" dirty="0">
+                          <a:solidFill>
+                            <a:srgbClr val="FFFFFF"/>
+                          </a:solidFill>
+                          <a:latin typeface="Segoe UI" pitchFamily="34" charset="0"/>
+                          <a:ea typeface="Segoe UI" pitchFamily="34" charset="-122"/>
+                          <a:cs typeface="Segoe UI" pitchFamily="34" charset="-120"/>
+                        </a:rPr>
+                        <a:t>Period</a:t>
+                      </a:r>
+                      <a:endParaRPr lang="en-US" sz="1150" dirty="0">
+                        <a:latin typeface="Segoe UI" charset="0"/>
+                        <a:ea typeface="Segoe UI" charset="0"/>
+                        <a:cs typeface="Segoe UI" charset="0"/>
+                      </a:endParaRPr>
+                    </a:p>
+                  </a:txBody>
+                  <a:tcPr marL="64008" marR="64008" marT="64008" marB="64008" anchor="ctr">
+                    <a:lnL w="6350" cap="flat" cmpd="sng" algn="ctr">
+                      <a:solidFill>
+                        <a:srgbClr val="24365A"/>
+                      </a:solidFill>
+                      <a:prstDash val="solid"/>
+                      <a:round/>
+                      <a:headEnd type="none" w="med" len="med"/>
+                      <a:tailEnd type="none" w="med" len="med"/>
+                    </a:lnL>
+                    <a:lnR w="6350" cap="flat" cmpd="sng" algn="ctr">
+                      <a:solidFill>
+                        <a:srgbClr val="24365A"/>
+                      </a:solidFill>
+                      <a:prstDash val="solid"/>
+                      <a:round/>
+                      <a:headEnd type="none" w="med" len="med"/>
+                      <a:tailEnd type="none" w="med" len="med"/>
+                    </a:lnR>
+                    <a:lnT w="6350" cap="flat" cmpd="sng" algn="ctr">
+                      <a:solidFill>
+                        <a:srgbClr val="24365A"/>
+                      </a:solidFill>
+                      <a:prstDash val="solid"/>
+                      <a:round/>
+                      <a:headEnd type="none" w="med" len="med"/>
+                      <a:tailEnd type="none" w="med" len="med"/>
+                    </a:lnT>
+                    <a:lnB w="6350" cap="flat" cmpd="sng" algn="ctr">
+                      <a:solidFill>
+                        <a:srgbClr val="24365A"/>
+                      </a:solidFill>
+                      <a:prstDash val="solid"/>
+                      <a:round/>
+                      <a:headEnd type="none" w="med" len="med"/>
+                      <a:tailEnd type="none" w="med" len="med"/>
+                    </a:lnB>
+                    <a:solidFill>
+                      <a:srgbClr val="16233B"/>
+                    </a:solidFill>
+                  </a:tcPr>
+                </a:tc>
+                <a:tc>
+                  <a:txBody>
+                    <a:bodyPr/>
+                    <a:lstStyle/>
+                    <a:p>
+                      <a:pPr indent="0" marL="0">
+                        <a:buNone/>
+                      </a:pPr>
+                      <a:r>
+                        <a:rPr lang="en-US" sz="1150" b="1" dirty="0">
+                          <a:solidFill>
+                            <a:srgbClr val="FFFFFF"/>
+                          </a:solidFill>
+                          <a:latin typeface="Segoe UI" pitchFamily="34" charset="0"/>
+                          <a:ea typeface="Segoe UI" pitchFamily="34" charset="-122"/>
+                          <a:cs typeface="Segoe UI" pitchFamily="34" charset="-120"/>
+                        </a:rPr>
+                        <a:t>Role</a:t>
+                      </a:r>
+                      <a:endParaRPr lang="en-US" sz="1150" dirty="0">
+                        <a:latin typeface="Segoe UI" charset="0"/>
+                        <a:ea typeface="Segoe UI" charset="0"/>
+                        <a:cs typeface="Segoe UI" charset="0"/>
+                      </a:endParaRPr>
+                    </a:p>
+                  </a:txBody>
+                  <a:tcPr marL="64008" marR="64008" marT="64008" marB="64008" anchor="ctr">
+                    <a:lnL w="6350" cap="flat" cmpd="sng" algn="ctr">
+                      <a:solidFill>
+                        <a:srgbClr val="24365A"/>
+                      </a:solidFill>
+                      <a:prstDash val="solid"/>
+                      <a:round/>
+                      <a:headEnd type="none" w="med" len="med"/>
+                      <a:tailEnd type="none" w="med" len="med"/>
+                    </a:lnL>
+                    <a:lnR w="6350" cap="flat" cmpd="sng" algn="ctr">
+                      <a:solidFill>
+                        <a:srgbClr val="24365A"/>
+                      </a:solidFill>
+                      <a:prstDash val="solid"/>
+                      <a:round/>
+                      <a:headEnd type="none" w="med" len="med"/>
+                      <a:tailEnd type="none" w="med" len="med"/>
+                    </a:lnR>
+                    <a:lnT w="6350" cap="flat" cmpd="sng" algn="ctr">
+                      <a:solidFill>
+                        <a:srgbClr val="24365A"/>
+                      </a:solidFill>
+                      <a:prstDash val="solid"/>
+                      <a:round/>
+                      <a:headEnd type="none" w="med" len="med"/>
+                      <a:tailEnd type="none" w="med" len="med"/>
+                    </a:lnT>
+                    <a:lnB w="6350" cap="flat" cmpd="sng" algn="ctr">
+                      <a:solidFill>
+                        <a:srgbClr val="24365A"/>
+                      </a:solidFill>
+                      <a:prstDash val="solid"/>
+                      <a:round/>
+                      <a:headEnd type="none" w="med" len="med"/>
+                      <a:tailEnd type="none" w="med" len="med"/>
+                    </a:lnB>
+                    <a:solidFill>
+                      <a:srgbClr val="16233B"/>
+                    </a:solidFill>
+                  </a:tcPr>
+                </a:tc>
+                <a:tc>
+                  <a:txBody>
+                    <a:bodyPr/>
+                    <a:lstStyle/>
+                    <a:p>
+                      <a:pPr indent="0" marL="0">
+                        <a:buNone/>
+                      </a:pPr>
+                      <a:r>
+                        <a:rPr lang="en-US" sz="1150" b="1" dirty="0">
+                          <a:solidFill>
+                            <a:srgbClr val="FFFFFF"/>
+                          </a:solidFill>
+                          <a:latin typeface="Segoe UI" pitchFamily="34" charset="0"/>
+                          <a:ea typeface="Segoe UI" pitchFamily="34" charset="-122"/>
+                          <a:cs typeface="Segoe UI" pitchFamily="34" charset="-120"/>
+                        </a:rPr>
+                        <a:t>Scope</a:t>
+                      </a:r>
+                      <a:endParaRPr lang="en-US" sz="1150" dirty="0">
+                        <a:latin typeface="Segoe UI" charset="0"/>
+                        <a:ea typeface="Segoe UI" charset="0"/>
+                        <a:cs typeface="Segoe UI" charset="0"/>
+                      </a:endParaRPr>
+                    </a:p>
+                  </a:txBody>
+                  <a:tcPr marL="64008" marR="64008" marT="64008" marB="64008" anchor="ctr">
+                    <a:lnL w="6350" cap="flat" cmpd="sng" algn="ctr">
+                      <a:solidFill>
+                        <a:srgbClr val="24365A"/>
+                      </a:solidFill>
+                      <a:prstDash val="solid"/>
+                      <a:round/>
+                      <a:headEnd type="none" w="med" len="med"/>
+                      <a:tailEnd type="none" w="med" len="med"/>
+                    </a:lnL>
+                    <a:lnR w="6350" cap="flat" cmpd="sng" algn="ctr">
+                      <a:solidFill>
+                        <a:srgbClr val="24365A"/>
+                      </a:solidFill>
+                      <a:prstDash val="solid"/>
+                      <a:round/>
+                      <a:headEnd type="none" w="med" len="med"/>
+                      <a:tailEnd type="none" w="med" len="med"/>
+                    </a:lnR>
+                    <a:lnT w="6350" cap="flat" cmpd="sng" algn="ctr">
+                      <a:solidFill>
+                        <a:srgbClr val="24365A"/>
+                      </a:solidFill>
+                      <a:prstDash val="solid"/>
+                      <a:round/>
+                      <a:headEnd type="none" w="med" len="med"/>
+                      <a:tailEnd type="none" w="med" len="med"/>
+                    </a:lnT>
+                    <a:lnB w="6350" cap="flat" cmpd="sng" algn="ctr">
+                      <a:solidFill>
+                        <a:srgbClr val="24365A"/>
+                      </a:solidFill>
+                      <a:prstDash val="solid"/>
+                      <a:round/>
+                      <a:headEnd type="none" w="med" len="med"/>
+                      <a:tailEnd type="none" w="med" len="med"/>
+                    </a:lnB>
+                    <a:solidFill>
+                      <a:srgbClr val="16233B"/>
+                    </a:solidFill>
+                  </a:tcPr>
+                </a:tc>
+                <a:tc>
+                  <a:txBody>
+                    <a:bodyPr/>
+                    <a:lstStyle/>
+                    <a:p>
+                      <a:pPr indent="0" marL="0">
+                        <a:buNone/>
+                      </a:pPr>
+                      <a:r>
+                        <a:rPr lang="en-US" sz="1150" b="1" dirty="0">
+                          <a:solidFill>
+                            <a:srgbClr val="FFFFFF"/>
+                          </a:solidFill>
+                          <a:latin typeface="Segoe UI" pitchFamily="34" charset="0"/>
+                          <a:ea typeface="Segoe UI" pitchFamily="34" charset="-122"/>
+                          <a:cs typeface="Segoe UI" pitchFamily="34" charset="-120"/>
+                        </a:rPr>
+                        <a:t>Core stack</a:t>
+                      </a:r>
+                      <a:endParaRPr lang="en-US" sz="1150" dirty="0">
+                        <a:latin typeface="Segoe UI" charset="0"/>
+                        <a:ea typeface="Segoe UI" charset="0"/>
+                        <a:cs typeface="Segoe UI" charset="0"/>
+                      </a:endParaRPr>
+                    </a:p>
+                  </a:txBody>
+                  <a:tcPr marL="64008" marR="64008" marT="64008" marB="64008" anchor="ctr">
+                    <a:lnL w="6350" cap="flat" cmpd="sng" algn="ctr">
+                      <a:solidFill>
+                        <a:srgbClr val="24365A"/>
+                      </a:solidFill>
+                      <a:prstDash val="solid"/>
+                      <a:round/>
+                      <a:headEnd type="none" w="med" len="med"/>
+                      <a:tailEnd type="none" w="med" len="med"/>
+                    </a:lnL>
+                    <a:lnR w="6350" cap="flat" cmpd="sng" algn="ctr">
+                      <a:solidFill>
+                        <a:srgbClr val="24365A"/>
+                      </a:solidFill>
+                      <a:prstDash val="solid"/>
+                      <a:round/>
+                      <a:headEnd type="none" w="med" len="med"/>
+                      <a:tailEnd type="none" w="med" len="med"/>
+                    </a:lnR>
+                    <a:lnT w="6350" cap="flat" cmpd="sng" algn="ctr">
+                      <a:solidFill>
+                        <a:srgbClr val="24365A"/>
+                      </a:solidFill>
+                      <a:prstDash val="solid"/>
+                      <a:round/>
+                      <a:headEnd type="none" w="med" len="med"/>
+                      <a:tailEnd type="none" w="med" len="med"/>
+                    </a:lnT>
+                    <a:lnB w="6350" cap="flat" cmpd="sng" algn="ctr">
+                      <a:solidFill>
+                        <a:srgbClr val="24365A"/>
+                      </a:solidFill>
+                      <a:prstDash val="solid"/>
+                      <a:round/>
+                      <a:headEnd type="none" w="med" len="med"/>
+                      <a:tailEnd type="none" w="med" len="med"/>
+                    </a:lnB>
+                    <a:solidFill>
+                      <a:srgbClr val="16233B"/>
+                    </a:solidFill>
+                  </a:tcPr>
+                </a:tc>
+              </a:tr>
+              <a:tr h="402336">
+                <a:tc>
+                  <a:txBody>
+                    <a:bodyPr/>
+                    <a:lstStyle/>
+                    <a:p>
+                      <a:pPr indent="0" marL="0">
+                        <a:buNone/>
+                      </a:pPr>
+                      <a:r>
+                        <a:rPr lang="en-US" sz="1080" dirty="0">
+                          <a:solidFill>
+                            <a:srgbClr val="CBD5E1"/>
+                          </a:solidFill>
+                          <a:latin typeface="Segoe UI" pitchFamily="34" charset="0"/>
+                          <a:ea typeface="Segoe UI" pitchFamily="34" charset="-122"/>
+                          <a:cs typeface="Segoe UI" pitchFamily="34" charset="-120"/>
+                        </a:rPr>
+                        <a:t>Aug-Sep 2022</a:t>
+                      </a:r>
+                      <a:endParaRPr lang="en-US" sz="1080" dirty="0">
+                        <a:latin typeface="Segoe UI" charset="0"/>
+                        <a:ea typeface="Segoe UI" charset="0"/>
+                        <a:cs typeface="Segoe UI" charset="0"/>
+                      </a:endParaRPr>
+                    </a:p>
+                  </a:txBody>
+                  <a:tcPr marL="64008" marR="64008" marT="64008" marB="64008" anchor="ctr">
+                    <a:lnL w="6350" cap="flat" cmpd="sng" algn="ctr">
+                      <a:solidFill>
+                        <a:srgbClr val="24365A"/>
+                      </a:solidFill>
+                      <a:prstDash val="solid"/>
+                      <a:round/>
+                      <a:headEnd type="none" w="med" len="med"/>
+                      <a:tailEnd type="none" w="med" len="med"/>
+                    </a:lnL>
+                    <a:lnR w="6350" cap="flat" cmpd="sng" algn="ctr">
+                      <a:solidFill>
+                        <a:srgbClr val="24365A"/>
+                      </a:solidFill>
+                      <a:prstDash val="solid"/>
+                      <a:round/>
+                      <a:headEnd type="none" w="med" len="med"/>
+                      <a:tailEnd type="none" w="med" len="med"/>
+                    </a:lnR>
+                    <a:lnT w="6350" cap="flat" cmpd="sng" algn="ctr">
+                      <a:solidFill>
+                        <a:srgbClr val="24365A"/>
+                      </a:solidFill>
+                      <a:prstDash val="solid"/>
+                      <a:round/>
+                      <a:headEnd type="none" w="med" len="med"/>
+                      <a:tailEnd type="none" w="med" len="med"/>
+                    </a:lnT>
+                    <a:lnB w="6350" cap="flat" cmpd="sng" algn="ctr">
+                      <a:solidFill>
+                        <a:srgbClr val="24365A"/>
+                      </a:solidFill>
+                      <a:prstDash val="solid"/>
+                      <a:round/>
+                      <a:headEnd type="none" w="med" len="med"/>
+                      <a:tailEnd type="none" w="med" len="med"/>
+                    </a:lnB>
+                    <a:solidFill>
+                      <a:srgbClr val="101A2D"/>
+                    </a:solidFill>
+                  </a:tcPr>
+                </a:tc>
+                <a:tc>
+                  <a:txBody>
+                    <a:bodyPr/>
+                    <a:lstStyle/>
+                    <a:p>
+                      <a:pPr indent="0" marL="0">
+                        <a:buNone/>
+                      </a:pPr>
+                      <a:r>
+                        <a:rPr lang="en-US" sz="1080" dirty="0">
+                          <a:solidFill>
+                            <a:srgbClr val="CBD5E1"/>
+                          </a:solidFill>
+                          <a:latin typeface="Segoe UI" pitchFamily="34" charset="0"/>
+                          <a:ea typeface="Segoe UI" pitchFamily="34" charset="-122"/>
+                          <a:cs typeface="Segoe UI" pitchFamily="34" charset="-120"/>
+                        </a:rPr>
+                        <a:t>Data Analytics, RevoU × Tokopedia</a:t>
+                      </a:r>
+                      <a:endParaRPr lang="en-US" sz="1080" dirty="0">
+                        <a:latin typeface="Segoe UI" charset="0"/>
+                        <a:ea typeface="Segoe UI" charset="0"/>
+                        <a:cs typeface="Segoe UI" charset="0"/>
+                      </a:endParaRPr>
+                    </a:p>
+                  </a:txBody>
+                  <a:tcPr marL="64008" marR="64008" marT="64008" marB="64008" anchor="ctr">
+                    <a:lnL w="6350" cap="flat" cmpd="sng" algn="ctr">
+                      <a:solidFill>
+                        <a:srgbClr val="24365A"/>
+                      </a:solidFill>
+                      <a:prstDash val="solid"/>
+                      <a:round/>
+                      <a:headEnd type="none" w="med" len="med"/>
+                      <a:tailEnd type="none" w="med" len="med"/>
+                    </a:lnL>
+                    <a:lnR w="6350" cap="flat" cmpd="sng" algn="ctr">
+                      <a:solidFill>
+                        <a:srgbClr val="24365A"/>
+                      </a:solidFill>
+                      <a:prstDash val="solid"/>
+                      <a:round/>
+                      <a:headEnd type="none" w="med" len="med"/>
+                      <a:tailEnd type="none" w="med" len="med"/>
+                    </a:lnR>
+                    <a:lnT w="6350" cap="flat" cmpd="sng" algn="ctr">
+                      <a:solidFill>
+                        <a:srgbClr val="24365A"/>
+                      </a:solidFill>
+                      <a:prstDash val="solid"/>
+                      <a:round/>
+                      <a:headEnd type="none" w="med" len="med"/>
+                      <a:tailEnd type="none" w="med" len="med"/>
+                    </a:lnT>
+                    <a:lnB w="6350" cap="flat" cmpd="sng" algn="ctr">
+                      <a:solidFill>
+                        <a:srgbClr val="24365A"/>
+                      </a:solidFill>
+                      <a:prstDash val="solid"/>
+                      <a:round/>
+                      <a:headEnd type="none" w="med" len="med"/>
+                      <a:tailEnd type="none" w="med" len="med"/>
+                    </a:lnB>
+                    <a:solidFill>
+                      <a:srgbClr val="101A2D"/>
+                    </a:solidFill>
+                  </a:tcPr>
+                </a:tc>
+                <a:tc>
+                  <a:txBody>
+                    <a:bodyPr/>
+                    <a:lstStyle/>
+                    <a:p>
+                      <a:pPr indent="0" marL="0">
+                        <a:buNone/>
+                      </a:pPr>
+                      <a:r>
+                        <a:rPr lang="en-US" sz="1080" dirty="0">
+                          <a:solidFill>
+                            <a:srgbClr val="CBD5E1"/>
+                          </a:solidFill>
+                          <a:latin typeface="Segoe UI" pitchFamily="34" charset="0"/>
+                          <a:ea typeface="Segoe UI" pitchFamily="34" charset="-122"/>
+                          <a:cs typeface="Segoe UI" pitchFamily="34" charset="-120"/>
+                        </a:rPr>
+                        <a:t>Segmentation, churn, and feature adoption on real e-commerce data</a:t>
+                      </a:r>
+                      <a:endParaRPr lang="en-US" sz="1080" dirty="0">
+                        <a:latin typeface="Segoe UI" charset="0"/>
+                        <a:ea typeface="Segoe UI" charset="0"/>
+                        <a:cs typeface="Segoe UI" charset="0"/>
+                      </a:endParaRPr>
+                    </a:p>
+                  </a:txBody>
+                  <a:tcPr marL="64008" marR="64008" marT="64008" marB="64008" anchor="ctr">
+                    <a:lnL w="6350" cap="flat" cmpd="sng" algn="ctr">
+                      <a:solidFill>
+                        <a:srgbClr val="24365A"/>
+                      </a:solidFill>
+                      <a:prstDash val="solid"/>
+                      <a:round/>
+                      <a:headEnd type="none" w="med" len="med"/>
+                      <a:tailEnd type="none" w="med" len="med"/>
+                    </a:lnL>
+                    <a:lnR w="6350" cap="flat" cmpd="sng" algn="ctr">
+                      <a:solidFill>
+                        <a:srgbClr val="24365A"/>
+                      </a:solidFill>
+                      <a:prstDash val="solid"/>
+                      <a:round/>
+                      <a:headEnd type="none" w="med" len="med"/>
+                      <a:tailEnd type="none" w="med" len="med"/>
+                    </a:lnR>
+                    <a:lnT w="6350" cap="flat" cmpd="sng" algn="ctr">
+                      <a:solidFill>
+                        <a:srgbClr val="24365A"/>
+                      </a:solidFill>
+                      <a:prstDash val="solid"/>
+                      <a:round/>
+                      <a:headEnd type="none" w="med" len="med"/>
+                      <a:tailEnd type="none" w="med" len="med"/>
+                    </a:lnT>
+                    <a:lnB w="6350" cap="flat" cmpd="sng" algn="ctr">
+                      <a:solidFill>
+                        <a:srgbClr val="24365A"/>
+                      </a:solidFill>
+                      <a:prstDash val="solid"/>
+                      <a:round/>
+                      <a:headEnd type="none" w="med" len="med"/>
+                      <a:tailEnd type="none" w="med" len="med"/>
+                    </a:lnB>
+                    <a:solidFill>
+                      <a:srgbClr val="101A2D"/>
+                    </a:solidFill>
+                  </a:tcPr>
+                </a:tc>
+                <a:tc>
+                  <a:txBody>
+                    <a:bodyPr/>
+                    <a:lstStyle/>
+                    <a:p>
+                      <a:pPr indent="0" marL="0">
+                        <a:buNone/>
+                      </a:pPr>
+                      <a:r>
+                        <a:rPr lang="en-US" sz="1080" dirty="0">
+                          <a:solidFill>
+                            <a:srgbClr val="CBD5E1"/>
+                          </a:solidFill>
+                          <a:latin typeface="Segoe UI" pitchFamily="34" charset="0"/>
+                          <a:ea typeface="Segoe UI" pitchFamily="34" charset="-122"/>
+                          <a:cs typeface="Segoe UI" pitchFamily="34" charset="-120"/>
+                        </a:rPr>
+                        <a:t>Python, SQL, Tableau</a:t>
+                      </a:r>
+                      <a:endParaRPr lang="en-US" sz="1080" dirty="0">
+                        <a:latin typeface="Segoe UI" charset="0"/>
+                        <a:ea typeface="Segoe UI" charset="0"/>
+                        <a:cs typeface="Segoe UI" charset="0"/>
+                      </a:endParaRPr>
+                    </a:p>
+                  </a:txBody>
+                  <a:tcPr marL="64008" marR="64008" marT="64008" marB="64008" anchor="ctr">
+                    <a:lnL w="6350" cap="flat" cmpd="sng" algn="ctr">
+                      <a:solidFill>
+                        <a:srgbClr val="24365A"/>
+                      </a:solidFill>
+                      <a:prstDash val="solid"/>
+                      <a:round/>
+                      <a:headEnd type="none" w="med" len="med"/>
+                      <a:tailEnd type="none" w="med" len="med"/>
+                    </a:lnL>
+                    <a:lnR w="6350" cap="flat" cmpd="sng" algn="ctr">
+                      <a:solidFill>
+                        <a:srgbClr val="24365A"/>
+                      </a:solidFill>
+                      <a:prstDash val="solid"/>
+                      <a:round/>
+                      <a:headEnd type="none" w="med" len="med"/>
+                      <a:tailEnd type="none" w="med" len="med"/>
+                    </a:lnR>
+                    <a:lnT w="6350" cap="flat" cmpd="sng" algn="ctr">
+                      <a:solidFill>
+                        <a:srgbClr val="24365A"/>
+                      </a:solidFill>
+                      <a:prstDash val="solid"/>
+                      <a:round/>
+                      <a:headEnd type="none" w="med" len="med"/>
+                      <a:tailEnd type="none" w="med" len="med"/>
+                    </a:lnT>
+                    <a:lnB w="6350" cap="flat" cmpd="sng" algn="ctr">
+                      <a:solidFill>
+                        <a:srgbClr val="24365A"/>
+                      </a:solidFill>
+                      <a:prstDash val="solid"/>
+                      <a:round/>
+                      <a:headEnd type="none" w="med" len="med"/>
+                      <a:tailEnd type="none" w="med" len="med"/>
+                    </a:lnB>
+                    <a:solidFill>
+                      <a:srgbClr val="101A2D"/>
+                    </a:solidFill>
+                  </a:tcPr>
+                </a:tc>
+              </a:tr>
+              <a:tr h="402336">
+                <a:tc>
+                  <a:txBody>
+                    <a:bodyPr/>
+                    <a:lstStyle/>
+                    <a:p>
+                      <a:pPr indent="0" marL="0">
+                        <a:buNone/>
+                      </a:pPr>
+                      <a:r>
+                        <a:rPr lang="en-US" sz="1080" dirty="0">
+                          <a:solidFill>
+                            <a:srgbClr val="CBD5E1"/>
+                          </a:solidFill>
+                          <a:latin typeface="Segoe UI" pitchFamily="34" charset="0"/>
+                          <a:ea typeface="Segoe UI" pitchFamily="34" charset="-122"/>
+                          <a:cs typeface="Segoe UI" pitchFamily="34" charset="-120"/>
+                        </a:rPr>
+                        <a:t>Feb-Sep 2023</a:t>
+                      </a:r>
+                      <a:endParaRPr lang="en-US" sz="1080" dirty="0">
+                        <a:latin typeface="Segoe UI" charset="0"/>
+                        <a:ea typeface="Segoe UI" charset="0"/>
+                        <a:cs typeface="Segoe UI" charset="0"/>
+                      </a:endParaRPr>
+                    </a:p>
+                  </a:txBody>
+                  <a:tcPr marL="64008" marR="64008" marT="64008" marB="64008" anchor="ctr">
+                    <a:lnL w="6350" cap="flat" cmpd="sng" algn="ctr">
+                      <a:solidFill>
+                        <a:srgbClr val="24365A"/>
+                      </a:solidFill>
+                      <a:prstDash val="solid"/>
+                      <a:round/>
+                      <a:headEnd type="none" w="med" len="med"/>
+                      <a:tailEnd type="none" w="med" len="med"/>
+                    </a:lnL>
+                    <a:lnR w="6350" cap="flat" cmpd="sng" algn="ctr">
+                      <a:solidFill>
+                        <a:srgbClr val="24365A"/>
+                      </a:solidFill>
+                      <a:prstDash val="solid"/>
+                      <a:round/>
+                      <a:headEnd type="none" w="med" len="med"/>
+                      <a:tailEnd type="none" w="med" len="med"/>
+                    </a:lnR>
+                    <a:lnT w="6350" cap="flat" cmpd="sng" algn="ctr">
+                      <a:solidFill>
+                        <a:srgbClr val="24365A"/>
+                      </a:solidFill>
+                      <a:prstDash val="solid"/>
+                      <a:round/>
+                      <a:headEnd type="none" w="med" len="med"/>
+                      <a:tailEnd type="none" w="med" len="med"/>
+                    </a:lnT>
+                    <a:lnB w="6350" cap="flat" cmpd="sng" algn="ctr">
+                      <a:solidFill>
+                        <a:srgbClr val="24365A"/>
+                      </a:solidFill>
+                      <a:prstDash val="solid"/>
+                      <a:round/>
+                      <a:headEnd type="none" w="med" len="med"/>
+                      <a:tailEnd type="none" w="med" len="med"/>
+                    </a:lnB>
+                    <a:solidFill>
+                      <a:srgbClr val="0D1420"/>
+                    </a:solidFill>
+                  </a:tcPr>
+                </a:tc>
+                <a:tc>
+                  <a:txBody>
+                    <a:bodyPr/>
+                    <a:lstStyle/>
+                    <a:p>
+                      <a:pPr indent="0" marL="0">
+                        <a:buNone/>
+                      </a:pPr>
+                      <a:r>
+                        <a:rPr lang="en-US" sz="1080" dirty="0">
+                          <a:solidFill>
+                            <a:srgbClr val="CBD5E1"/>
+                          </a:solidFill>
+                          <a:latin typeface="Segoe UI" pitchFamily="34" charset="0"/>
+                          <a:ea typeface="Segoe UI" pitchFamily="34" charset="-122"/>
+                          <a:cs typeface="Segoe UI" pitchFamily="34" charset="-120"/>
+                        </a:rPr>
+                        <a:t>IT Business Analyst, BRI AML</a:t>
+                      </a:r>
+                      <a:endParaRPr lang="en-US" sz="1080" dirty="0">
+                        <a:latin typeface="Segoe UI" charset="0"/>
+                        <a:ea typeface="Segoe UI" charset="0"/>
+                        <a:cs typeface="Segoe UI" charset="0"/>
+                      </a:endParaRPr>
+                    </a:p>
+                  </a:txBody>
+                  <a:tcPr marL="64008" marR="64008" marT="64008" marB="64008" anchor="ctr">
+                    <a:lnL w="6350" cap="flat" cmpd="sng" algn="ctr">
+                      <a:solidFill>
+                        <a:srgbClr val="24365A"/>
+                      </a:solidFill>
+                      <a:prstDash val="solid"/>
+                      <a:round/>
+                      <a:headEnd type="none" w="med" len="med"/>
+                      <a:tailEnd type="none" w="med" len="med"/>
+                    </a:lnL>
+                    <a:lnR w="6350" cap="flat" cmpd="sng" algn="ctr">
+                      <a:solidFill>
+                        <a:srgbClr val="24365A"/>
+                      </a:solidFill>
+                      <a:prstDash val="solid"/>
+                      <a:round/>
+                      <a:headEnd type="none" w="med" len="med"/>
+                      <a:tailEnd type="none" w="med" len="med"/>
+                    </a:lnR>
+                    <a:lnT w="6350" cap="flat" cmpd="sng" algn="ctr">
+                      <a:solidFill>
+                        <a:srgbClr val="24365A"/>
+                      </a:solidFill>
+                      <a:prstDash val="solid"/>
+                      <a:round/>
+                      <a:headEnd type="none" w="med" len="med"/>
+                      <a:tailEnd type="none" w="med" len="med"/>
+                    </a:lnT>
+                    <a:lnB w="6350" cap="flat" cmpd="sng" algn="ctr">
+                      <a:solidFill>
+                        <a:srgbClr val="24365A"/>
+                      </a:solidFill>
+                      <a:prstDash val="solid"/>
+                      <a:round/>
+                      <a:headEnd type="none" w="med" len="med"/>
+                      <a:tailEnd type="none" w="med" len="med"/>
+                    </a:lnB>
+                    <a:solidFill>
+                      <a:srgbClr val="0D1420"/>
+                    </a:solidFill>
+                  </a:tcPr>
+                </a:tc>
+                <a:tc>
+                  <a:txBody>
+                    <a:bodyPr/>
+                    <a:lstStyle/>
+                    <a:p>
+                      <a:pPr indent="0" marL="0">
+                        <a:buNone/>
+                      </a:pPr>
+                      <a:r>
+                        <a:rPr lang="en-US" sz="1080" dirty="0">
+                          <a:solidFill>
+                            <a:srgbClr val="CBD5E1"/>
+                          </a:solidFill>
+                          <a:latin typeface="Segoe UI" pitchFamily="34" charset="0"/>
+                          <a:ea typeface="Segoe UI" pitchFamily="34" charset="-122"/>
+                          <a:cs typeface="Segoe UI" pitchFamily="34" charset="-120"/>
+                        </a:rPr>
+                        <a:t>Graph-based AML analysis, requirements, auditor-facing documentation</a:t>
+                      </a:r>
+                      <a:endParaRPr lang="en-US" sz="1080" dirty="0">
+                        <a:latin typeface="Segoe UI" charset="0"/>
+                        <a:ea typeface="Segoe UI" charset="0"/>
+                        <a:cs typeface="Segoe UI" charset="0"/>
+                      </a:endParaRPr>
+                    </a:p>
+                  </a:txBody>
+                  <a:tcPr marL="64008" marR="64008" marT="64008" marB="64008" anchor="ctr">
+                    <a:lnL w="6350" cap="flat" cmpd="sng" algn="ctr">
+                      <a:solidFill>
+                        <a:srgbClr val="24365A"/>
+                      </a:solidFill>
+                      <a:prstDash val="solid"/>
+                      <a:round/>
+                      <a:headEnd type="none" w="med" len="med"/>
+                      <a:tailEnd type="none" w="med" len="med"/>
+                    </a:lnL>
+                    <a:lnR w="6350" cap="flat" cmpd="sng" algn="ctr">
+                      <a:solidFill>
+                        <a:srgbClr val="24365A"/>
+                      </a:solidFill>
+                      <a:prstDash val="solid"/>
+                      <a:round/>
+                      <a:headEnd type="none" w="med" len="med"/>
+                      <a:tailEnd type="none" w="med" len="med"/>
+                    </a:lnR>
+                    <a:lnT w="6350" cap="flat" cmpd="sng" algn="ctr">
+                      <a:solidFill>
+                        <a:srgbClr val="24365A"/>
+                      </a:solidFill>
+                      <a:prstDash val="solid"/>
+                      <a:round/>
+                      <a:headEnd type="none" w="med" len="med"/>
+                      <a:tailEnd type="none" w="med" len="med"/>
+                    </a:lnT>
+                    <a:lnB w="6350" cap="flat" cmpd="sng" algn="ctr">
+                      <a:solidFill>
+                        <a:srgbClr val="24365A"/>
+                      </a:solidFill>
+                      <a:prstDash val="solid"/>
+                      <a:round/>
+                      <a:headEnd type="none" w="med" len="med"/>
+                      <a:tailEnd type="none" w="med" len="med"/>
+                    </a:lnB>
+                    <a:solidFill>
+                      <a:srgbClr val="0D1420"/>
+                    </a:solidFill>
+                  </a:tcPr>
+                </a:tc>
+                <a:tc>
+                  <a:txBody>
+                    <a:bodyPr/>
+                    <a:lstStyle/>
+                    <a:p>
+                      <a:pPr indent="0" marL="0">
+                        <a:buNone/>
+                      </a:pPr>
+                      <a:r>
+                        <a:rPr lang="en-US" sz="1080" dirty="0">
+                          <a:solidFill>
+                            <a:srgbClr val="CBD5E1"/>
+                          </a:solidFill>
+                          <a:latin typeface="Segoe UI" pitchFamily="34" charset="0"/>
+                          <a:ea typeface="Segoe UI" pitchFamily="34" charset="-122"/>
+                          <a:cs typeface="Segoe UI" pitchFamily="34" charset="-120"/>
+                        </a:rPr>
+                        <a:t>Graph Database, SQL</a:t>
+                      </a:r>
+                      <a:endParaRPr lang="en-US" sz="1080" dirty="0">
+                        <a:latin typeface="Segoe UI" charset="0"/>
+                        <a:ea typeface="Segoe UI" charset="0"/>
+                        <a:cs typeface="Segoe UI" charset="0"/>
+                      </a:endParaRPr>
+                    </a:p>
+                  </a:txBody>
+                  <a:tcPr marL="64008" marR="64008" marT="64008" marB="64008" anchor="ctr">
+                    <a:lnL w="6350" cap="flat" cmpd="sng" algn="ctr">
+                      <a:solidFill>
+                        <a:srgbClr val="24365A"/>
+                      </a:solidFill>
+                      <a:prstDash val="solid"/>
+                      <a:round/>
+                      <a:headEnd type="none" w="med" len="med"/>
+                      <a:tailEnd type="none" w="med" len="med"/>
+                    </a:lnL>
+                    <a:lnR w="6350" cap="flat" cmpd="sng" algn="ctr">
+                      <a:solidFill>
+                        <a:srgbClr val="24365A"/>
+                      </a:solidFill>
+                      <a:prstDash val="solid"/>
+                      <a:round/>
+                      <a:headEnd type="none" w="med" len="med"/>
+                      <a:tailEnd type="none" w="med" len="med"/>
+                    </a:lnR>
+                    <a:lnT w="6350" cap="flat" cmpd="sng" algn="ctr">
+                      <a:solidFill>
+                        <a:srgbClr val="24365A"/>
+                      </a:solidFill>
+                      <a:prstDash val="solid"/>
+                      <a:round/>
+                      <a:headEnd type="none" w="med" len="med"/>
+                      <a:tailEnd type="none" w="med" len="med"/>
+                    </a:lnT>
+                    <a:lnB w="6350" cap="flat" cmpd="sng" algn="ctr">
+                      <a:solidFill>
+                        <a:srgbClr val="24365A"/>
+                      </a:solidFill>
+                      <a:prstDash val="solid"/>
+                      <a:round/>
+                      <a:headEnd type="none" w="med" len="med"/>
+                      <a:tailEnd type="none" w="med" len="med"/>
+                    </a:lnB>
+                    <a:solidFill>
+                      <a:srgbClr val="0D1420"/>
+                    </a:solidFill>
+                  </a:tcPr>
+                </a:tc>
+              </a:tr>
+              <a:tr h="402336">
+                <a:tc>
+                  <a:txBody>
+                    <a:bodyPr/>
+                    <a:lstStyle/>
+                    <a:p>
+                      <a:pPr indent="0" marL="0">
+                        <a:buNone/>
+                      </a:pPr>
+                      <a:r>
+                        <a:rPr lang="en-US" sz="1080" dirty="0">
+                          <a:solidFill>
+                            <a:srgbClr val="CBD5E1"/>
+                          </a:solidFill>
+                          <a:latin typeface="Segoe UI" pitchFamily="34" charset="0"/>
+                          <a:ea typeface="Segoe UI" pitchFamily="34" charset="-122"/>
+                          <a:cs typeface="Segoe UI" pitchFamily="34" charset="-120"/>
+                        </a:rPr>
+                        <a:t>Oct 2023-Mar 2024</a:t>
+                      </a:r>
+                      <a:endParaRPr lang="en-US" sz="1080" dirty="0">
+                        <a:latin typeface="Segoe UI" charset="0"/>
+                        <a:ea typeface="Segoe UI" charset="0"/>
+                        <a:cs typeface="Segoe UI" charset="0"/>
+                      </a:endParaRPr>
+                    </a:p>
+                  </a:txBody>
+                  <a:tcPr marL="64008" marR="64008" marT="64008" marB="64008" anchor="ctr">
+                    <a:lnL w="6350" cap="flat" cmpd="sng" algn="ctr">
+                      <a:solidFill>
+                        <a:srgbClr val="24365A"/>
+                      </a:solidFill>
+                      <a:prstDash val="solid"/>
+                      <a:round/>
+                      <a:headEnd type="none" w="med" len="med"/>
+                      <a:tailEnd type="none" w="med" len="med"/>
+                    </a:lnL>
+                    <a:lnR w="6350" cap="flat" cmpd="sng" algn="ctr">
+                      <a:solidFill>
+                        <a:srgbClr val="24365A"/>
+                      </a:solidFill>
+                      <a:prstDash val="solid"/>
+                      <a:round/>
+                      <a:headEnd type="none" w="med" len="med"/>
+                      <a:tailEnd type="none" w="med" len="med"/>
+                    </a:lnR>
+                    <a:lnT w="6350" cap="flat" cmpd="sng" algn="ctr">
+                      <a:solidFill>
+                        <a:srgbClr val="24365A"/>
+                      </a:solidFill>
+                      <a:prstDash val="solid"/>
+                      <a:round/>
+                      <a:headEnd type="none" w="med" len="med"/>
+                      <a:tailEnd type="none" w="med" len="med"/>
+                    </a:lnT>
+                    <a:lnB w="6350" cap="flat" cmpd="sng" algn="ctr">
+                      <a:solidFill>
+                        <a:srgbClr val="24365A"/>
+                      </a:solidFill>
+                      <a:prstDash val="solid"/>
+                      <a:round/>
+                      <a:headEnd type="none" w="med" len="med"/>
+                      <a:tailEnd type="none" w="med" len="med"/>
+                    </a:lnB>
+                    <a:solidFill>
+                      <a:srgbClr val="101A2D"/>
+                    </a:solidFill>
+                  </a:tcPr>
+                </a:tc>
+                <a:tc>
+                  <a:txBody>
+                    <a:bodyPr/>
+                    <a:lstStyle/>
+                    <a:p>
+                      <a:pPr indent="0" marL="0">
+                        <a:buNone/>
+                      </a:pPr>
+                      <a:r>
+                        <a:rPr lang="en-US" sz="1080" dirty="0">
+                          <a:solidFill>
+                            <a:srgbClr val="CBD5E1"/>
+                          </a:solidFill>
+                          <a:latin typeface="Segoe UI" pitchFamily="34" charset="0"/>
+                          <a:ea typeface="Segoe UI" pitchFamily="34" charset="-122"/>
+                          <a:cs typeface="Segoe UI" pitchFamily="34" charset="-120"/>
+                        </a:rPr>
+                        <a:t>Regional BI Specialist, IKEA</a:t>
+                      </a:r>
+                      <a:endParaRPr lang="en-US" sz="1080" dirty="0">
+                        <a:latin typeface="Segoe UI" charset="0"/>
+                        <a:ea typeface="Segoe UI" charset="0"/>
+                        <a:cs typeface="Segoe UI" charset="0"/>
+                      </a:endParaRPr>
+                    </a:p>
+                  </a:txBody>
+                  <a:tcPr marL="64008" marR="64008" marT="64008" marB="64008" anchor="ctr">
+                    <a:lnL w="6350" cap="flat" cmpd="sng" algn="ctr">
+                      <a:solidFill>
+                        <a:srgbClr val="24365A"/>
+                      </a:solidFill>
+                      <a:prstDash val="solid"/>
+                      <a:round/>
+                      <a:headEnd type="none" w="med" len="med"/>
+                      <a:tailEnd type="none" w="med" len="med"/>
+                    </a:lnL>
+                    <a:lnR w="6350" cap="flat" cmpd="sng" algn="ctr">
+                      <a:solidFill>
+                        <a:srgbClr val="24365A"/>
+                      </a:solidFill>
+                      <a:prstDash val="solid"/>
+                      <a:round/>
+                      <a:headEnd type="none" w="med" len="med"/>
+                      <a:tailEnd type="none" w="med" len="med"/>
+                    </a:lnR>
+                    <a:lnT w="6350" cap="flat" cmpd="sng" algn="ctr">
+                      <a:solidFill>
+                        <a:srgbClr val="24365A"/>
+                      </a:solidFill>
+                      <a:prstDash val="solid"/>
+                      <a:round/>
+                      <a:headEnd type="none" w="med" len="med"/>
+                      <a:tailEnd type="none" w="med" len="med"/>
+                    </a:lnT>
+                    <a:lnB w="6350" cap="flat" cmpd="sng" algn="ctr">
+                      <a:solidFill>
+                        <a:srgbClr val="24365A"/>
+                      </a:solidFill>
+                      <a:prstDash val="solid"/>
+                      <a:round/>
+                      <a:headEnd type="none" w="med" len="med"/>
+                      <a:tailEnd type="none" w="med" len="med"/>
+                    </a:lnB>
+                    <a:solidFill>
+                      <a:srgbClr val="101A2D"/>
+                    </a:solidFill>
+                  </a:tcPr>
+                </a:tc>
+                <a:tc>
+                  <a:txBody>
+                    <a:bodyPr/>
+                    <a:lstStyle/>
+                    <a:p>
+                      <a:pPr indent="0" marL="0">
+                        <a:buNone/>
+                      </a:pPr>
+                      <a:r>
+                        <a:rPr lang="en-US" sz="1080" dirty="0">
+                          <a:solidFill>
+                            <a:srgbClr val="CBD5E1"/>
+                          </a:solidFill>
+                          <a:latin typeface="Segoe UI" pitchFamily="34" charset="0"/>
+                          <a:ea typeface="Segoe UI" pitchFamily="34" charset="-122"/>
+                          <a:cs typeface="Segoe UI" pitchFamily="34" charset="-120"/>
+                        </a:rPr>
+                        <a:t>BI operations across 4 countries, datalake QA, scheduled pipelines</a:t>
+                      </a:r>
+                      <a:endParaRPr lang="en-US" sz="1080" dirty="0">
+                        <a:latin typeface="Segoe UI" charset="0"/>
+                        <a:ea typeface="Segoe UI" charset="0"/>
+                        <a:cs typeface="Segoe UI" charset="0"/>
+                      </a:endParaRPr>
+                    </a:p>
+                  </a:txBody>
+                  <a:tcPr marL="64008" marR="64008" marT="64008" marB="64008" anchor="ctr">
+                    <a:lnL w="6350" cap="flat" cmpd="sng" algn="ctr">
+                      <a:solidFill>
+                        <a:srgbClr val="24365A"/>
+                      </a:solidFill>
+                      <a:prstDash val="solid"/>
+                      <a:round/>
+                      <a:headEnd type="none" w="med" len="med"/>
+                      <a:tailEnd type="none" w="med" len="med"/>
+                    </a:lnL>
+                    <a:lnR w="6350" cap="flat" cmpd="sng" algn="ctr">
+                      <a:solidFill>
+                        <a:srgbClr val="24365A"/>
+                      </a:solidFill>
+                      <a:prstDash val="solid"/>
+                      <a:round/>
+                      <a:headEnd type="none" w="med" len="med"/>
+                      <a:tailEnd type="none" w="med" len="med"/>
+                    </a:lnR>
+                    <a:lnT w="6350" cap="flat" cmpd="sng" algn="ctr">
+                      <a:solidFill>
+                        <a:srgbClr val="24365A"/>
+                      </a:solidFill>
+                      <a:prstDash val="solid"/>
+                      <a:round/>
+                      <a:headEnd type="none" w="med" len="med"/>
+                      <a:tailEnd type="none" w="med" len="med"/>
+                    </a:lnT>
+                    <a:lnB w="6350" cap="flat" cmpd="sng" algn="ctr">
+                      <a:solidFill>
+                        <a:srgbClr val="24365A"/>
+                      </a:solidFill>
+                      <a:prstDash val="solid"/>
+                      <a:round/>
+                      <a:headEnd type="none" w="med" len="med"/>
+                      <a:tailEnd type="none" w="med" len="med"/>
+                    </a:lnB>
+                    <a:solidFill>
+                      <a:srgbClr val="101A2D"/>
+                    </a:solidFill>
+                  </a:tcPr>
+                </a:tc>
+                <a:tc>
+                  <a:txBody>
+                    <a:bodyPr/>
+                    <a:lstStyle/>
+                    <a:p>
+                      <a:pPr indent="0" marL="0">
+                        <a:buNone/>
+                      </a:pPr>
+                      <a:r>
+                        <a:rPr lang="en-US" sz="1080" dirty="0">
+                          <a:solidFill>
+                            <a:srgbClr val="CBD5E1"/>
+                          </a:solidFill>
+                          <a:latin typeface="Segoe UI" pitchFamily="34" charset="0"/>
+                          <a:ea typeface="Segoe UI" pitchFamily="34" charset="-122"/>
+                          <a:cs typeface="Segoe UI" pitchFamily="34" charset="-120"/>
+                        </a:rPr>
+                        <a:t>Qlik Sense, Alteryx, SQL Server</a:t>
+                      </a:r>
+                      <a:endParaRPr lang="en-US" sz="1080" dirty="0">
+                        <a:latin typeface="Segoe UI" charset="0"/>
+                        <a:ea typeface="Segoe UI" charset="0"/>
+                        <a:cs typeface="Segoe UI" charset="0"/>
+                      </a:endParaRPr>
+                    </a:p>
+                  </a:txBody>
+                  <a:tcPr marL="64008" marR="64008" marT="64008" marB="64008" anchor="ctr">
+                    <a:lnL w="6350" cap="flat" cmpd="sng" algn="ctr">
+                      <a:solidFill>
+                        <a:srgbClr val="24365A"/>
+                      </a:solidFill>
+                      <a:prstDash val="solid"/>
+                      <a:round/>
+                      <a:headEnd type="none" w="med" len="med"/>
+                      <a:tailEnd type="none" w="med" len="med"/>
+                    </a:lnL>
+                    <a:lnR w="6350" cap="flat" cmpd="sng" algn="ctr">
+                      <a:solidFill>
+                        <a:srgbClr val="24365A"/>
+                      </a:solidFill>
+                      <a:prstDash val="solid"/>
+                      <a:round/>
+                      <a:headEnd type="none" w="med" len="med"/>
+                      <a:tailEnd type="none" w="med" len="med"/>
+                    </a:lnR>
+                    <a:lnT w="6350" cap="flat" cmpd="sng" algn="ctr">
+                      <a:solidFill>
+                        <a:srgbClr val="24365A"/>
+                      </a:solidFill>
+                      <a:prstDash val="solid"/>
+                      <a:round/>
+                      <a:headEnd type="none" w="med" len="med"/>
+                      <a:tailEnd type="none" w="med" len="med"/>
+                    </a:lnT>
+                    <a:lnB w="6350" cap="flat" cmpd="sng" algn="ctr">
+                      <a:solidFill>
+                        <a:srgbClr val="24365A"/>
+                      </a:solidFill>
+                      <a:prstDash val="solid"/>
+                      <a:round/>
+                      <a:headEnd type="none" w="med" len="med"/>
+                      <a:tailEnd type="none" w="med" len="med"/>
+                    </a:lnB>
+                    <a:solidFill>
+                      <a:srgbClr val="101A2D"/>
+                    </a:solidFill>
+                  </a:tcPr>
+                </a:tc>
+              </a:tr>
+              <a:tr h="402336">
+                <a:tc>
+                  <a:txBody>
+                    <a:bodyPr/>
+                    <a:lstStyle/>
+                    <a:p>
+                      <a:pPr indent="0" marL="0">
+                        <a:buNone/>
+                      </a:pPr>
+                      <a:r>
+                        <a:rPr lang="en-US" sz="1080" dirty="0">
+                          <a:solidFill>
+                            <a:srgbClr val="CBD5E1"/>
+                          </a:solidFill>
+                          <a:latin typeface="Segoe UI" pitchFamily="34" charset="0"/>
+                          <a:ea typeface="Segoe UI" pitchFamily="34" charset="-122"/>
+                          <a:cs typeface="Segoe UI" pitchFamily="34" charset="-120"/>
+                        </a:rPr>
+                        <a:t>Apr 2024-present</a:t>
+                      </a:r>
+                      <a:endParaRPr lang="en-US" sz="1080" dirty="0">
+                        <a:latin typeface="Segoe UI" charset="0"/>
+                        <a:ea typeface="Segoe UI" charset="0"/>
+                        <a:cs typeface="Segoe UI" charset="0"/>
+                      </a:endParaRPr>
+                    </a:p>
+                  </a:txBody>
+                  <a:tcPr marL="64008" marR="64008" marT="64008" marB="64008" anchor="ctr">
+                    <a:lnL w="6350" cap="flat" cmpd="sng" algn="ctr">
+                      <a:solidFill>
+                        <a:srgbClr val="24365A"/>
+                      </a:solidFill>
+                      <a:prstDash val="solid"/>
+                      <a:round/>
+                      <a:headEnd type="none" w="med" len="med"/>
+                      <a:tailEnd type="none" w="med" len="med"/>
+                    </a:lnL>
+                    <a:lnR w="6350" cap="flat" cmpd="sng" algn="ctr">
+                      <a:solidFill>
+                        <a:srgbClr val="24365A"/>
+                      </a:solidFill>
+                      <a:prstDash val="solid"/>
+                      <a:round/>
+                      <a:headEnd type="none" w="med" len="med"/>
+                      <a:tailEnd type="none" w="med" len="med"/>
+                    </a:lnR>
+                    <a:lnT w="6350" cap="flat" cmpd="sng" algn="ctr">
+                      <a:solidFill>
+                        <a:srgbClr val="24365A"/>
+                      </a:solidFill>
+                      <a:prstDash val="solid"/>
+                      <a:round/>
+                      <a:headEnd type="none" w="med" len="med"/>
+                      <a:tailEnd type="none" w="med" len="med"/>
+                    </a:lnT>
+                    <a:lnB w="6350" cap="flat" cmpd="sng" algn="ctr">
+                      <a:solidFill>
+                        <a:srgbClr val="24365A"/>
+                      </a:solidFill>
+                      <a:prstDash val="solid"/>
+                      <a:round/>
+                      <a:headEnd type="none" w="med" len="med"/>
+                      <a:tailEnd type="none" w="med" len="med"/>
+                    </a:lnB>
+                    <a:solidFill>
+                      <a:srgbClr val="0D1420"/>
+                    </a:solidFill>
+                  </a:tcPr>
+                </a:tc>
+                <a:tc>
+                  <a:txBody>
+                    <a:bodyPr/>
+                    <a:lstStyle/>
+                    <a:p>
+                      <a:pPr indent="0" marL="0">
+                        <a:buNone/>
+                      </a:pPr>
+                      <a:r>
+                        <a:rPr lang="en-US" sz="1080" dirty="0">
+                          <a:solidFill>
+                            <a:srgbClr val="CBD5E1"/>
+                          </a:solidFill>
+                          <a:latin typeface="Segoe UI" pitchFamily="34" charset="0"/>
+                          <a:ea typeface="Segoe UI" pitchFamily="34" charset="-122"/>
+                          <a:cs typeface="Segoe UI" pitchFamily="34" charset="-120"/>
+                        </a:rPr>
+                        <a:t>Founder &amp; Lead AI Engineer, Zalin Labs</a:t>
+                      </a:r>
+                      <a:endParaRPr lang="en-US" sz="1080" dirty="0">
+                        <a:latin typeface="Segoe UI" charset="0"/>
+                        <a:ea typeface="Segoe UI" charset="0"/>
+                        <a:cs typeface="Segoe UI" charset="0"/>
+                      </a:endParaRPr>
+                    </a:p>
+                  </a:txBody>
+                  <a:tcPr marL="64008" marR="64008" marT="64008" marB="64008" anchor="ctr">
+                    <a:lnL w="6350" cap="flat" cmpd="sng" algn="ctr">
+                      <a:solidFill>
+                        <a:srgbClr val="24365A"/>
+                      </a:solidFill>
+                      <a:prstDash val="solid"/>
+                      <a:round/>
+                      <a:headEnd type="none" w="med" len="med"/>
+                      <a:tailEnd type="none" w="med" len="med"/>
+                    </a:lnL>
+                    <a:lnR w="6350" cap="flat" cmpd="sng" algn="ctr">
+                      <a:solidFill>
+                        <a:srgbClr val="24365A"/>
+                      </a:solidFill>
+                      <a:prstDash val="solid"/>
+                      <a:round/>
+                      <a:headEnd type="none" w="med" len="med"/>
+                      <a:tailEnd type="none" w="med" len="med"/>
+                    </a:lnR>
+                    <a:lnT w="6350" cap="flat" cmpd="sng" algn="ctr">
+                      <a:solidFill>
+                        <a:srgbClr val="24365A"/>
+                      </a:solidFill>
+                      <a:prstDash val="solid"/>
+                      <a:round/>
+                      <a:headEnd type="none" w="med" len="med"/>
+                      <a:tailEnd type="none" w="med" len="med"/>
+                    </a:lnT>
+                    <a:lnB w="6350" cap="flat" cmpd="sng" algn="ctr">
+                      <a:solidFill>
+                        <a:srgbClr val="24365A"/>
+                      </a:solidFill>
+                      <a:prstDash val="solid"/>
+                      <a:round/>
+                      <a:headEnd type="none" w="med" len="med"/>
+                      <a:tailEnd type="none" w="med" len="med"/>
+                    </a:lnB>
+                    <a:solidFill>
+                      <a:srgbClr val="0D1420"/>
+                    </a:solidFill>
+                  </a:tcPr>
+                </a:tc>
+                <a:tc>
+                  <a:txBody>
+                    <a:bodyPr/>
+                    <a:lstStyle/>
+                    <a:p>
+                      <a:pPr indent="0" marL="0">
+                        <a:buNone/>
+                      </a:pPr>
+                      <a:r>
+                        <a:rPr lang="en-US" sz="1080" dirty="0">
+                          <a:solidFill>
+                            <a:srgbClr val="CBD5E1"/>
+                          </a:solidFill>
+                          <a:latin typeface="Segoe UI" pitchFamily="34" charset="0"/>
+                          <a:ea typeface="Segoe UI" pitchFamily="34" charset="-122"/>
+                          <a:cs typeface="Segoe UI" pitchFamily="34" charset="-120"/>
+                        </a:rPr>
+                        <a:t>30+ production apps, 9+ agents, 2 open-source frameworks</a:t>
+                      </a:r>
+                      <a:endParaRPr lang="en-US" sz="1080" dirty="0">
+                        <a:latin typeface="Segoe UI" charset="0"/>
+                        <a:ea typeface="Segoe UI" charset="0"/>
+                        <a:cs typeface="Segoe UI" charset="0"/>
+                      </a:endParaRPr>
+                    </a:p>
+                  </a:txBody>
+                  <a:tcPr marL="64008" marR="64008" marT="64008" marB="64008" anchor="ctr">
+                    <a:lnL w="6350" cap="flat" cmpd="sng" algn="ctr">
+                      <a:solidFill>
+                        <a:srgbClr val="24365A"/>
+                      </a:solidFill>
+                      <a:prstDash val="solid"/>
+                      <a:round/>
+                      <a:headEnd type="none" w="med" len="med"/>
+                      <a:tailEnd type="none" w="med" len="med"/>
+                    </a:lnL>
+                    <a:lnR w="6350" cap="flat" cmpd="sng" algn="ctr">
+                      <a:solidFill>
+                        <a:srgbClr val="24365A"/>
+                      </a:solidFill>
+                      <a:prstDash val="solid"/>
+                      <a:round/>
+                      <a:headEnd type="none" w="med" len="med"/>
+                      <a:tailEnd type="none" w="med" len="med"/>
+                    </a:lnR>
+                    <a:lnT w="6350" cap="flat" cmpd="sng" algn="ctr">
+                      <a:solidFill>
+                        <a:srgbClr val="24365A"/>
+                      </a:solidFill>
+                      <a:prstDash val="solid"/>
+                      <a:round/>
+                      <a:headEnd type="none" w="med" len="med"/>
+                      <a:tailEnd type="none" w="med" len="med"/>
+                    </a:lnT>
+                    <a:lnB w="6350" cap="flat" cmpd="sng" algn="ctr">
+                      <a:solidFill>
+                        <a:srgbClr val="24365A"/>
+                      </a:solidFill>
+                      <a:prstDash val="solid"/>
+                      <a:round/>
+                      <a:headEnd type="none" w="med" len="med"/>
+                      <a:tailEnd type="none" w="med" len="med"/>
+                    </a:lnB>
+                    <a:solidFill>
+                      <a:srgbClr val="0D1420"/>
+                    </a:solidFill>
+                  </a:tcPr>
+                </a:tc>
+                <a:tc>
+                  <a:txBody>
+                    <a:bodyPr/>
+                    <a:lstStyle/>
+                    <a:p>
+                      <a:pPr indent="0" marL="0">
+                        <a:buNone/>
+                      </a:pPr>
+                      <a:r>
+                        <a:rPr lang="en-US" sz="1080" dirty="0">
+                          <a:solidFill>
+                            <a:srgbClr val="CBD5E1"/>
+                          </a:solidFill>
+                          <a:latin typeface="Segoe UI" pitchFamily="34" charset="0"/>
+                          <a:ea typeface="Segoe UI" pitchFamily="34" charset="-122"/>
+                          <a:cs typeface="Segoe UI" pitchFamily="34" charset="-120"/>
+                        </a:rPr>
+                        <a:t>Python, FastAPI, Ollama</a:t>
+                      </a:r>
+                      <a:endParaRPr lang="en-US" sz="1080" dirty="0">
+                        <a:latin typeface="Segoe UI" charset="0"/>
+                        <a:ea typeface="Segoe UI" charset="0"/>
+                        <a:cs typeface="Segoe UI" charset="0"/>
+                      </a:endParaRPr>
+                    </a:p>
+                  </a:txBody>
+                  <a:tcPr marL="64008" marR="64008" marT="64008" marB="64008" anchor="ctr">
+                    <a:lnL w="6350" cap="flat" cmpd="sng" algn="ctr">
+                      <a:solidFill>
+                        <a:srgbClr val="24365A"/>
+                      </a:solidFill>
+                      <a:prstDash val="solid"/>
+                      <a:round/>
+                      <a:headEnd type="none" w="med" len="med"/>
+                      <a:tailEnd type="none" w="med" len="med"/>
+                    </a:lnL>
+                    <a:lnR w="6350" cap="flat" cmpd="sng" algn="ctr">
+                      <a:solidFill>
+                        <a:srgbClr val="24365A"/>
+                      </a:solidFill>
+                      <a:prstDash val="solid"/>
+                      <a:round/>
+                      <a:headEnd type="none" w="med" len="med"/>
+                      <a:tailEnd type="none" w="med" len="med"/>
+                    </a:lnR>
+                    <a:lnT w="6350" cap="flat" cmpd="sng" algn="ctr">
+                      <a:solidFill>
+                        <a:srgbClr val="24365A"/>
+                      </a:solidFill>
+                      <a:prstDash val="solid"/>
+                      <a:round/>
+                      <a:headEnd type="none" w="med" len="med"/>
+                      <a:tailEnd type="none" w="med" len="med"/>
+                    </a:lnT>
+                    <a:lnB w="6350" cap="flat" cmpd="sng" algn="ctr">
+                      <a:solidFill>
+                        <a:srgbClr val="24365A"/>
+                      </a:solidFill>
+                      <a:prstDash val="solid"/>
+                      <a:round/>
+                      <a:headEnd type="none" w="med" len="med"/>
+                      <a:tailEnd type="none" w="med" len="med"/>
+                    </a:lnB>
+                    <a:solidFill>
+                      <a:srgbClr val="0D1420"/>
+                    </a:solidFill>
+                  </a:tcPr>
+                </a:tc>
+              </a:tr>
+            </a:tbl>
+          </a:graphicData>
+        </a:graphic>
+      </p:graphicFrame>
+      <p:sp>
+        <p:nvSpPr>
+          <p:cNvPr id="7" name="Shape 4"/>
+          <p:cNvSpPr/>
+          <p:nvPr/>
+        </p:nvSpPr>
+        <p:spPr>
+          <a:xfrm>
+            <a:off x="822960" y="5961888"/>
+            <a:ext cx="10515600" cy="0"/>
+          </a:xfrm>
+          <a:prstGeom prst="line">
+            <a:avLst/>
+          </a:prstGeom>
+          <a:noFill/>
+          <a:ln w="12700">
+            <a:solidFill>
+              <a:srgbClr val="1E2D45"/>
+            </a:solidFill>
+            <a:prstDash val="solid"/>
+          </a:ln>
+        </p:spPr>
+      </p:sp>
+      <p:sp>
+        <p:nvSpPr>
+          <p:cNvPr id="8" name="Text 5"/>
+          <p:cNvSpPr/>
+          <p:nvPr/>
+        </p:nvSpPr>
+        <p:spPr>
+          <a:xfrm>
+            <a:off x="822960" y="6053328"/>
+            <a:ext cx="9692640" cy="457200"/>
+          </a:xfrm>
+          <a:prstGeom prst="rect">
+            <a:avLst/>
+          </a:prstGeom>
+          <a:noFill/>
+          <a:ln/>
+        </p:spPr>
+        <p:txBody>
+          <a:bodyPr wrap="square" rtlCol="0" anchor="ctr"/>
+          <a:lstStyle/>
+          <a:p>
+            <a:pPr indent="0" marL="0">
+              <a:buNone/>
+            </a:pPr>
+            <a:r>
+              <a:rPr lang="en-US" sz="1150" dirty="0">
+                <a:solidFill>
+                  <a:srgbClr val="64748B"/>
                 </a:solidFill>
                 <a:latin typeface="Segoe UI" pitchFamily="34" charset="0"/>
                 <a:ea typeface="Segoe UI" pitchFamily="34" charset="-122"/>
                 <a:cs typeface="Segoe UI" pitchFamily="34" charset="-120"/>
               </a:rPr>
-              <a:t>BI foundations: requirements, quality, stakeholder trust</a:t>
-            </a:r>
-            <a:endParaRPr lang="en-US" sz="1600" dirty="0"/>
-          </a:p>
-          <a:p>
-            <a:pPr marL="342900" indent="-342900">
-              <a:lnSpc>
-                <a:spcPct val="115000"/>
-              </a:lnSpc>
-              <a:spcAft>
-                <a:spcPts val="1000"/>
-              </a:spcAft>
-              <a:buSzPct val="100000"/>
-              <a:buChar char="▸"/>
-            </a:pPr>
-            <a:r>
-              <a:rPr lang="en-US" sz="1600" dirty="0">
-                <a:solidFill>
-                  <a:srgbClr val="CBD5E1"/>
-                </a:solidFill>
-                <a:latin typeface="Segoe UI" pitchFamily="34" charset="0"/>
-                <a:ea typeface="Segoe UI" pitchFamily="34" charset="-122"/>
-                <a:cs typeface="Segoe UI" pitchFamily="34" charset="-120"/>
-              </a:rPr>
-              <a:t>AI engineering: agents, routing, local-first systems</a:t>
-            </a:r>
-            <a:endParaRPr lang="en-US" sz="1600" dirty="0"/>
-          </a:p>
-          <a:p>
-            <a:pPr marL="342900" indent="-342900">
-              <a:lnSpc>
-                <a:spcPct val="115000"/>
-              </a:lnSpc>
-              <a:spcAft>
-                <a:spcPts val="1000"/>
-              </a:spcAft>
-              <a:buSzPct val="100000"/>
-              <a:buChar char="▸"/>
-            </a:pPr>
-            <a:r>
-              <a:rPr lang="en-US" sz="1600" dirty="0">
-                <a:solidFill>
-                  <a:srgbClr val="CBD5E1"/>
-                </a:solidFill>
-                <a:latin typeface="Segoe UI" pitchFamily="34" charset="0"/>
-                <a:ea typeface="Segoe UI" pitchFamily="34" charset="-122"/>
-                <a:cs typeface="Segoe UI" pitchFamily="34" charset="-120"/>
-              </a:rPr>
-              <a:t>Proof of shipping: 30+ apps, open-source frameworks, live portfolio</a:t>
-            </a:r>
-            <a:endParaRPr lang="en-US" sz="1600" dirty="0"/>
-          </a:p>
-          <a:p>
-            <a:pPr marL="342900" indent="-342900">
-              <a:lnSpc>
-                <a:spcPct val="115000"/>
-              </a:lnSpc>
-              <a:spcAft>
-                <a:spcPts val="1000"/>
-              </a:spcAft>
-              <a:buSzPct val="100000"/>
-              <a:buChar char="▸"/>
-            </a:pPr>
-            <a:r>
-              <a:rPr lang="en-US" sz="1600" dirty="0">
-                <a:solidFill>
-                  <a:srgbClr val="CBD5E1"/>
-                </a:solidFill>
-                <a:latin typeface="Segoe UI" pitchFamily="34" charset="0"/>
-                <a:ea typeface="Segoe UI" pitchFamily="34" charset="-122"/>
-                <a:cs typeface="Segoe UI" pitchFamily="34" charset="-120"/>
-              </a:rPr>
-              <a:t>Available for freelance data scraping, BI, and AI automation via Upwork</a:t>
-            </a:r>
-            <a:endParaRPr lang="en-US" sz="1600" dirty="0"/>
-          </a:p>
-        </p:txBody>
-      </p:sp>
-      <p:sp>
-        <p:nvSpPr>
-          <p:cNvPr id="7" name="Text 5"/>
-          <p:cNvSpPr/>
-          <p:nvPr/>
-        </p:nvSpPr>
-        <p:spPr>
-          <a:xfrm>
-            <a:off x="10698480" y="6355080"/>
+              <a:t>E-commerce, banking, multinational retail, and independent R&amp;D - each one stricter than the last about evidence.</a:t>
+            </a:r>
+            <a:endParaRPr lang="en-US" sz="1150" dirty="0"/>
+          </a:p>
+        </p:txBody>
+      </p:sp>
+      <p:sp>
+        <p:nvSpPr>
+          <p:cNvPr id="9" name="Text 6"/>
+          <p:cNvSpPr/>
+          <p:nvPr/>
+        </p:nvSpPr>
+        <p:spPr>
+          <a:xfrm>
+            <a:off x="10698480" y="6382512"/>
             <a:ext cx="1188720" cy="365760"/>
           </a:xfrm>
           <a:prstGeom prst="rect">
@@ -3506,7 +10500,7 @@
                 <a:ea typeface="Consolas" pitchFamily="34" charset="-122"/>
                 <a:cs typeface="Consolas" pitchFamily="34" charset="-120"/>
               </a:rPr>
-              <a:t>7 / 8</a:t>
+              <a:t>7 / 14</a:t>
             </a:r>
             <a:endParaRPr lang="en-US" sz="1000" dirty="0"/>
           </a:p>
@@ -3592,8 +10586,8 @@
         </p:nvSpPr>
         <p:spPr>
           <a:xfrm>
-            <a:off x="822960" y="1554480"/>
-            <a:ext cx="10515600" cy="457200"/>
+            <a:off x="822960" y="502920"/>
+            <a:ext cx="10515600" cy="365760"/>
           </a:xfrm>
           <a:prstGeom prst="rect">
             <a:avLst/>
@@ -3609,7 +10603,7 @@
               <a:buNone/>
             </a:pPr>
             <a:r>
-              <a:rPr lang="en-US" sz="1400" spc="400" kern="0" dirty="0">
+              <a:rPr lang="en-US" sz="1200" spc="300" kern="0" dirty="0">
                 <a:solidFill>
                   <a:srgbClr val="06B6D4"/>
                 </a:solidFill>
@@ -3617,9 +10611,9 @@
                 <a:ea typeface="Consolas" pitchFamily="34" charset="-122"/>
                 <a:cs typeface="Consolas" pitchFamily="34" charset="-120"/>
               </a:rPr>
-              <a:t>TAKEAWAY</a:t>
-            </a:r>
-            <a:endParaRPr lang="en-US" sz="1400" dirty="0"/>
+              <a:t>WHAT DID NOT TRANSFER</a:t>
+            </a:r>
+            <a:endParaRPr lang="en-US" sz="1200" dirty="0"/>
           </a:p>
         </p:txBody>
       </p:sp>
@@ -3631,8 +10625,8 @@
         </p:nvSpPr>
         <p:spPr>
           <a:xfrm>
-            <a:off x="822960" y="2286000"/>
-            <a:ext cx="10515600" cy="1737360"/>
+            <a:off x="822960" y="914400"/>
+            <a:ext cx="10561320" cy="868680"/>
           </a:xfrm>
           <a:prstGeom prst="rect">
             <a:avLst/>
@@ -3648,7 +10642,7 @@
               <a:buNone/>
             </a:pPr>
             <a:r>
-              <a:rPr lang="en-US" sz="4400" b="1" dirty="0">
+              <a:rPr lang="en-US" sz="2700" b="1" dirty="0">
                 <a:solidFill>
                   <a:srgbClr val="FFFFFF"/>
                 </a:solidFill>
@@ -3656,9 +10650,9 @@
                 <a:ea typeface="Segoe UI" pitchFamily="34" charset="-122"/>
                 <a:cs typeface="Segoe UI" pitchFamily="34" charset="-120"/>
               </a:rPr>
-              <a:t>Compound who you already were</a:t>
-            </a:r>
-            <a:endParaRPr lang="en-US" sz="4400" dirty="0"/>
+              <a:t>The unlearning list every founder pays for</a:t>
+            </a:r>
+            <a:endParaRPr lang="en-US" sz="2700" dirty="0"/>
           </a:p>
         </p:txBody>
       </p:sp>
@@ -3670,46 +10664,187 @@
         </p:nvSpPr>
         <p:spPr>
           <a:xfrm>
-            <a:off x="822960" y="4206240"/>
-            <a:ext cx="10515600" cy="914400"/>
-          </a:xfrm>
-          <a:prstGeom prst="rect">
-            <a:avLst/>
-          </a:prstGeom>
-          <a:noFill/>
-          <a:ln/>
-        </p:spPr>
-        <p:txBody>
-          <a:bodyPr wrap="square" rtlCol="0" anchor="ctr"/>
-          <a:lstStyle/>
-          <a:p>
-            <a:pPr indent="0" marL="0">
-              <a:buNone/>
+            <a:off x="868680" y="2011680"/>
+            <a:ext cx="10424160" cy="3566160"/>
+          </a:xfrm>
+          <a:prstGeom prst="rect">
+            <a:avLst/>
+          </a:prstGeom>
+          <a:noFill/>
+          <a:ln/>
+        </p:spPr>
+        <p:txBody>
+          <a:bodyPr wrap="square" rtlCol="0" anchor="t"/>
+          <a:lstStyle/>
+          <a:p>
+            <a:pPr marL="342900" indent="-342900">
+              <a:lnSpc>
+                <a:spcPct val="112000"/>
+              </a:lnSpc>
+              <a:spcAft>
+                <a:spcPts val="900"/>
+              </a:spcAft>
+              <a:buSzPct val="100000"/>
+              <a:buChar char="▸"/>
             </a:pPr>
             <a:r>
               <a:rPr lang="en-US" sz="1600" dirty="0">
                 <a:solidFill>
-                  <a:srgbClr val="94A3B8"/>
+                  <a:srgbClr val="CBD5E1"/>
                 </a:solidFill>
                 <a:latin typeface="Segoe UI" pitchFamily="34" charset="0"/>
                 <a:ea typeface="Segoe UI" pitchFamily="34" charset="-122"/>
                 <a:cs typeface="Segoe UI" pitchFamily="34" charset="-120"/>
               </a:rPr>
-              <a:t>Career transitions are transfers, not restarts. · rezalianvatiady.github.io</a:t>
+              <a:t>Waiting for permission: in enterprises change is a process; as a founder it is a Tuesday.</a:t>
             </a:r>
             <a:endParaRPr lang="en-US" sz="1600" dirty="0"/>
           </a:p>
-        </p:txBody>
-      </p:sp>
-      <p:sp>
-        <p:nvSpPr>
-          <p:cNvPr id="7" name="Text 5"/>
-          <p:cNvSpPr/>
-          <p:nvPr/>
-        </p:nvSpPr>
-        <p:spPr>
-          <a:xfrm>
-            <a:off x="10698480" y="6355080"/>
+          <a:p>
+            <a:pPr marL="342900" indent="-342900">
+              <a:lnSpc>
+                <a:spcPct val="112000"/>
+              </a:lnSpc>
+              <a:spcAft>
+                <a:spcPts val="900"/>
+              </a:spcAft>
+              <a:buSzPct val="100000"/>
+              <a:buChar char="▸"/>
+            </a:pPr>
+            <a:r>
+              <a:rPr lang="en-US" sz="1600" dirty="0">
+                <a:solidFill>
+                  <a:srgbClr val="CBD5E1"/>
+                </a:solidFill>
+                <a:latin typeface="Segoe UI" pitchFamily="34" charset="0"/>
+                <a:ea typeface="Segoe UI" pitchFamily="34" charset="-122"/>
+                <a:cs typeface="Segoe UI" pitchFamily="34" charset="-120"/>
+              </a:rPr>
+              <a:t>Scope defense: BI rewards protecting boundaries - founders win by crossing them.</a:t>
+            </a:r>
+            <a:endParaRPr lang="en-US" sz="1600" dirty="0"/>
+          </a:p>
+          <a:p>
+            <a:pPr marL="342900" indent="-342900">
+              <a:lnSpc>
+                <a:spcPct val="112000"/>
+              </a:lnSpc>
+              <a:spcAft>
+                <a:spcPts val="900"/>
+              </a:spcAft>
+              <a:buSzPct val="100000"/>
+              <a:buChar char="▸"/>
+            </a:pPr>
+            <a:r>
+              <a:rPr lang="en-US" sz="1600" dirty="0">
+                <a:solidFill>
+                  <a:srgbClr val="CBD5E1"/>
+                </a:solidFill>
+                <a:latin typeface="Segoe UI" pitchFamily="34" charset="0"/>
+                <a:ea typeface="Segoe UI" pitchFamily="34" charset="-122"/>
+                <a:cs typeface="Segoe UI" pitchFamily="34" charset="-120"/>
+              </a:rPr>
+              <a:t>Perfectionism before shipping: quality gates replace gold-plating, so evidence ships instead of excuses.</a:t>
+            </a:r>
+            <a:endParaRPr lang="en-US" sz="1600" dirty="0"/>
+          </a:p>
+          <a:p>
+            <a:pPr marL="342900" indent="-342900">
+              <a:lnSpc>
+                <a:spcPct val="112000"/>
+              </a:lnSpc>
+              <a:spcAft>
+                <a:spcPts val="900"/>
+              </a:spcAft>
+              <a:buSzPct val="100000"/>
+              <a:buChar char="▸"/>
+            </a:pPr>
+            <a:r>
+              <a:rPr lang="en-US" sz="1600" dirty="0">
+                <a:solidFill>
+                  <a:srgbClr val="CBD5E1"/>
+                </a:solidFill>
+                <a:latin typeface="Segoe UI" pitchFamily="34" charset="0"/>
+                <a:ea typeface="Segoe UI" pitchFamily="34" charset="-122"/>
+                <a:cs typeface="Segoe UI" pitchFamily="34" charset="-120"/>
+              </a:rPr>
+              <a:t>Tool loyalty: stacks expire in a year; validation, documentation, and system thinking compound.</a:t>
+            </a:r>
+            <a:endParaRPr lang="en-US" sz="1600" dirty="0"/>
+          </a:p>
+        </p:txBody>
+      </p:sp>
+      <p:sp>
+        <p:nvSpPr>
+          <p:cNvPr id="7" name="Shape 5"/>
+          <p:cNvSpPr/>
+          <p:nvPr/>
+        </p:nvSpPr>
+        <p:spPr>
+          <a:xfrm>
+            <a:off x="822960" y="5961888"/>
+            <a:ext cx="10515600" cy="0"/>
+          </a:xfrm>
+          <a:prstGeom prst="line">
+            <a:avLst/>
+          </a:prstGeom>
+          <a:noFill/>
+          <a:ln w="12700">
+            <a:solidFill>
+              <a:srgbClr val="1E2D45"/>
+            </a:solidFill>
+            <a:prstDash val="solid"/>
+          </a:ln>
+        </p:spPr>
+      </p:sp>
+      <p:sp>
+        <p:nvSpPr>
+          <p:cNvPr id="8" name="Text 6"/>
+          <p:cNvSpPr/>
+          <p:nvPr/>
+        </p:nvSpPr>
+        <p:spPr>
+          <a:xfrm>
+            <a:off x="822960" y="6053328"/>
+            <a:ext cx="9692640" cy="457200"/>
+          </a:xfrm>
+          <a:prstGeom prst="rect">
+            <a:avLst/>
+          </a:prstGeom>
+          <a:noFill/>
+          <a:ln/>
+        </p:spPr>
+        <p:txBody>
+          <a:bodyPr wrap="square" rtlCol="0" anchor="ctr"/>
+          <a:lstStyle/>
+          <a:p>
+            <a:pPr indent="0" marL="0">
+              <a:buNone/>
+            </a:pPr>
+            <a:r>
+              <a:rPr lang="en-US" sz="1150" dirty="0">
+                <a:solidFill>
+                  <a:srgbClr val="64748B"/>
+                </a:solidFill>
+                <a:latin typeface="Segoe UI" pitchFamily="34" charset="0"/>
+                <a:ea typeface="Segoe UI" pitchFamily="34" charset="-122"/>
+                <a:cs typeface="Segoe UI" pitchFamily="34" charset="-120"/>
+              </a:rPr>
+              <a:t>Unlearning caution took months - the gates made it safe to move fast anyway.</a:t>
+            </a:r>
+            <a:endParaRPr lang="en-US" sz="1150" dirty="0"/>
+          </a:p>
+        </p:txBody>
+      </p:sp>
+      <p:sp>
+        <p:nvSpPr>
+          <p:cNvPr id="9" name="Text 7"/>
+          <p:cNvSpPr/>
+          <p:nvPr/>
+        </p:nvSpPr>
+        <p:spPr>
+          <a:xfrm>
+            <a:off x="10698480" y="6382512"/>
             <a:ext cx="1188720" cy="365760"/>
           </a:xfrm>
           <a:prstGeom prst="rect">
@@ -3734,7 +10869,336 @@
                 <a:ea typeface="Consolas" pitchFamily="34" charset="-122"/>
                 <a:cs typeface="Consolas" pitchFamily="34" charset="-120"/>
               </a:rPr>
-              <a:t>8 / 8</a:t>
+              <a:t>8 / 14</a:t>
+            </a:r>
+            <a:endParaRPr lang="en-US" sz="1000" dirty="0"/>
+          </a:p>
+        </p:txBody>
+      </p:sp>
+    </p:spTree>
+  </p:cSld>
+  <p:clrMapOvr>
+    <a:masterClrMapping/>
+  </p:clrMapOvr>
+</p:sld>
+</file>
+
+<file path=ppt/slides/slide9.xml><?xml version="1.0" encoding="utf-8"?>
+<p:sld xmlns:a="http://schemas.openxmlformats.org/drawingml/2006/main" xmlns:r="http://schemas.openxmlformats.org/officeDocument/2006/relationships" xmlns:p="http://schemas.openxmlformats.org/presentationml/2006/main">
+  <p:cSld name="Slide 9">
+    <p:bg>
+      <p:bgPr>
+        <a:solidFill>
+          <a:srgbClr val="0A0C12"/>
+        </a:solidFill>
+      </p:bgPr>
+    </p:bg>
+    <p:spTree>
+      <p:nvGrpSpPr>
+        <p:cNvPr id="1" name=""/>
+        <p:cNvGrpSpPr/>
+        <p:nvPr/>
+      </p:nvGrpSpPr>
+      <p:grpSpPr>
+        <a:xfrm>
+          <a:off x="0" y="0"/>
+          <a:ext cx="0" cy="0"/>
+          <a:chOff x="0" y="0"/>
+          <a:chExt cx="0" cy="0"/>
+        </a:xfrm>
+      </p:grpSpPr>
+      <p:sp>
+        <p:nvSpPr>
+          <p:cNvPr id="2" name="Shape 0"/>
+          <p:cNvSpPr/>
+          <p:nvPr/>
+        </p:nvSpPr>
+        <p:spPr>
+          <a:xfrm>
+            <a:off x="0" y="0"/>
+            <a:ext cx="7680960" cy="64008"/>
+          </a:xfrm>
+          <a:prstGeom prst="rect">
+            <a:avLst/>
+          </a:prstGeom>
+          <a:solidFill>
+            <a:srgbClr val="3B82F6"/>
+          </a:solidFill>
+          <a:ln/>
+        </p:spPr>
+      </p:sp>
+      <p:sp>
+        <p:nvSpPr>
+          <p:cNvPr id="3" name="Shape 1"/>
+          <p:cNvSpPr/>
+          <p:nvPr/>
+        </p:nvSpPr>
+        <p:spPr>
+          <a:xfrm>
+            <a:off x="7680960" y="0"/>
+            <a:ext cx="4510735" cy="64008"/>
+          </a:xfrm>
+          <a:prstGeom prst="rect">
+            <a:avLst/>
+          </a:prstGeom>
+          <a:solidFill>
+            <a:srgbClr val="06B6D4"/>
+          </a:solidFill>
+          <a:ln/>
+        </p:spPr>
+      </p:sp>
+      <p:sp>
+        <p:nvSpPr>
+          <p:cNvPr id="4" name="Text 2"/>
+          <p:cNvSpPr/>
+          <p:nvPr/>
+        </p:nvSpPr>
+        <p:spPr>
+          <a:xfrm>
+            <a:off x="822960" y="502920"/>
+            <a:ext cx="10515600" cy="365760"/>
+          </a:xfrm>
+          <a:prstGeom prst="rect">
+            <a:avLst/>
+          </a:prstGeom>
+          <a:noFill/>
+          <a:ln/>
+        </p:spPr>
+        <p:txBody>
+          <a:bodyPr wrap="square" rtlCol="0" anchor="ctr"/>
+          <a:lstStyle/>
+          <a:p>
+            <a:pPr indent="0" marL="0">
+              <a:buNone/>
+            </a:pPr>
+            <a:r>
+              <a:rPr lang="en-US" sz="1200" spc="300" kern="0" dirty="0">
+                <a:solidFill>
+                  <a:srgbClr val="06B6D4"/>
+                </a:solidFill>
+                <a:latin typeface="Consolas" pitchFamily="34" charset="0"/>
+                <a:ea typeface="Consolas" pitchFamily="34" charset="-122"/>
+                <a:cs typeface="Consolas" pitchFamily="34" charset="-120"/>
+              </a:rPr>
+              <a:t>OPERATING RHYTHM</a:t>
+            </a:r>
+            <a:endParaRPr lang="en-US" sz="1200" dirty="0"/>
+          </a:p>
+        </p:txBody>
+      </p:sp>
+      <p:sp>
+        <p:nvSpPr>
+          <p:cNvPr id="5" name="Text 3"/>
+          <p:cNvSpPr/>
+          <p:nvPr/>
+        </p:nvSpPr>
+        <p:spPr>
+          <a:xfrm>
+            <a:off x="822960" y="914400"/>
+            <a:ext cx="10561320" cy="868680"/>
+          </a:xfrm>
+          <a:prstGeom prst="rect">
+            <a:avLst/>
+          </a:prstGeom>
+          <a:noFill/>
+          <a:ln/>
+        </p:spPr>
+        <p:txBody>
+          <a:bodyPr wrap="square" rtlCol="0" anchor="ctr"/>
+          <a:lstStyle/>
+          <a:p>
+            <a:pPr indent="0" marL="0">
+              <a:buNone/>
+            </a:pPr>
+            <a:r>
+              <a:rPr lang="en-US" sz="2700" b="1" dirty="0">
+                <a:solidFill>
+                  <a:srgbClr val="FFFFFF"/>
+                </a:solidFill>
+                <a:latin typeface="Segoe UI" pitchFamily="34" charset="0"/>
+                <a:ea typeface="Segoe UI" pitchFamily="34" charset="-122"/>
+                <a:cs typeface="Segoe UI" pitchFamily="34" charset="-120"/>
+              </a:rPr>
+              <a:t>Where a founder's week actually goes</a:t>
+            </a:r>
+            <a:endParaRPr lang="en-US" sz="2700" dirty="0"/>
+          </a:p>
+        </p:txBody>
+      </p:sp>
+      <p:graphicFrame>
+        <p:nvGraphicFramePr>
+          <p:cNvPr id="6" name="Chart 0" descr=""/>
+          <p:cNvGraphicFramePr/>
+          <p:nvPr/>
+        </p:nvGraphicFramePr>
+        <p:xfrm>
+          <a:off x="822960" y="1874520"/>
+          <a:ext cx="10515600" cy="3337560"/>
+        </p:xfrm>
+        <a:graphic xmlns:a="http://schemas.openxmlformats.org/drawingml/2006/main">
+          <a:graphicData uri="http://schemas.openxmlformats.org/drawingml/2006/chart">
+            <c:chart xmlns:c="http://schemas.openxmlformats.org/drawingml/2006/chart" r:id="rId1"/>
+          </a:graphicData>
+        </a:graphic>
+      </p:graphicFrame>
+      <p:sp>
+        <p:nvSpPr>
+          <p:cNvPr id="7" name="Shape 4"/>
+          <p:cNvSpPr/>
+          <p:nvPr/>
+        </p:nvSpPr>
+        <p:spPr>
+          <a:xfrm>
+            <a:off x="822960" y="5413248"/>
+            <a:ext cx="10515600" cy="0"/>
+          </a:xfrm>
+          <a:prstGeom prst="line">
+            <a:avLst/>
+          </a:prstGeom>
+          <a:noFill/>
+          <a:ln w="12700">
+            <a:solidFill>
+              <a:srgbClr val="1E2D45"/>
+            </a:solidFill>
+            <a:prstDash val="solid"/>
+          </a:ln>
+        </p:spPr>
+      </p:sp>
+      <p:sp>
+        <p:nvSpPr>
+          <p:cNvPr id="8" name="Text 5"/>
+          <p:cNvSpPr/>
+          <p:nvPr/>
+        </p:nvSpPr>
+        <p:spPr>
+          <a:xfrm>
+            <a:off x="822960" y="5504688"/>
+            <a:ext cx="10424160" cy="411480"/>
+          </a:xfrm>
+          <a:prstGeom prst="rect">
+            <a:avLst/>
+          </a:prstGeom>
+          <a:noFill/>
+          <a:ln/>
+        </p:spPr>
+        <p:txBody>
+          <a:bodyPr wrap="square" rtlCol="0" anchor="ctr"/>
+          <a:lstStyle/>
+          <a:p>
+            <a:pPr indent="0" marL="0">
+              <a:buNone/>
+            </a:pPr>
+            <a:r>
+              <a:rPr lang="en-US" sz="1300" i="1" dirty="0">
+                <a:solidFill>
+                  <a:srgbClr val="06B6D4"/>
+                </a:solidFill>
+                <a:latin typeface="Segoe UI" pitchFamily="34" charset="0"/>
+                <a:ea typeface="Segoe UI" pitchFamily="34" charset="-122"/>
+                <a:cs typeface="Segoe UI" pitchFamily="34" charset="-120"/>
+              </a:rPr>
+              <a:t>→  Agents absorbed the repetitive majority, so the founder share is decisions, review, and writing - the parts that compound.</a:t>
+            </a:r>
+            <a:endParaRPr lang="en-US" sz="1300" dirty="0"/>
+          </a:p>
+        </p:txBody>
+      </p:sp>
+      <p:sp>
+        <p:nvSpPr>
+          <p:cNvPr id="9" name="Shape 6"/>
+          <p:cNvSpPr/>
+          <p:nvPr/>
+        </p:nvSpPr>
+        <p:spPr>
+          <a:xfrm>
+            <a:off x="822960" y="5961888"/>
+            <a:ext cx="10515600" cy="0"/>
+          </a:xfrm>
+          <a:prstGeom prst="line">
+            <a:avLst/>
+          </a:prstGeom>
+          <a:noFill/>
+          <a:ln w="12700">
+            <a:solidFill>
+              <a:srgbClr val="1E2D45"/>
+            </a:solidFill>
+            <a:prstDash val="solid"/>
+          </a:ln>
+        </p:spPr>
+      </p:sp>
+      <p:sp>
+        <p:nvSpPr>
+          <p:cNvPr id="10" name="Text 7"/>
+          <p:cNvSpPr/>
+          <p:nvPr/>
+        </p:nvSpPr>
+        <p:spPr>
+          <a:xfrm>
+            <a:off x="822960" y="6053328"/>
+            <a:ext cx="9692640" cy="457200"/>
+          </a:xfrm>
+          <a:prstGeom prst="rect">
+            <a:avLst/>
+          </a:prstGeom>
+          <a:noFill/>
+          <a:ln/>
+        </p:spPr>
+        <p:txBody>
+          <a:bodyPr wrap="square" rtlCol="0" anchor="ctr"/>
+          <a:lstStyle/>
+          <a:p>
+            <a:pPr indent="0" marL="0">
+              <a:buNone/>
+            </a:pPr>
+            <a:r>
+              <a:rPr lang="en-US" sz="1150" dirty="0">
+                <a:solidFill>
+                  <a:srgbClr val="64748B"/>
+                </a:solidFill>
+                <a:latin typeface="Segoe UI" pitchFamily="34" charset="0"/>
+                <a:ea typeface="Segoe UI" pitchFamily="34" charset="-122"/>
+                <a:cs typeface="Segoe UI" pitchFamily="34" charset="-120"/>
+              </a:rPr>
+              <a:t>Illustrative distribution consistent with the published nine-agent operating model.</a:t>
+            </a:r>
+            <a:endParaRPr lang="en-US" sz="1150" dirty="0"/>
+          </a:p>
+        </p:txBody>
+      </p:sp>
+      <p:sp>
+        <p:nvSpPr>
+          <p:cNvPr id="11" name="Text 8"/>
+          <p:cNvSpPr/>
+          <p:nvPr/>
+        </p:nvSpPr>
+        <p:spPr>
+          <a:xfrm>
+            <a:off x="10698480" y="6382512"/>
+            <a:ext cx="1188720" cy="365760"/>
+          </a:xfrm>
+          <a:prstGeom prst="rect">
+            <a:avLst/>
+          </a:prstGeom>
+          <a:noFill/>
+          <a:ln/>
+        </p:spPr>
+        <p:txBody>
+          <a:bodyPr wrap="square" rtlCol="0" anchor="ctr"/>
+          <a:lstStyle/>
+          <a:p>
+            <a:pPr algn="r" indent="0" marL="0">
+              <a:buNone/>
+            </a:pPr>
+            <a:r>
+              <a:rPr lang="en-US" sz="1000" dirty="0">
+                <a:solidFill>
+                  <a:srgbClr val="64748B"/>
+                </a:solidFill>
+                <a:latin typeface="Consolas" pitchFamily="34" charset="0"/>
+                <a:ea typeface="Consolas" pitchFamily="34" charset="-122"/>
+                <a:cs typeface="Consolas" pitchFamily="34" charset="-120"/>
+              </a:rPr>
+              <a:t>9 / 14</a:t>
             </a:r>
             <a:endParaRPr lang="en-US" sz="1000" dirty="0"/>
           </a:p>

--- a/decks/career-journey.pptx
+++ b/decks/career-journey.pptx
@@ -412,7 +412,7 @@
           <a:lstStyle/>
           <a:p>
             <a:pPr>
-              <a:defRPr sz="1100" b="0" i="0" u="none" strike="noStrike">
+              <a:defRPr sz="1800" b="0" i="0" u="none" strike="noStrike">
                 <a:solidFill>
                   <a:srgbClr val="94A3B8"/>
                 </a:solidFill>
@@ -432,6 +432,7 @@
         <c:axId val="2094734552"/>
         <c:scaling>
           <c:orientation val="minMax"/>
+          <c:min val="0"/>
         </c:scaling>
         <c:delete val="0"/>
         <c:axPos val="l"/>
@@ -464,7 +465,7 @@
           <a:lstStyle/>
           <a:p>
             <a:pPr>
-              <a:defRPr sz="1000" b="0" i="0" u="none" strike="noStrike">
+              <a:defRPr sz="1800" b="0" i="0" u="none" strike="noStrike">
                 <a:solidFill>
                   <a:srgbClr val="94A3B8"/>
                 </a:solidFill>
@@ -496,7 +497,7 @@
         <a:lstStyle/>
         <a:p>
           <a:pPr>
-            <a:defRPr sz="1100">
+            <a:defRPr sz="1800">
               <a:solidFill>
                 <a:srgbClr val="CBD5E1"/>
               </a:solidFill>
@@ -615,7 +616,7 @@
                 <a:lstStyle/>
                 <a:p>
                   <a:pPr>
-                    <a:defRPr sz="1000" b="0" i="0" u="none" strike="noStrike">
+                    <a:defRPr sz="1800" b="0" i="0" u="none" strike="noStrike">
                       <a:solidFill>
                         <a:srgbClr val="E2E8F0"/>
                       </a:solidFill>
@@ -640,7 +641,7 @@
                 <a:lstStyle/>
                 <a:p>
                   <a:pPr>
-                    <a:defRPr sz="1000" b="0" i="0" u="none" strike="noStrike">
+                    <a:defRPr sz="1800" b="0" i="0" u="none" strike="noStrike">
                       <a:solidFill>
                         <a:srgbClr val="E2E8F0"/>
                       </a:solidFill>
@@ -665,7 +666,7 @@
                 <a:lstStyle/>
                 <a:p>
                   <a:pPr>
-                    <a:defRPr sz="1000" b="0" i="0" u="none" strike="noStrike">
+                    <a:defRPr sz="1800" b="0" i="0" u="none" strike="noStrike">
                       <a:solidFill>
                         <a:srgbClr val="E2E8F0"/>
                       </a:solidFill>
@@ -690,7 +691,7 @@
                 <a:lstStyle/>
                 <a:p>
                   <a:pPr>
-                    <a:defRPr sz="1000" b="0" i="0" u="none" strike="noStrike">
+                    <a:defRPr sz="1800" b="0" i="0" u="none" strike="noStrike">
                       <a:solidFill>
                         <a:srgbClr val="E2E8F0"/>
                       </a:solidFill>
@@ -771,7 +772,7 @@
           </c:val>
         </c:ser>
         <c:firstSliceAng val="0"/>
-        <c:holeSize val="62"/>
+        <c:holeSize val="60"/>
       </c:doughnutChart>
       <c:spPr>
         <a:solidFill>
@@ -791,7 +792,7 @@
         <a:lstStyle/>
         <a:p>
           <a:pPr>
-            <a:defRPr sz="1100">
+            <a:defRPr sz="1800">
               <a:solidFill>
                 <a:srgbClr val="CBD5E1"/>
               </a:solidFill>
@@ -863,7 +864,7 @@
               <a:lstStyle/>
               <a:p>
                 <a:pPr>
-                  <a:defRPr b="0" i="0" strike="noStrike" sz="1000" u="none">
+                  <a:defRPr b="0" i="0" strike="noStrike" sz="1800" u="none">
                     <a:solidFill>
                       <a:srgbClr val="E2E8F0"/>
                     </a:solidFill>
@@ -975,7 +976,7 @@
             <a:lstStyle/>
             <a:p>
               <a:pPr>
-                <a:defRPr b="0" i="0" strike="noStrike" sz="1000" u="none">
+                <a:defRPr b="0" i="0" strike="noStrike" sz="1800" u="none">
                   <a:solidFill>
                     <a:srgbClr val="E2E8F0"/>
                   </a:solidFill>
@@ -1023,7 +1024,7 @@
           <a:lstStyle/>
           <a:p>
             <a:pPr>
-              <a:defRPr sz="1100" b="0" i="0" u="none" strike="noStrike">
+              <a:defRPr sz="1800" b="0" i="0" u="none" strike="noStrike">
                 <a:solidFill>
                   <a:srgbClr val="94A3B8"/>
                 </a:solidFill>
@@ -1043,6 +1044,7 @@
         <c:axId val="2094734552"/>
         <c:scaling>
           <c:orientation val="minMax"/>
+          <c:min val="0"/>
         </c:scaling>
         <c:delete val="0"/>
         <c:axPos val="l"/>
@@ -1075,7 +1077,7 @@
           <a:lstStyle/>
           <a:p>
             <a:pPr>
-              <a:defRPr sz="1000" b="0" i="0" u="none" strike="noStrike">
+              <a:defRPr sz="1800" b="0" i="0" u="none" strike="noStrike">
                 <a:solidFill>
                   <a:srgbClr val="94A3B8"/>
                 </a:solidFill>
@@ -1514,7 +1516,7 @@
           <a:p>
             <a:r>
               <a:rPr lang="en-US" dirty="0"/>
-              <a:t/>
+              <a:t>Opening: introduce yourself and this deck, "From BI Analyst to AI Company Builder". | Transition: next up - "What this deck covers".</a:t>
             </a:r>
             <a:endParaRPr lang="en-US" dirty="0"/>
           </a:p>
@@ -1602,7 +1604,7 @@
           <a:p>
             <a:r>
               <a:rPr lang="en-US" dirty="0"/>
-              <a:t/>
+              <a:t>Key message: Build the proof before you need it | Talk track: Credibility was not a certificate - it was shipped work anyone could inspect. | Transition: next up - "The enterprise taught me the system; building taught me the leverage".</a:t>
             </a:r>
             <a:endParaRPr lang="en-US" dirty="0"/>
           </a:p>
@@ -1690,7 +1692,7 @@
           <a:p>
             <a:r>
               <a:rPr lang="en-US" dirty="0"/>
-              <a:t/>
+              <a:t>Key message: The enterprise taught me the system; building taught me the leverage | Talk track: Rare profiles are combinations, not specialties: system thinking plus shipping speed. | Transition: next up - "Numbers you can verify in two clicks".</a:t>
             </a:r>
             <a:endParaRPr lang="en-US" dirty="0"/>
           </a:p>
@@ -1778,7 +1780,7 @@
           <a:p>
             <a:r>
               <a:rPr lang="en-US" dirty="0"/>
-              <a:t/>
+              <a:t>Key message: Numbers you can verify in two clicks | Insight: Every bar is public today - the live portfolio links to the apps, the platform, and the validation set. | Talk track: Sources: 30+ apps, 9+ agents, 51/52 production checks passing, and the 30-query intent-router validation set. | Transition: next up - "Why this combination is rare".</a:t>
             </a:r>
             <a:endParaRPr lang="en-US" dirty="0"/>
           </a:p>
@@ -1866,7 +1868,7 @@
           <a:p>
             <a:r>
               <a:rPr lang="en-US" dirty="0"/>
-              <a:t/>
+              <a:t>Key message: Why this combination is rare | Transition: next up - "Hire the transition, not just the title".</a:t>
             </a:r>
             <a:endParaRPr lang="en-US" dirty="0"/>
           </a:p>
@@ -1954,7 +1956,7 @@
           <a:p>
             <a:r>
               <a:rPr lang="en-US" dirty="0"/>
-              <a:t/>
+              <a:t>Key message: Hire the transition, not just the title | Transition: close with the call to action on the contact slide, invite questions.</a:t>
             </a:r>
             <a:endParaRPr lang="en-US" dirty="0"/>
           </a:p>
@@ -2042,7 +2044,7 @@
           <a:p>
             <a:r>
               <a:rPr lang="en-US" dirty="0"/>
-              <a:t/>
+              <a:t>Key message: What this deck covers | Agenda: The four chapters - and what each one set up; What transferred perfectly from BI to AI building; What I had to unlearn on the way to founder; The proof: apps, agents, frameworks, router checks; Why this combination is rare - and available | Transition: next up - "Four chapters, one direction: every role set up the next".</a:t>
             </a:r>
             <a:endParaRPr lang="en-US" dirty="0"/>
           </a:p>
@@ -2130,7 +2132,7 @@
           <a:p>
             <a:r>
               <a:rPr lang="en-US" dirty="0"/>
-              <a:t/>
+              <a:t>Key message: Four chapters, one direction: every role set up the next | Talk track: Analytics fundamentals led to technical analyst roles, then regional platform ownership, then the automation company. | Transition: next up - "Skills that compounded instead of restarting".</a:t>
             </a:r>
             <a:endParaRPr lang="en-US" dirty="0"/>
           </a:p>
@@ -2218,7 +2220,7 @@
           <a:p>
             <a:r>
               <a:rPr lang="en-US" dirty="0"/>
-              <a:t/>
+              <a:t>Key message: Skills that compounded instead of restarting | Talk track: Transferable skills are the compounding asset; tools are only the current interface. | Transition: next up - "What the leap has produced so far".</a:t>
             </a:r>
             <a:endParaRPr lang="en-US" dirty="0"/>
           </a:p>
@@ -2306,7 +2308,7 @@
           <a:p>
             <a:r>
               <a:rPr lang="en-US" dirty="0"/>
-              <a:t/>
+              <a:t>Key message: What the leap has produced so far | Talk track: All four numbers come from the public portfolio and published build logs. | Transition: next up - "The founder leap is the last step of a steady climb".</a:t>
             </a:r>
             <a:endParaRPr lang="en-US" dirty="0"/>
           </a:p>
@@ -2394,7 +2396,7 @@
           <a:p>
             <a:r>
               <a:rPr lang="en-US" dirty="0"/>
-              <a:t/>
+              <a:t>Key message: The founder leap is the last step of a steady climb | Insight: On a resume the founder leap looks sudden; on the skill curve it is the final step of a two-year climb. | Talk track: Indices are illustrative; the chapters, roles, and dates are real. | Transition: next up - "Four chapters, four environments, one direction".</a:t>
             </a:r>
             <a:endParaRPr lang="en-US" dirty="0"/>
           </a:p>
@@ -2482,7 +2484,7 @@
           <a:p>
             <a:r>
               <a:rPr lang="en-US" dirty="0"/>
-              <a:t/>
+              <a:t>Key message: Four chapters, four environments, one direction | Talk track: E-commerce, banking, multinational retail, and independent R&amp;D - each one stricter than the last about evidence. | Transition: next up - "The unlearning list every founder pays for".</a:t>
             </a:r>
             <a:endParaRPr lang="en-US" dirty="0"/>
           </a:p>
@@ -2570,7 +2572,7 @@
           <a:p>
             <a:r>
               <a:rPr lang="en-US" dirty="0"/>
-              <a:t/>
+              <a:t>Key message: The unlearning list every founder pays for | Talk track: Unlearning caution took months - the gates made it safe to move fast anyway. | Transition: next up - "Where a founder's week actually goes".</a:t>
             </a:r>
             <a:endParaRPr lang="en-US" dirty="0"/>
           </a:p>
@@ -2658,7 +2660,7 @@
           <a:p>
             <a:r>
               <a:rPr lang="en-US" dirty="0"/>
-              <a:t/>
+              <a:t>Key message: Where a founder's week actually goes | Insight: Agents absorbed the repetitive majority, so the founder share is decisions, review, and writing - the parts that compound. | Talk track: Illustrative distribution consistent with the published nine-agent operating model. | Transition: next up - "Build the proof before you need it".</a:t>
             </a:r>
             <a:endParaRPr lang="en-US" dirty="0"/>
           </a:p>
@@ -3079,7 +3081,7 @@
         </p:nvSpPr>
         <p:spPr>
           <a:xfrm>
-            <a:off x="822960" y="1783080"/>
+            <a:off x="822960" y="1737360"/>
             <a:ext cx="10515600" cy="457200"/>
           </a:xfrm>
           <a:prstGeom prst="rect">
@@ -3096,7 +3098,7 @@
               <a:buNone/>
             </a:pPr>
             <a:r>
-              <a:rPr lang="en-US" sz="1400" spc="400" kern="0" dirty="0">
+              <a:rPr lang="en-US" sz="1800" spc="400" kern="0" dirty="0">
                 <a:solidFill>
                   <a:srgbClr val="06B6D4"/>
                 </a:solidFill>
@@ -3106,7 +3108,7 @@
               </a:rPr>
               <a:t>ZALIN PLATFORM · CAREER STORY</a:t>
             </a:r>
-            <a:endParaRPr lang="en-US" sz="1400" dirty="0"/>
+            <a:endParaRPr lang="en-US" sz="1800" dirty="0"/>
           </a:p>
         </p:txBody>
       </p:sp>
@@ -3118,7 +3120,7 @@
         </p:nvSpPr>
         <p:spPr>
           <a:xfrm>
-            <a:off x="822960" y="2286000"/>
+            <a:off x="822960" y="2240280"/>
             <a:ext cx="10607040" cy="1691640"/>
           </a:xfrm>
           <a:prstGeom prst="rect">
@@ -3157,8 +3159,8 @@
         </p:nvSpPr>
         <p:spPr>
           <a:xfrm>
-            <a:off x="822960" y="4023360"/>
-            <a:ext cx="10058400" cy="777240"/>
+            <a:off x="822960" y="3977640"/>
+            <a:ext cx="10058400" cy="822960"/>
           </a:xfrm>
           <a:prstGeom prst="rect">
             <a:avLst/>
@@ -3174,7 +3176,7 @@
               <a:buNone/>
             </a:pPr>
             <a:r>
-              <a:rPr lang="en-US" sz="1700" dirty="0">
+              <a:rPr lang="en-US" sz="2000" dirty="0">
                 <a:solidFill>
                   <a:srgbClr val="94A3B8"/>
                 </a:solidFill>
@@ -3184,7 +3186,7 @@
               </a:rPr>
               <a:t>Four chapters - Tokopedia, BRI, IKEA, Zalin Labs - and the skills that compounded into 30+ shipped products</a:t>
             </a:r>
-            <a:endParaRPr lang="en-US" sz="1700" dirty="0"/>
+            <a:endParaRPr lang="en-US" sz="2000" dirty="0"/>
           </a:p>
         </p:txBody>
       </p:sp>
@@ -3196,7 +3198,7 @@
         </p:nvSpPr>
         <p:spPr>
           <a:xfrm>
-            <a:off x="822960" y="5440680"/>
+            <a:off x="822960" y="5349240"/>
             <a:ext cx="4114800" cy="0"/>
           </a:xfrm>
           <a:prstGeom prst="line">
@@ -3219,8 +3221,8 @@
         </p:nvSpPr>
         <p:spPr>
           <a:xfrm>
-            <a:off x="822960" y="5596128"/>
-            <a:ext cx="10058400" cy="457200"/>
+            <a:off x="822960" y="5532120"/>
+            <a:ext cx="10058400" cy="502920"/>
           </a:xfrm>
           <a:prstGeom prst="rect">
             <a:avLst/>
@@ -3236,9 +3238,9 @@
               <a:buNone/>
             </a:pPr>
             <a:r>
-              <a:rPr lang="en-US" sz="1250" dirty="0">
-                <a:solidFill>
-                  <a:srgbClr val="64748B"/>
+              <a:rPr lang="en-US" sz="1800" dirty="0">
+                <a:solidFill>
+                  <a:srgbClr val="8FA3BF"/>
                 </a:solidFill>
                 <a:latin typeface="Segoe UI" pitchFamily="34" charset="0"/>
                 <a:ea typeface="Segoe UI" pitchFamily="34" charset="-122"/>
@@ -3246,7 +3248,7 @@
               </a:rPr>
               <a:t>Rezalian Vatiady · Zalin Labs · 2026</a:t>
             </a:r>
-            <a:endParaRPr lang="en-US" sz="1250" dirty="0"/>
+            <a:endParaRPr lang="en-US" sz="1800" dirty="0"/>
           </a:p>
         </p:txBody>
       </p:sp>
@@ -3258,8 +3260,8 @@
         </p:nvSpPr>
         <p:spPr>
           <a:xfrm>
-            <a:off x="10698480" y="6382512"/>
-            <a:ext cx="1188720" cy="365760"/>
+            <a:off x="10698480" y="6309360"/>
+            <a:ext cx="1188720" cy="411480"/>
           </a:xfrm>
           <a:prstGeom prst="rect">
             <a:avLst/>
@@ -3275,9 +3277,9 @@
               <a:buNone/>
             </a:pPr>
             <a:r>
-              <a:rPr lang="en-US" sz="1000" dirty="0">
-                <a:solidFill>
-                  <a:srgbClr val="64748B"/>
+              <a:rPr lang="en-US" sz="1800" dirty="0">
+                <a:solidFill>
+                  <a:srgbClr val="8FA3BF"/>
                 </a:solidFill>
                 <a:latin typeface="Consolas" pitchFamily="34" charset="0"/>
                 <a:ea typeface="Consolas" pitchFamily="34" charset="-122"/>
@@ -3285,7 +3287,7 @@
               </a:rPr>
               <a:t>1 / 14</a:t>
             </a:r>
-            <a:endParaRPr lang="en-US" sz="1000" dirty="0"/>
+            <a:endParaRPr lang="en-US" sz="1800" dirty="0"/>
           </a:p>
         </p:txBody>
       </p:sp>
@@ -3369,8 +3371,8 @@
         </p:nvSpPr>
         <p:spPr>
           <a:xfrm>
-            <a:off x="822960" y="502920"/>
-            <a:ext cx="10515600" cy="365760"/>
+            <a:off x="822960" y="457200"/>
+            <a:ext cx="10515600" cy="411480"/>
           </a:xfrm>
           <a:prstGeom prst="rect">
             <a:avLst/>
@@ -3386,7 +3388,7 @@
               <a:buNone/>
             </a:pPr>
             <a:r>
-              <a:rPr lang="en-US" sz="1200" spc="300" kern="0" dirty="0">
+              <a:rPr lang="en-US" sz="1800" spc="300" kern="0" dirty="0">
                 <a:solidFill>
                   <a:srgbClr val="06B6D4"/>
                 </a:solidFill>
@@ -3396,7 +3398,7 @@
               </a:rPr>
               <a:t>METHOD</a:t>
             </a:r>
-            <a:endParaRPr lang="en-US" sz="1200" dirty="0"/>
+            <a:endParaRPr lang="en-US" sz="1800" dirty="0"/>
           </a:p>
         </p:txBody>
       </p:sp>
@@ -3447,12 +3449,12 @@
         </p:nvSpPr>
         <p:spPr>
           <a:xfrm>
-            <a:off x="1075792" y="2514600"/>
-            <a:ext cx="2331720" cy="2103120"/>
+            <a:off x="1075792" y="2331720"/>
+            <a:ext cx="2331720" cy="2697480"/>
           </a:xfrm>
           <a:prstGeom prst="roundRect">
             <a:avLst>
-              <a:gd name="adj" fmla="val 3043"/>
+              <a:gd name="adj" fmla="val 2745"/>
             </a:avLst>
           </a:prstGeom>
           <a:solidFill>
@@ -3474,8 +3476,8 @@
         </p:nvSpPr>
         <p:spPr>
           <a:xfrm>
-            <a:off x="1203808" y="2633472"/>
-            <a:ext cx="2075688" cy="310896"/>
+            <a:off x="1203808" y="2450592"/>
+            <a:ext cx="2075688" cy="365760"/>
           </a:xfrm>
           <a:prstGeom prst="rect">
             <a:avLst/>
@@ -3491,7 +3493,7 @@
               <a:buNone/>
             </a:pPr>
             <a:r>
-              <a:rPr lang="en-US" sz="1100" b="1" dirty="0">
+              <a:rPr lang="en-US" sz="1800" b="1" dirty="0">
                 <a:solidFill>
                   <a:srgbClr val="3B82F6"/>
                 </a:solidFill>
@@ -3501,7 +3503,7 @@
               </a:rPr>
               <a:t>01</a:t>
             </a:r>
-            <a:endParaRPr lang="en-US" sz="1100" dirty="0"/>
+            <a:endParaRPr lang="en-US" sz="1800" dirty="0"/>
           </a:p>
         </p:txBody>
       </p:sp>
@@ -3513,8 +3515,8 @@
         </p:nvSpPr>
         <p:spPr>
           <a:xfrm>
-            <a:off x="1203808" y="2962656"/>
-            <a:ext cx="2075688" cy="566928"/>
+            <a:off x="1203808" y="2834640"/>
+            <a:ext cx="2075688" cy="713232"/>
           </a:xfrm>
           <a:prstGeom prst="rect">
             <a:avLst/>
@@ -3530,7 +3532,7 @@
               <a:buNone/>
             </a:pPr>
             <a:r>
-              <a:rPr lang="en-US" sz="1350" b="1" dirty="0">
+              <a:rPr lang="en-US" sz="1800" b="1" dirty="0">
                 <a:solidFill>
                   <a:srgbClr val="FFFFFF"/>
                 </a:solidFill>
@@ -3540,7 +3542,7 @@
               </a:rPr>
               <a:t>Learn in production</a:t>
             </a:r>
-            <a:endParaRPr lang="en-US" sz="1350" dirty="0"/>
+            <a:endParaRPr lang="en-US" sz="1800" dirty="0"/>
           </a:p>
         </p:txBody>
       </p:sp>
@@ -3552,8 +3554,8 @@
         </p:nvSpPr>
         <p:spPr>
           <a:xfrm>
-            <a:off x="1203808" y="3566160"/>
-            <a:ext cx="2075688" cy="960120"/>
+            <a:off x="1203808" y="3584448"/>
+            <a:ext cx="2075688" cy="1371600"/>
           </a:xfrm>
           <a:prstGeom prst="rect">
             <a:avLst/>
@@ -3569,7 +3571,7 @@
               <a:buNone/>
             </a:pPr>
             <a:r>
-              <a:rPr lang="en-US" sz="980" dirty="0">
+              <a:rPr lang="en-US" sz="1800" dirty="0">
                 <a:solidFill>
                   <a:srgbClr val="CBD5E1"/>
                 </a:solidFill>
@@ -3579,7 +3581,7 @@
               </a:rPr>
               <a:t>Analytics fundamentals sharpened on real client data, not toy datasets.</a:t>
             </a:r>
-            <a:endParaRPr lang="en-US" sz="980" dirty="0"/>
+            <a:endParaRPr lang="en-US" sz="1800" dirty="0"/>
           </a:p>
         </p:txBody>
       </p:sp>
@@ -3591,7 +3593,7 @@
         </p:nvSpPr>
         <p:spPr>
           <a:xfrm>
-            <a:off x="3421228" y="3419856"/>
+            <a:off x="3421228" y="3566160"/>
             <a:ext cx="210312" cy="274320"/>
           </a:xfrm>
           <a:prstGeom prst="rightArrow">
@@ -3611,12 +3613,12 @@
         </p:nvSpPr>
         <p:spPr>
           <a:xfrm>
-            <a:off x="3645256" y="2514600"/>
-            <a:ext cx="2331720" cy="2103120"/>
+            <a:off x="3645256" y="2331720"/>
+            <a:ext cx="2331720" cy="2697480"/>
           </a:xfrm>
           <a:prstGeom prst="roundRect">
             <a:avLst>
-              <a:gd name="adj" fmla="val 3043"/>
+              <a:gd name="adj" fmla="val 2745"/>
             </a:avLst>
           </a:prstGeom>
           <a:solidFill>
@@ -3638,8 +3640,8 @@
         </p:nvSpPr>
         <p:spPr>
           <a:xfrm>
-            <a:off x="3773272" y="2633472"/>
-            <a:ext cx="2075688" cy="310896"/>
+            <a:off x="3773272" y="2450592"/>
+            <a:ext cx="2075688" cy="365760"/>
           </a:xfrm>
           <a:prstGeom prst="rect">
             <a:avLst/>
@@ -3655,7 +3657,7 @@
               <a:buNone/>
             </a:pPr>
             <a:r>
-              <a:rPr lang="en-US" sz="1100" b="1" dirty="0">
+              <a:rPr lang="en-US" sz="1800" b="1" dirty="0">
                 <a:solidFill>
                   <a:srgbClr val="06B6D4"/>
                 </a:solidFill>
@@ -3665,7 +3667,7 @@
               </a:rPr>
               <a:t>02</a:t>
             </a:r>
-            <a:endParaRPr lang="en-US" sz="1100" dirty="0"/>
+            <a:endParaRPr lang="en-US" sz="1800" dirty="0"/>
           </a:p>
         </p:txBody>
       </p:sp>
@@ -3677,8 +3679,8 @@
         </p:nvSpPr>
         <p:spPr>
           <a:xfrm>
-            <a:off x="3773272" y="2962656"/>
-            <a:ext cx="2075688" cy="566928"/>
+            <a:off x="3773272" y="2834640"/>
+            <a:ext cx="2075688" cy="713232"/>
           </a:xfrm>
           <a:prstGeom prst="rect">
             <a:avLst/>
@@ -3694,7 +3696,7 @@
               <a:buNone/>
             </a:pPr>
             <a:r>
-              <a:rPr lang="en-US" sz="1350" b="1" dirty="0">
+              <a:rPr lang="en-US" sz="1800" b="1" dirty="0">
                 <a:solidFill>
                   <a:srgbClr val="FFFFFF"/>
                 </a:solidFill>
@@ -3704,7 +3706,7 @@
               </a:rPr>
               <a:t>Automate your own job</a:t>
             </a:r>
-            <a:endParaRPr lang="en-US" sz="1350" dirty="0"/>
+            <a:endParaRPr lang="en-US" sz="1800" dirty="0"/>
           </a:p>
         </p:txBody>
       </p:sp>
@@ -3716,8 +3718,8 @@
         </p:nvSpPr>
         <p:spPr>
           <a:xfrm>
-            <a:off x="3773272" y="3566160"/>
-            <a:ext cx="2075688" cy="960120"/>
+            <a:off x="3773272" y="3584448"/>
+            <a:ext cx="2075688" cy="1371600"/>
           </a:xfrm>
           <a:prstGeom prst="rect">
             <a:avLst/>
@@ -3733,7 +3735,7 @@
               <a:buNone/>
             </a:pPr>
             <a:r>
-              <a:rPr lang="en-US" sz="980" dirty="0">
+              <a:rPr lang="en-US" sz="1800" dirty="0">
                 <a:solidFill>
                   <a:srgbClr val="CBD5E1"/>
                 </a:solidFill>
@@ -3743,7 +3745,7 @@
               </a:rPr>
               <a:t>Pipelines and ETL at IKEA made the automation itch impossible to ignore.</a:t>
             </a:r>
-            <a:endParaRPr lang="en-US" sz="980" dirty="0"/>
+            <a:endParaRPr lang="en-US" sz="1800" dirty="0"/>
           </a:p>
         </p:txBody>
       </p:sp>
@@ -3755,7 +3757,7 @@
         </p:nvSpPr>
         <p:spPr>
           <a:xfrm>
-            <a:off x="5990692" y="3419856"/>
+            <a:off x="5990692" y="3566160"/>
             <a:ext cx="210312" cy="274320"/>
           </a:xfrm>
           <a:prstGeom prst="rightArrow">
@@ -3775,12 +3777,12 @@
         </p:nvSpPr>
         <p:spPr>
           <a:xfrm>
-            <a:off x="6214720" y="2514600"/>
-            <a:ext cx="2331720" cy="2103120"/>
+            <a:off x="6214720" y="2331720"/>
+            <a:ext cx="2331720" cy="2697480"/>
           </a:xfrm>
           <a:prstGeom prst="roundRect">
             <a:avLst>
-              <a:gd name="adj" fmla="val 3043"/>
+              <a:gd name="adj" fmla="val 2745"/>
             </a:avLst>
           </a:prstGeom>
           <a:solidFill>
@@ -3802,8 +3804,8 @@
         </p:nvSpPr>
         <p:spPr>
           <a:xfrm>
-            <a:off x="6342736" y="2633472"/>
-            <a:ext cx="2075688" cy="310896"/>
+            <a:off x="6342736" y="2450592"/>
+            <a:ext cx="2075688" cy="365760"/>
           </a:xfrm>
           <a:prstGeom prst="rect">
             <a:avLst/>
@@ -3819,7 +3821,7 @@
               <a:buNone/>
             </a:pPr>
             <a:r>
-              <a:rPr lang="en-US" sz="1100" b="1" dirty="0">
+              <a:rPr lang="en-US" sz="1800" b="1" dirty="0">
                 <a:solidFill>
                   <a:srgbClr val="3B82F6"/>
                 </a:solidFill>
@@ -3829,7 +3831,7 @@
               </a:rPr>
               <a:t>03</a:t>
             </a:r>
-            <a:endParaRPr lang="en-US" sz="1100" dirty="0"/>
+            <a:endParaRPr lang="en-US" sz="1800" dirty="0"/>
           </a:p>
         </p:txBody>
       </p:sp>
@@ -3841,8 +3843,8 @@
         </p:nvSpPr>
         <p:spPr>
           <a:xfrm>
-            <a:off x="6342736" y="2962656"/>
-            <a:ext cx="2075688" cy="566928"/>
+            <a:off x="6342736" y="2834640"/>
+            <a:ext cx="2075688" cy="713232"/>
           </a:xfrm>
           <a:prstGeom prst="rect">
             <a:avLst/>
@@ -3858,7 +3860,7 @@
               <a:buNone/>
             </a:pPr>
             <a:r>
-              <a:rPr lang="en-US" sz="1350" b="1" dirty="0">
+              <a:rPr lang="en-US" sz="1800" b="1" dirty="0">
                 <a:solidFill>
                   <a:srgbClr val="FFFFFF"/>
                 </a:solidFill>
@@ -3868,7 +3870,7 @@
               </a:rPr>
               <a:t>Ship public artifacts</a:t>
             </a:r>
-            <a:endParaRPr lang="en-US" sz="1350" dirty="0"/>
+            <a:endParaRPr lang="en-US" sz="1800" dirty="0"/>
           </a:p>
         </p:txBody>
       </p:sp>
@@ -3880,8 +3882,8 @@
         </p:nvSpPr>
         <p:spPr>
           <a:xfrm>
-            <a:off x="6342736" y="3566160"/>
-            <a:ext cx="2075688" cy="960120"/>
+            <a:off x="6342736" y="3584448"/>
+            <a:ext cx="2075688" cy="1371600"/>
           </a:xfrm>
           <a:prstGeom prst="rect">
             <a:avLst/>
@@ -3897,7 +3899,7 @@
               <a:buNone/>
             </a:pPr>
             <a:r>
-              <a:rPr lang="en-US" sz="980" dirty="0">
+              <a:rPr lang="en-US" sz="1800" dirty="0">
                 <a:solidFill>
                   <a:srgbClr val="CBD5E1"/>
                 </a:solidFill>
@@ -3907,7 +3909,7 @@
               </a:rPr>
               <a:t>Open-source frameworks turned private skill into inspectable proof.</a:t>
             </a:r>
-            <a:endParaRPr lang="en-US" sz="980" dirty="0"/>
+            <a:endParaRPr lang="en-US" sz="1800" dirty="0"/>
           </a:p>
         </p:txBody>
       </p:sp>
@@ -3919,7 +3921,7 @@
         </p:nvSpPr>
         <p:spPr>
           <a:xfrm>
-            <a:off x="8560156" y="3419856"/>
+            <a:off x="8560156" y="3566160"/>
             <a:ext cx="210312" cy="274320"/>
           </a:xfrm>
           <a:prstGeom prst="rightArrow">
@@ -3939,12 +3941,12 @@
         </p:nvSpPr>
         <p:spPr>
           <a:xfrm>
-            <a:off x="8784184" y="2514600"/>
-            <a:ext cx="2331720" cy="2103120"/>
+            <a:off x="8784184" y="2331720"/>
+            <a:ext cx="2331720" cy="2697480"/>
           </a:xfrm>
           <a:prstGeom prst="roundRect">
             <a:avLst>
-              <a:gd name="adj" fmla="val 3043"/>
+              <a:gd name="adj" fmla="val 2745"/>
             </a:avLst>
           </a:prstGeom>
           <a:solidFill>
@@ -3966,8 +3968,8 @@
         </p:nvSpPr>
         <p:spPr>
           <a:xfrm>
-            <a:off x="8912200" y="2633472"/>
-            <a:ext cx="2075688" cy="310896"/>
+            <a:off x="8912200" y="2450592"/>
+            <a:ext cx="2075688" cy="365760"/>
           </a:xfrm>
           <a:prstGeom prst="rect">
             <a:avLst/>
@@ -3983,7 +3985,7 @@
               <a:buNone/>
             </a:pPr>
             <a:r>
-              <a:rPr lang="en-US" sz="1100" b="1" dirty="0">
+              <a:rPr lang="en-US" sz="1800" b="1" dirty="0">
                 <a:solidFill>
                   <a:srgbClr val="06B6D4"/>
                 </a:solidFill>
@@ -3993,7 +3995,7 @@
               </a:rPr>
               <a:t>04</a:t>
             </a:r>
-            <a:endParaRPr lang="en-US" sz="1100" dirty="0"/>
+            <a:endParaRPr lang="en-US" sz="1800" dirty="0"/>
           </a:p>
         </p:txBody>
       </p:sp>
@@ -4005,8 +4007,8 @@
         </p:nvSpPr>
         <p:spPr>
           <a:xfrm>
-            <a:off x="8912200" y="2962656"/>
-            <a:ext cx="2075688" cy="566928"/>
+            <a:off x="8912200" y="2834640"/>
+            <a:ext cx="2075688" cy="713232"/>
           </a:xfrm>
           <a:prstGeom prst="rect">
             <a:avLst/>
@@ -4022,7 +4024,7 @@
               <a:buNone/>
             </a:pPr>
             <a:r>
-              <a:rPr lang="en-US" sz="1350" b="1" dirty="0">
+              <a:rPr lang="en-US" sz="1800" b="1" dirty="0">
                 <a:solidFill>
                   <a:srgbClr val="FFFFFF"/>
                 </a:solidFill>
@@ -4032,7 +4034,7 @@
               </a:rPr>
               <a:t>Compound into a company</a:t>
             </a:r>
-            <a:endParaRPr lang="en-US" sz="1350" dirty="0"/>
+            <a:endParaRPr lang="en-US" sz="1800" dirty="0"/>
           </a:p>
         </p:txBody>
       </p:sp>
@@ -4044,8 +4046,8 @@
         </p:nvSpPr>
         <p:spPr>
           <a:xfrm>
-            <a:off x="8912200" y="3566160"/>
-            <a:ext cx="2075688" cy="960120"/>
+            <a:off x="8912200" y="3584448"/>
+            <a:ext cx="2075688" cy="1371600"/>
           </a:xfrm>
           <a:prstGeom prst="rect">
             <a:avLst/>
@@ -4061,7 +4063,7 @@
               <a:buNone/>
             </a:pPr>
             <a:r>
-              <a:rPr lang="en-US" sz="980" dirty="0">
+              <a:rPr lang="en-US" sz="1800" dirty="0">
                 <a:solidFill>
                   <a:srgbClr val="CBD5E1"/>
                 </a:solidFill>
@@ -4071,7 +4073,7 @@
               </a:rPr>
               <a:t>Zalin Labs: the automation of the automation, under quality gates.</a:t>
             </a:r>
-            <a:endParaRPr lang="en-US" sz="980" dirty="0"/>
+            <a:endParaRPr lang="en-US" sz="1800" dirty="0"/>
           </a:p>
         </p:txBody>
       </p:sp>
@@ -4106,8 +4108,8 @@
         </p:nvSpPr>
         <p:spPr>
           <a:xfrm>
-            <a:off x="822960" y="6053328"/>
-            <a:ext cx="9692640" cy="457200"/>
+            <a:off x="822960" y="6035040"/>
+            <a:ext cx="10424160" cy="566928"/>
           </a:xfrm>
           <a:prstGeom prst="rect">
             <a:avLst/>
@@ -4123,9 +4125,9 @@
               <a:buNone/>
             </a:pPr>
             <a:r>
-              <a:rPr lang="en-US" sz="1150" dirty="0">
-                <a:solidFill>
-                  <a:srgbClr val="64748B"/>
+              <a:rPr lang="en-US" sz="1800" dirty="0">
+                <a:solidFill>
+                  <a:srgbClr val="8FA3BF"/>
                 </a:solidFill>
                 <a:latin typeface="Segoe UI" pitchFamily="34" charset="0"/>
                 <a:ea typeface="Segoe UI" pitchFamily="34" charset="-122"/>
@@ -4133,7 +4135,7 @@
               </a:rPr>
               <a:t>Credibility was not a certificate - it was shipped work anyone could inspect.</a:t>
             </a:r>
-            <a:endParaRPr lang="en-US" sz="1150" dirty="0"/>
+            <a:endParaRPr lang="en-US" sz="1800" dirty="0"/>
           </a:p>
         </p:txBody>
       </p:sp>
@@ -4145,8 +4147,8 @@
         </p:nvSpPr>
         <p:spPr>
           <a:xfrm>
-            <a:off x="10698480" y="6382512"/>
-            <a:ext cx="1188720" cy="365760"/>
+            <a:off x="10698480" y="6309360"/>
+            <a:ext cx="1188720" cy="411480"/>
           </a:xfrm>
           <a:prstGeom prst="rect">
             <a:avLst/>
@@ -4162,9 +4164,9 @@
               <a:buNone/>
             </a:pPr>
             <a:r>
-              <a:rPr lang="en-US" sz="1000" dirty="0">
-                <a:solidFill>
-                  <a:srgbClr val="64748B"/>
+              <a:rPr lang="en-US" sz="1800" dirty="0">
+                <a:solidFill>
+                  <a:srgbClr val="8FA3BF"/>
                 </a:solidFill>
                 <a:latin typeface="Consolas" pitchFamily="34" charset="0"/>
                 <a:ea typeface="Consolas" pitchFamily="34" charset="-122"/>
@@ -4172,7 +4174,7 @@
               </a:rPr>
               <a:t>10 / 14</a:t>
             </a:r>
-            <a:endParaRPr lang="en-US" sz="1000" dirty="0"/>
+            <a:endParaRPr lang="en-US" sz="1800" dirty="0"/>
           </a:p>
         </p:txBody>
       </p:sp>
@@ -4256,8 +4258,8 @@
         </p:nvSpPr>
         <p:spPr>
           <a:xfrm>
-            <a:off x="822960" y="502920"/>
-            <a:ext cx="10515600" cy="365760"/>
+            <a:off x="822960" y="457200"/>
+            <a:ext cx="10515600" cy="411480"/>
           </a:xfrm>
           <a:prstGeom prst="rect">
             <a:avLst/>
@@ -4273,7 +4275,7 @@
               <a:buNone/>
             </a:pPr>
             <a:r>
-              <a:rPr lang="en-US" sz="1200" spc="300" kern="0" dirty="0">
+              <a:rPr lang="en-US" sz="1800" spc="300" kern="0" dirty="0">
                 <a:solidFill>
                   <a:srgbClr val="06B6D4"/>
                 </a:solidFill>
@@ -4283,7 +4285,7 @@
               </a:rPr>
               <a:t>MINDSET</a:t>
             </a:r>
-            <a:endParaRPr lang="en-US" sz="1200" dirty="0"/>
+            <a:endParaRPr lang="en-US" sz="1800" dirty="0"/>
           </a:p>
         </p:txBody>
       </p:sp>
@@ -4334,12 +4336,12 @@
         </p:nvSpPr>
         <p:spPr>
           <a:xfrm>
-            <a:off x="822960" y="2011680"/>
-            <a:ext cx="5074920" cy="3611880"/>
+            <a:off x="822960" y="1965960"/>
+            <a:ext cx="5074920" cy="3657600"/>
           </a:xfrm>
           <a:prstGeom prst="roundRect">
             <a:avLst>
-              <a:gd name="adj" fmla="val 2025"/>
+              <a:gd name="adj" fmla="val 2000"/>
             </a:avLst>
           </a:prstGeom>
           <a:solidFill>
@@ -4361,8 +4363,8 @@
         </p:nvSpPr>
         <p:spPr>
           <a:xfrm>
-            <a:off x="1097280" y="2240280"/>
-            <a:ext cx="4526280" cy="502920"/>
+            <a:off x="1097280" y="2194560"/>
+            <a:ext cx="4526280" cy="548640"/>
           </a:xfrm>
           <a:prstGeom prst="rect">
             <a:avLst/>
@@ -4378,7 +4380,7 @@
               <a:buNone/>
             </a:pPr>
             <a:r>
-              <a:rPr lang="en-US" sz="1650" b="1" dirty="0">
+              <a:rPr lang="en-US" sz="2000" b="1" dirty="0">
                 <a:solidFill>
                   <a:srgbClr val="06B6D4"/>
                 </a:solidFill>
@@ -4388,7 +4390,7 @@
               </a:rPr>
               <a:t>What enterprise gave me</a:t>
             </a:r>
-            <a:endParaRPr lang="en-US" sz="1650" dirty="0"/>
+            <a:endParaRPr lang="en-US" sz="2000" dirty="0"/>
           </a:p>
         </p:txBody>
       </p:sp>
@@ -4424,7 +4426,7 @@
               <a:buChar char="▸"/>
             </a:pPr>
             <a:r>
-              <a:rPr lang="en-US" sz="1280" dirty="0">
+              <a:rPr lang="en-US" sz="1800" dirty="0">
                 <a:solidFill>
                   <a:srgbClr val="CBD5E1"/>
                 </a:solidFill>
@@ -4434,7 +4436,7 @@
               </a:rPr>
               <a:t>Requirements discipline from compliance-grade AML analysis</a:t>
             </a:r>
-            <a:endParaRPr lang="en-US" sz="1280" dirty="0"/>
+            <a:endParaRPr lang="en-US" sz="1800" dirty="0"/>
           </a:p>
           <a:p>
             <a:pPr marL="342900" indent="-342900">
@@ -4448,7 +4450,7 @@
               <a:buChar char="▸"/>
             </a:pPr>
             <a:r>
-              <a:rPr lang="en-US" sz="1280" dirty="0">
+              <a:rPr lang="en-US" sz="1800" dirty="0">
                 <a:solidFill>
                   <a:srgbClr val="CBD5E1"/>
                 </a:solidFill>
@@ -4458,7 +4460,7 @@
               </a:rPr>
               <a:t>Data quality paranoia from datalake reconciliation</a:t>
             </a:r>
-            <a:endParaRPr lang="en-US" sz="1280" dirty="0"/>
+            <a:endParaRPr lang="en-US" sz="1800" dirty="0"/>
           </a:p>
           <a:p>
             <a:pPr marL="342900" indent="-342900">
@@ -4472,7 +4474,7 @@
               <a:buChar char="▸"/>
             </a:pPr>
             <a:r>
-              <a:rPr lang="en-US" sz="1280" dirty="0">
+              <a:rPr lang="en-US" sz="1800" dirty="0">
                 <a:solidFill>
                   <a:srgbClr val="CBD5E1"/>
                 </a:solidFill>
@@ -4482,7 +4484,7 @@
               </a:rPr>
               <a:t>Stakeholder trust earned row by row</a:t>
             </a:r>
-            <a:endParaRPr lang="en-US" sz="1280" dirty="0"/>
+            <a:endParaRPr lang="en-US" sz="1800" dirty="0"/>
           </a:p>
           <a:p>
             <a:pPr marL="342900" indent="-342900">
@@ -4496,7 +4498,7 @@
               <a:buChar char="▸"/>
             </a:pPr>
             <a:r>
-              <a:rPr lang="en-US" sz="1280" dirty="0">
+              <a:rPr lang="en-US" sz="1800" dirty="0">
                 <a:solidFill>
                   <a:srgbClr val="CBD5E1"/>
                 </a:solidFill>
@@ -4506,7 +4508,7 @@
               </a:rPr>
               <a:t>Respect for process - and for its costs</a:t>
             </a:r>
-            <a:endParaRPr lang="en-US" sz="1280" dirty="0"/>
+            <a:endParaRPr lang="en-US" sz="1800" dirty="0"/>
           </a:p>
         </p:txBody>
       </p:sp>
@@ -4518,12 +4520,12 @@
         </p:nvSpPr>
         <p:spPr>
           <a:xfrm>
-            <a:off x="6291072" y="2011680"/>
-            <a:ext cx="5074920" cy="3611880"/>
+            <a:off x="6291072" y="1965960"/>
+            <a:ext cx="5074920" cy="3657600"/>
           </a:xfrm>
           <a:prstGeom prst="roundRect">
             <a:avLst>
-              <a:gd name="adj" fmla="val 2025"/>
+              <a:gd name="adj" fmla="val 2000"/>
             </a:avLst>
           </a:prstGeom>
           <a:solidFill>
@@ -4545,8 +4547,8 @@
         </p:nvSpPr>
         <p:spPr>
           <a:xfrm>
-            <a:off x="6565392" y="2240280"/>
-            <a:ext cx="4526280" cy="502920"/>
+            <a:off x="6565392" y="2194560"/>
+            <a:ext cx="4526280" cy="548640"/>
           </a:xfrm>
           <a:prstGeom prst="rect">
             <a:avLst/>
@@ -4562,7 +4564,7 @@
               <a:buNone/>
             </a:pPr>
             <a:r>
-              <a:rPr lang="en-US" sz="1650" b="1" dirty="0">
+              <a:rPr lang="en-US" sz="2000" b="1" dirty="0">
                 <a:solidFill>
                   <a:srgbClr val="93C5FD"/>
                 </a:solidFill>
@@ -4572,7 +4574,7 @@
               </a:rPr>
               <a:t>What building added</a:t>
             </a:r>
-            <a:endParaRPr lang="en-US" sz="1650" dirty="0"/>
+            <a:endParaRPr lang="en-US" sz="2000" dirty="0"/>
           </a:p>
         </p:txBody>
       </p:sp>
@@ -4608,7 +4610,7 @@
               <a:buChar char="▸"/>
             </a:pPr>
             <a:r>
-              <a:rPr lang="en-US" sz="1280" dirty="0">
+              <a:rPr lang="en-US" sz="1800" dirty="0">
                 <a:solidFill>
                   <a:srgbClr val="CBD5E1"/>
                 </a:solidFill>
@@ -4618,7 +4620,7 @@
               </a:rPr>
               <a:t>Shipping as the default, not the exception</a:t>
             </a:r>
-            <a:endParaRPr lang="en-US" sz="1280" dirty="0"/>
+            <a:endParaRPr lang="en-US" sz="1800" dirty="0"/>
           </a:p>
           <a:p>
             <a:pPr marL="342900" indent="-342900">
@@ -4632,7 +4634,7 @@
               <a:buChar char="▸"/>
             </a:pPr>
             <a:r>
-              <a:rPr lang="en-US" sz="1280" dirty="0">
+              <a:rPr lang="en-US" sz="1800" dirty="0">
                 <a:solidFill>
                   <a:srgbClr val="CBD5E1"/>
                 </a:solidFill>
@@ -4642,7 +4644,7 @@
               </a:rPr>
               <a:t>Agents as programmable leverage</a:t>
             </a:r>
-            <a:endParaRPr lang="en-US" sz="1280" dirty="0"/>
+            <a:endParaRPr lang="en-US" sz="1800" dirty="0"/>
           </a:p>
           <a:p>
             <a:pPr marL="342900" indent="-342900">
@@ -4656,7 +4658,7 @@
               <a:buChar char="▸"/>
             </a:pPr>
             <a:r>
-              <a:rPr lang="en-US" sz="1280" dirty="0">
+              <a:rPr lang="en-US" sz="1800" dirty="0">
                 <a:solidFill>
                   <a:srgbClr val="CBD5E1"/>
                 </a:solidFill>
@@ -4666,7 +4668,7 @@
               </a:rPr>
               <a:t>Evidence over status reports</a:t>
             </a:r>
-            <a:endParaRPr lang="en-US" sz="1280" dirty="0"/>
+            <a:endParaRPr lang="en-US" sz="1800" dirty="0"/>
           </a:p>
           <a:p>
             <a:pPr marL="342900" indent="-342900">
@@ -4680,7 +4682,7 @@
               <a:buChar char="▸"/>
             </a:pPr>
             <a:r>
-              <a:rPr lang="en-US" sz="1280" dirty="0">
+              <a:rPr lang="en-US" sz="1800" dirty="0">
                 <a:solidFill>
                   <a:srgbClr val="CBD5E1"/>
                 </a:solidFill>
@@ -4690,7 +4692,7 @@
               </a:rPr>
               <a:t>Decisiveness: change is a Tuesday</a:t>
             </a:r>
-            <a:endParaRPr lang="en-US" sz="1280" dirty="0"/>
+            <a:endParaRPr lang="en-US" sz="1800" dirty="0"/>
           </a:p>
         </p:txBody>
       </p:sp>
@@ -4725,8 +4727,8 @@
         </p:nvSpPr>
         <p:spPr>
           <a:xfrm>
-            <a:off x="822960" y="6053328"/>
-            <a:ext cx="9692640" cy="457200"/>
+            <a:off x="822960" y="6035040"/>
+            <a:ext cx="10424160" cy="566928"/>
           </a:xfrm>
           <a:prstGeom prst="rect">
             <a:avLst/>
@@ -4742,9 +4744,9 @@
               <a:buNone/>
             </a:pPr>
             <a:r>
-              <a:rPr lang="en-US" sz="1150" dirty="0">
-                <a:solidFill>
-                  <a:srgbClr val="64748B"/>
+              <a:rPr lang="en-US" sz="1800" dirty="0">
+                <a:solidFill>
+                  <a:srgbClr val="8FA3BF"/>
                 </a:solidFill>
                 <a:latin typeface="Segoe UI" pitchFamily="34" charset="0"/>
                 <a:ea typeface="Segoe UI" pitchFamily="34" charset="-122"/>
@@ -4752,7 +4754,7 @@
               </a:rPr>
               <a:t>Rare profiles are combinations, not specialties: system thinking plus shipping speed.</a:t>
             </a:r>
-            <a:endParaRPr lang="en-US" sz="1150" dirty="0"/>
+            <a:endParaRPr lang="en-US" sz="1800" dirty="0"/>
           </a:p>
         </p:txBody>
       </p:sp>
@@ -4764,8 +4766,8 @@
         </p:nvSpPr>
         <p:spPr>
           <a:xfrm>
-            <a:off x="10698480" y="6382512"/>
-            <a:ext cx="1188720" cy="365760"/>
+            <a:off x="10698480" y="6309360"/>
+            <a:ext cx="1188720" cy="411480"/>
           </a:xfrm>
           <a:prstGeom prst="rect">
             <a:avLst/>
@@ -4781,9 +4783,9 @@
               <a:buNone/>
             </a:pPr>
             <a:r>
-              <a:rPr lang="en-US" sz="1000" dirty="0">
-                <a:solidFill>
-                  <a:srgbClr val="64748B"/>
+              <a:rPr lang="en-US" sz="1800" dirty="0">
+                <a:solidFill>
+                  <a:srgbClr val="8FA3BF"/>
                 </a:solidFill>
                 <a:latin typeface="Consolas" pitchFamily="34" charset="0"/>
                 <a:ea typeface="Consolas" pitchFamily="34" charset="-122"/>
@@ -4791,7 +4793,7 @@
               </a:rPr>
               <a:t>11 / 14</a:t>
             </a:r>
-            <a:endParaRPr lang="en-US" sz="1000" dirty="0"/>
+            <a:endParaRPr lang="en-US" sz="1800" dirty="0"/>
           </a:p>
         </p:txBody>
       </p:sp>
@@ -4875,8 +4877,8 @@
         </p:nvSpPr>
         <p:spPr>
           <a:xfrm>
-            <a:off x="822960" y="502920"/>
-            <a:ext cx="10515600" cy="365760"/>
+            <a:off x="822960" y="457200"/>
+            <a:ext cx="10515600" cy="411480"/>
           </a:xfrm>
           <a:prstGeom prst="rect">
             <a:avLst/>
@@ -4892,7 +4894,7 @@
               <a:buNone/>
             </a:pPr>
             <a:r>
-              <a:rPr lang="en-US" sz="1200" spc="300" kern="0" dirty="0">
+              <a:rPr lang="en-US" sz="1800" spc="300" kern="0" dirty="0">
                 <a:solidFill>
                   <a:srgbClr val="06B6D4"/>
                 </a:solidFill>
@@ -4902,7 +4904,7 @@
               </a:rPr>
               <a:t>RECRUITER CHECK</a:t>
             </a:r>
-            <a:endParaRPr lang="en-US" sz="1200" dirty="0"/>
+            <a:endParaRPr lang="en-US" sz="1800" dirty="0"/>
           </a:p>
         </p:txBody>
       </p:sp>
@@ -4953,7 +4955,7 @@
         </p:nvGraphicFramePr>
         <p:xfrm>
           <a:off x="822960" y="1874520"/>
-          <a:ext cx="10515600" cy="3337560"/>
+          <a:ext cx="10515600" cy="3246120"/>
         </p:xfrm>
         <a:graphic xmlns:a="http://schemas.openxmlformats.org/drawingml/2006/main">
           <a:graphicData uri="http://schemas.openxmlformats.org/drawingml/2006/chart">
@@ -4969,7 +4971,7 @@
         </p:nvSpPr>
         <p:spPr>
           <a:xfrm>
-            <a:off x="822960" y="5413248"/>
+            <a:off x="822960" y="5321808"/>
             <a:ext cx="10515600" cy="0"/>
           </a:xfrm>
           <a:prstGeom prst="line">
@@ -4992,8 +4994,8 @@
         </p:nvSpPr>
         <p:spPr>
           <a:xfrm>
-            <a:off x="822960" y="5504688"/>
-            <a:ext cx="10424160" cy="411480"/>
+            <a:off x="822960" y="5394960"/>
+            <a:ext cx="10424160" cy="502920"/>
           </a:xfrm>
           <a:prstGeom prst="rect">
             <a:avLst/>
@@ -5009,7 +5011,7 @@
               <a:buNone/>
             </a:pPr>
             <a:r>
-              <a:rPr lang="en-US" sz="1300" i="1" dirty="0">
+              <a:rPr lang="en-US" sz="1800" i="1" dirty="0">
                 <a:solidFill>
                   <a:srgbClr val="06B6D4"/>
                 </a:solidFill>
@@ -5019,7 +5021,7 @@
               </a:rPr>
               <a:t>→  Every bar is public today - the live portfolio links to the apps, the platform, and the validation set.</a:t>
             </a:r>
-            <a:endParaRPr lang="en-US" sz="1300" dirty="0"/>
+            <a:endParaRPr lang="en-US" sz="1800" dirty="0"/>
           </a:p>
         </p:txBody>
       </p:sp>
@@ -5054,8 +5056,8 @@
         </p:nvSpPr>
         <p:spPr>
           <a:xfrm>
-            <a:off x="822960" y="6053328"/>
-            <a:ext cx="9692640" cy="457200"/>
+            <a:off x="822960" y="6035040"/>
+            <a:ext cx="10424160" cy="566928"/>
           </a:xfrm>
           <a:prstGeom prst="rect">
             <a:avLst/>
@@ -5071,9 +5073,9 @@
               <a:buNone/>
             </a:pPr>
             <a:r>
-              <a:rPr lang="en-US" sz="1150" dirty="0">
-                <a:solidFill>
-                  <a:srgbClr val="64748B"/>
+              <a:rPr lang="en-US" sz="1800" dirty="0">
+                <a:solidFill>
+                  <a:srgbClr val="8FA3BF"/>
                 </a:solidFill>
                 <a:latin typeface="Segoe UI" pitchFamily="34" charset="0"/>
                 <a:ea typeface="Segoe UI" pitchFamily="34" charset="-122"/>
@@ -5081,7 +5083,7 @@
               </a:rPr>
               <a:t>Sources: 30+ apps, 9+ agents, 51/52 production checks passing, and the 30-query intent-router validation set.</a:t>
             </a:r>
-            <a:endParaRPr lang="en-US" sz="1150" dirty="0"/>
+            <a:endParaRPr lang="en-US" sz="1800" dirty="0"/>
           </a:p>
         </p:txBody>
       </p:sp>
@@ -5093,8 +5095,8 @@
         </p:nvSpPr>
         <p:spPr>
           <a:xfrm>
-            <a:off x="10698480" y="6382512"/>
-            <a:ext cx="1188720" cy="365760"/>
+            <a:off x="10698480" y="6309360"/>
+            <a:ext cx="1188720" cy="411480"/>
           </a:xfrm>
           <a:prstGeom prst="rect">
             <a:avLst/>
@@ -5110,9 +5112,9 @@
               <a:buNone/>
             </a:pPr>
             <a:r>
-              <a:rPr lang="en-US" sz="1000" dirty="0">
-                <a:solidFill>
-                  <a:srgbClr val="64748B"/>
+              <a:rPr lang="en-US" sz="1800" dirty="0">
+                <a:solidFill>
+                  <a:srgbClr val="8FA3BF"/>
                 </a:solidFill>
                 <a:latin typeface="Consolas" pitchFamily="34" charset="0"/>
                 <a:ea typeface="Consolas" pitchFamily="34" charset="-122"/>
@@ -5120,7 +5122,7 @@
               </a:rPr>
               <a:t>12 / 14</a:t>
             </a:r>
-            <a:endParaRPr lang="en-US" sz="1000" dirty="0"/>
+            <a:endParaRPr lang="en-US" sz="1800" dirty="0"/>
           </a:p>
         </p:txBody>
       </p:sp>
@@ -5204,8 +5206,8 @@
         </p:nvSpPr>
         <p:spPr>
           <a:xfrm>
-            <a:off x="822960" y="502920"/>
-            <a:ext cx="10515600" cy="365760"/>
+            <a:off x="822960" y="457200"/>
+            <a:ext cx="10515600" cy="411480"/>
           </a:xfrm>
           <a:prstGeom prst="rect">
             <a:avLst/>
@@ -5221,7 +5223,7 @@
               <a:buNone/>
             </a:pPr>
             <a:r>
-              <a:rPr lang="en-US" sz="1200" spc="300" kern="0" dirty="0">
+              <a:rPr lang="en-US" sz="1800" spc="300" kern="0" dirty="0">
                 <a:solidFill>
                   <a:srgbClr val="06B6D4"/>
                 </a:solidFill>
@@ -5231,7 +5233,7 @@
               </a:rPr>
               <a:t>FOR RECRUITERS</a:t>
             </a:r>
-            <a:endParaRPr lang="en-US" sz="1200" dirty="0"/>
+            <a:endParaRPr lang="en-US" sz="1800" dirty="0"/>
           </a:p>
         </p:txBody>
       </p:sp>
@@ -5282,8 +5284,8 @@
         </p:nvSpPr>
         <p:spPr>
           <a:xfrm>
-            <a:off x="868680" y="2011680"/>
-            <a:ext cx="10424160" cy="3566160"/>
+            <a:off x="868680" y="1965960"/>
+            <a:ext cx="10424160" cy="3840480"/>
           </a:xfrm>
           <a:prstGeom prst="rect">
             <a:avLst/>
@@ -5306,7 +5308,7 @@
               <a:buChar char="▸"/>
             </a:pPr>
             <a:r>
-              <a:rPr lang="en-US" sz="1600" dirty="0">
+              <a:rPr lang="en-US" sz="2000" dirty="0">
                 <a:solidFill>
                   <a:srgbClr val="CBD5E1"/>
                 </a:solidFill>
@@ -5316,7 +5318,7 @@
               </a:rPr>
               <a:t>BI foundations: requirements, data quality, and stakeholder trust from multinational retail and banking.</a:t>
             </a:r>
-            <a:endParaRPr lang="en-US" sz="1600" dirty="0"/>
+            <a:endParaRPr lang="en-US" sz="2000" dirty="0"/>
           </a:p>
           <a:p>
             <a:pPr marL="342900" indent="-342900">
@@ -5330,7 +5332,7 @@
               <a:buChar char="▸"/>
             </a:pPr>
             <a:r>
-              <a:rPr lang="en-US" sz="1600" dirty="0">
+              <a:rPr lang="en-US" sz="2000" dirty="0">
                 <a:solidFill>
                   <a:srgbClr val="CBD5E1"/>
                 </a:solidFill>
@@ -5340,7 +5342,7 @@
               </a:rPr>
               <a:t>AI engineering: agents, intent routing, and local-first systems running in production, not in demos.</a:t>
             </a:r>
-            <a:endParaRPr lang="en-US" sz="1600" dirty="0"/>
+            <a:endParaRPr lang="en-US" sz="2000" dirty="0"/>
           </a:p>
           <a:p>
             <a:pPr marL="342900" indent="-342900">
@@ -5354,7 +5356,7 @@
               <a:buChar char="▸"/>
             </a:pPr>
             <a:r>
-              <a:rPr lang="en-US" sz="1600" dirty="0">
+              <a:rPr lang="en-US" sz="2000" dirty="0">
                 <a:solidFill>
                   <a:srgbClr val="CBD5E1"/>
                 </a:solidFill>
@@ -5364,7 +5366,7 @@
               </a:rPr>
               <a:t>Proof of shipping: 30+ production apps, 8.7K+ lines of open source, and a live portfolio anyone can inspect.</a:t>
             </a:r>
-            <a:endParaRPr lang="en-US" sz="1600" dirty="0"/>
+            <a:endParaRPr lang="en-US" sz="2000" dirty="0"/>
           </a:p>
           <a:p>
             <a:pPr marL="342900" indent="-342900">
@@ -5378,7 +5380,7 @@
               <a:buChar char="▸"/>
             </a:pPr>
             <a:r>
-              <a:rPr lang="en-US" sz="1600" dirty="0">
+              <a:rPr lang="en-US" sz="2000" dirty="0">
                 <a:solidFill>
                   <a:srgbClr val="CBD5E1"/>
                 </a:solidFill>
@@ -5388,7 +5390,7 @@
               </a:rPr>
               <a:t>Range: e-commerce analytics, banking compliance, four-country BI operations, and company building.</a:t>
             </a:r>
-            <a:endParaRPr lang="en-US" sz="1600" dirty="0"/>
+            <a:endParaRPr lang="en-US" sz="2000" dirty="0"/>
           </a:p>
           <a:p>
             <a:pPr marL="342900" indent="-342900">
@@ -5402,7 +5404,7 @@
               <a:buChar char="▸"/>
             </a:pPr>
             <a:r>
-              <a:rPr lang="en-US" sz="1600" dirty="0">
+              <a:rPr lang="en-US" sz="2000" dirty="0">
                 <a:solidFill>
                   <a:srgbClr val="CBD5E1"/>
                 </a:solidFill>
@@ -5412,7 +5414,7 @@
               </a:rPr>
               <a:t>Available now for freelance data scraping, BI, and AI automation worldwide via Upwork.</a:t>
             </a:r>
-            <a:endParaRPr lang="en-US" sz="1600" dirty="0"/>
+            <a:endParaRPr lang="en-US" sz="2000" dirty="0"/>
           </a:p>
         </p:txBody>
       </p:sp>
@@ -5424,8 +5426,8 @@
         </p:nvSpPr>
         <p:spPr>
           <a:xfrm>
-            <a:off x="10698480" y="6382512"/>
-            <a:ext cx="1188720" cy="365760"/>
+            <a:off x="10698480" y="6309360"/>
+            <a:ext cx="1188720" cy="411480"/>
           </a:xfrm>
           <a:prstGeom prst="rect">
             <a:avLst/>
@@ -5441,9 +5443,9 @@
               <a:buNone/>
             </a:pPr>
             <a:r>
-              <a:rPr lang="en-US" sz="1000" dirty="0">
-                <a:solidFill>
-                  <a:srgbClr val="64748B"/>
+              <a:rPr lang="en-US" sz="1800" dirty="0">
+                <a:solidFill>
+                  <a:srgbClr val="8FA3BF"/>
                 </a:solidFill>
                 <a:latin typeface="Consolas" pitchFamily="34" charset="0"/>
                 <a:ea typeface="Consolas" pitchFamily="34" charset="-122"/>
@@ -5451,7 +5453,7 @@
               </a:rPr>
               <a:t>13 / 14</a:t>
             </a:r>
-            <a:endParaRPr lang="en-US" sz="1000" dirty="0"/>
+            <a:endParaRPr lang="en-US" sz="1800" dirty="0"/>
           </a:p>
         </p:txBody>
       </p:sp>
@@ -5535,8 +5537,8 @@
         </p:nvSpPr>
         <p:spPr>
           <a:xfrm>
-            <a:off x="822960" y="1417320"/>
-            <a:ext cx="10515600" cy="411480"/>
+            <a:off x="822960" y="1371600"/>
+            <a:ext cx="10515600" cy="457200"/>
           </a:xfrm>
           <a:prstGeom prst="rect">
             <a:avLst/>
@@ -5552,7 +5554,7 @@
               <a:buNone/>
             </a:pPr>
             <a:r>
-              <a:rPr lang="en-US" sz="1300" spc="400" kern="0" dirty="0">
+              <a:rPr lang="en-US" sz="1800" spc="400" kern="0" dirty="0">
                 <a:solidFill>
                   <a:srgbClr val="06B6D4"/>
                 </a:solidFill>
@@ -5562,7 +5564,7 @@
               </a:rPr>
               <a:t>WORK WITH ME</a:t>
             </a:r>
-            <a:endParaRPr lang="en-US" sz="1300" dirty="0"/>
+            <a:endParaRPr lang="en-US" sz="1800" dirty="0"/>
           </a:p>
         </p:txBody>
       </p:sp>
@@ -5574,7 +5576,7 @@
         </p:nvSpPr>
         <p:spPr>
           <a:xfrm>
-            <a:off x="822960" y="1920240"/>
+            <a:off x="822960" y="1874520"/>
             <a:ext cx="10515600" cy="1371600"/>
           </a:xfrm>
           <a:prstGeom prst="rect">
@@ -5613,8 +5615,8 @@
         </p:nvSpPr>
         <p:spPr>
           <a:xfrm>
-            <a:off x="2011680" y="3429000"/>
-            <a:ext cx="8183880" cy="1554480"/>
+            <a:off x="2011680" y="3383280"/>
+            <a:ext cx="8183880" cy="1691640"/>
           </a:xfrm>
           <a:prstGeom prst="rect">
             <a:avLst/>
@@ -5633,7 +5635,7 @@
               <a:buNone/>
             </a:pPr>
             <a:r>
-              <a:rPr lang="en-US" sz="1500" dirty="0">
+              <a:rPr lang="en-US" sz="2000" dirty="0">
                 <a:solidFill>
                   <a:srgbClr val="CBD5E1"/>
                 </a:solidFill>
@@ -5650,7 +5652,7 @@
               <a:buNone/>
             </a:pPr>
             <a:r>
-              <a:rPr lang="en-US" sz="1500" dirty="0">
+              <a:rPr lang="en-US" sz="2000" dirty="0">
                 <a:solidFill>
                   <a:srgbClr val="CBD5E1"/>
                 </a:solidFill>
@@ -5667,7 +5669,7 @@
               <a:buNone/>
             </a:pPr>
             <a:r>
-              <a:rPr lang="en-US" sz="1500" dirty="0">
+              <a:rPr lang="en-US" sz="2000" dirty="0">
                 <a:solidFill>
                   <a:srgbClr val="CBD5E1"/>
                 </a:solidFill>
@@ -5677,7 +5679,7 @@
               </a:rPr>
               <a:t>Every number in this deck is verifiable on the live portfolio</a:t>
             </a:r>
-            <a:endParaRPr lang="en-US" sz="1500" dirty="0"/>
+            <a:endParaRPr lang="en-US" sz="2000" dirty="0"/>
           </a:p>
         </p:txBody>
       </p:sp>
@@ -5712,8 +5714,8 @@
         </p:nvSpPr>
         <p:spPr>
           <a:xfrm>
-            <a:off x="822960" y="5376672"/>
-            <a:ext cx="10515600" cy="457200"/>
+            <a:off x="822960" y="5349240"/>
+            <a:ext cx="10515600" cy="502920"/>
           </a:xfrm>
           <a:prstGeom prst="rect">
             <a:avLst/>
@@ -5729,7 +5731,7 @@
               <a:buNone/>
             </a:pPr>
             <a:r>
-              <a:rPr lang="en-US" sz="1350" b="1" dirty="0">
+              <a:rPr lang="en-US" sz="1800" b="1" dirty="0">
                 <a:solidFill>
                   <a:srgbClr val="06B6D4"/>
                 </a:solidFill>
@@ -5739,7 +5741,7 @@
               </a:rPr>
               <a:t>rezalianvatiady.github.io · github.com/rezalianvatiady</a:t>
             </a:r>
-            <a:endParaRPr lang="en-US" sz="1350" dirty="0"/>
+            <a:endParaRPr lang="en-US" sz="1800" dirty="0"/>
           </a:p>
         </p:txBody>
       </p:sp>
@@ -5751,8 +5753,8 @@
         </p:nvSpPr>
         <p:spPr>
           <a:xfrm>
-            <a:off x="10698480" y="6382512"/>
-            <a:ext cx="1188720" cy="365760"/>
+            <a:off x="10698480" y="6309360"/>
+            <a:ext cx="1188720" cy="411480"/>
           </a:xfrm>
           <a:prstGeom prst="rect">
             <a:avLst/>
@@ -5768,9 +5770,9 @@
               <a:buNone/>
             </a:pPr>
             <a:r>
-              <a:rPr lang="en-US" sz="1000" dirty="0">
-                <a:solidFill>
-                  <a:srgbClr val="64748B"/>
+              <a:rPr lang="en-US" sz="1800" dirty="0">
+                <a:solidFill>
+                  <a:srgbClr val="8FA3BF"/>
                 </a:solidFill>
                 <a:latin typeface="Consolas" pitchFamily="34" charset="0"/>
                 <a:ea typeface="Consolas" pitchFamily="34" charset="-122"/>
@@ -5778,7 +5780,7 @@
               </a:rPr>
               <a:t>14 / 14</a:t>
             </a:r>
-            <a:endParaRPr lang="en-US" sz="1000" dirty="0"/>
+            <a:endParaRPr lang="en-US" sz="1800" dirty="0"/>
           </a:p>
         </p:txBody>
       </p:sp>
@@ -5862,8 +5864,8 @@
         </p:nvSpPr>
         <p:spPr>
           <a:xfrm>
-            <a:off x="822960" y="502920"/>
-            <a:ext cx="10515600" cy="365760"/>
+            <a:off x="822960" y="457200"/>
+            <a:ext cx="10515600" cy="411480"/>
           </a:xfrm>
           <a:prstGeom prst="rect">
             <a:avLst/>
@@ -5879,7 +5881,7 @@
               <a:buNone/>
             </a:pPr>
             <a:r>
-              <a:rPr lang="en-US" sz="1200" spc="300" kern="0" dirty="0">
+              <a:rPr lang="en-US" sz="1800" spc="300" kern="0" dirty="0">
                 <a:solidFill>
                   <a:srgbClr val="06B6D4"/>
                 </a:solidFill>
@@ -5889,7 +5891,7 @@
               </a:rPr>
               <a:t>AGENDA</a:t>
             </a:r>
-            <a:endParaRPr lang="en-US" sz="1200" dirty="0"/>
+            <a:endParaRPr lang="en-US" sz="1800" dirty="0"/>
           </a:p>
         </p:txBody>
       </p:sp>
@@ -5940,8 +5942,8 @@
         </p:nvSpPr>
         <p:spPr>
           <a:xfrm>
-            <a:off x="868680" y="2112264"/>
-            <a:ext cx="420624" cy="420624"/>
+            <a:off x="868680" y="2103120"/>
+            <a:ext cx="457200" cy="457200"/>
           </a:xfrm>
           <a:prstGeom prst="ellipse">
             <a:avLst/>
@@ -5965,8 +5967,8 @@
         </p:nvSpPr>
         <p:spPr>
           <a:xfrm>
-            <a:off x="868680" y="2112264"/>
-            <a:ext cx="420624" cy="420624"/>
+            <a:off x="868680" y="2103120"/>
+            <a:ext cx="457200" cy="457200"/>
           </a:xfrm>
           <a:prstGeom prst="rect">
             <a:avLst/>
@@ -5982,7 +5984,7 @@
               <a:buNone/>
             </a:pPr>
             <a:r>
-              <a:rPr lang="en-US" sz="1300" b="1" dirty="0">
+              <a:rPr lang="en-US" sz="1800" b="1" dirty="0">
                 <a:solidFill>
                   <a:srgbClr val="3B82F6"/>
                 </a:solidFill>
@@ -5992,7 +5994,7 @@
               </a:rPr>
               <a:t>1</a:t>
             </a:r>
-            <a:endParaRPr lang="en-US" sz="1300" dirty="0"/>
+            <a:endParaRPr lang="en-US" sz="1800" dirty="0"/>
           </a:p>
         </p:txBody>
       </p:sp>
@@ -6004,8 +6006,8 @@
         </p:nvSpPr>
         <p:spPr>
           <a:xfrm>
-            <a:off x="1435608" y="2057400"/>
-            <a:ext cx="4480560" cy="822960"/>
+            <a:off x="1472184" y="2011680"/>
+            <a:ext cx="4443984" cy="960120"/>
           </a:xfrm>
           <a:prstGeom prst="rect">
             <a:avLst/>
@@ -6021,7 +6023,7 @@
               <a:buNone/>
             </a:pPr>
             <a:r>
-              <a:rPr lang="en-US" sz="1450" dirty="0">
+              <a:rPr lang="en-US" sz="2000" dirty="0">
                 <a:solidFill>
                   <a:srgbClr val="CBD5E1"/>
                 </a:solidFill>
@@ -6031,7 +6033,7 @@
               </a:rPr>
               <a:t>The four chapters - and what each one set up</a:t>
             </a:r>
-            <a:endParaRPr lang="en-US" sz="1450" dirty="0"/>
+            <a:endParaRPr lang="en-US" sz="2000" dirty="0"/>
           </a:p>
         </p:txBody>
       </p:sp>
@@ -6043,8 +6045,8 @@
         </p:nvSpPr>
         <p:spPr>
           <a:xfrm>
-            <a:off x="868680" y="3044952"/>
-            <a:ext cx="420624" cy="420624"/>
+            <a:off x="868680" y="3182112"/>
+            <a:ext cx="457200" cy="457200"/>
           </a:xfrm>
           <a:prstGeom prst="ellipse">
             <a:avLst/>
@@ -6068,8 +6070,8 @@
         </p:nvSpPr>
         <p:spPr>
           <a:xfrm>
-            <a:off x="868680" y="3044952"/>
-            <a:ext cx="420624" cy="420624"/>
+            <a:off x="868680" y="3182112"/>
+            <a:ext cx="457200" cy="457200"/>
           </a:xfrm>
           <a:prstGeom prst="rect">
             <a:avLst/>
@@ -6085,7 +6087,7 @@
               <a:buNone/>
             </a:pPr>
             <a:r>
-              <a:rPr lang="en-US" sz="1300" b="1" dirty="0">
+              <a:rPr lang="en-US" sz="1800" b="1" dirty="0">
                 <a:solidFill>
                   <a:srgbClr val="06B6D4"/>
                 </a:solidFill>
@@ -6095,7 +6097,7 @@
               </a:rPr>
               <a:t>2</a:t>
             </a:r>
-            <a:endParaRPr lang="en-US" sz="1300" dirty="0"/>
+            <a:endParaRPr lang="en-US" sz="1800" dirty="0"/>
           </a:p>
         </p:txBody>
       </p:sp>
@@ -6107,8 +6109,8 @@
         </p:nvSpPr>
         <p:spPr>
           <a:xfrm>
-            <a:off x="1435608" y="2990088"/>
-            <a:ext cx="4480560" cy="822960"/>
+            <a:off x="1472184" y="3090672"/>
+            <a:ext cx="4443984" cy="960120"/>
           </a:xfrm>
           <a:prstGeom prst="rect">
             <a:avLst/>
@@ -6124,7 +6126,7 @@
               <a:buNone/>
             </a:pPr>
             <a:r>
-              <a:rPr lang="en-US" sz="1450" dirty="0">
+              <a:rPr lang="en-US" sz="2000" dirty="0">
                 <a:solidFill>
                   <a:srgbClr val="CBD5E1"/>
                 </a:solidFill>
@@ -6134,7 +6136,7 @@
               </a:rPr>
               <a:t>What transferred perfectly from BI to AI building</a:t>
             </a:r>
-            <a:endParaRPr lang="en-US" sz="1450" dirty="0"/>
+            <a:endParaRPr lang="en-US" sz="2000" dirty="0"/>
           </a:p>
         </p:txBody>
       </p:sp>
@@ -6146,8 +6148,8 @@
         </p:nvSpPr>
         <p:spPr>
           <a:xfrm>
-            <a:off x="868680" y="3977640"/>
-            <a:ext cx="420624" cy="420624"/>
+            <a:off x="868680" y="4261104"/>
+            <a:ext cx="457200" cy="457200"/>
           </a:xfrm>
           <a:prstGeom prst="ellipse">
             <a:avLst/>
@@ -6171,8 +6173,8 @@
         </p:nvSpPr>
         <p:spPr>
           <a:xfrm>
-            <a:off x="868680" y="3977640"/>
-            <a:ext cx="420624" cy="420624"/>
+            <a:off x="868680" y="4261104"/>
+            <a:ext cx="457200" cy="457200"/>
           </a:xfrm>
           <a:prstGeom prst="rect">
             <a:avLst/>
@@ -6188,7 +6190,7 @@
               <a:buNone/>
             </a:pPr>
             <a:r>
-              <a:rPr lang="en-US" sz="1300" b="1" dirty="0">
+              <a:rPr lang="en-US" sz="1800" b="1" dirty="0">
                 <a:solidFill>
                   <a:srgbClr val="3B82F6"/>
                 </a:solidFill>
@@ -6198,7 +6200,7 @@
               </a:rPr>
               <a:t>3</a:t>
             </a:r>
-            <a:endParaRPr lang="en-US" sz="1300" dirty="0"/>
+            <a:endParaRPr lang="en-US" sz="1800" dirty="0"/>
           </a:p>
         </p:txBody>
       </p:sp>
@@ -6210,8 +6212,8 @@
         </p:nvSpPr>
         <p:spPr>
           <a:xfrm>
-            <a:off x="1435608" y="3922776"/>
-            <a:ext cx="4480560" cy="822960"/>
+            <a:off x="1472184" y="4169664"/>
+            <a:ext cx="4443984" cy="960120"/>
           </a:xfrm>
           <a:prstGeom prst="rect">
             <a:avLst/>
@@ -6227,7 +6229,7 @@
               <a:buNone/>
             </a:pPr>
             <a:r>
-              <a:rPr lang="en-US" sz="1450" dirty="0">
+              <a:rPr lang="en-US" sz="2000" dirty="0">
                 <a:solidFill>
                   <a:srgbClr val="CBD5E1"/>
                 </a:solidFill>
@@ -6237,7 +6239,7 @@
               </a:rPr>
               <a:t>What I had to unlearn on the way to founder</a:t>
             </a:r>
-            <a:endParaRPr lang="en-US" sz="1450" dirty="0"/>
+            <a:endParaRPr lang="en-US" sz="2000" dirty="0"/>
           </a:p>
         </p:txBody>
       </p:sp>
@@ -6249,8 +6251,8 @@
         </p:nvSpPr>
         <p:spPr>
           <a:xfrm>
-            <a:off x="6355080" y="2112264"/>
-            <a:ext cx="420624" cy="420624"/>
+            <a:off x="6355080" y="2103120"/>
+            <a:ext cx="457200" cy="457200"/>
           </a:xfrm>
           <a:prstGeom prst="ellipse">
             <a:avLst/>
@@ -6274,8 +6276,8 @@
         </p:nvSpPr>
         <p:spPr>
           <a:xfrm>
-            <a:off x="6355080" y="2112264"/>
-            <a:ext cx="420624" cy="420624"/>
+            <a:off x="6355080" y="2103120"/>
+            <a:ext cx="457200" cy="457200"/>
           </a:xfrm>
           <a:prstGeom prst="rect">
             <a:avLst/>
@@ -6291,7 +6293,7 @@
               <a:buNone/>
             </a:pPr>
             <a:r>
-              <a:rPr lang="en-US" sz="1300" b="1" dirty="0">
+              <a:rPr lang="en-US" sz="1800" b="1" dirty="0">
                 <a:solidFill>
                   <a:srgbClr val="06B6D4"/>
                 </a:solidFill>
@@ -6301,7 +6303,7 @@
               </a:rPr>
               <a:t>4</a:t>
             </a:r>
-            <a:endParaRPr lang="en-US" sz="1300" dirty="0"/>
+            <a:endParaRPr lang="en-US" sz="1800" dirty="0"/>
           </a:p>
         </p:txBody>
       </p:sp>
@@ -6313,8 +6315,8 @@
         </p:nvSpPr>
         <p:spPr>
           <a:xfrm>
-            <a:off x="6922008" y="2057400"/>
-            <a:ext cx="4480560" cy="822960"/>
+            <a:off x="6958584" y="2011680"/>
+            <a:ext cx="4443984" cy="960120"/>
           </a:xfrm>
           <a:prstGeom prst="rect">
             <a:avLst/>
@@ -6330,7 +6332,7 @@
               <a:buNone/>
             </a:pPr>
             <a:r>
-              <a:rPr lang="en-US" sz="1450" dirty="0">
+              <a:rPr lang="en-US" sz="2000" dirty="0">
                 <a:solidFill>
                   <a:srgbClr val="CBD5E1"/>
                 </a:solidFill>
@@ -6340,7 +6342,7 @@
               </a:rPr>
               <a:t>The proof: apps, agents, frameworks, router checks</a:t>
             </a:r>
-            <a:endParaRPr lang="en-US" sz="1450" dirty="0"/>
+            <a:endParaRPr lang="en-US" sz="2000" dirty="0"/>
           </a:p>
         </p:txBody>
       </p:sp>
@@ -6352,8 +6354,8 @@
         </p:nvSpPr>
         <p:spPr>
           <a:xfrm>
-            <a:off x="6355080" y="3044952"/>
-            <a:ext cx="420624" cy="420624"/>
+            <a:off x="6355080" y="3182112"/>
+            <a:ext cx="457200" cy="457200"/>
           </a:xfrm>
           <a:prstGeom prst="ellipse">
             <a:avLst/>
@@ -6377,8 +6379,8 @@
         </p:nvSpPr>
         <p:spPr>
           <a:xfrm>
-            <a:off x="6355080" y="3044952"/>
-            <a:ext cx="420624" cy="420624"/>
+            <a:off x="6355080" y="3182112"/>
+            <a:ext cx="457200" cy="457200"/>
           </a:xfrm>
           <a:prstGeom prst="rect">
             <a:avLst/>
@@ -6394,7 +6396,7 @@
               <a:buNone/>
             </a:pPr>
             <a:r>
-              <a:rPr lang="en-US" sz="1300" b="1" dirty="0">
+              <a:rPr lang="en-US" sz="1800" b="1" dirty="0">
                 <a:solidFill>
                   <a:srgbClr val="3B82F6"/>
                 </a:solidFill>
@@ -6404,7 +6406,7 @@
               </a:rPr>
               <a:t>5</a:t>
             </a:r>
-            <a:endParaRPr lang="en-US" sz="1300" dirty="0"/>
+            <a:endParaRPr lang="en-US" sz="1800" dirty="0"/>
           </a:p>
         </p:txBody>
       </p:sp>
@@ -6416,8 +6418,8 @@
         </p:nvSpPr>
         <p:spPr>
           <a:xfrm>
-            <a:off x="6922008" y="2990088"/>
-            <a:ext cx="4480560" cy="822960"/>
+            <a:off x="6958584" y="3090672"/>
+            <a:ext cx="4443984" cy="960120"/>
           </a:xfrm>
           <a:prstGeom prst="rect">
             <a:avLst/>
@@ -6433,7 +6435,7 @@
               <a:buNone/>
             </a:pPr>
             <a:r>
-              <a:rPr lang="en-US" sz="1450" dirty="0">
+              <a:rPr lang="en-US" sz="2000" dirty="0">
                 <a:solidFill>
                   <a:srgbClr val="CBD5E1"/>
                 </a:solidFill>
@@ -6443,7 +6445,7 @@
               </a:rPr>
               <a:t>Why this combination is rare - and available</a:t>
             </a:r>
-            <a:endParaRPr lang="en-US" sz="1450" dirty="0"/>
+            <a:endParaRPr lang="en-US" sz="2000" dirty="0"/>
           </a:p>
         </p:txBody>
       </p:sp>
@@ -6455,8 +6457,8 @@
         </p:nvSpPr>
         <p:spPr>
           <a:xfrm>
-            <a:off x="10698480" y="6382512"/>
-            <a:ext cx="1188720" cy="365760"/>
+            <a:off x="10698480" y="6309360"/>
+            <a:ext cx="1188720" cy="411480"/>
           </a:xfrm>
           <a:prstGeom prst="rect">
             <a:avLst/>
@@ -6472,9 +6474,9 @@
               <a:buNone/>
             </a:pPr>
             <a:r>
-              <a:rPr lang="en-US" sz="1000" dirty="0">
-                <a:solidFill>
-                  <a:srgbClr val="64748B"/>
+              <a:rPr lang="en-US" sz="1800" dirty="0">
+                <a:solidFill>
+                  <a:srgbClr val="8FA3BF"/>
                 </a:solidFill>
                 <a:latin typeface="Consolas" pitchFamily="34" charset="0"/>
                 <a:ea typeface="Consolas" pitchFamily="34" charset="-122"/>
@@ -6482,7 +6484,7 @@
               </a:rPr>
               <a:t>2 / 14</a:t>
             </a:r>
-            <a:endParaRPr lang="en-US" sz="1000" dirty="0"/>
+            <a:endParaRPr lang="en-US" sz="1800" dirty="0"/>
           </a:p>
         </p:txBody>
       </p:sp>
@@ -6566,8 +6568,8 @@
         </p:nvSpPr>
         <p:spPr>
           <a:xfrm>
-            <a:off x="822960" y="502920"/>
-            <a:ext cx="10515600" cy="365760"/>
+            <a:off x="822960" y="457200"/>
+            <a:ext cx="10515600" cy="411480"/>
           </a:xfrm>
           <a:prstGeom prst="rect">
             <a:avLst/>
@@ -6583,7 +6585,7 @@
               <a:buNone/>
             </a:pPr>
             <a:r>
-              <a:rPr lang="en-US" sz="1200" spc="300" kern="0" dirty="0">
+              <a:rPr lang="en-US" sz="1800" spc="300" kern="0" dirty="0">
                 <a:solidFill>
                   <a:srgbClr val="06B6D4"/>
                 </a:solidFill>
@@ -6593,7 +6595,7 @@
               </a:rPr>
               <a:t>TIMELINE</a:t>
             </a:r>
-            <a:endParaRPr lang="en-US" sz="1200" dirty="0"/>
+            <a:endParaRPr lang="en-US" sz="1800" dirty="0"/>
           </a:p>
         </p:txBody>
       </p:sp>
@@ -6644,7 +6646,7 @@
         </p:nvSpPr>
         <p:spPr>
           <a:xfrm>
-            <a:off x="1371600" y="3035808"/>
+            <a:off x="1371600" y="2907792"/>
             <a:ext cx="9464040" cy="0"/>
           </a:xfrm>
           <a:prstGeom prst="line">
@@ -6667,7 +6669,7 @@
         </p:nvSpPr>
         <p:spPr>
           <a:xfrm>
-            <a:off x="1289304" y="2953512"/>
+            <a:off x="1289304" y="2825496"/>
             <a:ext cx="164592" cy="164592"/>
           </a:xfrm>
           <a:prstGeom prst="ellipse">
@@ -6692,8 +6694,8 @@
         </p:nvSpPr>
         <p:spPr>
           <a:xfrm>
-            <a:off x="342900" y="2395728"/>
-            <a:ext cx="2057400" cy="365760"/>
+            <a:off x="297180" y="2212848"/>
+            <a:ext cx="2148840" cy="384048"/>
           </a:xfrm>
           <a:prstGeom prst="rect">
             <a:avLst/>
@@ -6709,7 +6711,7 @@
               <a:buNone/>
             </a:pPr>
             <a:r>
-              <a:rPr lang="en-US" sz="1100" b="1" dirty="0">
+              <a:rPr lang="en-US" sz="1800" b="1" dirty="0">
                 <a:solidFill>
                   <a:srgbClr val="3B82F6"/>
                 </a:solidFill>
@@ -6719,7 +6721,7 @@
               </a:rPr>
               <a:t>Aug 2022</a:t>
             </a:r>
-            <a:endParaRPr lang="en-US" sz="1100" dirty="0"/>
+            <a:endParaRPr lang="en-US" sz="1800" dirty="0"/>
           </a:p>
         </p:txBody>
       </p:sp>
@@ -6731,8 +6733,8 @@
         </p:nvSpPr>
         <p:spPr>
           <a:xfrm>
-            <a:off x="342900" y="3310128"/>
-            <a:ext cx="2057400" cy="566928"/>
+            <a:off x="297180" y="3200400"/>
+            <a:ext cx="2148840" cy="713232"/>
           </a:xfrm>
           <a:prstGeom prst="rect">
             <a:avLst/>
@@ -6748,7 +6750,7 @@
               <a:buNone/>
             </a:pPr>
             <a:r>
-              <a:rPr lang="en-US" sz="1250" b="1" dirty="0">
+              <a:rPr lang="en-US" sz="1800" b="1" dirty="0">
                 <a:solidFill>
                   <a:srgbClr val="FFFFFF"/>
                 </a:solidFill>
@@ -6758,7 +6760,7 @@
               </a:rPr>
               <a:t>Customer Analytics - RevoU × Tokopedia</a:t>
             </a:r>
-            <a:endParaRPr lang="en-US" sz="1250" dirty="0"/>
+            <a:endParaRPr lang="en-US" sz="1800" dirty="0"/>
           </a:p>
         </p:txBody>
       </p:sp>
@@ -6770,8 +6772,8 @@
         </p:nvSpPr>
         <p:spPr>
           <a:xfrm>
-            <a:off x="342900" y="3895344"/>
-            <a:ext cx="2057400" cy="1234440"/>
+            <a:off x="297180" y="3931920"/>
+            <a:ext cx="2148840" cy="1417320"/>
           </a:xfrm>
           <a:prstGeom prst="rect">
             <a:avLst/>
@@ -6787,7 +6789,7 @@
               <a:buNone/>
             </a:pPr>
             <a:r>
-              <a:rPr lang="en-US" sz="1000" dirty="0">
+              <a:rPr lang="en-US" sz="1800" dirty="0">
                 <a:solidFill>
                   <a:srgbClr val="CBD5E1"/>
                 </a:solidFill>
@@ -6797,7 +6799,7 @@
               </a:rPr>
               <a:t>Segmentation, churn, and feature adoption on real e-commerce data, evaluated by the Tokopedia analytics team.</a:t>
             </a:r>
-            <a:endParaRPr lang="en-US" sz="1000" dirty="0"/>
+            <a:endParaRPr lang="en-US" sz="1800" dirty="0"/>
           </a:p>
         </p:txBody>
       </p:sp>
@@ -6809,7 +6811,7 @@
         </p:nvSpPr>
         <p:spPr>
           <a:xfrm>
-            <a:off x="4443984" y="2953512"/>
+            <a:off x="4443984" y="2825496"/>
             <a:ext cx="164592" cy="164592"/>
           </a:xfrm>
           <a:prstGeom prst="ellipse">
@@ -6834,8 +6836,8 @@
         </p:nvSpPr>
         <p:spPr>
           <a:xfrm>
-            <a:off x="3497580" y="2395728"/>
-            <a:ext cx="2057400" cy="365760"/>
+            <a:off x="3451860" y="2212848"/>
+            <a:ext cx="2148840" cy="384048"/>
           </a:xfrm>
           <a:prstGeom prst="rect">
             <a:avLst/>
@@ -6851,7 +6853,7 @@
               <a:buNone/>
             </a:pPr>
             <a:r>
-              <a:rPr lang="en-US" sz="1100" b="1" dirty="0">
+              <a:rPr lang="en-US" sz="1800" b="1" dirty="0">
                 <a:solidFill>
                   <a:srgbClr val="06B6D4"/>
                 </a:solidFill>
@@ -6861,7 +6863,7 @@
               </a:rPr>
               <a:t>Feb 2023</a:t>
             </a:r>
-            <a:endParaRPr lang="en-US" sz="1100" dirty="0"/>
+            <a:endParaRPr lang="en-US" sz="1800" dirty="0"/>
           </a:p>
         </p:txBody>
       </p:sp>
@@ -6873,8 +6875,8 @@
         </p:nvSpPr>
         <p:spPr>
           <a:xfrm>
-            <a:off x="3497580" y="3310128"/>
-            <a:ext cx="2057400" cy="566928"/>
+            <a:off x="3451860" y="3200400"/>
+            <a:ext cx="2148840" cy="713232"/>
           </a:xfrm>
           <a:prstGeom prst="rect">
             <a:avLst/>
@@ -6890,7 +6892,7 @@
               <a:buNone/>
             </a:pPr>
             <a:r>
-              <a:rPr lang="en-US" sz="1250" b="1" dirty="0">
+              <a:rPr lang="en-US" sz="1800" b="1" dirty="0">
                 <a:solidFill>
                   <a:srgbClr val="FFFFFF"/>
                 </a:solidFill>
@@ -6900,7 +6902,7 @@
               </a:rPr>
               <a:t>IT Business Analyst - BRI AML Project</a:t>
             </a:r>
-            <a:endParaRPr lang="en-US" sz="1250" dirty="0"/>
+            <a:endParaRPr lang="en-US" sz="1800" dirty="0"/>
           </a:p>
         </p:txBody>
       </p:sp>
@@ -6912,8 +6914,8 @@
         </p:nvSpPr>
         <p:spPr>
           <a:xfrm>
-            <a:off x="3497580" y="3895344"/>
-            <a:ext cx="2057400" cy="1234440"/>
+            <a:off x="3451860" y="3931920"/>
+            <a:ext cx="2148840" cy="1417320"/>
           </a:xfrm>
           <a:prstGeom prst="rect">
             <a:avLst/>
@@ -6929,7 +6931,7 @@
               <a:buNone/>
             </a:pPr>
             <a:r>
-              <a:rPr lang="en-US" sz="1000" dirty="0">
+              <a:rPr lang="en-US" sz="1800" dirty="0">
                 <a:solidFill>
                   <a:srgbClr val="CBD5E1"/>
                 </a:solidFill>
@@ -6939,7 +6941,7 @@
               </a:rPr>
               <a:t>Graph-database anti-money-laundering analysis: requirements, pattern definition, auditor-ready documentation.</a:t>
             </a:r>
-            <a:endParaRPr lang="en-US" sz="1000" dirty="0"/>
+            <a:endParaRPr lang="en-US" sz="1800" dirty="0"/>
           </a:p>
         </p:txBody>
       </p:sp>
@@ -6951,7 +6953,7 @@
         </p:nvSpPr>
         <p:spPr>
           <a:xfrm>
-            <a:off x="7598664" y="2953512"/>
+            <a:off x="7598664" y="2825496"/>
             <a:ext cx="164592" cy="164592"/>
           </a:xfrm>
           <a:prstGeom prst="ellipse">
@@ -6976,8 +6978,8 @@
         </p:nvSpPr>
         <p:spPr>
           <a:xfrm>
-            <a:off x="6652260" y="2395728"/>
-            <a:ext cx="2057400" cy="365760"/>
+            <a:off x="6606540" y="2212848"/>
+            <a:ext cx="2148840" cy="384048"/>
           </a:xfrm>
           <a:prstGeom prst="rect">
             <a:avLst/>
@@ -6993,7 +6995,7 @@
               <a:buNone/>
             </a:pPr>
             <a:r>
-              <a:rPr lang="en-US" sz="1100" b="1" dirty="0">
+              <a:rPr lang="en-US" sz="1800" b="1" dirty="0">
                 <a:solidFill>
                   <a:srgbClr val="3B82F6"/>
                 </a:solidFill>
@@ -7003,7 +7005,7 @@
               </a:rPr>
               <a:t>Oct 2023</a:t>
             </a:r>
-            <a:endParaRPr lang="en-US" sz="1100" dirty="0"/>
+            <a:endParaRPr lang="en-US" sz="1800" dirty="0"/>
           </a:p>
         </p:txBody>
       </p:sp>
@@ -7015,8 +7017,8 @@
         </p:nvSpPr>
         <p:spPr>
           <a:xfrm>
-            <a:off x="6652260" y="3310128"/>
-            <a:ext cx="2057400" cy="566928"/>
+            <a:off x="6606540" y="3200400"/>
+            <a:ext cx="2148840" cy="713232"/>
           </a:xfrm>
           <a:prstGeom prst="rect">
             <a:avLst/>
@@ -7032,7 +7034,7 @@
               <a:buNone/>
             </a:pPr>
             <a:r>
-              <a:rPr lang="en-US" sz="1250" b="1" dirty="0">
+              <a:rPr lang="en-US" sz="1800" b="1" dirty="0">
                 <a:solidFill>
                   <a:srgbClr val="FFFFFF"/>
                 </a:solidFill>
@@ -7042,7 +7044,7 @@
               </a:rPr>
               <a:t>Regional BI Specialist - IKEA Indonesia</a:t>
             </a:r>
-            <a:endParaRPr lang="en-US" sz="1250" dirty="0"/>
+            <a:endParaRPr lang="en-US" sz="1800" dirty="0"/>
           </a:p>
         </p:txBody>
       </p:sp>
@@ -7054,8 +7056,8 @@
         </p:nvSpPr>
         <p:spPr>
           <a:xfrm>
-            <a:off x="6652260" y="3895344"/>
-            <a:ext cx="2057400" cy="1234440"/>
+            <a:off x="6606540" y="3931920"/>
+            <a:ext cx="2148840" cy="1417320"/>
           </a:xfrm>
           <a:prstGeom prst="rect">
             <a:avLst/>
@@ -7071,7 +7073,7 @@
               <a:buNone/>
             </a:pPr>
             <a:r>
-              <a:rPr lang="en-US" sz="1000" dirty="0">
+              <a:rPr lang="en-US" sz="1800" dirty="0">
                 <a:solidFill>
                   <a:srgbClr val="CBD5E1"/>
                 </a:solidFill>
@@ -7081,7 +7083,7 @@
               </a:rPr>
               <a:t>BI operations for Indonesia, Taiwan, Hong Kong, and Macau: one datalake, Qlik Sense, Alteryx pipelines.</a:t>
             </a:r>
-            <a:endParaRPr lang="en-US" sz="1000" dirty="0"/>
+            <a:endParaRPr lang="en-US" sz="1800" dirty="0"/>
           </a:p>
         </p:txBody>
       </p:sp>
@@ -7093,7 +7095,7 @@
         </p:nvSpPr>
         <p:spPr>
           <a:xfrm>
-            <a:off x="10753344" y="2953512"/>
+            <a:off x="10753344" y="2825496"/>
             <a:ext cx="164592" cy="164592"/>
           </a:xfrm>
           <a:prstGeom prst="ellipse">
@@ -7118,8 +7120,8 @@
         </p:nvSpPr>
         <p:spPr>
           <a:xfrm>
-            <a:off x="9806940" y="2395728"/>
-            <a:ext cx="2057400" cy="365760"/>
+            <a:off x="9761220" y="2212848"/>
+            <a:ext cx="2148840" cy="384048"/>
           </a:xfrm>
           <a:prstGeom prst="rect">
             <a:avLst/>
@@ -7135,7 +7137,7 @@
               <a:buNone/>
             </a:pPr>
             <a:r>
-              <a:rPr lang="en-US" sz="1100" b="1" dirty="0">
+              <a:rPr lang="en-US" sz="1800" b="1" dirty="0">
                 <a:solidFill>
                   <a:srgbClr val="06B6D4"/>
                 </a:solidFill>
@@ -7145,7 +7147,7 @@
               </a:rPr>
               <a:t>Apr 2024</a:t>
             </a:r>
-            <a:endParaRPr lang="en-US" sz="1100" dirty="0"/>
+            <a:endParaRPr lang="en-US" sz="1800" dirty="0"/>
           </a:p>
         </p:txBody>
       </p:sp>
@@ -7157,8 +7159,8 @@
         </p:nvSpPr>
         <p:spPr>
           <a:xfrm>
-            <a:off x="9806940" y="3310128"/>
-            <a:ext cx="2057400" cy="566928"/>
+            <a:off x="9761220" y="3200400"/>
+            <a:ext cx="2148840" cy="713232"/>
           </a:xfrm>
           <a:prstGeom prst="rect">
             <a:avLst/>
@@ -7174,7 +7176,7 @@
               <a:buNone/>
             </a:pPr>
             <a:r>
-              <a:rPr lang="en-US" sz="1250" b="1" dirty="0">
+              <a:rPr lang="en-US" sz="1800" b="1" dirty="0">
                 <a:solidFill>
                   <a:srgbClr val="FFFFFF"/>
                 </a:solidFill>
@@ -7184,7 +7186,7 @@
               </a:rPr>
               <a:t>Founder &amp; Lead AI Engineer - Zalin Labs</a:t>
             </a:r>
-            <a:endParaRPr lang="en-US" sz="1250" dirty="0"/>
+            <a:endParaRPr lang="en-US" sz="1800" dirty="0"/>
           </a:p>
         </p:txBody>
       </p:sp>
@@ -7196,8 +7198,8 @@
         </p:nvSpPr>
         <p:spPr>
           <a:xfrm>
-            <a:off x="9806940" y="3895344"/>
-            <a:ext cx="2057400" cy="1234440"/>
+            <a:off x="9761220" y="3931920"/>
+            <a:ext cx="2148840" cy="1417320"/>
           </a:xfrm>
           <a:prstGeom prst="rect">
             <a:avLst/>
@@ -7213,7 +7215,7 @@
               <a:buNone/>
             </a:pPr>
             <a:r>
-              <a:rPr lang="en-US" sz="1000" dirty="0">
+              <a:rPr lang="en-US" sz="1800" dirty="0">
                 <a:solidFill>
                   <a:srgbClr val="CBD5E1"/>
                 </a:solidFill>
@@ -7223,7 +7225,7 @@
               </a:rPr>
               <a:t>ZalinOS, a nine-agent workforce, 30+ production apps, and two open-source frameworks - built and shipped solo.</a:t>
             </a:r>
-            <a:endParaRPr lang="en-US" sz="1000" dirty="0"/>
+            <a:endParaRPr lang="en-US" sz="1800" dirty="0"/>
           </a:p>
         </p:txBody>
       </p:sp>
@@ -7258,8 +7260,8 @@
         </p:nvSpPr>
         <p:spPr>
           <a:xfrm>
-            <a:off x="822960" y="6053328"/>
-            <a:ext cx="9692640" cy="457200"/>
+            <a:off x="822960" y="6035040"/>
+            <a:ext cx="10424160" cy="566928"/>
           </a:xfrm>
           <a:prstGeom prst="rect">
             <a:avLst/>
@@ -7275,9 +7277,9 @@
               <a:buNone/>
             </a:pPr>
             <a:r>
-              <a:rPr lang="en-US" sz="1150" dirty="0">
-                <a:solidFill>
-                  <a:srgbClr val="64748B"/>
+              <a:rPr lang="en-US" sz="1800" dirty="0">
+                <a:solidFill>
+                  <a:srgbClr val="8FA3BF"/>
                 </a:solidFill>
                 <a:latin typeface="Segoe UI" pitchFamily="34" charset="0"/>
                 <a:ea typeface="Segoe UI" pitchFamily="34" charset="-122"/>
@@ -7285,7 +7287,7 @@
               </a:rPr>
               <a:t>Analytics fundamentals led to technical analyst roles, then regional platform ownership, then the automation company.</a:t>
             </a:r>
-            <a:endParaRPr lang="en-US" sz="1150" dirty="0"/>
+            <a:endParaRPr lang="en-US" sz="1800" dirty="0"/>
           </a:p>
         </p:txBody>
       </p:sp>
@@ -7297,8 +7299,8 @@
         </p:nvSpPr>
         <p:spPr>
           <a:xfrm>
-            <a:off x="10698480" y="6382512"/>
-            <a:ext cx="1188720" cy="365760"/>
+            <a:off x="10698480" y="6309360"/>
+            <a:ext cx="1188720" cy="411480"/>
           </a:xfrm>
           <a:prstGeom prst="rect">
             <a:avLst/>
@@ -7314,9 +7316,9 @@
               <a:buNone/>
             </a:pPr>
             <a:r>
-              <a:rPr lang="en-US" sz="1000" dirty="0">
-                <a:solidFill>
-                  <a:srgbClr val="64748B"/>
+              <a:rPr lang="en-US" sz="1800" dirty="0">
+                <a:solidFill>
+                  <a:srgbClr val="8FA3BF"/>
                 </a:solidFill>
                 <a:latin typeface="Consolas" pitchFamily="34" charset="0"/>
                 <a:ea typeface="Consolas" pitchFamily="34" charset="-122"/>
@@ -7324,7 +7326,7 @@
               </a:rPr>
               <a:t>3 / 14</a:t>
             </a:r>
-            <a:endParaRPr lang="en-US" sz="1000" dirty="0"/>
+            <a:endParaRPr lang="en-US" sz="1800" dirty="0"/>
           </a:p>
         </p:txBody>
       </p:sp>
@@ -7408,8 +7410,8 @@
         </p:nvSpPr>
         <p:spPr>
           <a:xfrm>
-            <a:off x="822960" y="502920"/>
-            <a:ext cx="10515600" cy="365760"/>
+            <a:off x="822960" y="457200"/>
+            <a:ext cx="10515600" cy="411480"/>
           </a:xfrm>
           <a:prstGeom prst="rect">
             <a:avLst/>
@@ -7425,7 +7427,7 @@
               <a:buNone/>
             </a:pPr>
             <a:r>
-              <a:rPr lang="en-US" sz="1200" spc="300" kern="0" dirty="0">
+              <a:rPr lang="en-US" sz="1800" spc="300" kern="0" dirty="0">
                 <a:solidFill>
                   <a:srgbClr val="06B6D4"/>
                 </a:solidFill>
@@ -7435,7 +7437,7 @@
               </a:rPr>
               <a:t>WHAT TRANSFERRED</a:t>
             </a:r>
-            <a:endParaRPr lang="en-US" sz="1200" dirty="0"/>
+            <a:endParaRPr lang="en-US" sz="1800" dirty="0"/>
           </a:p>
         </p:txBody>
       </p:sp>
@@ -7486,8 +7488,8 @@
         </p:nvSpPr>
         <p:spPr>
           <a:xfrm>
-            <a:off x="868680" y="2011680"/>
-            <a:ext cx="10424160" cy="3566160"/>
+            <a:off x="868680" y="1965960"/>
+            <a:ext cx="10424160" cy="3840480"/>
           </a:xfrm>
           <a:prstGeom prst="rect">
             <a:avLst/>
@@ -7510,7 +7512,7 @@
               <a:buChar char="▸"/>
             </a:pPr>
             <a:r>
-              <a:rPr lang="en-US" sz="1600" dirty="0">
+              <a:rPr lang="en-US" sz="2000" dirty="0">
                 <a:solidFill>
                   <a:srgbClr val="CBD5E1"/>
                 </a:solidFill>
@@ -7520,7 +7522,7 @@
               </a:rPr>
               <a:t>Requirements are 80% of success - unclear questions produce useless answers in analytics and in agent design alike.</a:t>
             </a:r>
-            <a:endParaRPr lang="en-US" sz="1600" dirty="0"/>
+            <a:endParaRPr lang="en-US" sz="2000" dirty="0"/>
           </a:p>
           <a:p>
             <a:pPr marL="342900" indent="-342900">
@@ -7534,7 +7536,7 @@
               <a:buChar char="▸"/>
             </a:pPr>
             <a:r>
-              <a:rPr lang="en-US" sz="1600" dirty="0">
+              <a:rPr lang="en-US" sz="2000" dirty="0">
                 <a:solidFill>
                   <a:srgbClr val="CBD5E1"/>
                 </a:solidFill>
@@ -7544,7 +7546,7 @@
               </a:rPr>
               <a:t>Data quality discipline: an agent company runs on trustworthy internal data, and enterprise BI taught me that paranoia.</a:t>
             </a:r>
-            <a:endParaRPr lang="en-US" sz="1600" dirty="0"/>
+            <a:endParaRPr lang="en-US" sz="2000" dirty="0"/>
           </a:p>
           <a:p>
             <a:pPr marL="342900" indent="-342900">
@@ -7558,7 +7560,7 @@
               <a:buChar char="▸"/>
             </a:pPr>
             <a:r>
-              <a:rPr lang="en-US" sz="1600" dirty="0">
+              <a:rPr lang="en-US" sz="2000" dirty="0">
                 <a:solidFill>
                   <a:srgbClr val="CBD5E1"/>
                 </a:solidFill>
@@ -7568,7 +7570,7 @@
               </a:rPr>
               <a:t>Stakeholder communication: explaining AML patterns to auditors is the same muscle as explaining agent behavior to a recruiter.</a:t>
             </a:r>
-            <a:endParaRPr lang="en-US" sz="1600" dirty="0"/>
+            <a:endParaRPr lang="en-US" sz="2000" dirty="0"/>
           </a:p>
           <a:p>
             <a:pPr marL="342900" indent="-342900">
@@ -7582,7 +7584,7 @@
               <a:buChar char="▸"/>
             </a:pPr>
             <a:r>
-              <a:rPr lang="en-US" sz="1600" dirty="0">
+              <a:rPr lang="en-US" sz="2000" dirty="0">
                 <a:solidFill>
                   <a:srgbClr val="CBD5E1"/>
                 </a:solidFill>
@@ -7592,7 +7594,7 @@
               </a:rPr>
               <a:t>The automation instinct: the best part of every BI job was building the machine that does the job.</a:t>
             </a:r>
-            <a:endParaRPr lang="en-US" sz="1600" dirty="0"/>
+            <a:endParaRPr lang="en-US" sz="2000" dirty="0"/>
           </a:p>
         </p:txBody>
       </p:sp>
@@ -7627,8 +7629,8 @@
         </p:nvSpPr>
         <p:spPr>
           <a:xfrm>
-            <a:off x="822960" y="6053328"/>
-            <a:ext cx="9692640" cy="457200"/>
+            <a:off x="822960" y="6035040"/>
+            <a:ext cx="10424160" cy="566928"/>
           </a:xfrm>
           <a:prstGeom prst="rect">
             <a:avLst/>
@@ -7644,9 +7646,9 @@
               <a:buNone/>
             </a:pPr>
             <a:r>
-              <a:rPr lang="en-US" sz="1150" dirty="0">
-                <a:solidFill>
-                  <a:srgbClr val="64748B"/>
+              <a:rPr lang="en-US" sz="1800" dirty="0">
+                <a:solidFill>
+                  <a:srgbClr val="8FA3BF"/>
                 </a:solidFill>
                 <a:latin typeface="Segoe UI" pitchFamily="34" charset="0"/>
                 <a:ea typeface="Segoe UI" pitchFamily="34" charset="-122"/>
@@ -7654,7 +7656,7 @@
               </a:rPr>
               <a:t>Transferable skills are the compounding asset; tools are only the current interface.</a:t>
             </a:r>
-            <a:endParaRPr lang="en-US" sz="1150" dirty="0"/>
+            <a:endParaRPr lang="en-US" sz="1800" dirty="0"/>
           </a:p>
         </p:txBody>
       </p:sp>
@@ -7666,8 +7668,8 @@
         </p:nvSpPr>
         <p:spPr>
           <a:xfrm>
-            <a:off x="10698480" y="6382512"/>
-            <a:ext cx="1188720" cy="365760"/>
+            <a:off x="10698480" y="6309360"/>
+            <a:ext cx="1188720" cy="411480"/>
           </a:xfrm>
           <a:prstGeom prst="rect">
             <a:avLst/>
@@ -7683,9 +7685,9 @@
               <a:buNone/>
             </a:pPr>
             <a:r>
-              <a:rPr lang="en-US" sz="1000" dirty="0">
-                <a:solidFill>
-                  <a:srgbClr val="64748B"/>
+              <a:rPr lang="en-US" sz="1800" dirty="0">
+                <a:solidFill>
+                  <a:srgbClr val="8FA3BF"/>
                 </a:solidFill>
                 <a:latin typeface="Consolas" pitchFamily="34" charset="0"/>
                 <a:ea typeface="Consolas" pitchFamily="34" charset="-122"/>
@@ -7693,7 +7695,7 @@
               </a:rPr>
               <a:t>4 / 14</a:t>
             </a:r>
-            <a:endParaRPr lang="en-US" sz="1000" dirty="0"/>
+            <a:endParaRPr lang="en-US" sz="1800" dirty="0"/>
           </a:p>
         </p:txBody>
       </p:sp>
@@ -7777,8 +7779,8 @@
         </p:nvSpPr>
         <p:spPr>
           <a:xfrm>
-            <a:off x="822960" y="502920"/>
-            <a:ext cx="10515600" cy="365760"/>
+            <a:off x="822960" y="457200"/>
+            <a:ext cx="10515600" cy="411480"/>
           </a:xfrm>
           <a:prstGeom prst="rect">
             <a:avLst/>
@@ -7794,7 +7796,7 @@
               <a:buNone/>
             </a:pPr>
             <a:r>
-              <a:rPr lang="en-US" sz="1200" spc="300" kern="0" dirty="0">
+              <a:rPr lang="en-US" sz="1800" spc="300" kern="0" dirty="0">
                 <a:solidFill>
                   <a:srgbClr val="06B6D4"/>
                 </a:solidFill>
@@ -7804,7 +7806,7 @@
               </a:rPr>
               <a:t>THE PROOF</a:t>
             </a:r>
-            <a:endParaRPr lang="en-US" sz="1200" dirty="0"/>
+            <a:endParaRPr lang="en-US" sz="1800" dirty="0"/>
           </a:p>
         </p:txBody>
       </p:sp>
@@ -7855,8 +7857,8 @@
         </p:nvSpPr>
         <p:spPr>
           <a:xfrm>
-            <a:off x="822960" y="2194560"/>
-            <a:ext cx="2423160" cy="2697480"/>
+            <a:off x="822960" y="1965960"/>
+            <a:ext cx="2423160" cy="3154680"/>
           </a:xfrm>
           <a:prstGeom prst="roundRect">
             <a:avLst>
@@ -7882,7 +7884,7 @@
         </p:nvSpPr>
         <p:spPr>
           <a:xfrm>
-            <a:off x="960120" y="2514600"/>
+            <a:off x="960120" y="2194560"/>
             <a:ext cx="2148840" cy="914400"/>
           </a:xfrm>
           <a:prstGeom prst="rect">
@@ -7921,8 +7923,8 @@
         </p:nvSpPr>
         <p:spPr>
           <a:xfrm>
-            <a:off x="960120" y="3520440"/>
-            <a:ext cx="2148840" cy="502920"/>
+            <a:off x="960120" y="3200400"/>
+            <a:ext cx="2148840" cy="868680"/>
           </a:xfrm>
           <a:prstGeom prst="rect">
             <a:avLst/>
@@ -7938,7 +7940,7 @@
               <a:buNone/>
             </a:pPr>
             <a:r>
-              <a:rPr lang="en-US" sz="1450" b="1" dirty="0">
+              <a:rPr lang="en-US" sz="1800" b="1" dirty="0">
                 <a:solidFill>
                   <a:srgbClr val="FFFFFF"/>
                 </a:solidFill>
@@ -7948,7 +7950,7 @@
               </a:rPr>
               <a:t>Production apps</a:t>
             </a:r>
-            <a:endParaRPr lang="en-US" sz="1450" dirty="0"/>
+            <a:endParaRPr lang="en-US" sz="1800" dirty="0"/>
           </a:p>
         </p:txBody>
       </p:sp>
@@ -7960,8 +7962,8 @@
         </p:nvSpPr>
         <p:spPr>
           <a:xfrm>
-            <a:off x="1005840" y="4069080"/>
-            <a:ext cx="2057400" cy="685800"/>
+            <a:off x="1005840" y="4114800"/>
+            <a:ext cx="2057400" cy="914400"/>
           </a:xfrm>
           <a:prstGeom prst="rect">
             <a:avLst/>
@@ -7977,7 +7979,7 @@
               <a:buNone/>
             </a:pPr>
             <a:r>
-              <a:rPr lang="en-US" sz="1050" dirty="0">
+              <a:rPr lang="en-US" sz="1800" dirty="0">
                 <a:solidFill>
                   <a:srgbClr val="94A3B8"/>
                 </a:solidFill>
@@ -7987,7 +7989,7 @@
               </a:rPr>
               <a:t>Shipped, updated, and supported through one gated pipeline</a:t>
             </a:r>
-            <a:endParaRPr lang="en-US" sz="1050" dirty="0"/>
+            <a:endParaRPr lang="en-US" sz="1800" dirty="0"/>
           </a:p>
         </p:txBody>
       </p:sp>
@@ -7999,8 +8001,8 @@
         </p:nvSpPr>
         <p:spPr>
           <a:xfrm>
-            <a:off x="3520440" y="2194560"/>
-            <a:ext cx="2423160" cy="2697480"/>
+            <a:off x="3520440" y="1965960"/>
+            <a:ext cx="2423160" cy="3154680"/>
           </a:xfrm>
           <a:prstGeom prst="roundRect">
             <a:avLst>
@@ -8026,7 +8028,7 @@
         </p:nvSpPr>
         <p:spPr>
           <a:xfrm>
-            <a:off x="3657600" y="2514600"/>
+            <a:off x="3657600" y="2194560"/>
             <a:ext cx="2148840" cy="914400"/>
           </a:xfrm>
           <a:prstGeom prst="rect">
@@ -8065,8 +8067,8 @@
         </p:nvSpPr>
         <p:spPr>
           <a:xfrm>
-            <a:off x="3657600" y="3520440"/>
-            <a:ext cx="2148840" cy="502920"/>
+            <a:off x="3657600" y="3200400"/>
+            <a:ext cx="2148840" cy="868680"/>
           </a:xfrm>
           <a:prstGeom prst="rect">
             <a:avLst/>
@@ -8082,7 +8084,7 @@
               <a:buNone/>
             </a:pPr>
             <a:r>
-              <a:rPr lang="en-US" sz="1450" b="1" dirty="0">
+              <a:rPr lang="en-US" sz="1800" b="1" dirty="0">
                 <a:solidFill>
                   <a:srgbClr val="FFFFFF"/>
                 </a:solidFill>
@@ -8092,7 +8094,7 @@
               </a:rPr>
               <a:t>Specialist agents</a:t>
             </a:r>
-            <a:endParaRPr lang="en-US" sz="1450" dirty="0"/>
+            <a:endParaRPr lang="en-US" sz="1800" dirty="0"/>
           </a:p>
         </p:txBody>
       </p:sp>
@@ -8104,8 +8106,8 @@
         </p:nvSpPr>
         <p:spPr>
           <a:xfrm>
-            <a:off x="3703320" y="4069080"/>
-            <a:ext cx="2057400" cy="685800"/>
+            <a:off x="3703320" y="4114800"/>
+            <a:ext cx="2057400" cy="914400"/>
           </a:xfrm>
           <a:prstGeom prst="rect">
             <a:avLst/>
@@ -8121,7 +8123,7 @@
               <a:buNone/>
             </a:pPr>
             <a:r>
-              <a:rPr lang="en-US" sz="1050" dirty="0">
+              <a:rPr lang="en-US" sz="1800" dirty="0">
                 <a:solidFill>
                   <a:srgbClr val="94A3B8"/>
                 </a:solidFill>
@@ -8131,7 +8133,7 @@
               </a:rPr>
               <a:t>A workforce that builds, tests, documents, and watches</a:t>
             </a:r>
-            <a:endParaRPr lang="en-US" sz="1050" dirty="0"/>
+            <a:endParaRPr lang="en-US" sz="1800" dirty="0"/>
           </a:p>
         </p:txBody>
       </p:sp>
@@ -8143,8 +8145,8 @@
         </p:nvSpPr>
         <p:spPr>
           <a:xfrm>
-            <a:off x="6217920" y="2194560"/>
-            <a:ext cx="2423160" cy="2697480"/>
+            <a:off x="6217920" y="1965960"/>
+            <a:ext cx="2423160" cy="3154680"/>
           </a:xfrm>
           <a:prstGeom prst="roundRect">
             <a:avLst>
@@ -8170,7 +8172,7 @@
         </p:nvSpPr>
         <p:spPr>
           <a:xfrm>
-            <a:off x="6355080" y="2514600"/>
+            <a:off x="6355080" y="2194560"/>
             <a:ext cx="2148840" cy="914400"/>
           </a:xfrm>
           <a:prstGeom prst="rect">
@@ -8209,8 +8211,8 @@
         </p:nvSpPr>
         <p:spPr>
           <a:xfrm>
-            <a:off x="6355080" y="3520440"/>
-            <a:ext cx="2148840" cy="502920"/>
+            <a:off x="6355080" y="3200400"/>
+            <a:ext cx="2148840" cy="868680"/>
           </a:xfrm>
           <a:prstGeom prst="rect">
             <a:avLst/>
@@ -8226,7 +8228,7 @@
               <a:buNone/>
             </a:pPr>
             <a:r>
-              <a:rPr lang="en-US" sz="1450" b="1" dirty="0">
+              <a:rPr lang="en-US" sz="1800" b="1" dirty="0">
                 <a:solidFill>
                   <a:srgbClr val="FFFFFF"/>
                 </a:solidFill>
@@ -8236,7 +8238,7 @@
               </a:rPr>
               <a:t>Lines of code</a:t>
             </a:r>
-            <a:endParaRPr lang="en-US" sz="1450" dirty="0"/>
+            <a:endParaRPr lang="en-US" sz="1800" dirty="0"/>
           </a:p>
         </p:txBody>
       </p:sp>
@@ -8248,8 +8250,8 @@
         </p:nvSpPr>
         <p:spPr>
           <a:xfrm>
-            <a:off x="6400800" y="4069080"/>
-            <a:ext cx="2057400" cy="685800"/>
+            <a:off x="6400800" y="4114800"/>
+            <a:ext cx="2057400" cy="914400"/>
           </a:xfrm>
           <a:prstGeom prst="rect">
             <a:avLst/>
@@ -8265,7 +8267,7 @@
               <a:buNone/>
             </a:pPr>
             <a:r>
-              <a:rPr lang="en-US" sz="1050" dirty="0">
+              <a:rPr lang="en-US" sz="1800" dirty="0">
                 <a:solidFill>
                   <a:srgbClr val="94A3B8"/>
                 </a:solidFill>
@@ -8275,7 +8277,7 @@
               </a:rPr>
               <a:t>Two open-source frameworks any client can audit</a:t>
             </a:r>
-            <a:endParaRPr lang="en-US" sz="1050" dirty="0"/>
+            <a:endParaRPr lang="en-US" sz="1800" dirty="0"/>
           </a:p>
         </p:txBody>
       </p:sp>
@@ -8287,8 +8289,8 @@
         </p:nvSpPr>
         <p:spPr>
           <a:xfrm>
-            <a:off x="8915400" y="2194560"/>
-            <a:ext cx="2423160" cy="2697480"/>
+            <a:off x="8915400" y="1965960"/>
+            <a:ext cx="2423160" cy="3154680"/>
           </a:xfrm>
           <a:prstGeom prst="roundRect">
             <a:avLst>
@@ -8314,7 +8316,7 @@
         </p:nvSpPr>
         <p:spPr>
           <a:xfrm>
-            <a:off x="9052560" y="2514600"/>
+            <a:off x="9052560" y="2194560"/>
             <a:ext cx="2148840" cy="914400"/>
           </a:xfrm>
           <a:prstGeom prst="rect">
@@ -8353,8 +8355,8 @@
         </p:nvSpPr>
         <p:spPr>
           <a:xfrm>
-            <a:off x="9052560" y="3520440"/>
-            <a:ext cx="2148840" cy="502920"/>
+            <a:off x="9052560" y="3200400"/>
+            <a:ext cx="2148840" cy="868680"/>
           </a:xfrm>
           <a:prstGeom prst="rect">
             <a:avLst/>
@@ -8370,7 +8372,7 @@
               <a:buNone/>
             </a:pPr>
             <a:r>
-              <a:rPr lang="en-US" sz="1450" b="1" dirty="0">
+              <a:rPr lang="en-US" sz="1800" b="1" dirty="0">
                 <a:solidFill>
                   <a:srgbClr val="FFFFFF"/>
                 </a:solidFill>
@@ -8380,7 +8382,7 @@
               </a:rPr>
               <a:t>Production checks</a:t>
             </a:r>
-            <a:endParaRPr lang="en-US" sz="1450" dirty="0"/>
+            <a:endParaRPr lang="en-US" sz="1800" dirty="0"/>
           </a:p>
         </p:txBody>
       </p:sp>
@@ -8392,8 +8394,8 @@
         </p:nvSpPr>
         <p:spPr>
           <a:xfrm>
-            <a:off x="9098280" y="4069080"/>
-            <a:ext cx="2057400" cy="685800"/>
+            <a:off x="9098280" y="4114800"/>
+            <a:ext cx="2057400" cy="914400"/>
           </a:xfrm>
           <a:prstGeom prst="rect">
             <a:avLst/>
@@ -8409,7 +8411,7 @@
               <a:buNone/>
             </a:pPr>
             <a:r>
-              <a:rPr lang="en-US" sz="1050" dirty="0">
+              <a:rPr lang="en-US" sz="1800" dirty="0">
                 <a:solidFill>
                   <a:srgbClr val="94A3B8"/>
                 </a:solidFill>
@@ -8419,7 +8421,7 @@
               </a:rPr>
               <a:t>Passing in the live platform, with a 30-query router validation set</a:t>
             </a:r>
-            <a:endParaRPr lang="en-US" sz="1050" dirty="0"/>
+            <a:endParaRPr lang="en-US" sz="1800" dirty="0"/>
           </a:p>
         </p:txBody>
       </p:sp>
@@ -8431,7 +8433,7 @@
         </p:nvSpPr>
         <p:spPr>
           <a:xfrm>
-            <a:off x="822960" y="5413248"/>
+            <a:off x="822960" y="5321808"/>
             <a:ext cx="10515600" cy="0"/>
           </a:xfrm>
           <a:prstGeom prst="line">
@@ -8454,8 +8456,8 @@
         </p:nvSpPr>
         <p:spPr>
           <a:xfrm>
-            <a:off x="822960" y="5504688"/>
-            <a:ext cx="10424160" cy="411480"/>
+            <a:off x="822960" y="5394960"/>
+            <a:ext cx="10424160" cy="502920"/>
           </a:xfrm>
           <a:prstGeom prst="rect">
             <a:avLst/>
@@ -8471,7 +8473,7 @@
               <a:buNone/>
             </a:pPr>
             <a:r>
-              <a:rPr lang="en-US" sz="1300" i="1" dirty="0">
+              <a:rPr lang="en-US" sz="1800" i="1" dirty="0">
                 <a:solidFill>
                   <a:srgbClr val="06B6D4"/>
                 </a:solidFill>
@@ -8481,7 +8483,7 @@
               </a:rPr>
               <a:t>→  All four numbers come from the public portfolio and published build logs.</a:t>
             </a:r>
-            <a:endParaRPr lang="en-US" sz="1300" dirty="0"/>
+            <a:endParaRPr lang="en-US" sz="1800" dirty="0"/>
           </a:p>
         </p:txBody>
       </p:sp>
@@ -8493,8 +8495,8 @@
         </p:nvSpPr>
         <p:spPr>
           <a:xfrm>
-            <a:off x="10698480" y="6382512"/>
-            <a:ext cx="1188720" cy="365760"/>
+            <a:off x="10698480" y="6309360"/>
+            <a:ext cx="1188720" cy="411480"/>
           </a:xfrm>
           <a:prstGeom prst="rect">
             <a:avLst/>
@@ -8510,9 +8512,9 @@
               <a:buNone/>
             </a:pPr>
             <a:r>
-              <a:rPr lang="en-US" sz="1000" dirty="0">
-                <a:solidFill>
-                  <a:srgbClr val="64748B"/>
+              <a:rPr lang="en-US" sz="1800" dirty="0">
+                <a:solidFill>
+                  <a:srgbClr val="8FA3BF"/>
                 </a:solidFill>
                 <a:latin typeface="Consolas" pitchFamily="34" charset="0"/>
                 <a:ea typeface="Consolas" pitchFamily="34" charset="-122"/>
@@ -8520,7 +8522,7 @@
               </a:rPr>
               <a:t>5 / 14</a:t>
             </a:r>
-            <a:endParaRPr lang="en-US" sz="1000" dirty="0"/>
+            <a:endParaRPr lang="en-US" sz="1800" dirty="0"/>
           </a:p>
         </p:txBody>
       </p:sp>
@@ -8604,8 +8606,8 @@
         </p:nvSpPr>
         <p:spPr>
           <a:xfrm>
-            <a:off x="822960" y="502920"/>
-            <a:ext cx="10515600" cy="365760"/>
+            <a:off x="822960" y="457200"/>
+            <a:ext cx="10515600" cy="411480"/>
           </a:xfrm>
           <a:prstGeom prst="rect">
             <a:avLst/>
@@ -8621,7 +8623,7 @@
               <a:buNone/>
             </a:pPr>
             <a:r>
-              <a:rPr lang="en-US" sz="1200" spc="300" kern="0" dirty="0">
+              <a:rPr lang="en-US" sz="1800" spc="300" kern="0" dirty="0">
                 <a:solidFill>
                   <a:srgbClr val="06B6D4"/>
                 </a:solidFill>
@@ -8631,7 +8633,7 @@
               </a:rPr>
               <a:t>THE CURVE</a:t>
             </a:r>
-            <a:endParaRPr lang="en-US" sz="1200" dirty="0"/>
+            <a:endParaRPr lang="en-US" sz="1800" dirty="0"/>
           </a:p>
         </p:txBody>
       </p:sp>
@@ -8682,7 +8684,7 @@
         </p:nvGraphicFramePr>
         <p:xfrm>
           <a:off x="822960" y="1874520"/>
-          <a:ext cx="10515600" cy="3337560"/>
+          <a:ext cx="10515600" cy="3246120"/>
         </p:xfrm>
         <a:graphic xmlns:a="http://schemas.openxmlformats.org/drawingml/2006/main">
           <a:graphicData uri="http://schemas.openxmlformats.org/drawingml/2006/chart">
@@ -8698,7 +8700,7 @@
         </p:nvSpPr>
         <p:spPr>
           <a:xfrm>
-            <a:off x="822960" y="5413248"/>
+            <a:off x="822960" y="5321808"/>
             <a:ext cx="10515600" cy="0"/>
           </a:xfrm>
           <a:prstGeom prst="line">
@@ -8721,8 +8723,8 @@
         </p:nvSpPr>
         <p:spPr>
           <a:xfrm>
-            <a:off x="822960" y="5504688"/>
-            <a:ext cx="10424160" cy="411480"/>
+            <a:off x="822960" y="5394960"/>
+            <a:ext cx="10424160" cy="502920"/>
           </a:xfrm>
           <a:prstGeom prst="rect">
             <a:avLst/>
@@ -8738,7 +8740,7 @@
               <a:buNone/>
             </a:pPr>
             <a:r>
-              <a:rPr lang="en-US" sz="1300" i="1" dirty="0">
+              <a:rPr lang="en-US" sz="1800" i="1" dirty="0">
                 <a:solidFill>
                   <a:srgbClr val="06B6D4"/>
                 </a:solidFill>
@@ -8748,7 +8750,7 @@
               </a:rPr>
               <a:t>→  On a resume the founder leap looks sudden; on the skill curve it is the final step of a two-year climb.</a:t>
             </a:r>
-            <a:endParaRPr lang="en-US" sz="1300" dirty="0"/>
+            <a:endParaRPr lang="en-US" sz="1800" dirty="0"/>
           </a:p>
         </p:txBody>
       </p:sp>
@@ -8783,8 +8785,8 @@
         </p:nvSpPr>
         <p:spPr>
           <a:xfrm>
-            <a:off x="822960" y="6053328"/>
-            <a:ext cx="9692640" cy="457200"/>
+            <a:off x="822960" y="6035040"/>
+            <a:ext cx="10424160" cy="566928"/>
           </a:xfrm>
           <a:prstGeom prst="rect">
             <a:avLst/>
@@ -8800,9 +8802,9 @@
               <a:buNone/>
             </a:pPr>
             <a:r>
-              <a:rPr lang="en-US" sz="1150" dirty="0">
-                <a:solidFill>
-                  <a:srgbClr val="64748B"/>
+              <a:rPr lang="en-US" sz="1800" dirty="0">
+                <a:solidFill>
+                  <a:srgbClr val="8FA3BF"/>
                 </a:solidFill>
                 <a:latin typeface="Segoe UI" pitchFamily="34" charset="0"/>
                 <a:ea typeface="Segoe UI" pitchFamily="34" charset="-122"/>
@@ -8810,7 +8812,7 @@
               </a:rPr>
               <a:t>Indices are illustrative; the chapters, roles, and dates are real.</a:t>
             </a:r>
-            <a:endParaRPr lang="en-US" sz="1150" dirty="0"/>
+            <a:endParaRPr lang="en-US" sz="1800" dirty="0"/>
           </a:p>
         </p:txBody>
       </p:sp>
@@ -8822,8 +8824,8 @@
         </p:nvSpPr>
         <p:spPr>
           <a:xfrm>
-            <a:off x="10698480" y="6382512"/>
-            <a:ext cx="1188720" cy="365760"/>
+            <a:off x="10698480" y="6309360"/>
+            <a:ext cx="1188720" cy="411480"/>
           </a:xfrm>
           <a:prstGeom prst="rect">
             <a:avLst/>
@@ -8839,9 +8841,9 @@
               <a:buNone/>
             </a:pPr>
             <a:r>
-              <a:rPr lang="en-US" sz="1000" dirty="0">
-                <a:solidFill>
-                  <a:srgbClr val="64748B"/>
+              <a:rPr lang="en-US" sz="1800" dirty="0">
+                <a:solidFill>
+                  <a:srgbClr val="8FA3BF"/>
                 </a:solidFill>
                 <a:latin typeface="Consolas" pitchFamily="34" charset="0"/>
                 <a:ea typeface="Consolas" pitchFamily="34" charset="-122"/>
@@ -8849,7 +8851,7 @@
               </a:rPr>
               <a:t>6 / 14</a:t>
             </a:r>
-            <a:endParaRPr lang="en-US" sz="1000" dirty="0"/>
+            <a:endParaRPr lang="en-US" sz="1800" dirty="0"/>
           </a:p>
         </p:txBody>
       </p:sp>
@@ -8933,8 +8935,8 @@
         </p:nvSpPr>
         <p:spPr>
           <a:xfrm>
-            <a:off x="822960" y="502920"/>
-            <a:ext cx="10515600" cy="365760"/>
+            <a:off x="822960" y="457200"/>
+            <a:ext cx="10515600" cy="411480"/>
           </a:xfrm>
           <a:prstGeom prst="rect">
             <a:avLst/>
@@ -8950,7 +8952,7 @@
               <a:buNone/>
             </a:pPr>
             <a:r>
-              <a:rPr lang="en-US" sz="1200" spc="300" kern="0" dirty="0">
+              <a:rPr lang="en-US" sz="1800" spc="300" kern="0" dirty="0">
                 <a:solidFill>
                   <a:srgbClr val="06B6D4"/>
                 </a:solidFill>
@@ -8960,7 +8962,7 @@
               </a:rPr>
               <a:t>AT A GLANCE</a:t>
             </a:r>
-            <a:endParaRPr lang="en-US" sz="1200" dirty="0"/>
+            <a:endParaRPr lang="en-US" sz="1800" dirty="0"/>
           </a:p>
         </p:txBody>
       </p:sp>
@@ -9018,7 +9020,7 @@
           </p:nvPr>
         </p:nvGraphicFramePr>
         <p:xfrm>
-          <a:off x="822960" y="2011680"/>
+          <a:off x="822960" y="1828800"/>
           <a:ext cx="10515600" cy="914400"/>
         </p:xfrm>
         <a:graphic>
@@ -9031,7 +9033,7 @@
                 <a:gridCol w="2628900"/>
                 <a:gridCol w="2628900"/>
               </a:tblGrid>
-              <a:tr h="402336">
+              <a:tr h="457200">
                 <a:tc>
                   <a:txBody>
                     <a:bodyPr/>
@@ -9041,7 +9043,7 @@
                         <a:buNone/>
                       </a:pPr>
                       <a:r>
-                        <a:rPr lang="en-US" sz="1150" b="1" dirty="0">
+                        <a:rPr lang="en-US" sz="1800" b="1" dirty="0">
                           <a:solidFill>
                             <a:srgbClr val="FFFFFF"/>
                           </a:solidFill>
@@ -9051,14 +9053,14 @@
                         </a:rPr>
                         <a:t>Period</a:t>
                       </a:r>
-                      <a:endParaRPr lang="en-US" sz="1150" dirty="0">
+                      <a:endParaRPr lang="en-US" sz="1800" dirty="0">
                         <a:latin typeface="Segoe UI" charset="0"/>
                         <a:ea typeface="Segoe UI" charset="0"/>
                         <a:cs typeface="Segoe UI" charset="0"/>
                       </a:endParaRPr>
                     </a:p>
                   </a:txBody>
-                  <a:tcPr marL="64008" marR="64008" marT="64008" marB="64008" anchor="ctr">
+                  <a:tcPr marL="36576" marR="36576" marT="36576" marB="36576" anchor="ctr">
                     <a:lnL w="6350" cap="flat" cmpd="sng" algn="ctr">
                       <a:solidFill>
                         <a:srgbClr val="24365A"/>
@@ -9109,7 +9111,7 @@
                         <a:buNone/>
                       </a:pPr>
                       <a:r>
-                        <a:rPr lang="en-US" sz="1150" b="1" dirty="0">
+                        <a:rPr lang="en-US" sz="1800" b="1" dirty="0">
                           <a:solidFill>
                             <a:srgbClr val="FFFFFF"/>
                           </a:solidFill>
@@ -9119,14 +9121,14 @@
                         </a:rPr>
                         <a:t>Role</a:t>
                       </a:r>
-                      <a:endParaRPr lang="en-US" sz="1150" dirty="0">
+                      <a:endParaRPr lang="en-US" sz="1800" dirty="0">
                         <a:latin typeface="Segoe UI" charset="0"/>
                         <a:ea typeface="Segoe UI" charset="0"/>
                         <a:cs typeface="Segoe UI" charset="0"/>
                       </a:endParaRPr>
                     </a:p>
                   </a:txBody>
-                  <a:tcPr marL="64008" marR="64008" marT="64008" marB="64008" anchor="ctr">
+                  <a:tcPr marL="36576" marR="36576" marT="36576" marB="36576" anchor="ctr">
                     <a:lnL w="6350" cap="flat" cmpd="sng" algn="ctr">
                       <a:solidFill>
                         <a:srgbClr val="24365A"/>
@@ -9177,7 +9179,7 @@
                         <a:buNone/>
                       </a:pPr>
                       <a:r>
-                        <a:rPr lang="en-US" sz="1150" b="1" dirty="0">
+                        <a:rPr lang="en-US" sz="1800" b="1" dirty="0">
                           <a:solidFill>
                             <a:srgbClr val="FFFFFF"/>
                           </a:solidFill>
@@ -9187,14 +9189,14 @@
                         </a:rPr>
                         <a:t>Scope</a:t>
                       </a:r>
-                      <a:endParaRPr lang="en-US" sz="1150" dirty="0">
+                      <a:endParaRPr lang="en-US" sz="1800" dirty="0">
                         <a:latin typeface="Segoe UI" charset="0"/>
                         <a:ea typeface="Segoe UI" charset="0"/>
                         <a:cs typeface="Segoe UI" charset="0"/>
                       </a:endParaRPr>
                     </a:p>
                   </a:txBody>
-                  <a:tcPr marL="64008" marR="64008" marT="64008" marB="64008" anchor="ctr">
+                  <a:tcPr marL="36576" marR="36576" marT="36576" marB="36576" anchor="ctr">
                     <a:lnL w="6350" cap="flat" cmpd="sng" algn="ctr">
                       <a:solidFill>
                         <a:srgbClr val="24365A"/>
@@ -9245,7 +9247,7 @@
                         <a:buNone/>
                       </a:pPr>
                       <a:r>
-                        <a:rPr lang="en-US" sz="1150" b="1" dirty="0">
+                        <a:rPr lang="en-US" sz="1800" b="1" dirty="0">
                           <a:solidFill>
                             <a:srgbClr val="FFFFFF"/>
                           </a:solidFill>
@@ -9255,14 +9257,14 @@
                         </a:rPr>
                         <a:t>Core stack</a:t>
                       </a:r>
-                      <a:endParaRPr lang="en-US" sz="1150" dirty="0">
+                      <a:endParaRPr lang="en-US" sz="1800" dirty="0">
                         <a:latin typeface="Segoe UI" charset="0"/>
                         <a:ea typeface="Segoe UI" charset="0"/>
                         <a:cs typeface="Segoe UI" charset="0"/>
                       </a:endParaRPr>
                     </a:p>
                   </a:txBody>
-                  <a:tcPr marL="64008" marR="64008" marT="64008" marB="64008" anchor="ctr">
+                  <a:tcPr marL="36576" marR="36576" marT="36576" marB="36576" anchor="ctr">
                     <a:lnL w="6350" cap="flat" cmpd="sng" algn="ctr">
                       <a:solidFill>
                         <a:srgbClr val="24365A"/>
@@ -9305,7 +9307,7 @@
                   </a:tcPr>
                 </a:tc>
               </a:tr>
-              <a:tr h="402336">
+              <a:tr h="457200">
                 <a:tc>
                   <a:txBody>
                     <a:bodyPr/>
@@ -9315,7 +9317,7 @@
                         <a:buNone/>
                       </a:pPr>
                       <a:r>
-                        <a:rPr lang="en-US" sz="1080" dirty="0">
+                        <a:rPr lang="en-US" sz="1800" dirty="0">
                           <a:solidFill>
                             <a:srgbClr val="CBD5E1"/>
                           </a:solidFill>
@@ -9325,14 +9327,14 @@
                         </a:rPr>
                         <a:t>Aug-Sep 2022</a:t>
                       </a:r>
-                      <a:endParaRPr lang="en-US" sz="1080" dirty="0">
+                      <a:endParaRPr lang="en-US" sz="1800" dirty="0">
                         <a:latin typeface="Segoe UI" charset="0"/>
                         <a:ea typeface="Segoe UI" charset="0"/>
                         <a:cs typeface="Segoe UI" charset="0"/>
                       </a:endParaRPr>
                     </a:p>
                   </a:txBody>
-                  <a:tcPr marL="64008" marR="64008" marT="64008" marB="64008" anchor="ctr">
+                  <a:tcPr marL="36576" marR="36576" marT="36576" marB="36576" anchor="ctr">
                     <a:lnL w="6350" cap="flat" cmpd="sng" algn="ctr">
                       <a:solidFill>
                         <a:srgbClr val="24365A"/>
@@ -9383,7 +9385,7 @@
                         <a:buNone/>
                       </a:pPr>
                       <a:r>
-                        <a:rPr lang="en-US" sz="1080" dirty="0">
+                        <a:rPr lang="en-US" sz="1800" dirty="0">
                           <a:solidFill>
                             <a:srgbClr val="CBD5E1"/>
                           </a:solidFill>
@@ -9393,14 +9395,14 @@
                         </a:rPr>
                         <a:t>Data Analytics, RevoU × Tokopedia</a:t>
                       </a:r>
-                      <a:endParaRPr lang="en-US" sz="1080" dirty="0">
+                      <a:endParaRPr lang="en-US" sz="1800" dirty="0">
                         <a:latin typeface="Segoe UI" charset="0"/>
                         <a:ea typeface="Segoe UI" charset="0"/>
                         <a:cs typeface="Segoe UI" charset="0"/>
                       </a:endParaRPr>
                     </a:p>
                   </a:txBody>
-                  <a:tcPr marL="64008" marR="64008" marT="64008" marB="64008" anchor="ctr">
+                  <a:tcPr marL="36576" marR="36576" marT="36576" marB="36576" anchor="ctr">
                     <a:lnL w="6350" cap="flat" cmpd="sng" algn="ctr">
                       <a:solidFill>
                         <a:srgbClr val="24365A"/>
@@ -9451,7 +9453,7 @@
                         <a:buNone/>
                       </a:pPr>
                       <a:r>
-                        <a:rPr lang="en-US" sz="1080" dirty="0">
+                        <a:rPr lang="en-US" sz="1800" dirty="0">
                           <a:solidFill>
                             <a:srgbClr val="CBD5E1"/>
                           </a:solidFill>
@@ -9461,14 +9463,14 @@
                         </a:rPr>
                         <a:t>Segmentation, churn, and feature adoption on real e-commerce data</a:t>
                       </a:r>
-                      <a:endParaRPr lang="en-US" sz="1080" dirty="0">
+                      <a:endParaRPr lang="en-US" sz="1800" dirty="0">
                         <a:latin typeface="Segoe UI" charset="0"/>
                         <a:ea typeface="Segoe UI" charset="0"/>
                         <a:cs typeface="Segoe UI" charset="0"/>
                       </a:endParaRPr>
                     </a:p>
                   </a:txBody>
-                  <a:tcPr marL="64008" marR="64008" marT="64008" marB="64008" anchor="ctr">
+                  <a:tcPr marL="36576" marR="36576" marT="36576" marB="36576" anchor="ctr">
                     <a:lnL w="6350" cap="flat" cmpd="sng" algn="ctr">
                       <a:solidFill>
                         <a:srgbClr val="24365A"/>
@@ -9519,7 +9521,7 @@
                         <a:buNone/>
                       </a:pPr>
                       <a:r>
-                        <a:rPr lang="en-US" sz="1080" dirty="0">
+                        <a:rPr lang="en-US" sz="1800" dirty="0">
                           <a:solidFill>
                             <a:srgbClr val="CBD5E1"/>
                           </a:solidFill>
@@ -9529,14 +9531,14 @@
                         </a:rPr>
                         <a:t>Python, SQL, Tableau</a:t>
                       </a:r>
-                      <a:endParaRPr lang="en-US" sz="1080" dirty="0">
+                      <a:endParaRPr lang="en-US" sz="1800" dirty="0">
                         <a:latin typeface="Segoe UI" charset="0"/>
                         <a:ea typeface="Segoe UI" charset="0"/>
                         <a:cs typeface="Segoe UI" charset="0"/>
                       </a:endParaRPr>
                     </a:p>
                   </a:txBody>
-                  <a:tcPr marL="64008" marR="64008" marT="64008" marB="64008" anchor="ctr">
+                  <a:tcPr marL="36576" marR="36576" marT="36576" marB="36576" anchor="ctr">
                     <a:lnL w="6350" cap="flat" cmpd="sng" algn="ctr">
                       <a:solidFill>
                         <a:srgbClr val="24365A"/>
@@ -9579,7 +9581,7 @@
                   </a:tcPr>
                 </a:tc>
               </a:tr>
-              <a:tr h="402336">
+              <a:tr h="457200">
                 <a:tc>
                   <a:txBody>
                     <a:bodyPr/>
@@ -9589,7 +9591,7 @@
                         <a:buNone/>
                       </a:pPr>
                       <a:r>
-                        <a:rPr lang="en-US" sz="1080" dirty="0">
+                        <a:rPr lang="en-US" sz="1800" dirty="0">
                           <a:solidFill>
                             <a:srgbClr val="CBD5E1"/>
                           </a:solidFill>
@@ -9599,14 +9601,14 @@
                         </a:rPr>
                         <a:t>Feb-Sep 2023</a:t>
                       </a:r>
-                      <a:endParaRPr lang="en-US" sz="1080" dirty="0">
+                      <a:endParaRPr lang="en-US" sz="1800" dirty="0">
                         <a:latin typeface="Segoe UI" charset="0"/>
                         <a:ea typeface="Segoe UI" charset="0"/>
                         <a:cs typeface="Segoe UI" charset="0"/>
                       </a:endParaRPr>
                     </a:p>
                   </a:txBody>
-                  <a:tcPr marL="64008" marR="64008" marT="64008" marB="64008" anchor="ctr">
+                  <a:tcPr marL="36576" marR="36576" marT="36576" marB="36576" anchor="ctr">
                     <a:lnL w="6350" cap="flat" cmpd="sng" algn="ctr">
                       <a:solidFill>
                         <a:srgbClr val="24365A"/>
@@ -9657,7 +9659,7 @@
                         <a:buNone/>
                       </a:pPr>
                       <a:r>
-                        <a:rPr lang="en-US" sz="1080" dirty="0">
+                        <a:rPr lang="en-US" sz="1800" dirty="0">
                           <a:solidFill>
                             <a:srgbClr val="CBD5E1"/>
                           </a:solidFill>
@@ -9667,14 +9669,14 @@
                         </a:rPr>
                         <a:t>IT Business Analyst, BRI AML</a:t>
                       </a:r>
-                      <a:endParaRPr lang="en-US" sz="1080" dirty="0">
+                      <a:endParaRPr lang="en-US" sz="1800" dirty="0">
                         <a:latin typeface="Segoe UI" charset="0"/>
                         <a:ea typeface="Segoe UI" charset="0"/>
                         <a:cs typeface="Segoe UI" charset="0"/>
                       </a:endParaRPr>
                     </a:p>
                   </a:txBody>
-                  <a:tcPr marL="64008" marR="64008" marT="64008" marB="64008" anchor="ctr">
+                  <a:tcPr marL="36576" marR="36576" marT="36576" marB="36576" anchor="ctr">
                     <a:lnL w="6350" cap="flat" cmpd="sng" algn="ctr">
                       <a:solidFill>
                         <a:srgbClr val="24365A"/>
@@ -9725,7 +9727,7 @@
                         <a:buNone/>
                       </a:pPr>
                       <a:r>
-                        <a:rPr lang="en-US" sz="1080" dirty="0">
+                        <a:rPr lang="en-US" sz="1800" dirty="0">
                           <a:solidFill>
                             <a:srgbClr val="CBD5E1"/>
                           </a:solidFill>
@@ -9735,14 +9737,14 @@
                         </a:rPr>
                         <a:t>Graph-based AML analysis, requirements, auditor-facing documentation</a:t>
                       </a:r>
-                      <a:endParaRPr lang="en-US" sz="1080" dirty="0">
+                      <a:endParaRPr lang="en-US" sz="1800" dirty="0">
                         <a:latin typeface="Segoe UI" charset="0"/>
                         <a:ea typeface="Segoe UI" charset="0"/>
                         <a:cs typeface="Segoe UI" charset="0"/>
                       </a:endParaRPr>
                     </a:p>
                   </a:txBody>
-                  <a:tcPr marL="64008" marR="64008" marT="64008" marB="64008" anchor="ctr">
+                  <a:tcPr marL="36576" marR="36576" marT="36576" marB="36576" anchor="ctr">
                     <a:lnL w="6350" cap="flat" cmpd="sng" algn="ctr">
                       <a:solidFill>
                         <a:srgbClr val="24365A"/>
@@ -9793,7 +9795,7 @@
                         <a:buNone/>
                       </a:pPr>
                       <a:r>
-                        <a:rPr lang="en-US" sz="1080" dirty="0">
+                        <a:rPr lang="en-US" sz="1800" dirty="0">
                           <a:solidFill>
                             <a:srgbClr val="CBD5E1"/>
                           </a:solidFill>
@@ -9803,14 +9805,14 @@
                         </a:rPr>
                         <a:t>Graph Database, SQL</a:t>
                       </a:r>
-                      <a:endParaRPr lang="en-US" sz="1080" dirty="0">
+                      <a:endParaRPr lang="en-US" sz="1800" dirty="0">
                         <a:latin typeface="Segoe UI" charset="0"/>
                         <a:ea typeface="Segoe UI" charset="0"/>
                         <a:cs typeface="Segoe UI" charset="0"/>
                       </a:endParaRPr>
                     </a:p>
                   </a:txBody>
-                  <a:tcPr marL="64008" marR="64008" marT="64008" marB="64008" anchor="ctr">
+                  <a:tcPr marL="36576" marR="36576" marT="36576" marB="36576" anchor="ctr">
                     <a:lnL w="6350" cap="flat" cmpd="sng" algn="ctr">
                       <a:solidFill>
                         <a:srgbClr val="24365A"/>
@@ -9853,7 +9855,7 @@
                   </a:tcPr>
                 </a:tc>
               </a:tr>
-              <a:tr h="402336">
+              <a:tr h="457200">
                 <a:tc>
                   <a:txBody>
                     <a:bodyPr/>
@@ -9863,7 +9865,7 @@
                         <a:buNone/>
                       </a:pPr>
                       <a:r>
-                        <a:rPr lang="en-US" sz="1080" dirty="0">
+                        <a:rPr lang="en-US" sz="1800" dirty="0">
                           <a:solidFill>
                             <a:srgbClr val="CBD5E1"/>
                           </a:solidFill>
@@ -9873,14 +9875,14 @@
                         </a:rPr>
                         <a:t>Oct 2023-Mar 2024</a:t>
                       </a:r>
-                      <a:endParaRPr lang="en-US" sz="1080" dirty="0">
+                      <a:endParaRPr lang="en-US" sz="1800" dirty="0">
                         <a:latin typeface="Segoe UI" charset="0"/>
                         <a:ea typeface="Segoe UI" charset="0"/>
                         <a:cs typeface="Segoe UI" charset="0"/>
                       </a:endParaRPr>
                     </a:p>
                   </a:txBody>
-                  <a:tcPr marL="64008" marR="64008" marT="64008" marB="64008" anchor="ctr">
+                  <a:tcPr marL="36576" marR="36576" marT="36576" marB="36576" anchor="ctr">
                     <a:lnL w="6350" cap="flat" cmpd="sng" algn="ctr">
                       <a:solidFill>
                         <a:srgbClr val="24365A"/>
@@ -9931,7 +9933,7 @@
                         <a:buNone/>
                       </a:pPr>
                       <a:r>
-                        <a:rPr lang="en-US" sz="1080" dirty="0">
+                        <a:rPr lang="en-US" sz="1800" dirty="0">
                           <a:solidFill>
                             <a:srgbClr val="CBD5E1"/>
                           </a:solidFill>
@@ -9941,14 +9943,14 @@
                         </a:rPr>
                         <a:t>Regional BI Specialist, IKEA</a:t>
                       </a:r>
-                      <a:endParaRPr lang="en-US" sz="1080" dirty="0">
+                      <a:endParaRPr lang="en-US" sz="1800" dirty="0">
                         <a:latin typeface="Segoe UI" charset="0"/>
                         <a:ea typeface="Segoe UI" charset="0"/>
                         <a:cs typeface="Segoe UI" charset="0"/>
                       </a:endParaRPr>
                     </a:p>
                   </a:txBody>
-                  <a:tcPr marL="64008" marR="64008" marT="64008" marB="64008" anchor="ctr">
+                  <a:tcPr marL="36576" marR="36576" marT="36576" marB="36576" anchor="ctr">
                     <a:lnL w="6350" cap="flat" cmpd="sng" algn="ctr">
                       <a:solidFill>
                         <a:srgbClr val="24365A"/>
@@ -9999,7 +10001,7 @@
                         <a:buNone/>
                       </a:pPr>
                       <a:r>
-                        <a:rPr lang="en-US" sz="1080" dirty="0">
+                        <a:rPr lang="en-US" sz="1800" dirty="0">
                           <a:solidFill>
                             <a:srgbClr val="CBD5E1"/>
                           </a:solidFill>
@@ -10009,14 +10011,14 @@
                         </a:rPr>
                         <a:t>BI operations across 4 countries, datalake QA, scheduled pipelines</a:t>
                       </a:r>
-                      <a:endParaRPr lang="en-US" sz="1080" dirty="0">
+                      <a:endParaRPr lang="en-US" sz="1800" dirty="0">
                         <a:latin typeface="Segoe UI" charset="0"/>
                         <a:ea typeface="Segoe UI" charset="0"/>
                         <a:cs typeface="Segoe UI" charset="0"/>
                       </a:endParaRPr>
                     </a:p>
                   </a:txBody>
-                  <a:tcPr marL="64008" marR="64008" marT="64008" marB="64008" anchor="ctr">
+                  <a:tcPr marL="36576" marR="36576" marT="36576" marB="36576" anchor="ctr">
                     <a:lnL w="6350" cap="flat" cmpd="sng" algn="ctr">
                       <a:solidFill>
                         <a:srgbClr val="24365A"/>
@@ -10067,7 +10069,7 @@
                         <a:buNone/>
                       </a:pPr>
                       <a:r>
-                        <a:rPr lang="en-US" sz="1080" dirty="0">
+                        <a:rPr lang="en-US" sz="1800" dirty="0">
                           <a:solidFill>
                             <a:srgbClr val="CBD5E1"/>
                           </a:solidFill>
@@ -10077,14 +10079,14 @@
                         </a:rPr>
                         <a:t>Qlik Sense, Alteryx, SQL Server</a:t>
                       </a:r>
-                      <a:endParaRPr lang="en-US" sz="1080" dirty="0">
+                      <a:endParaRPr lang="en-US" sz="1800" dirty="0">
                         <a:latin typeface="Segoe UI" charset="0"/>
                         <a:ea typeface="Segoe UI" charset="0"/>
                         <a:cs typeface="Segoe UI" charset="0"/>
                       </a:endParaRPr>
                     </a:p>
                   </a:txBody>
-                  <a:tcPr marL="64008" marR="64008" marT="64008" marB="64008" anchor="ctr">
+                  <a:tcPr marL="36576" marR="36576" marT="36576" marB="36576" anchor="ctr">
                     <a:lnL w="6350" cap="flat" cmpd="sng" algn="ctr">
                       <a:solidFill>
                         <a:srgbClr val="24365A"/>
@@ -10127,7 +10129,7 @@
                   </a:tcPr>
                 </a:tc>
               </a:tr>
-              <a:tr h="402336">
+              <a:tr h="457200">
                 <a:tc>
                   <a:txBody>
                     <a:bodyPr/>
@@ -10137,7 +10139,7 @@
                         <a:buNone/>
                       </a:pPr>
                       <a:r>
-                        <a:rPr lang="en-US" sz="1080" dirty="0">
+                        <a:rPr lang="en-US" sz="1800" dirty="0">
                           <a:solidFill>
                             <a:srgbClr val="CBD5E1"/>
                           </a:solidFill>
@@ -10147,14 +10149,14 @@
                         </a:rPr>
                         <a:t>Apr 2024-present</a:t>
                       </a:r>
-                      <a:endParaRPr lang="en-US" sz="1080" dirty="0">
+                      <a:endParaRPr lang="en-US" sz="1800" dirty="0">
                         <a:latin typeface="Segoe UI" charset="0"/>
                         <a:ea typeface="Segoe UI" charset="0"/>
                         <a:cs typeface="Segoe UI" charset="0"/>
                       </a:endParaRPr>
                     </a:p>
                   </a:txBody>
-                  <a:tcPr marL="64008" marR="64008" marT="64008" marB="64008" anchor="ctr">
+                  <a:tcPr marL="36576" marR="36576" marT="36576" marB="36576" anchor="ctr">
                     <a:lnL w="6350" cap="flat" cmpd="sng" algn="ctr">
                       <a:solidFill>
                         <a:srgbClr val="24365A"/>
@@ -10205,7 +10207,7 @@
                         <a:buNone/>
                       </a:pPr>
                       <a:r>
-                        <a:rPr lang="en-US" sz="1080" dirty="0">
+                        <a:rPr lang="en-US" sz="1800" dirty="0">
                           <a:solidFill>
                             <a:srgbClr val="CBD5E1"/>
                           </a:solidFill>
@@ -10215,14 +10217,14 @@
                         </a:rPr>
                         <a:t>Founder &amp; Lead AI Engineer, Zalin Labs</a:t>
                       </a:r>
-                      <a:endParaRPr lang="en-US" sz="1080" dirty="0">
+                      <a:endParaRPr lang="en-US" sz="1800" dirty="0">
                         <a:latin typeface="Segoe UI" charset="0"/>
                         <a:ea typeface="Segoe UI" charset="0"/>
                         <a:cs typeface="Segoe UI" charset="0"/>
                       </a:endParaRPr>
                     </a:p>
                   </a:txBody>
-                  <a:tcPr marL="64008" marR="64008" marT="64008" marB="64008" anchor="ctr">
+                  <a:tcPr marL="36576" marR="36576" marT="36576" marB="36576" anchor="ctr">
                     <a:lnL w="6350" cap="flat" cmpd="sng" algn="ctr">
                       <a:solidFill>
                         <a:srgbClr val="24365A"/>
@@ -10273,7 +10275,7 @@
                         <a:buNone/>
                       </a:pPr>
                       <a:r>
-                        <a:rPr lang="en-US" sz="1080" dirty="0">
+                        <a:rPr lang="en-US" sz="1800" dirty="0">
                           <a:solidFill>
                             <a:srgbClr val="CBD5E1"/>
                           </a:solidFill>
@@ -10283,14 +10285,14 @@
                         </a:rPr>
                         <a:t>30+ production apps, 9+ agents, 2 open-source frameworks</a:t>
                       </a:r>
-                      <a:endParaRPr lang="en-US" sz="1080" dirty="0">
+                      <a:endParaRPr lang="en-US" sz="1800" dirty="0">
                         <a:latin typeface="Segoe UI" charset="0"/>
                         <a:ea typeface="Segoe UI" charset="0"/>
                         <a:cs typeface="Segoe UI" charset="0"/>
                       </a:endParaRPr>
                     </a:p>
                   </a:txBody>
-                  <a:tcPr marL="64008" marR="64008" marT="64008" marB="64008" anchor="ctr">
+                  <a:tcPr marL="36576" marR="36576" marT="36576" marB="36576" anchor="ctr">
                     <a:lnL w="6350" cap="flat" cmpd="sng" algn="ctr">
                       <a:solidFill>
                         <a:srgbClr val="24365A"/>
@@ -10341,7 +10343,7 @@
                         <a:buNone/>
                       </a:pPr>
                       <a:r>
-                        <a:rPr lang="en-US" sz="1080" dirty="0">
+                        <a:rPr lang="en-US" sz="1800" dirty="0">
                           <a:solidFill>
                             <a:srgbClr val="CBD5E1"/>
                           </a:solidFill>
@@ -10351,14 +10353,14 @@
                         </a:rPr>
                         <a:t>Python, FastAPI, Ollama</a:t>
                       </a:r>
-                      <a:endParaRPr lang="en-US" sz="1080" dirty="0">
+                      <a:endParaRPr lang="en-US" sz="1800" dirty="0">
                         <a:latin typeface="Segoe UI" charset="0"/>
                         <a:ea typeface="Segoe UI" charset="0"/>
                         <a:cs typeface="Segoe UI" charset="0"/>
                       </a:endParaRPr>
                     </a:p>
                   </a:txBody>
-                  <a:tcPr marL="64008" marR="64008" marT="64008" marB="64008" anchor="ctr">
+                  <a:tcPr marL="36576" marR="36576" marT="36576" marB="36576" anchor="ctr">
                     <a:lnL w="6350" cap="flat" cmpd="sng" algn="ctr">
                       <a:solidFill>
                         <a:srgbClr val="24365A"/>
@@ -10436,8 +10438,8 @@
         </p:nvSpPr>
         <p:spPr>
           <a:xfrm>
-            <a:off x="822960" y="6053328"/>
-            <a:ext cx="9692640" cy="457200"/>
+            <a:off x="822960" y="6035040"/>
+            <a:ext cx="10424160" cy="566928"/>
           </a:xfrm>
           <a:prstGeom prst="rect">
             <a:avLst/>
@@ -10453,9 +10455,9 @@
               <a:buNone/>
             </a:pPr>
             <a:r>
-              <a:rPr lang="en-US" sz="1150" dirty="0">
-                <a:solidFill>
-                  <a:srgbClr val="64748B"/>
+              <a:rPr lang="en-US" sz="1800" dirty="0">
+                <a:solidFill>
+                  <a:srgbClr val="8FA3BF"/>
                 </a:solidFill>
                 <a:latin typeface="Segoe UI" pitchFamily="34" charset="0"/>
                 <a:ea typeface="Segoe UI" pitchFamily="34" charset="-122"/>
@@ -10463,7 +10465,7 @@
               </a:rPr>
               <a:t>E-commerce, banking, multinational retail, and independent R&amp;D - each one stricter than the last about evidence.</a:t>
             </a:r>
-            <a:endParaRPr lang="en-US" sz="1150" dirty="0"/>
+            <a:endParaRPr lang="en-US" sz="1800" dirty="0"/>
           </a:p>
         </p:txBody>
       </p:sp>
@@ -10475,8 +10477,8 @@
         </p:nvSpPr>
         <p:spPr>
           <a:xfrm>
-            <a:off x="10698480" y="6382512"/>
-            <a:ext cx="1188720" cy="365760"/>
+            <a:off x="10698480" y="6309360"/>
+            <a:ext cx="1188720" cy="411480"/>
           </a:xfrm>
           <a:prstGeom prst="rect">
             <a:avLst/>
@@ -10492,9 +10494,9 @@
               <a:buNone/>
             </a:pPr>
             <a:r>
-              <a:rPr lang="en-US" sz="1000" dirty="0">
-                <a:solidFill>
-                  <a:srgbClr val="64748B"/>
+              <a:rPr lang="en-US" sz="1800" dirty="0">
+                <a:solidFill>
+                  <a:srgbClr val="8FA3BF"/>
                 </a:solidFill>
                 <a:latin typeface="Consolas" pitchFamily="34" charset="0"/>
                 <a:ea typeface="Consolas" pitchFamily="34" charset="-122"/>
@@ -10502,7 +10504,7 @@
               </a:rPr>
               <a:t>7 / 14</a:t>
             </a:r>
-            <a:endParaRPr lang="en-US" sz="1000" dirty="0"/>
+            <a:endParaRPr lang="en-US" sz="1800" dirty="0"/>
           </a:p>
         </p:txBody>
       </p:sp>
@@ -10586,8 +10588,8 @@
         </p:nvSpPr>
         <p:spPr>
           <a:xfrm>
-            <a:off x="822960" y="502920"/>
-            <a:ext cx="10515600" cy="365760"/>
+            <a:off x="822960" y="457200"/>
+            <a:ext cx="10515600" cy="411480"/>
           </a:xfrm>
           <a:prstGeom prst="rect">
             <a:avLst/>
@@ -10603,7 +10605,7 @@
               <a:buNone/>
             </a:pPr>
             <a:r>
-              <a:rPr lang="en-US" sz="1200" spc="300" kern="0" dirty="0">
+              <a:rPr lang="en-US" sz="1800" spc="300" kern="0" dirty="0">
                 <a:solidFill>
                   <a:srgbClr val="06B6D4"/>
                 </a:solidFill>
@@ -10613,7 +10615,7 @@
               </a:rPr>
               <a:t>WHAT DID NOT TRANSFER</a:t>
             </a:r>
-            <a:endParaRPr lang="en-US" sz="1200" dirty="0"/>
+            <a:endParaRPr lang="en-US" sz="1800" dirty="0"/>
           </a:p>
         </p:txBody>
       </p:sp>
@@ -10664,8 +10666,8 @@
         </p:nvSpPr>
         <p:spPr>
           <a:xfrm>
-            <a:off x="868680" y="2011680"/>
-            <a:ext cx="10424160" cy="3566160"/>
+            <a:off x="868680" y="1965960"/>
+            <a:ext cx="10424160" cy="3840480"/>
           </a:xfrm>
           <a:prstGeom prst="rect">
             <a:avLst/>
@@ -10688,7 +10690,7 @@
               <a:buChar char="▸"/>
             </a:pPr>
             <a:r>
-              <a:rPr lang="en-US" sz="1600" dirty="0">
+              <a:rPr lang="en-US" sz="2000" dirty="0">
                 <a:solidFill>
                   <a:srgbClr val="CBD5E1"/>
                 </a:solidFill>
@@ -10698,7 +10700,7 @@
               </a:rPr>
               <a:t>Waiting for permission: in enterprises change is a process; as a founder it is a Tuesday.</a:t>
             </a:r>
-            <a:endParaRPr lang="en-US" sz="1600" dirty="0"/>
+            <a:endParaRPr lang="en-US" sz="2000" dirty="0"/>
           </a:p>
           <a:p>
             <a:pPr marL="342900" indent="-342900">
@@ -10712,7 +10714,7 @@
               <a:buChar char="▸"/>
             </a:pPr>
             <a:r>
-              <a:rPr lang="en-US" sz="1600" dirty="0">
+              <a:rPr lang="en-US" sz="2000" dirty="0">
                 <a:solidFill>
                   <a:srgbClr val="CBD5E1"/>
                 </a:solidFill>
@@ -10722,7 +10724,7 @@
               </a:rPr>
               <a:t>Scope defense: BI rewards protecting boundaries - founders win by crossing them.</a:t>
             </a:r>
-            <a:endParaRPr lang="en-US" sz="1600" dirty="0"/>
+            <a:endParaRPr lang="en-US" sz="2000" dirty="0"/>
           </a:p>
           <a:p>
             <a:pPr marL="342900" indent="-342900">
@@ -10736,7 +10738,7 @@
               <a:buChar char="▸"/>
             </a:pPr>
             <a:r>
-              <a:rPr lang="en-US" sz="1600" dirty="0">
+              <a:rPr lang="en-US" sz="2000" dirty="0">
                 <a:solidFill>
                   <a:srgbClr val="CBD5E1"/>
                 </a:solidFill>
@@ -10746,7 +10748,7 @@
               </a:rPr>
               <a:t>Perfectionism before shipping: quality gates replace gold-plating, so evidence ships instead of excuses.</a:t>
             </a:r>
-            <a:endParaRPr lang="en-US" sz="1600" dirty="0"/>
+            <a:endParaRPr lang="en-US" sz="2000" dirty="0"/>
           </a:p>
           <a:p>
             <a:pPr marL="342900" indent="-342900">
@@ -10760,7 +10762,7 @@
               <a:buChar char="▸"/>
             </a:pPr>
             <a:r>
-              <a:rPr lang="en-US" sz="1600" dirty="0">
+              <a:rPr lang="en-US" sz="2000" dirty="0">
                 <a:solidFill>
                   <a:srgbClr val="CBD5E1"/>
                 </a:solidFill>
@@ -10770,7 +10772,7 @@
               </a:rPr>
               <a:t>Tool loyalty: stacks expire in a year; validation, documentation, and system thinking compound.</a:t>
             </a:r>
-            <a:endParaRPr lang="en-US" sz="1600" dirty="0"/>
+            <a:endParaRPr lang="en-US" sz="2000" dirty="0"/>
           </a:p>
         </p:txBody>
       </p:sp>
@@ -10805,8 +10807,8 @@
         </p:nvSpPr>
         <p:spPr>
           <a:xfrm>
-            <a:off x="822960" y="6053328"/>
-            <a:ext cx="9692640" cy="457200"/>
+            <a:off x="822960" y="6035040"/>
+            <a:ext cx="10424160" cy="566928"/>
           </a:xfrm>
           <a:prstGeom prst="rect">
             <a:avLst/>
@@ -10822,9 +10824,9 @@
               <a:buNone/>
             </a:pPr>
             <a:r>
-              <a:rPr lang="en-US" sz="1150" dirty="0">
-                <a:solidFill>
-                  <a:srgbClr val="64748B"/>
+              <a:rPr lang="en-US" sz="1800" dirty="0">
+                <a:solidFill>
+                  <a:srgbClr val="8FA3BF"/>
                 </a:solidFill>
                 <a:latin typeface="Segoe UI" pitchFamily="34" charset="0"/>
                 <a:ea typeface="Segoe UI" pitchFamily="34" charset="-122"/>
@@ -10832,7 +10834,7 @@
               </a:rPr>
               <a:t>Unlearning caution took months - the gates made it safe to move fast anyway.</a:t>
             </a:r>
-            <a:endParaRPr lang="en-US" sz="1150" dirty="0"/>
+            <a:endParaRPr lang="en-US" sz="1800" dirty="0"/>
           </a:p>
         </p:txBody>
       </p:sp>
@@ -10844,8 +10846,8 @@
         </p:nvSpPr>
         <p:spPr>
           <a:xfrm>
-            <a:off x="10698480" y="6382512"/>
-            <a:ext cx="1188720" cy="365760"/>
+            <a:off x="10698480" y="6309360"/>
+            <a:ext cx="1188720" cy="411480"/>
           </a:xfrm>
           <a:prstGeom prst="rect">
             <a:avLst/>
@@ -10861,9 +10863,9 @@
               <a:buNone/>
             </a:pPr>
             <a:r>
-              <a:rPr lang="en-US" sz="1000" dirty="0">
-                <a:solidFill>
-                  <a:srgbClr val="64748B"/>
+              <a:rPr lang="en-US" sz="1800" dirty="0">
+                <a:solidFill>
+                  <a:srgbClr val="8FA3BF"/>
                 </a:solidFill>
                 <a:latin typeface="Consolas" pitchFamily="34" charset="0"/>
                 <a:ea typeface="Consolas" pitchFamily="34" charset="-122"/>
@@ -10871,7 +10873,7 @@
               </a:rPr>
               <a:t>8 / 14</a:t>
             </a:r>
-            <a:endParaRPr lang="en-US" sz="1000" dirty="0"/>
+            <a:endParaRPr lang="en-US" sz="1800" dirty="0"/>
           </a:p>
         </p:txBody>
       </p:sp>
@@ -10955,8 +10957,8 @@
         </p:nvSpPr>
         <p:spPr>
           <a:xfrm>
-            <a:off x="822960" y="502920"/>
-            <a:ext cx="10515600" cy="365760"/>
+            <a:off x="822960" y="457200"/>
+            <a:ext cx="10515600" cy="411480"/>
           </a:xfrm>
           <a:prstGeom prst="rect">
             <a:avLst/>
@@ -10972,7 +10974,7 @@
               <a:buNone/>
             </a:pPr>
             <a:r>
-              <a:rPr lang="en-US" sz="1200" spc="300" kern="0" dirty="0">
+              <a:rPr lang="en-US" sz="1800" spc="300" kern="0" dirty="0">
                 <a:solidFill>
                   <a:srgbClr val="06B6D4"/>
                 </a:solidFill>
@@ -10982,7 +10984,7 @@
               </a:rPr>
               <a:t>OPERATING RHYTHM</a:t>
             </a:r>
-            <a:endParaRPr lang="en-US" sz="1200" dirty="0"/>
+            <a:endParaRPr lang="en-US" sz="1800" dirty="0"/>
           </a:p>
         </p:txBody>
       </p:sp>
@@ -11032,8 +11034,8 @@
           <p:nvPr/>
         </p:nvGraphicFramePr>
         <p:xfrm>
-          <a:off x="822960" y="1874520"/>
-          <a:ext cx="10515600" cy="3337560"/>
+          <a:off x="822960" y="1783080"/>
+          <a:ext cx="10515600" cy="3383280"/>
         </p:xfrm>
         <a:graphic xmlns:a="http://schemas.openxmlformats.org/drawingml/2006/main">
           <a:graphicData uri="http://schemas.openxmlformats.org/drawingml/2006/chart">
@@ -11049,7 +11051,7 @@
         </p:nvSpPr>
         <p:spPr>
           <a:xfrm>
-            <a:off x="822960" y="5413248"/>
+            <a:off x="822960" y="5321808"/>
             <a:ext cx="10515600" cy="0"/>
           </a:xfrm>
           <a:prstGeom prst="line">
@@ -11072,8 +11074,8 @@
         </p:nvSpPr>
         <p:spPr>
           <a:xfrm>
-            <a:off x="822960" y="5504688"/>
-            <a:ext cx="10424160" cy="411480"/>
+            <a:off x="822960" y="5394960"/>
+            <a:ext cx="10424160" cy="502920"/>
           </a:xfrm>
           <a:prstGeom prst="rect">
             <a:avLst/>
@@ -11089,7 +11091,7 @@
               <a:buNone/>
             </a:pPr>
             <a:r>
-              <a:rPr lang="en-US" sz="1300" i="1" dirty="0">
+              <a:rPr lang="en-US" sz="1800" i="1" dirty="0">
                 <a:solidFill>
                   <a:srgbClr val="06B6D4"/>
                 </a:solidFill>
@@ -11099,7 +11101,7 @@
               </a:rPr>
               <a:t>→  Agents absorbed the repetitive majority, so the founder share is decisions, review, and writing - the parts that compound.</a:t>
             </a:r>
-            <a:endParaRPr lang="en-US" sz="1300" dirty="0"/>
+            <a:endParaRPr lang="en-US" sz="1800" dirty="0"/>
           </a:p>
         </p:txBody>
       </p:sp>
@@ -11134,8 +11136,8 @@
         </p:nvSpPr>
         <p:spPr>
           <a:xfrm>
-            <a:off x="822960" y="6053328"/>
-            <a:ext cx="9692640" cy="457200"/>
+            <a:off x="822960" y="6035040"/>
+            <a:ext cx="10424160" cy="566928"/>
           </a:xfrm>
           <a:prstGeom prst="rect">
             <a:avLst/>
@@ -11151,9 +11153,9 @@
               <a:buNone/>
             </a:pPr>
             <a:r>
-              <a:rPr lang="en-US" sz="1150" dirty="0">
-                <a:solidFill>
-                  <a:srgbClr val="64748B"/>
+              <a:rPr lang="en-US" sz="1800" dirty="0">
+                <a:solidFill>
+                  <a:srgbClr val="8FA3BF"/>
                 </a:solidFill>
                 <a:latin typeface="Segoe UI" pitchFamily="34" charset="0"/>
                 <a:ea typeface="Segoe UI" pitchFamily="34" charset="-122"/>
@@ -11161,7 +11163,7 @@
               </a:rPr>
               <a:t>Illustrative distribution consistent with the published nine-agent operating model.</a:t>
             </a:r>
-            <a:endParaRPr lang="en-US" sz="1150" dirty="0"/>
+            <a:endParaRPr lang="en-US" sz="1800" dirty="0"/>
           </a:p>
         </p:txBody>
       </p:sp>
@@ -11173,8 +11175,8 @@
         </p:nvSpPr>
         <p:spPr>
           <a:xfrm>
-            <a:off x="10698480" y="6382512"/>
-            <a:ext cx="1188720" cy="365760"/>
+            <a:off x="10698480" y="6309360"/>
+            <a:ext cx="1188720" cy="411480"/>
           </a:xfrm>
           <a:prstGeom prst="rect">
             <a:avLst/>
@@ -11190,9 +11192,9 @@
               <a:buNone/>
             </a:pPr>
             <a:r>
-              <a:rPr lang="en-US" sz="1000" dirty="0">
-                <a:solidFill>
-                  <a:srgbClr val="64748B"/>
+              <a:rPr lang="en-US" sz="1800" dirty="0">
+                <a:solidFill>
+                  <a:srgbClr val="8FA3BF"/>
                 </a:solidFill>
                 <a:latin typeface="Consolas" pitchFamily="34" charset="0"/>
                 <a:ea typeface="Consolas" pitchFamily="34" charset="-122"/>
@@ -11200,7 +11202,7 @@
               </a:rPr>
               <a:t>9 / 14</a:t>
             </a:r>
-            <a:endParaRPr lang="en-US" sz="1000" dirty="0"/>
+            <a:endParaRPr lang="en-US" sz="1800" dirty="0"/>
           </a:p>
         </p:txBody>
       </p:sp>
